--- a/ElementalHexTactics_PitchDeck.pptx
+++ b/ElementalHexTactics_PitchDeck.pptx
@@ -1142,7 +1142,7 @@
           <a:lstStyle/>
           <a:p>
             <a:r>
-              <a:t>Vanaris Tactics proved that Toge's audience loves retro tactics. Into the Breach proved how addictive kinetic knockbacks are. Elemental Hex Tactics unites both audiences.</a:t>
+              <a:t>Brigandine proved that players love hex-grid monster commanding on Steam. Vanaris and Into the Breach proved the market for retro tactics and kinetic shoves. Elemental Hex Tactics combines these proven elements into fast 10-minute HD-2D matches.</a:t>
             </a:r>
           </a:p>
         </p:txBody>
@@ -1212,7 +1212,7 @@
           <a:lstStyle/>
           <a:p>
             <a:r>
-              <a:t>For visual and audio production, I'm taking a lean indie approach: I handle 100% of game design and programming, while using the grant to commission specialist freelance pixel artists and an indie composer.</a:t>
+              <a:t>Here is our 3-part visual progression: our verified working prototype in Unity 6, our hex combat reference in Brigandine, and our target HD-2D visual benchmark. This proves we have a working foundation, a clear commercial reference, and a mathematically viable $1,200 asset pipeline.</a:t>
             </a:r>
           </a:p>
         </p:txBody>
@@ -5445,7 +5445,7 @@
               </a:defRPr>
             </a:pPr>
             <a:r>
-              <a:t>• Full Commercial Vision: TGFI demo proves Steam retention, laying the foundation for a full $50k-$150k commercial publishing deal (20+ classes &amp; full campaign).</a:t>
+              <a:t>• Full Commercial Vision: TGFI demo proves Steam retention, laying the groundwork for a full $50k-$150k commercial publishing partnership with Toge (20+ classes &amp; full campaign).</a:t>
             </a:r>
           </a:p>
         </p:txBody>
@@ -8163,7 +8163,7 @@
               </a:defRPr>
             </a:pPr>
             <a:r>
-              <a:t>Procedural encounter routes, emergent environmental chemistry, and diverse squad compositions ensure no two runs feel identical.</a:t>
+              <a:t>Procedural encounter routes, emergent environmental chemistry, and diverse squad combinations ensure no two runs feel identical.</a:t>
             </a:r>
           </a:p>
         </p:txBody>
@@ -8249,8 +8249,8 @@
         </p:nvSpPr>
         <p:spPr>
           <a:xfrm>
-            <a:off x="731520" y="1645920"/>
-            <a:ext cx="3383280" cy="3566160"/>
+            <a:off x="731520" y="1600200"/>
+            <a:ext cx="5212080" cy="1828800"/>
           </a:xfrm>
           <a:prstGeom prst="roundRect">
             <a:avLst/>
@@ -8293,121 +8293,52 @@
               </a:defRPr>
             </a:pPr>
             <a:r>
-              <a:t>Vanaris Tactics (Toge)</a:t>
-            </a:r>
-          </a:p>
-          <a:p>
-            <a:pPr>
-              <a:spcAft>
-                <a:spcPts val="300"/>
-              </a:spcAft>
-              <a:defRPr sz="1150">
-                <a:solidFill>
-                  <a:srgbClr val="F3F4F6"/>
-                </a:solidFill>
-              </a:defRPr>
-            </a:pPr>
-            <a:r>
-              <a:t>Publisher: Toge Productions</a:t>
-            </a:r>
-          </a:p>
-          <a:p>
-            <a:pPr>
-              <a:spcAft>
-                <a:spcPts val="300"/>
-              </a:spcAft>
-              <a:defRPr sz="1150">
-                <a:solidFill>
-                  <a:srgbClr val="F3F4F6"/>
-                </a:solidFill>
-              </a:defRPr>
-            </a:pPr>
-            <a:r>
-              <a:t>Platform: PC / Switch</a:t>
-            </a:r>
-          </a:p>
-          <a:p>
-            <a:pPr>
-              <a:spcAft>
-                <a:spcPts val="300"/>
-              </a:spcAft>
-              <a:defRPr sz="1150">
-                <a:solidFill>
-                  <a:srgbClr val="F3F4F6"/>
-                </a:solidFill>
-              </a:defRPr>
-            </a:pPr>
-          </a:p>
-          <a:p>
-            <a:pPr>
-              <a:spcAft>
-                <a:spcPts val="300"/>
-              </a:spcAft>
-              <a:defRPr sz="1150">
-                <a:solidFill>
-                  <a:srgbClr val="F3F4F6"/>
-                </a:solidFill>
-              </a:defRPr>
-            </a:pPr>
-            <a:r>
-              <a:t>What Players Love:</a:t>
-            </a:r>
-          </a:p>
-          <a:p>
-            <a:pPr>
-              <a:spcAft>
-                <a:spcPts val="300"/>
-              </a:spcAft>
-              <a:defRPr sz="1150">
-                <a:solidFill>
-                  <a:srgbClr val="F3F4F6"/>
-                </a:solidFill>
-              </a:defRPr>
-            </a:pPr>
-            <a:r>
-              <a:t>Classic retro FFT charm, beloved pixel art storytelling.</a:t>
-            </a:r>
-          </a:p>
-          <a:p>
-            <a:pPr>
-              <a:spcAft>
-                <a:spcPts val="300"/>
-              </a:spcAft>
-              <a:defRPr sz="1150">
-                <a:solidFill>
-                  <a:srgbClr val="F3F4F6"/>
-                </a:solidFill>
-              </a:defRPr>
-            </a:pPr>
-          </a:p>
-          <a:p>
-            <a:pPr>
-              <a:spcAft>
-                <a:spcPts val="300"/>
-              </a:spcAft>
-              <a:defRPr sz="1150">
-                <a:solidFill>
-                  <a:srgbClr val="F3F4F6"/>
-                </a:solidFill>
-              </a:defRPr>
-            </a:pPr>
-            <a:r>
-              <a:t>How We Differentiate:</a:t>
-            </a:r>
-          </a:p>
-          <a:p>
-            <a:pPr>
-              <a:spcAft>
-                <a:spcPts val="300"/>
-              </a:spcAft>
-              <a:defRPr sz="1150">
-                <a:solidFill>
-                  <a:srgbClr val="F3F4F6"/>
-                </a:solidFill>
-              </a:defRPr>
-            </a:pPr>
-            <a:r>
-              <a:t>We add fast kinetic shove physics and real-time terrain transformation.</a:t>
+              <a:t>♟️ Brigandine: Runersia (Happinet)</a:t>
+            </a:r>
+          </a:p>
+          <a:p>
+            <a:pPr>
+              <a:spcAft>
+                <a:spcPts val="300"/>
+              </a:spcAft>
+              <a:defRPr sz="1150">
+                <a:solidFill>
+                  <a:srgbClr val="F3F4F6"/>
+                </a:solidFill>
+              </a:defRPr>
+            </a:pPr>
+            <a:r>
+              <a:t>Publisher: Happinet (Very Positive, 1,300+ Steam Reviews)</a:t>
+            </a:r>
+          </a:p>
+          <a:p>
+            <a:pPr>
+              <a:spcAft>
+                <a:spcPts val="300"/>
+              </a:spcAft>
+              <a:defRPr sz="1150">
+                <a:solidFill>
+                  <a:srgbClr val="F3F4F6"/>
+                </a:solidFill>
+              </a:defRPr>
+            </a:pPr>
+            <a:r>
+              <a:t>What Players Love: Deep hex-grid tactics, monster commanding &amp; terrain affinities.</a:t>
+            </a:r>
+          </a:p>
+          <a:p>
+            <a:pPr>
+              <a:spcAft>
+                <a:spcPts val="300"/>
+              </a:spcAft>
+              <a:defRPr sz="1150">
+                <a:solidFill>
+                  <a:srgbClr val="F3F4F6"/>
+                </a:solidFill>
+              </a:defRPr>
+            </a:pPr>
+            <a:r>
+              <a:t>How We Differentiate: Replaces 45-min slow AA battle animations with fast 10-min kinetic skirmishes; transforms passive terrain buffs into Active Terraforming.</a:t>
             </a:r>
           </a:p>
         </p:txBody>
@@ -8420,8 +8351,8 @@
         </p:nvSpPr>
         <p:spPr>
           <a:xfrm>
-            <a:off x="4389120" y="1645920"/>
-            <a:ext cx="3383280" cy="3566160"/>
+            <a:off x="6217920" y="1600200"/>
+            <a:ext cx="5212080" cy="1828800"/>
           </a:xfrm>
           <a:prstGeom prst="roundRect">
             <a:avLst/>
@@ -8464,121 +8395,52 @@
               </a:defRPr>
             </a:pPr>
             <a:r>
-              <a:t>Into the Breach (Subset)</a:t>
-            </a:r>
-          </a:p>
-          <a:p>
-            <a:pPr>
-              <a:spcAft>
-                <a:spcPts val="300"/>
-              </a:spcAft>
-              <a:defRPr sz="1150">
-                <a:solidFill>
-                  <a:srgbClr val="F3F4F6"/>
-                </a:solidFill>
-              </a:defRPr>
-            </a:pPr>
-            <a:r>
-              <a:t>Publisher: Subset Games</a:t>
-            </a:r>
-          </a:p>
-          <a:p>
-            <a:pPr>
-              <a:spcAft>
-                <a:spcPts val="300"/>
-              </a:spcAft>
-              <a:defRPr sz="1150">
-                <a:solidFill>
-                  <a:srgbClr val="F3F4F6"/>
-                </a:solidFill>
-              </a:defRPr>
-            </a:pPr>
-            <a:r>
-              <a:t>Platform: PC / Mobile</a:t>
-            </a:r>
-          </a:p>
-          <a:p>
-            <a:pPr>
-              <a:spcAft>
-                <a:spcPts val="300"/>
-              </a:spcAft>
-              <a:defRPr sz="1150">
-                <a:solidFill>
-                  <a:srgbClr val="F3F4F6"/>
-                </a:solidFill>
-              </a:defRPr>
-            </a:pPr>
-          </a:p>
-          <a:p>
-            <a:pPr>
-              <a:spcAft>
-                <a:spcPts val="300"/>
-              </a:spcAft>
-              <a:defRPr sz="1150">
-                <a:solidFill>
-                  <a:srgbClr val="F3F4F6"/>
-                </a:solidFill>
-              </a:defRPr>
-            </a:pPr>
-            <a:r>
-              <a:t>What Players Love:</a:t>
-            </a:r>
-          </a:p>
-          <a:p>
-            <a:pPr>
-              <a:spcAft>
-                <a:spcPts val="300"/>
-              </a:spcAft>
-              <a:defRPr sz="1150">
-                <a:solidFill>
-                  <a:srgbClr val="F3F4F6"/>
-                </a:solidFill>
-              </a:defRPr>
-            </a:pPr>
-            <a:r>
-              <a:t>Masterpiece of kinetic knockback puzzles.</a:t>
-            </a:r>
-          </a:p>
-          <a:p>
-            <a:pPr>
-              <a:spcAft>
-                <a:spcPts val="300"/>
-              </a:spcAft>
-              <a:defRPr sz="1150">
-                <a:solidFill>
-                  <a:srgbClr val="F3F4F6"/>
-                </a:solidFill>
-              </a:defRPr>
-            </a:pPr>
-          </a:p>
-          <a:p>
-            <a:pPr>
-              <a:spcAft>
-                <a:spcPts val="300"/>
-              </a:spcAft>
-              <a:defRPr sz="1150">
-                <a:solidFill>
-                  <a:srgbClr val="F3F4F6"/>
-                </a:solidFill>
-              </a:defRPr>
-            </a:pPr>
-            <a:r>
-              <a:t>How We Differentiate:</a:t>
-            </a:r>
-          </a:p>
-          <a:p>
-            <a:pPr>
-              <a:spcAft>
-                <a:spcPts val="300"/>
-              </a:spcAft>
-              <a:defRPr sz="1150">
-                <a:solidFill>
-                  <a:srgbClr val="F3F4F6"/>
-                </a:solidFill>
-              </a:defRPr>
-            </a:pPr>
-            <a:r>
-              <a:t>We combine push puzzles with fantasy RPG squad progression, elevation tiers, and land siphoning.</a:t>
+              <a:t>🛡️ Vanaris Tactics (Toge)</a:t>
+            </a:r>
+          </a:p>
+          <a:p>
+            <a:pPr>
+              <a:spcAft>
+                <a:spcPts val="300"/>
+              </a:spcAft>
+              <a:defRPr sz="1150">
+                <a:solidFill>
+                  <a:srgbClr val="F3F4F6"/>
+                </a:solidFill>
+              </a:defRPr>
+            </a:pPr>
+            <a:r>
+              <a:t>Publisher: Toge Productions (Beloved Retro Tactics)</a:t>
+            </a:r>
+          </a:p>
+          <a:p>
+            <a:pPr>
+              <a:spcAft>
+                <a:spcPts val="300"/>
+              </a:spcAft>
+              <a:defRPr sz="1150">
+                <a:solidFill>
+                  <a:srgbClr val="F3F4F6"/>
+                </a:solidFill>
+              </a:defRPr>
+            </a:pPr>
+            <a:r>
+              <a:t>What Players Love: Classic retro FFT charm, beloved pixel art storytelling.</a:t>
+            </a:r>
+          </a:p>
+          <a:p>
+            <a:pPr>
+              <a:spcAft>
+                <a:spcPts val="300"/>
+              </a:spcAft>
+              <a:defRPr sz="1150">
+                <a:solidFill>
+                  <a:srgbClr val="F3F4F6"/>
+                </a:solidFill>
+              </a:defRPr>
+            </a:pPr>
+            <a:r>
+              <a:t>How We Differentiate: Adds 3D multi-level hex elevations, kinetic shove impact physics, and real-time elemental landscape destruction.</a:t>
             </a:r>
           </a:p>
         </p:txBody>
@@ -8591,179 +8453,8 @@
         </p:nvSpPr>
         <p:spPr>
           <a:xfrm>
-            <a:off x="8046720" y="1645920"/>
-            <a:ext cx="3383280" cy="3566160"/>
-          </a:xfrm>
-          <a:prstGeom prst="roundRect">
-            <a:avLst/>
-          </a:prstGeom>
-          <a:solidFill>
-            <a:srgbClr val="161B22"/>
-          </a:solidFill>
-          <a:ln w="19050">
-            <a:solidFill>
-              <a:srgbClr val="30363D"/>
-            </a:solidFill>
-          </a:ln>
-        </p:spPr>
-        <p:style>
-          <a:lnRef idx="1">
-            <a:schemeClr val="accent1"/>
-          </a:lnRef>
-          <a:fillRef idx="3">
-            <a:schemeClr val="accent1"/>
-          </a:fillRef>
-          <a:effectRef idx="2">
-            <a:schemeClr val="accent1"/>
-          </a:effectRef>
-          <a:fontRef idx="minor">
-            <a:schemeClr val="lt1"/>
-          </a:fontRef>
-        </p:style>
-        <p:txBody>
-          <a:bodyPr rtlCol="0" anchor="ctr" wrap="square" lIns="182880" rIns="182880" tIns="164592" bIns="164592"/>
-          <a:lstStyle/>
-          <a:p>
-            <a:pPr algn="ctr">
-              <a:spcAft>
-                <a:spcPts val="500"/>
-              </a:spcAft>
-              <a:defRPr b="1" sz="1350">
-                <a:solidFill>
-                  <a:srgbClr val="F59E0B"/>
-                </a:solidFill>
-              </a:defRPr>
-            </a:pPr>
-            <a:r>
-              <a:t>Triangle Strategy (Square Enix)</a:t>
-            </a:r>
-          </a:p>
-          <a:p>
-            <a:pPr>
-              <a:spcAft>
-                <a:spcPts val="300"/>
-              </a:spcAft>
-              <a:defRPr sz="1150">
-                <a:solidFill>
-                  <a:srgbClr val="F3F4F6"/>
-                </a:solidFill>
-              </a:defRPr>
-            </a:pPr>
-            <a:r>
-              <a:t>Publisher: Square Enix</a:t>
-            </a:r>
-          </a:p>
-          <a:p>
-            <a:pPr>
-              <a:spcAft>
-                <a:spcPts val="300"/>
-              </a:spcAft>
-              <a:defRPr sz="1150">
-                <a:solidFill>
-                  <a:srgbClr val="F3F4F6"/>
-                </a:solidFill>
-              </a:defRPr>
-            </a:pPr>
-            <a:r>
-              <a:t>Platform: PC / Switch</a:t>
-            </a:r>
-          </a:p>
-          <a:p>
-            <a:pPr>
-              <a:spcAft>
-                <a:spcPts val="300"/>
-              </a:spcAft>
-              <a:defRPr sz="1150">
-                <a:solidFill>
-                  <a:srgbClr val="F3F4F6"/>
-                </a:solidFill>
-              </a:defRPr>
-            </a:pPr>
-          </a:p>
-          <a:p>
-            <a:pPr>
-              <a:spcAft>
-                <a:spcPts val="300"/>
-              </a:spcAft>
-              <a:defRPr sz="1150">
-                <a:solidFill>
-                  <a:srgbClr val="F3F4F6"/>
-                </a:solidFill>
-              </a:defRPr>
-            </a:pPr>
-            <a:r>
-              <a:t>What Players Love:</a:t>
-            </a:r>
-          </a:p>
-          <a:p>
-            <a:pPr>
-              <a:spcAft>
-                <a:spcPts val="300"/>
-              </a:spcAft>
-              <a:defRPr sz="1150">
-                <a:solidFill>
-                  <a:srgbClr val="F3F4F6"/>
-                </a:solidFill>
-              </a:defRPr>
-            </a:pPr>
-            <a:r>
-              <a:t>HD-2D tactical presentation.</a:t>
-            </a:r>
-          </a:p>
-          <a:p>
-            <a:pPr>
-              <a:spcAft>
-                <a:spcPts val="300"/>
-              </a:spcAft>
-              <a:defRPr sz="1150">
-                <a:solidFill>
-                  <a:srgbClr val="F3F4F6"/>
-                </a:solidFill>
-              </a:defRPr>
-            </a:pPr>
-          </a:p>
-          <a:p>
-            <a:pPr>
-              <a:spcAft>
-                <a:spcPts val="300"/>
-              </a:spcAft>
-              <a:defRPr sz="1150">
-                <a:solidFill>
-                  <a:srgbClr val="F3F4F6"/>
-                </a:solidFill>
-              </a:defRPr>
-            </a:pPr>
-            <a:r>
-              <a:t>How We Differentiate:</a:t>
-            </a:r>
-          </a:p>
-          <a:p>
-            <a:pPr>
-              <a:spcAft>
-                <a:spcPts val="300"/>
-              </a:spcAft>
-              <a:defRPr sz="1150">
-                <a:solidFill>
-                  <a:srgbClr val="F3F4F6"/>
-                </a:solidFill>
-              </a:defRPr>
-            </a:pPr>
-            <a:r>
-              <a:t>Faster 10-minute skirmishes designed for modern players with zero level-grinding and deeper terrain chemistry.</a:t>
-            </a:r>
-          </a:p>
-        </p:txBody>
-      </p:sp>
-      <p:sp>
-        <p:nvSpPr>
-          <p:cNvPr id="6" name="Rounded Rectangle 5"/>
-          <p:cNvSpPr/>
-          <p:nvPr/>
-        </p:nvSpPr>
-        <p:spPr>
-          <a:xfrm>
-            <a:off x="731520" y="5440680"/>
-            <a:ext cx="10698480" cy="822960"/>
+            <a:off x="731520" y="3566160"/>
+            <a:ext cx="5212080" cy="1828800"/>
           </a:xfrm>
           <a:prstGeom prst="roundRect">
             <a:avLst/>
@@ -8806,6 +8497,210 @@
               </a:defRPr>
             </a:pPr>
             <a:r>
+              <a:t>💥 Into the Breach (Subset)</a:t>
+            </a:r>
+          </a:p>
+          <a:p>
+            <a:pPr>
+              <a:spcAft>
+                <a:spcPts val="300"/>
+              </a:spcAft>
+              <a:defRPr sz="1150">
+                <a:solidFill>
+                  <a:srgbClr val="F3F4F6"/>
+                </a:solidFill>
+              </a:defRPr>
+            </a:pPr>
+            <a:r>
+              <a:t>Publisher: Subset Games (Overwhelmingly Positive)</a:t>
+            </a:r>
+          </a:p>
+          <a:p>
+            <a:pPr>
+              <a:spcAft>
+                <a:spcPts val="300"/>
+              </a:spcAft>
+              <a:defRPr sz="1150">
+                <a:solidFill>
+                  <a:srgbClr val="F3F4F6"/>
+                </a:solidFill>
+              </a:defRPr>
+            </a:pPr>
+            <a:r>
+              <a:t>What Players Love: Masterpiece of kinetic knockback puzzles.</a:t>
+            </a:r>
+          </a:p>
+          <a:p>
+            <a:pPr>
+              <a:spcAft>
+                <a:spcPts val="300"/>
+              </a:spcAft>
+              <a:defRPr sz="1150">
+                <a:solidFill>
+                  <a:srgbClr val="F3F4F6"/>
+                </a:solidFill>
+              </a:defRPr>
+            </a:pPr>
+            <a:r>
+              <a:t>How We Differentiate: Marries push puzzles with fantasy RPG squad progression, elevation tiers, and land siphoning for Titan cataclysms.</a:t>
+            </a:r>
+          </a:p>
+        </p:txBody>
+      </p:sp>
+      <p:sp>
+        <p:nvSpPr>
+          <p:cNvPr id="6" name="Rounded Rectangle 5"/>
+          <p:cNvSpPr/>
+          <p:nvPr/>
+        </p:nvSpPr>
+        <p:spPr>
+          <a:xfrm>
+            <a:off x="6217920" y="3566160"/>
+            <a:ext cx="5212080" cy="1828800"/>
+          </a:xfrm>
+          <a:prstGeom prst="roundRect">
+            <a:avLst/>
+          </a:prstGeom>
+          <a:solidFill>
+            <a:srgbClr val="161B22"/>
+          </a:solidFill>
+          <a:ln w="19050">
+            <a:solidFill>
+              <a:srgbClr val="06B6D4"/>
+            </a:solidFill>
+          </a:ln>
+        </p:spPr>
+        <p:style>
+          <a:lnRef idx="1">
+            <a:schemeClr val="accent1"/>
+          </a:lnRef>
+          <a:fillRef idx="3">
+            <a:schemeClr val="accent1"/>
+          </a:fillRef>
+          <a:effectRef idx="2">
+            <a:schemeClr val="accent1"/>
+          </a:effectRef>
+          <a:fontRef idx="minor">
+            <a:schemeClr val="lt1"/>
+          </a:fontRef>
+        </p:style>
+        <p:txBody>
+          <a:bodyPr rtlCol="0" anchor="ctr" wrap="square" lIns="182880" rIns="182880" tIns="164592" bIns="164592"/>
+          <a:lstStyle/>
+          <a:p>
+            <a:pPr algn="ctr">
+              <a:spcAft>
+                <a:spcPts val="500"/>
+              </a:spcAft>
+              <a:defRPr b="1" sz="1350">
+                <a:solidFill>
+                  <a:srgbClr val="06B6D4"/>
+                </a:solidFill>
+              </a:defRPr>
+            </a:pPr>
+            <a:r>
+              <a:t>⚔️ Triangle Strategy (Square Enix)</a:t>
+            </a:r>
+          </a:p>
+          <a:p>
+            <a:pPr>
+              <a:spcAft>
+                <a:spcPts val="300"/>
+              </a:spcAft>
+              <a:defRPr sz="1150">
+                <a:solidFill>
+                  <a:srgbClr val="F3F4F6"/>
+                </a:solidFill>
+              </a:defRPr>
+            </a:pPr>
+            <a:r>
+              <a:t>Publisher: Square Enix (HD-2D Tactical RPG)</a:t>
+            </a:r>
+          </a:p>
+          <a:p>
+            <a:pPr>
+              <a:spcAft>
+                <a:spcPts val="300"/>
+              </a:spcAft>
+              <a:defRPr sz="1150">
+                <a:solidFill>
+                  <a:srgbClr val="F3F4F6"/>
+                </a:solidFill>
+              </a:defRPr>
+            </a:pPr>
+            <a:r>
+              <a:t>What Players Love: Modern HD-2D presentation &amp; elemental interactions.</a:t>
+            </a:r>
+          </a:p>
+          <a:p>
+            <a:pPr>
+              <a:spcAft>
+                <a:spcPts val="300"/>
+              </a:spcAft>
+              <a:defRPr sz="1150">
+                <a:solidFill>
+                  <a:srgbClr val="F3F4F6"/>
+                </a:solidFill>
+              </a:defRPr>
+            </a:pPr>
+            <a:r>
+              <a:t>How We Differentiate: Snappy 10-minute skirmishes designed for modern indie players with zero level-grinding and deeper terrain chemistry.</a:t>
+            </a:r>
+          </a:p>
+        </p:txBody>
+      </p:sp>
+      <p:sp>
+        <p:nvSpPr>
+          <p:cNvPr id="7" name="Rounded Rectangle 6"/>
+          <p:cNvSpPr/>
+          <p:nvPr/>
+        </p:nvSpPr>
+        <p:spPr>
+          <a:xfrm>
+            <a:off x="731520" y="5532120"/>
+            <a:ext cx="10698480" cy="777240"/>
+          </a:xfrm>
+          <a:prstGeom prst="roundRect">
+            <a:avLst/>
+          </a:prstGeom>
+          <a:solidFill>
+            <a:srgbClr val="161B22"/>
+          </a:solidFill>
+          <a:ln w="19050">
+            <a:solidFill>
+              <a:srgbClr val="F59E0B"/>
+            </a:solidFill>
+          </a:ln>
+        </p:spPr>
+        <p:style>
+          <a:lnRef idx="1">
+            <a:schemeClr val="accent1"/>
+          </a:lnRef>
+          <a:fillRef idx="3">
+            <a:schemeClr val="accent1"/>
+          </a:fillRef>
+          <a:effectRef idx="2">
+            <a:schemeClr val="accent1"/>
+          </a:effectRef>
+          <a:fontRef idx="minor">
+            <a:schemeClr val="lt1"/>
+          </a:fontRef>
+        </p:style>
+        <p:txBody>
+          <a:bodyPr rtlCol="0" anchor="ctr" wrap="square" lIns="182880" rIns="182880" tIns="164592" bIns="164592"/>
+          <a:lstStyle/>
+          <a:p>
+            <a:pPr algn="ctr">
+              <a:spcAft>
+                <a:spcPts val="500"/>
+              </a:spcAft>
+              <a:defRPr b="1" sz="1350">
+                <a:solidFill>
+                  <a:srgbClr val="F59E0B"/>
+                </a:solidFill>
+              </a:defRPr>
+            </a:pPr>
+            <a:r>
               <a:t>🎯 The Market Opportunity</a:t>
             </a:r>
           </a:p>
@@ -8821,7 +8716,7 @@
               </a:defRPr>
             </a:pPr>
             <a:r>
-              <a:t>Players love Into the Breach's puzzle clarity and Final Fantasy Tactics' fantasy flavor—Elemental Hex Tactics marries both into snappy 10-minute matches.</a:t>
+              <a:t>Players love Brigandine's hex-grid monster fantasy and Into the Breach's puzzle clarity—Elemental Hex Tactics marries both into snappy 10-minute HD-2D matches with active terraforming.</a:t>
             </a:r>
           </a:p>
         </p:txBody>
@@ -8882,7 +8777,7 @@
               </a:defRPr>
             </a:pPr>
             <a:r>
-              <a:t>TOGE GAME FUND INITIATIVE (TGFI) PITCH</a:t>
+              <a:t>ART DIRECTION &amp; PRODUCTION BENCHMARK</a:t>
             </a:r>
           </a:p>
           <a:p>
@@ -8894,7 +8789,7 @@
               </a:defRPr>
             </a:pPr>
             <a:r>
-              <a:t>Visual Target: HD-2D Diorama &amp; Production Benchmark</a:t>
+              <a:t>Visual Target: HD-2D Aesthetic &amp; Reference Pipeline</a:t>
             </a:r>
           </a:p>
         </p:txBody>
@@ -8908,7 +8803,7 @@
         <p:spPr>
           <a:xfrm>
             <a:off x="731520" y="1645920"/>
-            <a:ext cx="5212080" cy="2240280"/>
+            <a:ext cx="5303520" cy="2240280"/>
           </a:xfrm>
           <a:prstGeom prst="roundRect">
             <a:avLst/>
@@ -9009,8 +8904,8 @@
         </p:nvSpPr>
         <p:spPr>
           <a:xfrm>
-            <a:off x="6217920" y="1645920"/>
-            <a:ext cx="5212080" cy="2240280"/>
+            <a:off x="731520" y="4160520"/>
+            <a:ext cx="5303520" cy="2103120"/>
           </a:xfrm>
           <a:prstGeom prst="roundRect">
             <a:avLst/>
@@ -9103,165 +8998,30 @@
           </a:p>
         </p:txBody>
       </p:sp>
-      <p:sp>
-        <p:nvSpPr>
-          <p:cNvPr id="5" name="Rounded Rectangle 4"/>
-          <p:cNvSpPr/>
+      <p:pic>
+        <p:nvPicPr>
+          <p:cNvPr id="5" name="Picture 4" descr="slide9_visual_benchmark.png"/>
+          <p:cNvPicPr>
+            <a:picLocks noChangeAspect="1"/>
+          </p:cNvPicPr>
           <p:nvPr/>
-        </p:nvSpPr>
+        </p:nvPicPr>
+        <p:blipFill>
+          <a:blip r:embed="rId2"/>
+          <a:stretch>
+            <a:fillRect/>
+          </a:stretch>
+        </p:blipFill>
         <p:spPr>
           <a:xfrm>
-            <a:off x="731520" y="4160520"/>
-            <a:ext cx="5212080" cy="2103120"/>
+            <a:off x="6400800" y="1463040"/>
+            <a:ext cx="4214191" cy="4846320"/>
           </a:xfrm>
-          <a:prstGeom prst="roundRect">
+          <a:prstGeom prst="rect">
             <a:avLst/>
           </a:prstGeom>
-          <a:solidFill>
-            <a:srgbClr val="161B22"/>
-          </a:solidFill>
-          <a:ln w="19050">
-            <a:solidFill>
-              <a:srgbClr val="30363D"/>
-            </a:solidFill>
-          </a:ln>
         </p:spPr>
-        <p:style>
-          <a:lnRef idx="1">
-            <a:schemeClr val="accent1"/>
-          </a:lnRef>
-          <a:fillRef idx="3">
-            <a:schemeClr val="accent1"/>
-          </a:fillRef>
-          <a:effectRef idx="2">
-            <a:schemeClr val="accent1"/>
-          </a:effectRef>
-          <a:fontRef idx="minor">
-            <a:schemeClr val="lt1"/>
-          </a:fontRef>
-        </p:style>
-        <p:txBody>
-          <a:bodyPr rtlCol="0" anchor="ctr" wrap="square" lIns="182880" rIns="182880" tIns="164592" bIns="164592"/>
-          <a:lstStyle/>
-          <a:p>
-            <a:pPr algn="ctr">
-              <a:spcAft>
-                <a:spcPts val="500"/>
-              </a:spcAft>
-              <a:defRPr b="1" sz="1350">
-                <a:solidFill>
-                  <a:srgbClr val="F59E0B"/>
-                </a:solidFill>
-              </a:defRPr>
-            </a:pPr>
-            <a:r>
-              <a:t>🎵 Audio Production: Freelance OST</a:t>
-            </a:r>
-          </a:p>
-          <a:p>
-            <a:pPr>
-              <a:spcAft>
-                <a:spcPts val="300"/>
-              </a:spcAft>
-              <a:defRPr sz="1150">
-                <a:solidFill>
-                  <a:srgbClr val="F3F4F6"/>
-                </a:solidFill>
-              </a:defRPr>
-            </a:pPr>
-            <a:r>
-              <a:t>• Procedural sound engine already active in Unity 6 for impacts &amp; spells.</a:t>
-            </a:r>
-          </a:p>
-          <a:p>
-            <a:pPr>
-              <a:spcAft>
-                <a:spcPts val="300"/>
-              </a:spcAft>
-              <a:defRPr sz="1150">
-                <a:solidFill>
-                  <a:srgbClr val="F3F4F6"/>
-                </a:solidFill>
-              </a:defRPr>
-            </a:pPr>
-            <a:r>
-              <a:t>• Grant funds commission an indie composer for 2 original orchestral tactical battle themes and custom elemental SFX.</a:t>
-            </a:r>
-          </a:p>
-        </p:txBody>
-      </p:sp>
-      <p:sp>
-        <p:nvSpPr>
-          <p:cNvPr id="6" name="Rounded Rectangle 5"/>
-          <p:cNvSpPr/>
-          <p:nvPr/>
-        </p:nvSpPr>
-        <p:spPr>
-          <a:xfrm>
-            <a:off x="6217920" y="4160520"/>
-            <a:ext cx="5212080" cy="2103120"/>
-          </a:xfrm>
-          <a:prstGeom prst="roundRect">
-            <a:avLst/>
-          </a:prstGeom>
-          <a:solidFill>
-            <a:srgbClr val="161B22"/>
-          </a:solidFill>
-          <a:ln w="19050">
-            <a:solidFill>
-              <a:srgbClr val="30363D"/>
-            </a:solidFill>
-          </a:ln>
-        </p:spPr>
-        <p:style>
-          <a:lnRef idx="1">
-            <a:schemeClr val="accent1"/>
-          </a:lnRef>
-          <a:fillRef idx="3">
-            <a:schemeClr val="accent1"/>
-          </a:fillRef>
-          <a:effectRef idx="2">
-            <a:schemeClr val="accent1"/>
-          </a:effectRef>
-          <a:fontRef idx="minor">
-            <a:schemeClr val="lt1"/>
-          </a:fontRef>
-        </p:style>
-        <p:txBody>
-          <a:bodyPr rtlCol="0" anchor="ctr" wrap="square" lIns="182880" rIns="182880" tIns="164592" bIns="164592"/>
-          <a:lstStyle/>
-          <a:p>
-            <a:pPr algn="ctr">
-              <a:spcAft>
-                <a:spcPts val="500"/>
-              </a:spcAft>
-              <a:defRPr b="1" sz="1350">
-                <a:solidFill>
-                  <a:srgbClr val="F59E0B"/>
-                </a:solidFill>
-              </a:defRPr>
-            </a:pPr>
-            <a:r>
-              <a:t>💥 Tactile Combat Juice</a:t>
-            </a:r>
-          </a:p>
-          <a:p>
-            <a:pPr>
-              <a:spcAft>
-                <a:spcPts val="300"/>
-              </a:spcAft>
-              <a:defRPr sz="1150">
-                <a:solidFill>
-                  <a:srgbClr val="F3F4F6"/>
-                </a:solidFill>
-              </a:defRPr>
-            </a:pPr>
-            <a:r>
-              <a:t>Trauma-based decaying screen shake on wall collisions, particle sparks on terrain ignition, and floating combat text ensure every hit feels impactful.</a:t>
-            </a:r>
-          </a:p>
-        </p:txBody>
-      </p:sp>
+      </p:pic>
     </p:spTree>
   </p:cSld>
   <p:clrMapOvr>

--- a/ElementalHexTactics_PitchDeck.pptx
+++ b/ElementalHexTactics_PitchDeck.pptx
@@ -512,7 +512,7 @@
           <a:lstStyle/>
           <a:p>
             <a:r>
-              <a:t>Hi Kris and the Toge team, I'm Elang, a solo indie developer from Indonesia. Today I'm pitching Elemental Hex Tactics, a 2.5D tactical RPG inspired by classic JRPGs and Into the Breach, where the terrain itself is your greatest weapon.</a:t>
+              <a:t>Hi Kris and the Toge team, I'm Elang, a solo indie developer from Indonesia. Today I'm pitching Elemental Hex Tactics, a 2.5D tactical RPG inspired by Brigandine and Final Fantasy Tactics, where players directly command both human Masters and monster cohorts while using the terrain itself as an interactive weapon.</a:t>
             </a:r>
           </a:p>
         </p:txBody>
@@ -722,7 +722,7 @@
           <a:lstStyle/>
           <a:p>
             <a:r>
-              <a:t>Our core loop creates a natural tactical rhythm: you light the ground on fire, knock an enemy into it, stand in the fire to buff your dragon, drain the land for energy, and wipe out the enemy squad with a volcanic cataclysm.</a:t>
+              <a:t>Our core loop connects Master and Monster: your Master alters the terrain and pushes enemies, while your Monster holds the frontline, buffs itself on the elemental tiles, drains the land for energy, and wipes out the opposition with Cataclysms.</a:t>
             </a:r>
           </a:p>
         </p:txBody>
@@ -792,7 +792,7 @@
           <a:lstStyle/>
           <a:p>
             <a:r>
-              <a:t>We focus on three gameplay pillars: offensive terraforming with elemental magic, Titans that feed on the battlefield, and kinetic displacement that makes positioning lethal.</a:t>
+              <a:t>We focus on three gameplay pillars: offensive terraforming, direct dual-control of Masters and Monster cohorts, and kinetic displacement that makes positioning lethal.</a:t>
             </a:r>
           </a:p>
         </p:txBody>
@@ -862,7 +862,7 @@
           <a:lstStyle/>
           <a:p>
             <a:r>
-              <a:t>We aren't pitching an unproven idea. The vertical slice is completely built, tested, and playable today. You can run the Windows build from my submission and play through an entire battle.</a:t>
+              <a:t>We aren't pitching an unproven idea. The vertical slice is completely built, tested, and playable today. You can run the Windows build from my submission and experience the Master and Titan synergy firsthand.</a:t>
             </a:r>
           </a:p>
         </p:txBody>
@@ -932,7 +932,7 @@
           <a:lstStyle/>
           <a:p>
             <a:r>
-              <a:t>We solved two major tactical RPG frustrations: Ghost UI eliminates cognitive overload by previewing reactions before casting, and hybrid attack-spells remove setup tax so every single turn feels impactful.</a:t>
+              <a:t>We solved two major tactical RPG frustrations: Ghost UI eliminates cognitive overload by previewing reactions before casting, and hybrid attack-spells remove setup tax so every turn feels impactful.</a:t>
             </a:r>
           </a:p>
         </p:txBody>
@@ -1002,7 +1002,7 @@
           <a:lstStyle/>
           <a:p>
             <a:r>
-              <a:t>Every squad features asymmetric roles: your fragile Commander shapes the terrain and controls space, while your Titan holds the frontline, absorbs environmental energy, and delivers the finishing blows.</a:t>
+              <a:t>Every squad features asymmetric roles: your fragile Master shapes the terrain and controls space, while your Monster holds the frontline, absorbs environmental energy, and delivers the finishing blows.</a:t>
             </a:r>
           </a:p>
         </p:txBody>
@@ -1072,7 +1072,7 @@
           <a:lstStyle/>
           <a:p>
             <a:r>
-              <a:t>Beyond individual battles, the campaign features a node-based expedition map with spellbook upgrades, elemental titan customization, and zero level grinding.</a:t>
+              <a:t>Beyond individual battles, the campaign features a node-based expedition map with spellbook upgrades, monster squad customization, and zero level grinding.</a:t>
             </a:r>
           </a:p>
         </p:txBody>
@@ -1142,7 +1142,7 @@
           <a:lstStyle/>
           <a:p>
             <a:r>
-              <a:t>Brigandine proved that players love hex-grid monster commanding on Steam. Vanaris and Into the Breach proved the market for retro tactics and kinetic shoves. Elemental Hex Tactics combines these proven elements into fast 10-minute HD-2D matches.</a:t>
+              <a:t>Brigandine proved that players love hex-grid monster commanding on Steam. Vanaris and Into the Breach proved the market for retro tactics and kinetic shoves. Elemental Hex Tactics combines these proven elements into streamlined, deliberate HD-2D matches.</a:t>
             </a:r>
           </a:p>
         </p:txBody>
@@ -4286,7 +4286,7 @@
               </a:defRPr>
             </a:pPr>
             <a:r>
-              <a:t>"Into the Breach meets Final Fantasy Tactics"</a:t>
+              <a:t>"Brigandine meets Final Fantasy Tactics"</a:t>
             </a:r>
           </a:p>
           <a:p>
@@ -4301,7 +4301,7 @@
               </a:defRPr>
             </a:pPr>
             <a:r>
-              <a:t>A fast-paced 2.5D tactical RPG where the battlefield itself is an interactive chemical weapon. Alter 3D terrain with elemental magic, shove enemies into hazards, and harvest the land to fuel colossal Titan abilities.</a:t>
+              <a:t>A rich, streamlined 2.5D tactical RPG where players directly command both Human Masters and colossal Monsters. Reshape 3D terrain with elemental magic, shove enemies into hazards, and harvest the land to unleash devastating Titan Cataclysms.</a:t>
             </a:r>
           </a:p>
           <a:p>
@@ -4898,7 +4898,7 @@
               </a:defRPr>
             </a:pPr>
             <a:r>
-              <a:t>Core engine, hex grid math, kinetic displacement, and land-siphoning loops are ALREADY complete (Month 0). Months 1–6 are strictly for content, art pipeline, and AI tuning.</a:t>
+              <a:t>Core combat engine, hex grid math, kinetic displacement, and land-siphoning loops are ALREADY complete (Month 0). Months 1–6 are strictly for content, art pipeline, and AI tuning.</a:t>
             </a:r>
           </a:p>
         </p:txBody>
@@ -5445,7 +5445,7 @@
               </a:defRPr>
             </a:pPr>
             <a:r>
-              <a:t>• Full Commercial Vision: TGFI demo proves Steam retention, laying the groundwork for a full $50k-$150k commercial publishing partnership with Toge (20+ classes &amp; full campaign).</a:t>
+              <a:t>• Full Commercial Vision: TGFI demo proves Steam retention, laying the groundwork for a full $50k-$150k commercial publishing partnership with Toge (20+ classes &amp; full Master-Monster campaign).</a:t>
             </a:r>
           </a:p>
         </p:txBody>
@@ -5590,7 +5590,7 @@
               </a:defRPr>
             </a:pPr>
             <a:r>
-              <a:t>1. Infuse (Terraform)   ➔   2. Attune (Adapt)   ➔   3. Consume (Unleash)</a:t>
+              <a:t>1. Master Infuses (Terraform)   ➔   2. Monster Attunes (Adapt)   ➔   3. Monster Consumes (Unleash)</a:t>
             </a:r>
           </a:p>
         </p:txBody>
@@ -5647,49 +5647,49 @@
               </a:defRPr>
             </a:pPr>
             <a:r>
-              <a:t>🔥 1. Infuse (Terraform)</a:t>
-            </a:r>
-          </a:p>
-          <a:p>
-            <a:pPr>
-              <a:spcAft>
-                <a:spcPts val="300"/>
-              </a:spcAft>
-              <a:defRPr sz="1150">
-                <a:solidFill>
-                  <a:srgbClr val="F3F4F6"/>
-                </a:solidFill>
-              </a:defRPr>
-            </a:pPr>
-            <a:r>
-              <a:t>Spells physically change the ground in real-time.</a:t>
-            </a:r>
-          </a:p>
-          <a:p>
-            <a:pPr>
-              <a:spcAft>
-                <a:spcPts val="300"/>
-              </a:spcAft>
-              <a:defRPr sz="1150">
-                <a:solidFill>
-                  <a:srgbClr val="F3F4F6"/>
-                </a:solidFill>
-              </a:defRPr>
-            </a:pPr>
-          </a:p>
-          <a:p>
-            <a:pPr>
-              <a:spcAft>
-                <a:spcPts val="300"/>
-              </a:spcAft>
-              <a:defRPr sz="1150">
-                <a:solidFill>
-                  <a:srgbClr val="F3F4F6"/>
-                </a:solidFill>
-              </a:defRPr>
-            </a:pPr>
-            <a:r>
-              <a:t>Fireballs burn lush grass into molten lava; water blasts douse flames and create concealing steam clouds.</a:t>
+              <a:t>🧙 1. Master Infuses (Terraform)</a:t>
+            </a:r>
+          </a:p>
+          <a:p>
+            <a:pPr>
+              <a:spcAft>
+                <a:spcPts val="300"/>
+              </a:spcAft>
+              <a:defRPr sz="1150">
+                <a:solidFill>
+                  <a:srgbClr val="F3F4F6"/>
+                </a:solidFill>
+              </a:defRPr>
+            </a:pPr>
+            <a:r>
+              <a:t>Human Masters reshape the battlefield with magic.</a:t>
+            </a:r>
+          </a:p>
+          <a:p>
+            <a:pPr>
+              <a:spcAft>
+                <a:spcPts val="300"/>
+              </a:spcAft>
+              <a:defRPr sz="1150">
+                <a:solidFill>
+                  <a:srgbClr val="F3F4F6"/>
+                </a:solidFill>
+              </a:defRPr>
+            </a:pPr>
+          </a:p>
+          <a:p>
+            <a:pPr>
+              <a:spcAft>
+                <a:spcPts val="300"/>
+              </a:spcAft>
+              <a:defRPr sz="1150">
+                <a:solidFill>
+                  <a:srgbClr val="F3F4F6"/>
+                </a:solidFill>
+              </a:defRPr>
+            </a:pPr>
+            <a:r>
+              <a:t>Fireballs scorch grass into molten lava moats; water blasts douse flames and create concealing steam clouds.</a:t>
             </a:r>
           </a:p>
         </p:txBody>
@@ -5746,49 +5746,49 @@
               </a:defRPr>
             </a:pPr>
             <a:r>
-              <a:t>🌊 2. Attune (Adapt)</a:t>
-            </a:r>
-          </a:p>
-          <a:p>
-            <a:pPr>
-              <a:spcAft>
-                <a:spcPts val="300"/>
-              </a:spcAft>
-              <a:defRPr sz="1150">
-                <a:solidFill>
-                  <a:srgbClr val="F3F4F6"/>
-                </a:solidFill>
-              </a:defRPr>
-            </a:pPr>
-            <a:r>
-              <a:t>Units gain dynamic passive buffs matching the ground beneath them.</a:t>
-            </a:r>
-          </a:p>
-          <a:p>
-            <a:pPr>
-              <a:spcAft>
-                <a:spcPts val="300"/>
-              </a:spcAft>
-              <a:defRPr sz="1150">
-                <a:solidFill>
-                  <a:srgbClr val="F3F4F6"/>
-                </a:solidFill>
-              </a:defRPr>
-            </a:pPr>
-          </a:p>
-          <a:p>
-            <a:pPr>
-              <a:spcAft>
-                <a:spcPts val="300"/>
-              </a:spcAft>
-              <a:defRPr sz="1150">
-                <a:solidFill>
-                  <a:srgbClr val="F3F4F6"/>
-                </a:solidFill>
-              </a:defRPr>
-            </a:pPr>
-            <a:r>
-              <a:t>Standing on lava grants fire units +2 ATK and complete burn immunity.</a:t>
+              <a:t>🐉 2. Monster Attunes (Adapt)</a:t>
+            </a:r>
+          </a:p>
+          <a:p>
+            <a:pPr>
+              <a:spcAft>
+                <a:spcPts val="300"/>
+              </a:spcAft>
+              <a:defRPr sz="1150">
+                <a:solidFill>
+                  <a:srgbClr val="F3F4F6"/>
+                </a:solidFill>
+              </a:defRPr>
+            </a:pPr>
+            <a:r>
+              <a:t>Allied Monsters thrive in their native elements.</a:t>
+            </a:r>
+          </a:p>
+          <a:p>
+            <a:pPr>
+              <a:spcAft>
+                <a:spcPts val="300"/>
+              </a:spcAft>
+              <a:defRPr sz="1150">
+                <a:solidFill>
+                  <a:srgbClr val="F3F4F6"/>
+                </a:solidFill>
+              </a:defRPr>
+            </a:pPr>
+          </a:p>
+          <a:p>
+            <a:pPr>
+              <a:spcAft>
+                <a:spcPts val="300"/>
+              </a:spcAft>
+              <a:defRPr sz="1150">
+                <a:solidFill>
+                  <a:srgbClr val="F3F4F6"/>
+                </a:solidFill>
+              </a:defRPr>
+            </a:pPr>
+            <a:r>
+              <a:t>Standing on lava grants fire beasts +2 ATK and complete burn immunity. Positioning monsters on matching tiles is key.</a:t>
             </a:r>
           </a:p>
         </p:txBody>
@@ -5845,22 +5845,22 @@
               </a:defRPr>
             </a:pPr>
             <a:r>
-              <a:t>⚡ 3. Consume (Unleash)</a:t>
-            </a:r>
-          </a:p>
-          <a:p>
-            <a:pPr>
-              <a:spcAft>
-                <a:spcPts val="300"/>
-              </a:spcAft>
-              <a:defRPr sz="1150">
-                <a:solidFill>
-                  <a:srgbClr val="F3F4F6"/>
-                </a:solidFill>
-              </a:defRPr>
-            </a:pPr>
-            <a:r>
-              <a:t>Titans siphon active lava or lakes, turning the land into Barren Earth.</a:t>
+              <a:t>⚡ 3. Monster Consumes (Unleash)</a:t>
+            </a:r>
+          </a:p>
+          <a:p>
+            <a:pPr>
+              <a:spcAft>
+                <a:spcPts val="300"/>
+              </a:spcAft>
+              <a:defRPr sz="1150">
+                <a:solidFill>
+                  <a:srgbClr val="F3F4F6"/>
+                </a:solidFill>
+              </a:defRPr>
+            </a:pPr>
+            <a:r>
+              <a:t>Titans siphon active lava or water, mutating the land into Barren Earth.</a:t>
             </a:r>
           </a:p>
           <a:p>
@@ -5944,22 +5944,22 @@
               </a:defRPr>
             </a:pPr>
             <a:r>
-              <a:t>💡 Natural Synergy</a:t>
-            </a:r>
-          </a:p>
-          <a:p>
-            <a:pPr>
-              <a:spcAft>
-                <a:spcPts val="300"/>
-              </a:spcAft>
-              <a:defRPr sz="1150">
-                <a:solidFill>
-                  <a:srgbClr val="F3F4F6"/>
-                </a:solidFill>
-              </a:defRPr>
-            </a:pPr>
-            <a:r>
-              <a:t>Setting tiles ablaze creates hazards to push enemies into, buffs your allied monsters, and generates fuel to cast match-winning Titan finishers.</a:t>
+              <a:t>💡 Master &amp; Monster Dual-Command</a:t>
+            </a:r>
+          </a:p>
+          <a:p>
+            <a:pPr>
+              <a:spcAft>
+                <a:spcPts val="300"/>
+              </a:spcAft>
+              <a:defRPr sz="1150">
+                <a:solidFill>
+                  <a:srgbClr val="F3F4F6"/>
+                </a:solidFill>
+              </a:defRPr>
+            </a:pPr>
+            <a:r>
+              <a:t>The Master sculpts the space and knocks enemies into traps; the Monster holds the frontline, thrives in the hazards, and consumes the land for decisive finishers.</a:t>
             </a:r>
           </a:p>
         </p:txBody>
@@ -6131,7 +6131,7 @@
               </a:defRPr>
             </a:pPr>
             <a:r>
-              <a:t>Target the ground itself to reshape the battlefield, cut off enemy escape routes, and carve lethal molten lava moats.</a:t>
+              <a:t>Target the ground itself to reshape the battlefield, cut off enemy movement paths, and carve lethal molten lava moats.</a:t>
             </a:r>
           </a:p>
           <a:p>
@@ -6215,76 +6215,76 @@
               </a:defRPr>
             </a:pPr>
             <a:r>
-              <a:t>🐉 2. Titan Ecosystems</a:t>
-            </a:r>
-          </a:p>
-          <a:p>
-            <a:pPr>
-              <a:spcAft>
-                <a:spcPts val="300"/>
-              </a:spcAft>
-              <a:defRPr sz="1150">
-                <a:solidFill>
-                  <a:srgbClr val="F3F4F6"/>
-                </a:solidFill>
-              </a:defRPr>
-            </a:pPr>
-            <a:r>
-              <a:t>Colossal allied monsters that feed directly on the environment.</a:t>
-            </a:r>
-          </a:p>
-          <a:p>
-            <a:pPr>
-              <a:spcAft>
-                <a:spcPts val="300"/>
-              </a:spcAft>
-              <a:defRPr sz="1150">
-                <a:solidFill>
-                  <a:srgbClr val="F3F4F6"/>
-                </a:solidFill>
-              </a:defRPr>
-            </a:pPr>
-          </a:p>
-          <a:p>
-            <a:pPr>
-              <a:spcAft>
-                <a:spcPts val="300"/>
-              </a:spcAft>
-              <a:defRPr sz="1150">
-                <a:solidFill>
-                  <a:srgbClr val="F3F4F6"/>
-                </a:solidFill>
-              </a:defRPr>
-            </a:pPr>
-            <a:r>
-              <a:t>The more elemental chaos on the board, the more energy your Titan absorbs for ultimate abilities.</a:t>
-            </a:r>
-          </a:p>
-          <a:p>
-            <a:pPr>
-              <a:spcAft>
-                <a:spcPts val="300"/>
-              </a:spcAft>
-              <a:defRPr sz="1150">
-                <a:solidFill>
-                  <a:srgbClr val="F3F4F6"/>
-                </a:solidFill>
-              </a:defRPr>
-            </a:pPr>
-          </a:p>
-          <a:p>
-            <a:pPr>
-              <a:spcAft>
-                <a:spcPts val="300"/>
-              </a:spcAft>
-              <a:defRPr sz="1150">
-                <a:solidFill>
-                  <a:srgbClr val="F3F4F6"/>
-                </a:solidFill>
-              </a:defRPr>
-            </a:pPr>
-            <a:r>
-              <a:t>Titans are naturally immune to elemental hazards.</a:t>
+              <a:t>🐉 2. Master &amp; Monster Cohorts</a:t>
+            </a:r>
+          </a:p>
+          <a:p>
+            <a:pPr>
+              <a:spcAft>
+                <a:spcPts val="300"/>
+              </a:spcAft>
+              <a:defRPr sz="1150">
+                <a:solidFill>
+                  <a:srgbClr val="F3F4F6"/>
+                </a:solidFill>
+              </a:defRPr>
+            </a:pPr>
+            <a:r>
+              <a:t>Direct dual-command on the hex grid.</a:t>
+            </a:r>
+          </a:p>
+          <a:p>
+            <a:pPr>
+              <a:spcAft>
+                <a:spcPts val="300"/>
+              </a:spcAft>
+              <a:defRPr sz="1150">
+                <a:solidFill>
+                  <a:srgbClr val="F3F4F6"/>
+                </a:solidFill>
+              </a:defRPr>
+            </a:pPr>
+          </a:p>
+          <a:p>
+            <a:pPr>
+              <a:spcAft>
+                <a:spcPts val="300"/>
+              </a:spcAft>
+              <a:defRPr sz="1150">
+                <a:solidFill>
+                  <a:srgbClr val="F3F4F6"/>
+                </a:solidFill>
+              </a:defRPr>
+            </a:pPr>
+            <a:r>
+              <a:t>Players control both the fragile Human Master (spatial control &amp; spells) and colossal allied Monsters (frontline anchors &amp; land harvesters).</a:t>
+            </a:r>
+          </a:p>
+          <a:p>
+            <a:pPr>
+              <a:spcAft>
+                <a:spcPts val="300"/>
+              </a:spcAft>
+              <a:defRPr sz="1150">
+                <a:solidFill>
+                  <a:srgbClr val="F3F4F6"/>
+                </a:solidFill>
+              </a:defRPr>
+            </a:pPr>
+          </a:p>
+          <a:p>
+            <a:pPr>
+              <a:spcAft>
+                <a:spcPts val="300"/>
+              </a:spcAft>
+              <a:defRPr sz="1150">
+                <a:solidFill>
+                  <a:srgbClr val="F3F4F6"/>
+                </a:solidFill>
+              </a:defRPr>
+            </a:pPr>
+            <a:r>
+              <a:t>True tactical monster commanding.</a:t>
             </a:r>
           </a:p>
         </p:txBody>
@@ -6410,7 +6410,7 @@
               </a:defRPr>
             </a:pPr>
             <a:r>
-              <a:t>Knocking them into lava or off cliffs inflicts continuous environmental burns.</a:t>
+              <a:t>Knocking enemies into lava pools or off cliffs inflicts continuous environmental burns.</a:t>
             </a:r>
           </a:p>
         </p:txBody>
@@ -6467,22 +6467,22 @@
               </a:defRPr>
             </a:pPr>
             <a:r>
-              <a:t>⏱️ Fast Action Economy</a:t>
-            </a:r>
-          </a:p>
-          <a:p>
-            <a:pPr>
-              <a:spcAft>
-                <a:spcPts val="300"/>
-              </a:spcAft>
-              <a:defRPr sz="1150">
-                <a:solidFill>
-                  <a:srgbClr val="F3F4F6"/>
-                </a:solidFill>
-              </a:defRPr>
-            </a:pPr>
-            <a:r>
-              <a:t>Every unit gets a clean 1 Move + 1 Combat Action per turn. No menu paralysis, no 45-minute slogs—just tight 10-minute spatial puzzles.</a:t>
+              <a:t>⏱️ Streamlined Turn Economy (Zero Bloat)</a:t>
+            </a:r>
+          </a:p>
+          <a:p>
+            <a:pPr>
+              <a:spcAft>
+                <a:spcPts val="300"/>
+              </a:spcAft>
+              <a:defRPr sz="1150">
+                <a:solidFill>
+                  <a:srgbClr val="F3F4F6"/>
+                </a:solidFill>
+              </a:defRPr>
+            </a:pPr>
+            <a:r>
+              <a:t>Deliberate tactical depth with zero slog. Clean 1 Move + 1 Combat Action per unit, hybrid attack-terraforming, and Ghost UI prediction—respecting player time.</a:t>
             </a:r>
           </a:p>
         </p:txBody>
@@ -6627,6 +6627,21 @@
               </a:defRPr>
             </a:pPr>
             <a:r>
+              <a:t>• Focused 2v2 prototype (Master + Titan vs Boss + Minion)</a:t>
+            </a:r>
+          </a:p>
+          <a:p>
+            <a:pPr>
+              <a:spcAft>
+                <a:spcPts val="300"/>
+              </a:spcAft>
+              <a:defRPr sz="1150">
+                <a:solidFill>
+                  <a:srgbClr val="F3F4F6"/>
+                </a:solidFill>
+              </a:defRPr>
+            </a:pPr>
+            <a:r>
               <a:t>• 3D procedural hex grid with multi-level cliff elevations</a:t>
             </a:r>
           </a:p>
@@ -6672,7 +6687,7 @@
               </a:defRPr>
             </a:pPr>
             <a:r>
-              <a:t>• FFT-style terrain attunement (Flame Surge buffs &amp; immunities)</a:t>
+              <a:t>• Terrain attunement (Flame Surge buffs &amp; immunities)</a:t>
             </a:r>
           </a:p>
           <a:p>
@@ -6789,7 +6804,7 @@
               </a:defRPr>
             </a:pPr>
             <a:r>
-              <a:t>Fireball ignites grass ➔ Shove slams enemy into rock ➔ Dragon siphons lava (+1 Core) ➔ Magma Cataclysm wipes the board!</a:t>
+              <a:t>Master casts Fireball ➔ Shove slams enemy into rock ➔ Dragon siphons lava (+1 Core) ➔ Magma Cataclysm wipes the board!</a:t>
             </a:r>
           </a:p>
         </p:txBody>
@@ -6886,7 +6901,7 @@
               </a:defRPr>
             </a:pPr>
             <a:r>
-              <a:t>Game Design Solutions: Player-First Combat</a:t>
+              <a:t>Game Design Solutions: Streamlined Tactical Flow</a:t>
             </a:r>
           </a:p>
         </p:txBody>
@@ -7198,7 +7213,7 @@
               </a:defRPr>
             </a:pPr>
             <a:r>
-              <a:t>Result: Fast pacing where every single turn feels impactful.</a:t>
+              <a:t>Result: Streamlined combat flow where every turn advances the battle.</a:t>
             </a:r>
           </a:p>
         </p:txBody>
@@ -7271,7 +7286,7 @@
               </a:defRPr>
             </a:pPr>
             <a:r>
-              <a:t>Unit Asymmetry: Shapers vs. Titans</a:t>
+              <a:t>Unit Asymmetry: Masters vs. Monsters</a:t>
             </a:r>
           </a:p>
         </p:txBody>
@@ -7328,49 +7343,49 @@
               </a:defRPr>
             </a:pPr>
             <a:r>
-              <a:t>🧙 Human Commanders (The Shapers)</a:t>
-            </a:r>
-          </a:p>
-          <a:p>
-            <a:pPr>
-              <a:spcAft>
-                <a:spcPts val="300"/>
-              </a:spcAft>
-              <a:defRPr sz="1150">
-                <a:solidFill>
-                  <a:srgbClr val="F3F4F6"/>
-                </a:solidFill>
-              </a:defRPr>
-            </a:pPr>
-            <a:r>
-              <a:t>ROLE: Map Manipulator (Low HP, High Mobility, Spatial Control)</a:t>
-            </a:r>
-          </a:p>
-          <a:p>
-            <a:pPr>
-              <a:spcAft>
-                <a:spcPts val="300"/>
-              </a:spcAft>
-              <a:defRPr sz="1150">
-                <a:solidFill>
-                  <a:srgbClr val="F3F4F6"/>
-                </a:solidFill>
-              </a:defRPr>
-            </a:pPr>
-          </a:p>
-          <a:p>
-            <a:pPr>
-              <a:spcAft>
-                <a:spcPts val="300"/>
-              </a:spcAft>
-              <a:defRPr sz="1150">
-                <a:solidFill>
-                  <a:srgbClr val="F3F4F6"/>
-                </a:solidFill>
-              </a:defRPr>
-            </a:pPr>
-            <a:r>
-              <a:t>Squishy but agile. Casts ranged Fireballs, Water Surges, and Kinetic Pushes to manipulate enemy positioning and shape terrain from afar.</a:t>
+              <a:t>🧙 Human Masters (The Shapers)</a:t>
+            </a:r>
+          </a:p>
+          <a:p>
+            <a:pPr>
+              <a:spcAft>
+                <a:spcPts val="300"/>
+              </a:spcAft>
+              <a:defRPr sz="1150">
+                <a:solidFill>
+                  <a:srgbClr val="F3F4F6"/>
+                </a:solidFill>
+              </a:defRPr>
+            </a:pPr>
+            <a:r>
+              <a:t>ROLE: Spatial Manipulator (Low HP, High Mobility, Map Shaper)</a:t>
+            </a:r>
+          </a:p>
+          <a:p>
+            <a:pPr>
+              <a:spcAft>
+                <a:spcPts val="300"/>
+              </a:spcAft>
+              <a:defRPr sz="1150">
+                <a:solidFill>
+                  <a:srgbClr val="F3F4F6"/>
+                </a:solidFill>
+              </a:defRPr>
+            </a:pPr>
+          </a:p>
+          <a:p>
+            <a:pPr>
+              <a:spcAft>
+                <a:spcPts val="300"/>
+              </a:spcAft>
+              <a:defRPr sz="1150">
+                <a:solidFill>
+                  <a:srgbClr val="F3F4F6"/>
+                </a:solidFill>
+              </a:defRPr>
+            </a:pPr>
+            <a:r>
+              <a:t>Player-controlled caster. Squishy but agile. Casts ranged Fireballs, Water Surges, and Kinetic Pushes to reshape terrain and manipulate enemy positioning.</a:t>
             </a:r>
           </a:p>
         </p:txBody>
@@ -7427,49 +7442,49 @@
               </a:defRPr>
             </a:pPr>
             <a:r>
-              <a:t>🐉 Allied Titans (Colossal Anchors)</a:t>
-            </a:r>
-          </a:p>
-          <a:p>
-            <a:pPr>
-              <a:spcAft>
-                <a:spcPts val="300"/>
-              </a:spcAft>
-              <a:defRPr sz="1150">
-                <a:solidFill>
-                  <a:srgbClr val="F3F4F6"/>
-                </a:solidFill>
-              </a:defRPr>
-            </a:pPr>
-            <a:r>
-              <a:t>ROLE: Frontline Finisher (Colossal 14 HP, Hazard-Immune)</a:t>
-            </a:r>
-          </a:p>
-          <a:p>
-            <a:pPr>
-              <a:spcAft>
-                <a:spcPts val="300"/>
-              </a:spcAft>
-              <a:defRPr sz="1150">
-                <a:solidFill>
-                  <a:srgbClr val="F3F4F6"/>
-                </a:solidFill>
-              </a:defRPr>
-            </a:pPr>
-          </a:p>
-          <a:p>
-            <a:pPr>
-              <a:spcAft>
-                <a:spcPts val="300"/>
-              </a:spcAft>
-              <a:defRPr sz="1150">
-                <a:solidFill>
-                  <a:srgbClr val="F3F4F6"/>
-                </a:solidFill>
-              </a:defRPr>
-            </a:pPr>
-            <a:r>
-              <a:t>Massive tank. Naturally immune to molten lava, holds down the frontline with heavy melee strikes, and harvests land to trigger room-clearing Magma Cataclysms.</a:t>
+              <a:t>🐉 Allied Monsters (The Titans)</a:t>
+            </a:r>
+          </a:p>
+          <a:p>
+            <a:pPr>
+              <a:spcAft>
+                <a:spcPts val="300"/>
+              </a:spcAft>
+              <a:defRPr sz="1150">
+                <a:solidFill>
+                  <a:srgbClr val="F3F4F6"/>
+                </a:solidFill>
+              </a:defRPr>
+            </a:pPr>
+            <a:r>
+              <a:t>ROLE: Frontline Anchor (Colossal 14 HP, Hazard-Immune)</a:t>
+            </a:r>
+          </a:p>
+          <a:p>
+            <a:pPr>
+              <a:spcAft>
+                <a:spcPts val="300"/>
+              </a:spcAft>
+              <a:defRPr sz="1150">
+                <a:solidFill>
+                  <a:srgbClr val="F3F4F6"/>
+                </a:solidFill>
+              </a:defRPr>
+            </a:pPr>
+          </a:p>
+          <a:p>
+            <a:pPr>
+              <a:spcAft>
+                <a:spcPts val="300"/>
+              </a:spcAft>
+              <a:defRPr sz="1150">
+                <a:solidFill>
+                  <a:srgbClr val="F3F4F6"/>
+                </a:solidFill>
+              </a:defRPr>
+            </a:pPr>
+            <a:r>
+              <a:t>Player-controlled behemoth. Naturally immune to molten lava, holds down the frontline with heavy melee strikes, and harvests land to trigger Magma Cataclysms.</a:t>
             </a:r>
           </a:p>
         </p:txBody>
@@ -7526,7 +7541,7 @@
               </a:defRPr>
             </a:pPr>
             <a:r>
-              <a:t>🔥 Dracomancers (Enemy Bosses)</a:t>
+              <a:t>🔥 Dracomancers (Enemy Rival Masters)</a:t>
             </a:r>
           </a:p>
           <a:p>
@@ -7625,7 +7640,7 @@
               </a:defRPr>
             </a:pPr>
             <a:r>
-              <a:t>👿 Demon Slimes (Aggressive Swarmers)</a:t>
+              <a:t>👿 Demon Slimes (Aggressive Minions)</a:t>
             </a:r>
           </a:p>
           <a:p>
@@ -7667,7 +7682,7 @@
               </a:defRPr>
             </a:pPr>
             <a:r>
-              <a:t>Aggressive swarmers that navigate around hazards to flank your Commander and attempt to knock him off elevated plateaus.</a:t>
+              <a:t>Aggressive swarmers that navigate around hazards to flank your Master and attempt to knock him off elevated plateaus.</a:t>
             </a:r>
           </a:p>
         </p:txBody>
@@ -7812,7 +7827,7 @@
               </a:defRPr>
             </a:pPr>
             <a:r>
-              <a:t>Branching expedition map inspired by Slay the Spire and Into the Breach.</a:t>
+              <a:t>Branching expedition map inspired by Slay the Spire and Brigandine.</a:t>
             </a:r>
           </a:p>
           <a:p>
@@ -7923,49 +7938,49 @@
               </a:defRPr>
             </a:pPr>
             <a:r>
-              <a:t>🔮 Spellbooks &amp; Titans</a:t>
-            </a:r>
-          </a:p>
-          <a:p>
-            <a:pPr>
-              <a:spcAft>
-                <a:spcPts val="300"/>
-              </a:spcAft>
-              <a:defRPr sz="1150">
-                <a:solidFill>
-                  <a:srgbClr val="F3F4F6"/>
-                </a:solidFill>
-              </a:defRPr>
-            </a:pPr>
-            <a:r>
-              <a:t>Unlock new elemental disciplines for your Commander (Ice, Lightning, Earth).</a:t>
-            </a:r>
-          </a:p>
-          <a:p>
-            <a:pPr>
-              <a:spcAft>
-                <a:spcPts val="300"/>
-              </a:spcAft>
-              <a:defRPr sz="1150">
-                <a:solidFill>
-                  <a:srgbClr val="F3F4F6"/>
-                </a:solidFill>
-              </a:defRPr>
-            </a:pPr>
-          </a:p>
-          <a:p>
-            <a:pPr>
-              <a:spcAft>
-                <a:spcPts val="300"/>
-              </a:spcAft>
-              <a:defRPr sz="1150">
-                <a:solidFill>
-                  <a:srgbClr val="F3F4F6"/>
-                </a:solidFill>
-              </a:defRPr>
-            </a:pPr>
-            <a:r>
-              <a:t>Hatch and attune new Titan monsters with unique passive immunities and devastating Cataclysm ultimates.</a:t>
+              <a:t>🔮 Spellbooks &amp; Monsters</a:t>
+            </a:r>
+          </a:p>
+          <a:p>
+            <a:pPr>
+              <a:spcAft>
+                <a:spcPts val="300"/>
+              </a:spcAft>
+              <a:defRPr sz="1150">
+                <a:solidFill>
+                  <a:srgbClr val="F3F4F6"/>
+                </a:solidFill>
+              </a:defRPr>
+            </a:pPr>
+            <a:r>
+              <a:t>Unlock new elemental disciplines for your Master (Ice, Lightning, Earth).</a:t>
+            </a:r>
+          </a:p>
+          <a:p>
+            <a:pPr>
+              <a:spcAft>
+                <a:spcPts val="300"/>
+              </a:spcAft>
+              <a:defRPr sz="1150">
+                <a:solidFill>
+                  <a:srgbClr val="F3F4F6"/>
+                </a:solidFill>
+              </a:defRPr>
+            </a:pPr>
+          </a:p>
+          <a:p>
+            <a:pPr>
+              <a:spcAft>
+                <a:spcPts val="300"/>
+              </a:spcAft>
+              <a:defRPr sz="1150">
+                <a:solidFill>
+                  <a:srgbClr val="F3F4F6"/>
+                </a:solidFill>
+              </a:defRPr>
+            </a:pPr>
+            <a:r>
+              <a:t>Hatch, evolve, and attune new Monster cohorts with unique passive immunities and Cataclysm ultimates.</a:t>
             </a:r>
           </a:p>
         </p:txBody>
@@ -8022,76 +8037,49 @@
               </a:defRPr>
             </a:pPr>
             <a:r>
-              <a:t>⏱️ Zero-Grind Pacing</a:t>
-            </a:r>
-          </a:p>
-          <a:p>
-            <a:pPr>
-              <a:spcAft>
-                <a:spcPts val="300"/>
-              </a:spcAft>
-              <a:defRPr sz="1150">
-                <a:solidFill>
-                  <a:srgbClr val="F3F4F6"/>
-                </a:solidFill>
-              </a:defRPr>
-            </a:pPr>
-            <a:r>
-              <a:t>No 20-hour XP grinding.</a:t>
-            </a:r>
-          </a:p>
-          <a:p>
-            <a:pPr>
-              <a:spcAft>
-                <a:spcPts val="300"/>
-              </a:spcAft>
-              <a:defRPr sz="1150">
-                <a:solidFill>
-                  <a:srgbClr val="F3F4F6"/>
-                </a:solidFill>
-              </a:defRPr>
-            </a:pPr>
-          </a:p>
-          <a:p>
-            <a:pPr>
-              <a:spcAft>
-                <a:spcPts val="300"/>
-              </a:spcAft>
-              <a:defRPr sz="1150">
-                <a:solidFill>
-                  <a:srgbClr val="F3F4F6"/>
-                </a:solidFill>
-              </a:defRPr>
-            </a:pPr>
-            <a:r>
-              <a:t>Every skirmish is a tight 10–15 minute spatial challenge.</a:t>
-            </a:r>
-          </a:p>
-          <a:p>
-            <a:pPr>
-              <a:spcAft>
-                <a:spcPts val="300"/>
-              </a:spcAft>
-              <a:defRPr sz="1150">
-                <a:solidFill>
-                  <a:srgbClr val="F3F4F6"/>
-                </a:solidFill>
-              </a:defRPr>
-            </a:pPr>
-          </a:p>
-          <a:p>
-            <a:pPr>
-              <a:spcAft>
-                <a:spcPts val="300"/>
-              </a:spcAft>
-              <a:defRPr sz="1150">
-                <a:solidFill>
-                  <a:srgbClr val="F3F4F6"/>
-                </a:solidFill>
-              </a:defRPr>
-            </a:pPr>
-            <a:r>
-              <a:t>Success is driven by player skill, positioning, and creative terrain combos—never stat checks.</a:t>
+              <a:t>⏱️ Zero-Grind Tactical Depth</a:t>
+            </a:r>
+          </a:p>
+          <a:p>
+            <a:pPr>
+              <a:spcAft>
+                <a:spcPts val="300"/>
+              </a:spcAft>
+              <a:defRPr sz="1150">
+                <a:solidFill>
+                  <a:srgbClr val="F3F4F6"/>
+                </a:solidFill>
+              </a:defRPr>
+            </a:pPr>
+            <a:r>
+              <a:t>No 20-hour stat grinding.</a:t>
+            </a:r>
+          </a:p>
+          <a:p>
+            <a:pPr>
+              <a:spcAft>
+                <a:spcPts val="300"/>
+              </a:spcAft>
+              <a:defRPr sz="1150">
+                <a:solidFill>
+                  <a:srgbClr val="F3F4F6"/>
+                </a:solidFill>
+              </a:defRPr>
+            </a:pPr>
+          </a:p>
+          <a:p>
+            <a:pPr>
+              <a:spcAft>
+                <a:spcPts val="300"/>
+              </a:spcAft>
+              <a:defRPr sz="1150">
+                <a:solidFill>
+                  <a:srgbClr val="F3F4F6"/>
+                </a:solidFill>
+              </a:defRPr>
+            </a:pPr>
+            <a:r>
+              <a:t>Thoughtful, deliberate turn-based tactical battles where success is driven by player skill, positioning, and creative terrain combos—never stat checks.</a:t>
             </a:r>
           </a:p>
         </p:txBody>
@@ -8163,7 +8151,7 @@
               </a:defRPr>
             </a:pPr>
             <a:r>
-              <a:t>Procedural encounter routes, emergent environmental chemistry, and diverse squad combinations ensure no two runs feel identical.</a:t>
+              <a:t>Procedural encounter routes, emergent environmental chemistry, and diverse Master-Monster squad combinations ensure no two runs feel identical.</a:t>
             </a:r>
           </a:p>
         </p:txBody>
@@ -8338,7 +8326,7 @@
               </a:defRPr>
             </a:pPr>
             <a:r>
-              <a:t>How We Differentiate: Replaces 45-min slow AA battle animations with fast 10-min kinetic skirmishes; transforms passive terrain buffs into Active Terraforming.</a:t>
+              <a:t>How We Differentiate: Replaces slow 45-min AA battle animations with streamlined tactical skirmishes; transforms passive terrain buffs into Active Terraforming.</a:t>
             </a:r>
           </a:p>
         </p:txBody>
@@ -8644,7 +8632,7 @@
               </a:defRPr>
             </a:pPr>
             <a:r>
-              <a:t>How We Differentiate: Snappy 10-minute skirmishes designed for modern indie players with zero level-grinding and deeper terrain chemistry.</a:t>
+              <a:t>How We Differentiate: Streamlined tactical flow designed for modern indie players with zero level-grinding and deeper terrain chemistry.</a:t>
             </a:r>
           </a:p>
         </p:txBody>
@@ -8716,7 +8704,7 @@
               </a:defRPr>
             </a:pPr>
             <a:r>
-              <a:t>Players love Brigandine's hex-grid monster fantasy and Into the Breach's puzzle clarity—Elemental Hex Tactics marries both into snappy 10-minute HD-2D matches with active terraforming.</a:t>
+              <a:t>Players love Brigandine's hex-grid monster fantasy and Into the Breach's puzzle clarity—Elemental Hex Tactics marries both into streamlined, deliberate HD-2D matches with active terraforming.</a:t>
             </a:r>
           </a:p>
         </p:txBody>

--- a/ElementalHexTactics_PitchDeck.pptx
+++ b/ElementalHexTactics_PitchDeck.pptx
@@ -512,7 +512,7 @@
           <a:lstStyle/>
           <a:p>
             <a:r>
-              <a:t>Hi Kris and the Toge team, I'm Elang, a solo indie developer from Indonesia. Today I'm pitching Elemental Hex Tactics, a 2.5D tactical RPG inspired by Brigandine and Final Fantasy Tactics, where players directly command both human Masters and monster cohorts while using the terrain itself as an interactive weapon.</a:t>
+              <a:t>Hi Kris and the Toge team, I'm Elang, a solo indie developer from Indonesia. Today I'm pitching Elemental Hex Tactics, a 2.5D tactical RPG inspired by Brigandine and Final Fantasy Tactics, where players command both Masters and Monsters while terraforming the board as an interactive weapon.</a:t>
             </a:r>
           </a:p>
         </p:txBody>
@@ -722,7 +722,7 @@
           <a:lstStyle/>
           <a:p>
             <a:r>
-              <a:t>Our core loop connects Master and Monster: your Master alters the terrain and pushes enemies, while your Monster holds the frontline, buffs itself on the elemental tiles, drains the land for energy, and wipes out the opposition with Cataclysms.</a:t>
+              <a:t>Here is our one-page executive summary covering high concept, genre, key features, target audience, and business model. This proves our product scope is clear, commercial, and realistic from day one.</a:t>
             </a:r>
           </a:p>
         </p:txBody>
@@ -792,7 +792,7 @@
           <a:lstStyle/>
           <a:p>
             <a:r>
-              <a:t>We focus on three gameplay pillars: offensive terraforming, direct dual-control of Masters and Monster cohorts, and kinetic displacement that makes positioning lethal.</a:t>
+              <a:t>We solved two major tactical RPG frustrations: Ghost UI eliminates cognitive overload by previewing reactions before casting, and hybrid attack-spells remove setup tax so every single turn feels impactful.</a:t>
             </a:r>
           </a:p>
         </p:txBody>
@@ -862,7 +862,7 @@
           <a:lstStyle/>
           <a:p>
             <a:r>
-              <a:t>We aren't pitching an unproven idea. The vertical slice is completely built, tested, and playable today. You can run the Windows build from my submission and experience the Master and Titan synergy firsthand.</a:t>
+              <a:t>Brigandine proved that players love hex-grid monster commanding on Steam. Vanaris and Into the Breach proved the market for retro tactics and kinetic shoves. Elemental Hex Tactics combines these proven elements into streamlined, deliberate HD-2D matches.</a:t>
             </a:r>
           </a:p>
         </p:txBody>
@@ -932,7 +932,7 @@
           <a:lstStyle/>
           <a:p>
             <a:r>
-              <a:t>We solved two major tactical RPG frustrations: Ghost UI eliminates cognitive overload by previewing reactions before casting, and hybrid attack-spells remove setup tax so every turn feels impactful.</a:t>
+              <a:t>Our core loop connects Master and Monster: your Master alters the terrain and pushes enemies, while your Monster holds the frontline, buffs itself on the elemental tiles, drains the land for energy, and wipes out the opposition with Cataclysms.</a:t>
             </a:r>
           </a:p>
         </p:txBody>
@@ -1072,7 +1072,7 @@
           <a:lstStyle/>
           <a:p>
             <a:r>
-              <a:t>Beyond individual battles, the campaign features a node-based expedition map with spellbook upgrades, monster squad customization, and zero level grinding.</a:t>
+              <a:t>We aren't pitching an unproven idea. The vertical slice is completely built, tested, and playable today. You can run the Windows build from my submission and experience the Master and Titan synergy firsthand.</a:t>
             </a:r>
           </a:p>
         </p:txBody>
@@ -1142,7 +1142,7 @@
           <a:lstStyle/>
           <a:p>
             <a:r>
-              <a:t>Brigandine proved that players love hex-grid monster commanding on Steam. Vanaris and Into the Breach proved the market for retro tactics and kinetic shoves. Elemental Hex Tactics combines these proven elements into streamlined, deliberate HD-2D matches.</a:t>
+              <a:t>Here is our 3-part visual progression: our verified working prototype in Unity 6, our hex combat reference in Brigandine, and our target HD-2D visual benchmark. This proves we have a working foundation, a clear commercial reference, and a mathematically viable $1,200 asset pipeline.</a:t>
             </a:r>
           </a:p>
         </p:txBody>
@@ -1212,7 +1212,7 @@
           <a:lstStyle/>
           <a:p>
             <a:r>
-              <a:t>Here is our 3-part visual progression: our verified working prototype in Unity 6, our hex combat reference in Brigandine, and our target HD-2D visual benchmark. This proves we have a working foundation, a clear commercial reference, and a mathematically viable $1,200 asset pipeline.</a:t>
+              <a:t>Beyond individual battles, the campaign features a node-based expedition map with spellbook upgrades, monster squad customization, and zero level grinding.</a:t>
             </a:r>
           </a:p>
         </p:txBody>
@@ -4418,7 +4418,7 @@
               </a:defRPr>
             </a:pPr>
             <a:r>
-              <a:t>TOGE GAME FUND INITIATIVE (TGFI) PITCH</a:t>
+              <a:t>TGFI PITCH SECTION 5: EXECUTION PLAN, TIMELINE &amp; BUDGET</a:t>
             </a:r>
           </a:p>
           <a:p>
@@ -4430,7 +4430,7 @@
               </a:defRPr>
             </a:pPr>
             <a:r>
-              <a:t>Production Roadmap: 6 Months to Steam Demo</a:t>
+              <a:t>Execution Plan: 6 Months to Steam Demo</a:t>
             </a:r>
           </a:p>
         </p:txBody>
@@ -4502,7 +4502,7 @@
               </a:defRPr>
             </a:pPr>
             <a:r>
-              <a:t>Commission freelance pixel artist for 2-directional animated sprite sheets (6 classes) and high-res character portrait illustrations.</a:t>
+              <a:t>Commission freelance pixel artist for 2-directional animated sprite sheets (6 classes) and character portrait illustrations.</a:t>
             </a:r>
           </a:p>
           <a:p>
@@ -4959,7 +4959,7 @@
               </a:defRPr>
             </a:pPr>
             <a:r>
-              <a:t>TOGE GAME FUND INITIATIVE (TGFI) PITCH</a:t>
+              <a:t>TGFI PITCH SECTIONS 6 &amp; 7: THE ASK &amp; MORE INFO</a:t>
             </a:r>
           </a:p>
           <a:p>
@@ -4971,7 +4971,7 @@
               </a:defRPr>
             </a:pPr>
             <a:r>
-              <a:t>The Ask: $6,000 USD Lean Budget (~Rp 93 Juta)</a:t>
+              <a:t>The Ask: $6,000 USD Lean Budget &amp; Next Stage</a:t>
             </a:r>
           </a:p>
         </p:txBody>
@@ -5225,7 +5225,7 @@
         <p:spPr>
           <a:xfrm>
             <a:off x="6675120" y="1645920"/>
-            <a:ext cx="4754880" cy="2743200"/>
+            <a:ext cx="4754880" cy="2468880"/>
           </a:xfrm>
           <a:prstGeom prst="roundRect">
             <a:avLst/>
@@ -5268,7 +5268,7 @@
               </a:defRPr>
             </a:pPr>
             <a:r>
-              <a:t>👤 Developer Profile</a:t>
+              <a:t>👤 Developer Profile &amp; Contact</a:t>
             </a:r>
           </a:p>
           <a:p>
@@ -5358,7 +5358,7 @@
               </a:defRPr>
             </a:pPr>
             <a:r>
-              <a:t>Demo: Standalone Windows Executable (.exe)</a:t>
+              <a:t>GitHub: https://github.com/nealverseprime</a:t>
             </a:r>
           </a:p>
         </p:txBody>
@@ -5371,8 +5371,8 @@
         </p:nvSpPr>
         <p:spPr>
           <a:xfrm>
-            <a:off x="6675120" y="4572000"/>
-            <a:ext cx="4754880" cy="1737360"/>
+            <a:off x="6675120" y="4297680"/>
+            <a:ext cx="4754880" cy="2011680"/>
           </a:xfrm>
           <a:prstGeom prst="roundRect">
             <a:avLst/>
@@ -5415,37 +5415,52 @@
               </a:defRPr>
             </a:pPr>
             <a:r>
-              <a:t>🤝 Milestone Tracking &amp; Next Stage</a:t>
-            </a:r>
-          </a:p>
-          <a:p>
-            <a:pPr>
-              <a:spcAft>
-                <a:spcPts val="300"/>
-              </a:spcAft>
-              <a:defRPr sz="1150">
-                <a:solidFill>
-                  <a:srgbClr val="F3F4F6"/>
-                </a:solidFill>
-              </a:defRPr>
-            </a:pPr>
-            <a:r>
-              <a:t>• Accountability: Bi-weekly playable builds uploaded to private itch.io / GitHub milestone branches for Toge review.</a:t>
-            </a:r>
-          </a:p>
-          <a:p>
-            <a:pPr>
-              <a:spcAft>
-                <a:spcPts val="300"/>
-              </a:spcAft>
-              <a:defRPr sz="1150">
-                <a:solidFill>
-                  <a:srgbClr val="F3F4F6"/>
-                </a:solidFill>
-              </a:defRPr>
-            </a:pPr>
-            <a:r>
-              <a:t>• Full Commercial Vision: TGFI demo proves Steam retention, laying the groundwork for a full $50k-$150k commercial publishing partnership with Toge (20+ classes &amp; full Master-Monster campaign).</a:t>
+              <a:t>🤝 What Toge Gets &amp; Demo Link</a:t>
+            </a:r>
+          </a:p>
+          <a:p>
+            <a:pPr>
+              <a:spcAft>
+                <a:spcPts val="300"/>
+              </a:spcAft>
+              <a:defRPr sz="1150">
+                <a:solidFill>
+                  <a:srgbClr val="F3F4F6"/>
+                </a:solidFill>
+              </a:defRPr>
+            </a:pPr>
+            <a:r>
+              <a:t>• Verified Windows Prototype: Standalone .exe included</a:t>
+            </a:r>
+          </a:p>
+          <a:p>
+            <a:pPr>
+              <a:spcAft>
+                <a:spcPts val="300"/>
+              </a:spcAft>
+              <a:defRPr sz="1150">
+                <a:solidFill>
+                  <a:srgbClr val="F3F4F6"/>
+                </a:solidFill>
+              </a:defRPr>
+            </a:pPr>
+            <a:r>
+              <a:t>• Right of First Refusal: Full publishing commercial deal ($50k-$150k) for 20+ classes and full campaign</a:t>
+            </a:r>
+          </a:p>
+          <a:p>
+            <a:pPr>
+              <a:spcAft>
+                <a:spcPts val="300"/>
+              </a:spcAft>
+              <a:defRPr sz="1150">
+                <a:solidFill>
+                  <a:srgbClr val="F3F4F6"/>
+                </a:solidFill>
+              </a:defRPr>
+            </a:pPr>
+            <a:r>
+              <a:t>• Accountability: Bi-weekly milestone builds uploaded to private itch.io / GitHub milestone branches.</a:t>
             </a:r>
           </a:p>
         </p:txBody>
@@ -5506,7 +5521,7 @@
               </a:defRPr>
             </a:pPr>
             <a:r>
-              <a:t>TOGE GAME FUND INITIATIVE (TGFI) PITCH</a:t>
+              <a:t>TGFI PITCH SECTION 2: EXECUTIVE SUMMARY</a:t>
             </a:r>
           </a:p>
           <a:p>
@@ -5518,7 +5533,7 @@
               </a:defRPr>
             </a:pPr>
             <a:r>
-              <a:t>The Hook: The Ecosystem of War</a:t>
+              <a:t>TL;DR Overview: One-Page Executive Summary</a:t>
             </a:r>
           </a:p>
         </p:txBody>
@@ -5532,7 +5547,7 @@
         <p:spPr>
           <a:xfrm>
             <a:off x="731520" y="1645920"/>
-            <a:ext cx="10698480" cy="777240"/>
+            <a:ext cx="5212080" cy="4663440"/>
           </a:xfrm>
           <a:prstGeom prst="roundRect">
             <a:avLst/>
@@ -5575,22 +5590,208 @@
               </a:defRPr>
             </a:pPr>
             <a:r>
-              <a:t>THE 3-STEP TACTICAL LOOP</a:t>
-            </a:r>
-          </a:p>
-          <a:p>
-            <a:pPr>
-              <a:spcAft>
-                <a:spcPts val="300"/>
-              </a:spcAft>
-              <a:defRPr sz="1150">
-                <a:solidFill>
-                  <a:srgbClr val="F3F4F6"/>
-                </a:solidFill>
-              </a:defRPr>
-            </a:pPr>
-            <a:r>
-              <a:t>1. Master Infuses (Terraform)   ➔   2. Monster Attunes (Adapt)   ➔   3. Monster Consumes (Unleash)</a:t>
+              <a:t>🎮 High Concept &amp; Gameplay Pillars</a:t>
+            </a:r>
+          </a:p>
+          <a:p>
+            <a:pPr>
+              <a:spcAft>
+                <a:spcPts val="300"/>
+              </a:spcAft>
+              <a:defRPr sz="1150">
+                <a:solidFill>
+                  <a:srgbClr val="F3F4F6"/>
+                </a:solidFill>
+              </a:defRPr>
+            </a:pPr>
+            <a:r>
+              <a:t>• High Concept:</a:t>
+            </a:r>
+          </a:p>
+          <a:p>
+            <a:pPr>
+              <a:spcAft>
+                <a:spcPts val="300"/>
+              </a:spcAft>
+              <a:defRPr sz="1150">
+                <a:solidFill>
+                  <a:srgbClr val="F3F4F6"/>
+                </a:solidFill>
+              </a:defRPr>
+            </a:pPr>
+            <a:r>
+              <a:t>  A streamlined 2.5D tactical RPG where players command both Human Masters and colossal Monsters, terraforming 3D hex terrain with elemental magic to fuel Titan Cataclysms.</a:t>
+            </a:r>
+          </a:p>
+          <a:p>
+            <a:pPr>
+              <a:spcAft>
+                <a:spcPts val="300"/>
+              </a:spcAft>
+              <a:defRPr sz="1150">
+                <a:solidFill>
+                  <a:srgbClr val="F3F4F6"/>
+                </a:solidFill>
+              </a:defRPr>
+            </a:pPr>
+          </a:p>
+          <a:p>
+            <a:pPr>
+              <a:spcAft>
+                <a:spcPts val="300"/>
+              </a:spcAft>
+              <a:defRPr sz="1150">
+                <a:solidFill>
+                  <a:srgbClr val="F3F4F6"/>
+                </a:solidFill>
+              </a:defRPr>
+            </a:pPr>
+            <a:r>
+              <a:t>• Genre &amp; Engine:</a:t>
+            </a:r>
+          </a:p>
+          <a:p>
+            <a:pPr>
+              <a:spcAft>
+                <a:spcPts val="300"/>
+              </a:spcAft>
+              <a:defRPr sz="1150">
+                <a:solidFill>
+                  <a:srgbClr val="F3F4F6"/>
+                </a:solidFill>
+              </a:defRPr>
+            </a:pPr>
+            <a:r>
+              <a:t>  2.5D Turn-Based Tactical RPG (Hex Grid) | Unity 6 URP 3D</a:t>
+            </a:r>
+          </a:p>
+          <a:p>
+            <a:pPr>
+              <a:spcAft>
+                <a:spcPts val="300"/>
+              </a:spcAft>
+              <a:defRPr sz="1150">
+                <a:solidFill>
+                  <a:srgbClr val="F3F4F6"/>
+                </a:solidFill>
+              </a:defRPr>
+            </a:pPr>
+          </a:p>
+          <a:p>
+            <a:pPr>
+              <a:spcAft>
+                <a:spcPts val="300"/>
+              </a:spcAft>
+              <a:defRPr sz="1150">
+                <a:solidFill>
+                  <a:srgbClr val="F3F4F6"/>
+                </a:solidFill>
+              </a:defRPr>
+            </a:pPr>
+            <a:r>
+              <a:t>• Core Gameplay Experience:</a:t>
+            </a:r>
+          </a:p>
+          <a:p>
+            <a:pPr>
+              <a:spcAft>
+                <a:spcPts val="300"/>
+              </a:spcAft>
+              <a:defRPr sz="1150">
+                <a:solidFill>
+                  <a:srgbClr val="F3F4F6"/>
+                </a:solidFill>
+              </a:defRPr>
+            </a:pPr>
+            <a:r>
+              <a:t>  Deliberate turn-based tactical maneuvering without filler turns. Masters reshape terrain and push enemies, while Monsters hold the frontline and siphon land for ultimate abilities.</a:t>
+            </a:r>
+          </a:p>
+          <a:p>
+            <a:pPr>
+              <a:spcAft>
+                <a:spcPts val="300"/>
+              </a:spcAft>
+              <a:defRPr sz="1150">
+                <a:solidFill>
+                  <a:srgbClr val="F3F4F6"/>
+                </a:solidFill>
+              </a:defRPr>
+            </a:pPr>
+          </a:p>
+          <a:p>
+            <a:pPr>
+              <a:spcAft>
+                <a:spcPts val="300"/>
+              </a:spcAft>
+              <a:defRPr sz="1150">
+                <a:solidFill>
+                  <a:srgbClr val="F3F4F6"/>
+                </a:solidFill>
+              </a:defRPr>
+            </a:pPr>
+            <a:r>
+              <a:t>• Key Features:</a:t>
+            </a:r>
+          </a:p>
+          <a:p>
+            <a:pPr>
+              <a:spcAft>
+                <a:spcPts val="300"/>
+              </a:spcAft>
+              <a:defRPr sz="1150">
+                <a:solidFill>
+                  <a:srgbClr val="F3F4F6"/>
+                </a:solidFill>
+              </a:defRPr>
+            </a:pPr>
+            <a:r>
+              <a:t>  1. Offensive 3D Terraforming (Lava moats, steam clouds, ice bridges)</a:t>
+            </a:r>
+          </a:p>
+          <a:p>
+            <a:pPr>
+              <a:spcAft>
+                <a:spcPts val="300"/>
+              </a:spcAft>
+              <a:defRPr sz="1150">
+                <a:solidFill>
+                  <a:srgbClr val="F3F4F6"/>
+                </a:solidFill>
+              </a:defRPr>
+            </a:pPr>
+            <a:r>
+              <a:t>  2. Master &amp; Monster Dual-Command (Asymmetric squad synergy)</a:t>
+            </a:r>
+          </a:p>
+          <a:p>
+            <a:pPr>
+              <a:spcAft>
+                <a:spcPts val="300"/>
+              </a:spcAft>
+              <a:defRPr sz="1150">
+                <a:solidFill>
+                  <a:srgbClr val="F3F4F6"/>
+                </a:solidFill>
+              </a:defRPr>
+            </a:pPr>
+            <a:r>
+              <a:t>  3. Kinetic Shove Physics &amp; Collision Impacts</a:t>
+            </a:r>
+          </a:p>
+          <a:p>
+            <a:pPr>
+              <a:spcAft>
+                <a:spcPts val="300"/>
+              </a:spcAft>
+              <a:defRPr sz="1150">
+                <a:solidFill>
+                  <a:srgbClr val="F3F4F6"/>
+                </a:solidFill>
+              </a:defRPr>
+            </a:pPr>
+            <a:r>
+              <a:t>  4. Land Siphoning &amp; Room-Clearing Titan Cataclysms</a:t>
             </a:r>
           </a:p>
         </p:txBody>
@@ -5603,305 +5804,8 @@
         </p:nvSpPr>
         <p:spPr>
           <a:xfrm>
-            <a:off x="731520" y="2651760"/>
-            <a:ext cx="3383280" cy="2560320"/>
-          </a:xfrm>
-          <a:prstGeom prst="roundRect">
-            <a:avLst/>
-          </a:prstGeom>
-          <a:solidFill>
-            <a:srgbClr val="161B22"/>
-          </a:solidFill>
-          <a:ln w="19050">
-            <a:solidFill>
-              <a:srgbClr val="30363D"/>
-            </a:solidFill>
-          </a:ln>
-        </p:spPr>
-        <p:style>
-          <a:lnRef idx="1">
-            <a:schemeClr val="accent1"/>
-          </a:lnRef>
-          <a:fillRef idx="3">
-            <a:schemeClr val="accent1"/>
-          </a:fillRef>
-          <a:effectRef idx="2">
-            <a:schemeClr val="accent1"/>
-          </a:effectRef>
-          <a:fontRef idx="minor">
-            <a:schemeClr val="lt1"/>
-          </a:fontRef>
-        </p:style>
-        <p:txBody>
-          <a:bodyPr rtlCol="0" anchor="ctr" wrap="square" lIns="182880" rIns="182880" tIns="164592" bIns="164592"/>
-          <a:lstStyle/>
-          <a:p>
-            <a:pPr algn="ctr">
-              <a:spcAft>
-                <a:spcPts val="500"/>
-              </a:spcAft>
-              <a:defRPr b="1" sz="1350">
-                <a:solidFill>
-                  <a:srgbClr val="F59E0B"/>
-                </a:solidFill>
-              </a:defRPr>
-            </a:pPr>
-            <a:r>
-              <a:t>🧙 1. Master Infuses (Terraform)</a:t>
-            </a:r>
-          </a:p>
-          <a:p>
-            <a:pPr>
-              <a:spcAft>
-                <a:spcPts val="300"/>
-              </a:spcAft>
-              <a:defRPr sz="1150">
-                <a:solidFill>
-                  <a:srgbClr val="F3F4F6"/>
-                </a:solidFill>
-              </a:defRPr>
-            </a:pPr>
-            <a:r>
-              <a:t>Human Masters reshape the battlefield with magic.</a:t>
-            </a:r>
-          </a:p>
-          <a:p>
-            <a:pPr>
-              <a:spcAft>
-                <a:spcPts val="300"/>
-              </a:spcAft>
-              <a:defRPr sz="1150">
-                <a:solidFill>
-                  <a:srgbClr val="F3F4F6"/>
-                </a:solidFill>
-              </a:defRPr>
-            </a:pPr>
-          </a:p>
-          <a:p>
-            <a:pPr>
-              <a:spcAft>
-                <a:spcPts val="300"/>
-              </a:spcAft>
-              <a:defRPr sz="1150">
-                <a:solidFill>
-                  <a:srgbClr val="F3F4F6"/>
-                </a:solidFill>
-              </a:defRPr>
-            </a:pPr>
-            <a:r>
-              <a:t>Fireballs scorch grass into molten lava moats; water blasts douse flames and create concealing steam clouds.</a:t>
-            </a:r>
-          </a:p>
-        </p:txBody>
-      </p:sp>
-      <p:sp>
-        <p:nvSpPr>
-          <p:cNvPr id="5" name="Rounded Rectangle 4"/>
-          <p:cNvSpPr/>
-          <p:nvPr/>
-        </p:nvSpPr>
-        <p:spPr>
-          <a:xfrm>
-            <a:off x="4389120" y="2651760"/>
-            <a:ext cx="3383280" cy="2560320"/>
-          </a:xfrm>
-          <a:prstGeom prst="roundRect">
-            <a:avLst/>
-          </a:prstGeom>
-          <a:solidFill>
-            <a:srgbClr val="161B22"/>
-          </a:solidFill>
-          <a:ln w="19050">
-            <a:solidFill>
-              <a:srgbClr val="30363D"/>
-            </a:solidFill>
-          </a:ln>
-        </p:spPr>
-        <p:style>
-          <a:lnRef idx="1">
-            <a:schemeClr val="accent1"/>
-          </a:lnRef>
-          <a:fillRef idx="3">
-            <a:schemeClr val="accent1"/>
-          </a:fillRef>
-          <a:effectRef idx="2">
-            <a:schemeClr val="accent1"/>
-          </a:effectRef>
-          <a:fontRef idx="minor">
-            <a:schemeClr val="lt1"/>
-          </a:fontRef>
-        </p:style>
-        <p:txBody>
-          <a:bodyPr rtlCol="0" anchor="ctr" wrap="square" lIns="182880" rIns="182880" tIns="164592" bIns="164592"/>
-          <a:lstStyle/>
-          <a:p>
-            <a:pPr algn="ctr">
-              <a:spcAft>
-                <a:spcPts val="500"/>
-              </a:spcAft>
-              <a:defRPr b="1" sz="1350">
-                <a:solidFill>
-                  <a:srgbClr val="F59E0B"/>
-                </a:solidFill>
-              </a:defRPr>
-            </a:pPr>
-            <a:r>
-              <a:t>🐉 2. Monster Attunes (Adapt)</a:t>
-            </a:r>
-          </a:p>
-          <a:p>
-            <a:pPr>
-              <a:spcAft>
-                <a:spcPts val="300"/>
-              </a:spcAft>
-              <a:defRPr sz="1150">
-                <a:solidFill>
-                  <a:srgbClr val="F3F4F6"/>
-                </a:solidFill>
-              </a:defRPr>
-            </a:pPr>
-            <a:r>
-              <a:t>Allied Monsters thrive in their native elements.</a:t>
-            </a:r>
-          </a:p>
-          <a:p>
-            <a:pPr>
-              <a:spcAft>
-                <a:spcPts val="300"/>
-              </a:spcAft>
-              <a:defRPr sz="1150">
-                <a:solidFill>
-                  <a:srgbClr val="F3F4F6"/>
-                </a:solidFill>
-              </a:defRPr>
-            </a:pPr>
-          </a:p>
-          <a:p>
-            <a:pPr>
-              <a:spcAft>
-                <a:spcPts val="300"/>
-              </a:spcAft>
-              <a:defRPr sz="1150">
-                <a:solidFill>
-                  <a:srgbClr val="F3F4F6"/>
-                </a:solidFill>
-              </a:defRPr>
-            </a:pPr>
-            <a:r>
-              <a:t>Standing on lava grants fire beasts +2 ATK and complete burn immunity. Positioning monsters on matching tiles is key.</a:t>
-            </a:r>
-          </a:p>
-        </p:txBody>
-      </p:sp>
-      <p:sp>
-        <p:nvSpPr>
-          <p:cNvPr id="6" name="Rounded Rectangle 5"/>
-          <p:cNvSpPr/>
-          <p:nvPr/>
-        </p:nvSpPr>
-        <p:spPr>
-          <a:xfrm>
-            <a:off x="8046720" y="2651760"/>
-            <a:ext cx="3383280" cy="2560320"/>
-          </a:xfrm>
-          <a:prstGeom prst="roundRect">
-            <a:avLst/>
-          </a:prstGeom>
-          <a:solidFill>
-            <a:srgbClr val="161B22"/>
-          </a:solidFill>
-          <a:ln w="19050">
-            <a:solidFill>
-              <a:srgbClr val="EF4444"/>
-            </a:solidFill>
-          </a:ln>
-        </p:spPr>
-        <p:style>
-          <a:lnRef idx="1">
-            <a:schemeClr val="accent1"/>
-          </a:lnRef>
-          <a:fillRef idx="3">
-            <a:schemeClr val="accent1"/>
-          </a:fillRef>
-          <a:effectRef idx="2">
-            <a:schemeClr val="accent1"/>
-          </a:effectRef>
-          <a:fontRef idx="minor">
-            <a:schemeClr val="lt1"/>
-          </a:fontRef>
-        </p:style>
-        <p:txBody>
-          <a:bodyPr rtlCol="0" anchor="ctr" wrap="square" lIns="182880" rIns="182880" tIns="164592" bIns="164592"/>
-          <a:lstStyle/>
-          <a:p>
-            <a:pPr algn="ctr">
-              <a:spcAft>
-                <a:spcPts val="500"/>
-              </a:spcAft>
-              <a:defRPr b="1" sz="1350">
-                <a:solidFill>
-                  <a:srgbClr val="EF4444"/>
-                </a:solidFill>
-              </a:defRPr>
-            </a:pPr>
-            <a:r>
-              <a:t>⚡ 3. Monster Consumes (Unleash)</a:t>
-            </a:r>
-          </a:p>
-          <a:p>
-            <a:pPr>
-              <a:spcAft>
-                <a:spcPts val="300"/>
-              </a:spcAft>
-              <a:defRPr sz="1150">
-                <a:solidFill>
-                  <a:srgbClr val="F3F4F6"/>
-                </a:solidFill>
-              </a:defRPr>
-            </a:pPr>
-            <a:r>
-              <a:t>Titans siphon active lava or water, mutating the land into Barren Earth.</a:t>
-            </a:r>
-          </a:p>
-          <a:p>
-            <a:pPr>
-              <a:spcAft>
-                <a:spcPts val="300"/>
-              </a:spcAft>
-              <a:defRPr sz="1150">
-                <a:solidFill>
-                  <a:srgbClr val="F3F4F6"/>
-                </a:solidFill>
-              </a:defRPr>
-            </a:pPr>
-          </a:p>
-          <a:p>
-            <a:pPr>
-              <a:spcAft>
-                <a:spcPts val="300"/>
-              </a:spcAft>
-              <a:defRPr sz="1150">
-                <a:solidFill>
-                  <a:srgbClr val="F3F4F6"/>
-                </a:solidFill>
-              </a:defRPr>
-            </a:pPr>
-            <a:r>
-              <a:t>Harvesting land generates Elemental Cores to trigger room-clearing ultimate Cataclysms.</a:t>
-            </a:r>
-          </a:p>
-        </p:txBody>
-      </p:sp>
-      <p:sp>
-        <p:nvSpPr>
-          <p:cNvPr id="7" name="Rounded Rectangle 6"/>
-          <p:cNvSpPr/>
-          <p:nvPr/>
-        </p:nvSpPr>
-        <p:spPr>
-          <a:xfrm>
-            <a:off x="731520" y="5440680"/>
-            <a:ext cx="10698480" cy="822960"/>
+            <a:off x="6217920" y="1645920"/>
+            <a:ext cx="5212080" cy="4663440"/>
           </a:xfrm>
           <a:prstGeom prst="roundRect">
             <a:avLst/>
@@ -5944,22 +5848,163 @@
               </a:defRPr>
             </a:pPr>
             <a:r>
-              <a:t>💡 Master &amp; Monster Dual-Command</a:t>
-            </a:r>
-          </a:p>
-          <a:p>
-            <a:pPr>
-              <a:spcAft>
-                <a:spcPts val="300"/>
-              </a:spcAft>
-              <a:defRPr sz="1150">
-                <a:solidFill>
-                  <a:srgbClr val="F3F4F6"/>
-                </a:solidFill>
-              </a:defRPr>
-            </a:pPr>
-            <a:r>
-              <a:t>The Master sculpts the space and knocks enemies into traps; the Monster holds the frontline, thrives in the hazards, and consumes the land for decisive finishers.</a:t>
+              <a:t>🎯 Market, Platform &amp; Business Model</a:t>
+            </a:r>
+          </a:p>
+          <a:p>
+            <a:pPr>
+              <a:spcAft>
+                <a:spcPts val="300"/>
+              </a:spcAft>
+              <a:defRPr sz="1150">
+                <a:solidFill>
+                  <a:srgbClr val="F3F4F6"/>
+                </a:solidFill>
+              </a:defRPr>
+            </a:pPr>
+            <a:r>
+              <a:t>• Target Audience:</a:t>
+            </a:r>
+          </a:p>
+          <a:p>
+            <a:pPr>
+              <a:spcAft>
+                <a:spcPts val="300"/>
+              </a:spcAft>
+              <a:defRPr sz="1150">
+                <a:solidFill>
+                  <a:srgbClr val="F3F4F6"/>
+                </a:solidFill>
+              </a:defRPr>
+            </a:pPr>
+            <a:r>
+              <a:t>  Ages 18–35. Passionate fans of classic turn-based tactics (Brigandine, Final Fantasy Tactics, Tactics Ogre) and modern tactical hits (Triangle Strategy, Into the Breach).</a:t>
+            </a:r>
+          </a:p>
+          <a:p>
+            <a:pPr>
+              <a:spcAft>
+                <a:spcPts val="300"/>
+              </a:spcAft>
+              <a:defRPr sz="1150">
+                <a:solidFill>
+                  <a:srgbClr val="F3F4F6"/>
+                </a:solidFill>
+              </a:defRPr>
+            </a:pPr>
+          </a:p>
+          <a:p>
+            <a:pPr>
+              <a:spcAft>
+                <a:spcPts val="300"/>
+              </a:spcAft>
+              <a:defRPr sz="1150">
+                <a:solidFill>
+                  <a:srgbClr val="F3F4F6"/>
+                </a:solidFill>
+              </a:defRPr>
+            </a:pPr>
+            <a:r>
+              <a:t>• Target Platform:</a:t>
+            </a:r>
+          </a:p>
+          <a:p>
+            <a:pPr>
+              <a:spcAft>
+                <a:spcPts val="300"/>
+              </a:spcAft>
+              <a:defRPr sz="1150">
+                <a:solidFill>
+                  <a:srgbClr val="F3F4F6"/>
+                </a:solidFill>
+              </a:defRPr>
+            </a:pPr>
+            <a:r>
+              <a:t>  PC Steam (Windows 10/11) with Steam Deck verified targets. Console ports (Switch / PlayStation) feasible upon full commercial publishing.</a:t>
+            </a:r>
+          </a:p>
+          <a:p>
+            <a:pPr>
+              <a:spcAft>
+                <a:spcPts val="300"/>
+              </a:spcAft>
+              <a:defRPr sz="1150">
+                <a:solidFill>
+                  <a:srgbClr val="F3F4F6"/>
+                </a:solidFill>
+              </a:defRPr>
+            </a:pPr>
+          </a:p>
+          <a:p>
+            <a:pPr>
+              <a:spcAft>
+                <a:spcPts val="300"/>
+              </a:spcAft>
+              <a:defRPr sz="1150">
+                <a:solidFill>
+                  <a:srgbClr val="F3F4F6"/>
+                </a:solidFill>
+              </a:defRPr>
+            </a:pPr>
+            <a:r>
+              <a:t>• Business Model:</a:t>
+            </a:r>
+          </a:p>
+          <a:p>
+            <a:pPr>
+              <a:spcAft>
+                <a:spcPts val="300"/>
+              </a:spcAft>
+              <a:defRPr sz="1150">
+                <a:solidFill>
+                  <a:srgbClr val="F3F4F6"/>
+                </a:solidFill>
+              </a:defRPr>
+            </a:pPr>
+            <a:r>
+              <a:t>  Premium Single-Player Indie ($14.99 – $19.99 USD) with zero microtransactions or paywalls.</a:t>
+            </a:r>
+          </a:p>
+          <a:p>
+            <a:pPr>
+              <a:spcAft>
+                <a:spcPts val="300"/>
+              </a:spcAft>
+              <a:defRPr sz="1150">
+                <a:solidFill>
+                  <a:srgbClr val="F3F4F6"/>
+                </a:solidFill>
+              </a:defRPr>
+            </a:pPr>
+          </a:p>
+          <a:p>
+            <a:pPr>
+              <a:spcAft>
+                <a:spcPts val="300"/>
+              </a:spcAft>
+              <a:defRPr sz="1150">
+                <a:solidFill>
+                  <a:srgbClr val="F3F4F6"/>
+                </a:solidFill>
+              </a:defRPr>
+            </a:pPr>
+            <a:r>
+              <a:t>• Current State &amp; Demo Scope:</a:t>
+            </a:r>
+          </a:p>
+          <a:p>
+            <a:pPr>
+              <a:spcAft>
+                <a:spcPts val="300"/>
+              </a:spcAft>
+              <a:defRPr sz="1150">
+                <a:solidFill>
+                  <a:srgbClr val="F3F4F6"/>
+                </a:solidFill>
+              </a:defRPr>
+            </a:pPr>
+            <a:r>
+              <a:t>  Verified Unity 6 vertical slice (Month 0). $6,000 TGFI grant funds 6 months to expand into a high-retention 30-minute Steam Next Fest demo.</a:t>
             </a:r>
           </a:p>
         </p:txBody>
@@ -6020,7 +6065,7 @@
               </a:defRPr>
             </a:pPr>
             <a:r>
-              <a:t>TOGE GAME FUND INITIATIVE (TGFI) PITCH</a:t>
+              <a:t>TGFI PITCH SECTION 3: MARKET OPPORTUNITY</a:t>
             </a:r>
           </a:p>
           <a:p>
@@ -6032,7 +6077,7 @@
               </a:defRPr>
             </a:pPr>
             <a:r>
-              <a:t>Core Gameplay: Three Pillars of Combat</a:t>
+              <a:t>Market Opportunity: Solving SRPG Frustrations</a:t>
             </a:r>
           </a:p>
         </p:txBody>
@@ -6046,7 +6091,7 @@
         <p:spPr>
           <a:xfrm>
             <a:off x="731520" y="1645920"/>
-            <a:ext cx="3383280" cy="3566160"/>
+            <a:ext cx="5212080" cy="4572000"/>
           </a:xfrm>
           <a:prstGeom prst="roundRect">
             <a:avLst/>
@@ -6056,7 +6101,7 @@
           </a:solidFill>
           <a:ln w="19050">
             <a:solidFill>
-              <a:srgbClr val="30363D"/>
+              <a:srgbClr val="F59E0B"/>
             </a:solidFill>
           </a:ln>
         </p:spPr>
@@ -6089,76 +6134,106 @@
               </a:defRPr>
             </a:pPr>
             <a:r>
-              <a:t>⛰️ 1. Offensive Terraforming</a:t>
-            </a:r>
-          </a:p>
-          <a:p>
-            <a:pPr>
-              <a:spcAft>
-                <a:spcPts val="300"/>
-              </a:spcAft>
-              <a:defRPr sz="1150">
-                <a:solidFill>
-                  <a:srgbClr val="F3F4F6"/>
-                </a:solidFill>
-              </a:defRPr>
-            </a:pPr>
-            <a:r>
-              <a:t>Don't just cast spells at enemy health bars.</a:t>
-            </a:r>
-          </a:p>
-          <a:p>
-            <a:pPr>
-              <a:spcAft>
-                <a:spcPts val="300"/>
-              </a:spcAft>
-              <a:defRPr sz="1150">
-                <a:solidFill>
-                  <a:srgbClr val="F3F4F6"/>
-                </a:solidFill>
-              </a:defRPr>
-            </a:pPr>
-          </a:p>
-          <a:p>
-            <a:pPr>
-              <a:spcAft>
-                <a:spcPts val="300"/>
-              </a:spcAft>
-              <a:defRPr sz="1150">
-                <a:solidFill>
-                  <a:srgbClr val="F3F4F6"/>
-                </a:solidFill>
-              </a:defRPr>
-            </a:pPr>
-            <a:r>
-              <a:t>Target the ground itself to reshape the battlefield, cut off enemy movement paths, and carve lethal molten lava moats.</a:t>
-            </a:r>
-          </a:p>
-          <a:p>
-            <a:pPr>
-              <a:spcAft>
-                <a:spcPts val="300"/>
-              </a:spcAft>
-              <a:defRPr sz="1150">
-                <a:solidFill>
-                  <a:srgbClr val="F3F4F6"/>
-                </a:solidFill>
-              </a:defRPr>
-            </a:pPr>
-          </a:p>
-          <a:p>
-            <a:pPr>
-              <a:spcAft>
-                <a:spcPts val="300"/>
-              </a:spcAft>
-              <a:defRPr sz="1150">
-                <a:solidFill>
-                  <a:srgbClr val="F3F4F6"/>
-                </a:solidFill>
-              </a:defRPr>
-            </a:pPr>
-            <a:r>
-              <a:t>Terrain isn't static decoration—it is your weapon.</a:t>
+              <a:t>🧠 1. Solving 'Cognitive Overload'</a:t>
+            </a:r>
+          </a:p>
+          <a:p>
+            <a:pPr>
+              <a:spcAft>
+                <a:spcPts val="300"/>
+              </a:spcAft>
+              <a:defRPr sz="1150">
+                <a:solidFill>
+                  <a:srgbClr val="F3F4F6"/>
+                </a:solidFill>
+              </a:defRPr>
+            </a:pPr>
+            <a:r>
+              <a:t>The Problem in Classic SRPGs:</a:t>
+            </a:r>
+          </a:p>
+          <a:p>
+            <a:pPr>
+              <a:spcAft>
+                <a:spcPts val="300"/>
+              </a:spcAft>
+              <a:defRPr sz="1150">
+                <a:solidFill>
+                  <a:srgbClr val="F3F4F6"/>
+                </a:solidFill>
+              </a:defRPr>
+            </a:pPr>
+            <a:r>
+              <a:t>Classic elemental tactics games overwhelm players with dozens of confusing status effect icons, elemental charts, and hidden percentage calculation tables.</a:t>
+            </a:r>
+          </a:p>
+          <a:p>
+            <a:pPr>
+              <a:spcAft>
+                <a:spcPts val="300"/>
+              </a:spcAft>
+              <a:defRPr sz="1150">
+                <a:solidFill>
+                  <a:srgbClr val="F3F4F6"/>
+                </a:solidFill>
+              </a:defRPr>
+            </a:pPr>
+          </a:p>
+          <a:p>
+            <a:pPr>
+              <a:spcAft>
+                <a:spcPts val="300"/>
+              </a:spcAft>
+              <a:defRPr sz="1150">
+                <a:solidFill>
+                  <a:srgbClr val="F3F4F6"/>
+                </a:solidFill>
+              </a:defRPr>
+            </a:pPr>
+            <a:r>
+              <a:t>Our Solution: Ghost UI (Predictive Preview)</a:t>
+            </a:r>
+          </a:p>
+          <a:p>
+            <a:pPr>
+              <a:spcAft>
+                <a:spcPts val="300"/>
+              </a:spcAft>
+              <a:defRPr sz="1150">
+                <a:solidFill>
+                  <a:srgbClr val="F3F4F6"/>
+                </a:solidFill>
+              </a:defRPr>
+            </a:pPr>
+            <a:r>
+              <a:t>Hovering any spell or push action over a tile immediately previews the exact physical terrain reaction and knockback path before the player commits.</a:t>
+            </a:r>
+          </a:p>
+          <a:p>
+            <a:pPr>
+              <a:spcAft>
+                <a:spcPts val="300"/>
+              </a:spcAft>
+              <a:defRPr sz="1150">
+                <a:solidFill>
+                  <a:srgbClr val="F3F4F6"/>
+                </a:solidFill>
+              </a:defRPr>
+            </a:pPr>
+          </a:p>
+          <a:p>
+            <a:pPr>
+              <a:spcAft>
+                <a:spcPts val="300"/>
+              </a:spcAft>
+              <a:defRPr sz="1150">
+                <a:solidFill>
+                  <a:srgbClr val="F3F4F6"/>
+                </a:solidFill>
+              </a:defRPr>
+            </a:pPr>
+            <a:r>
+              <a:t>Result: Deep tactical planning with zero mental fatigue.</a:t>
             </a:r>
           </a:p>
         </p:txBody>
@@ -6171,260 +6246,8 @@
         </p:nvSpPr>
         <p:spPr>
           <a:xfrm>
-            <a:off x="4389120" y="1645920"/>
-            <a:ext cx="3383280" cy="3566160"/>
-          </a:xfrm>
-          <a:prstGeom prst="roundRect">
-            <a:avLst/>
-          </a:prstGeom>
-          <a:solidFill>
-            <a:srgbClr val="161B22"/>
-          </a:solidFill>
-          <a:ln w="19050">
-            <a:solidFill>
-              <a:srgbClr val="30363D"/>
-            </a:solidFill>
-          </a:ln>
-        </p:spPr>
-        <p:style>
-          <a:lnRef idx="1">
-            <a:schemeClr val="accent1"/>
-          </a:lnRef>
-          <a:fillRef idx="3">
-            <a:schemeClr val="accent1"/>
-          </a:fillRef>
-          <a:effectRef idx="2">
-            <a:schemeClr val="accent1"/>
-          </a:effectRef>
-          <a:fontRef idx="minor">
-            <a:schemeClr val="lt1"/>
-          </a:fontRef>
-        </p:style>
-        <p:txBody>
-          <a:bodyPr rtlCol="0" anchor="ctr" wrap="square" lIns="182880" rIns="182880" tIns="164592" bIns="164592"/>
-          <a:lstStyle/>
-          <a:p>
-            <a:pPr algn="ctr">
-              <a:spcAft>
-                <a:spcPts val="500"/>
-              </a:spcAft>
-              <a:defRPr b="1" sz="1350">
-                <a:solidFill>
-                  <a:srgbClr val="F59E0B"/>
-                </a:solidFill>
-              </a:defRPr>
-            </a:pPr>
-            <a:r>
-              <a:t>🐉 2. Master &amp; Monster Cohorts</a:t>
-            </a:r>
-          </a:p>
-          <a:p>
-            <a:pPr>
-              <a:spcAft>
-                <a:spcPts val="300"/>
-              </a:spcAft>
-              <a:defRPr sz="1150">
-                <a:solidFill>
-                  <a:srgbClr val="F3F4F6"/>
-                </a:solidFill>
-              </a:defRPr>
-            </a:pPr>
-            <a:r>
-              <a:t>Direct dual-command on the hex grid.</a:t>
-            </a:r>
-          </a:p>
-          <a:p>
-            <a:pPr>
-              <a:spcAft>
-                <a:spcPts val="300"/>
-              </a:spcAft>
-              <a:defRPr sz="1150">
-                <a:solidFill>
-                  <a:srgbClr val="F3F4F6"/>
-                </a:solidFill>
-              </a:defRPr>
-            </a:pPr>
-          </a:p>
-          <a:p>
-            <a:pPr>
-              <a:spcAft>
-                <a:spcPts val="300"/>
-              </a:spcAft>
-              <a:defRPr sz="1150">
-                <a:solidFill>
-                  <a:srgbClr val="F3F4F6"/>
-                </a:solidFill>
-              </a:defRPr>
-            </a:pPr>
-            <a:r>
-              <a:t>Players control both the fragile Human Master (spatial control &amp; spells) and colossal allied Monsters (frontline anchors &amp; land harvesters).</a:t>
-            </a:r>
-          </a:p>
-          <a:p>
-            <a:pPr>
-              <a:spcAft>
-                <a:spcPts val="300"/>
-              </a:spcAft>
-              <a:defRPr sz="1150">
-                <a:solidFill>
-                  <a:srgbClr val="F3F4F6"/>
-                </a:solidFill>
-              </a:defRPr>
-            </a:pPr>
-          </a:p>
-          <a:p>
-            <a:pPr>
-              <a:spcAft>
-                <a:spcPts val="300"/>
-              </a:spcAft>
-              <a:defRPr sz="1150">
-                <a:solidFill>
-                  <a:srgbClr val="F3F4F6"/>
-                </a:solidFill>
-              </a:defRPr>
-            </a:pPr>
-            <a:r>
-              <a:t>True tactical monster commanding.</a:t>
-            </a:r>
-          </a:p>
-        </p:txBody>
-      </p:sp>
-      <p:sp>
-        <p:nvSpPr>
-          <p:cNvPr id="5" name="Rounded Rectangle 4"/>
-          <p:cNvSpPr/>
-          <p:nvPr/>
-        </p:nvSpPr>
-        <p:spPr>
-          <a:xfrm>
-            <a:off x="8046720" y="1645920"/>
-            <a:ext cx="3383280" cy="3566160"/>
-          </a:xfrm>
-          <a:prstGeom prst="roundRect">
-            <a:avLst/>
-          </a:prstGeom>
-          <a:solidFill>
-            <a:srgbClr val="161B22"/>
-          </a:solidFill>
-          <a:ln w="19050">
-            <a:solidFill>
-              <a:srgbClr val="30363D"/>
-            </a:solidFill>
-          </a:ln>
-        </p:spPr>
-        <p:style>
-          <a:lnRef idx="1">
-            <a:schemeClr val="accent1"/>
-          </a:lnRef>
-          <a:fillRef idx="3">
-            <a:schemeClr val="accent1"/>
-          </a:fillRef>
-          <a:effectRef idx="2">
-            <a:schemeClr val="accent1"/>
-          </a:effectRef>
-          <a:fontRef idx="minor">
-            <a:schemeClr val="lt1"/>
-          </a:fontRef>
-        </p:style>
-        <p:txBody>
-          <a:bodyPr rtlCol="0" anchor="ctr" wrap="square" lIns="182880" rIns="182880" tIns="164592" bIns="164592"/>
-          <a:lstStyle/>
-          <a:p>
-            <a:pPr algn="ctr">
-              <a:spcAft>
-                <a:spcPts val="500"/>
-              </a:spcAft>
-              <a:defRPr b="1" sz="1350">
-                <a:solidFill>
-                  <a:srgbClr val="F59E0B"/>
-                </a:solidFill>
-              </a:defRPr>
-            </a:pPr>
-            <a:r>
-              <a:t>💥 3. Kinetic Shoves &amp; Physics</a:t>
-            </a:r>
-          </a:p>
-          <a:p>
-            <a:pPr>
-              <a:spcAft>
-                <a:spcPts val="300"/>
-              </a:spcAft>
-              <a:defRPr sz="1150">
-                <a:solidFill>
-                  <a:srgbClr val="F3F4F6"/>
-                </a:solidFill>
-              </a:defRPr>
-            </a:pPr>
-            <a:r>
-              <a:t>Directional displacement is lethal.</a:t>
-            </a:r>
-          </a:p>
-          <a:p>
-            <a:pPr>
-              <a:spcAft>
-                <a:spcPts val="300"/>
-              </a:spcAft>
-              <a:defRPr sz="1150">
-                <a:solidFill>
-                  <a:srgbClr val="F3F4F6"/>
-                </a:solidFill>
-              </a:defRPr>
-            </a:pPr>
-          </a:p>
-          <a:p>
-            <a:pPr>
-              <a:spcAft>
-                <a:spcPts val="300"/>
-              </a:spcAft>
-              <a:defRPr sz="1150">
-                <a:solidFill>
-                  <a:srgbClr val="F3F4F6"/>
-                </a:solidFill>
-              </a:defRPr>
-            </a:pPr>
-            <a:r>
-              <a:t>Shoving enemies into stone cliffs deals heavy collision impact damage.</a:t>
-            </a:r>
-          </a:p>
-          <a:p>
-            <a:pPr>
-              <a:spcAft>
-                <a:spcPts val="300"/>
-              </a:spcAft>
-              <a:defRPr sz="1150">
-                <a:solidFill>
-                  <a:srgbClr val="F3F4F6"/>
-                </a:solidFill>
-              </a:defRPr>
-            </a:pPr>
-          </a:p>
-          <a:p>
-            <a:pPr>
-              <a:spcAft>
-                <a:spcPts val="300"/>
-              </a:spcAft>
-              <a:defRPr sz="1150">
-                <a:solidFill>
-                  <a:srgbClr val="F3F4F6"/>
-                </a:solidFill>
-              </a:defRPr>
-            </a:pPr>
-            <a:r>
-              <a:t>Knocking enemies into lava pools or off cliffs inflicts continuous environmental burns.</a:t>
-            </a:r>
-          </a:p>
-        </p:txBody>
-      </p:sp>
-      <p:sp>
-        <p:nvSpPr>
-          <p:cNvPr id="6" name="Rounded Rectangle 5"/>
-          <p:cNvSpPr/>
-          <p:nvPr/>
-        </p:nvSpPr>
-        <p:spPr>
-          <a:xfrm>
-            <a:off x="731520" y="5440680"/>
-            <a:ext cx="10698480" cy="822960"/>
+            <a:off x="6217920" y="1645920"/>
+            <a:ext cx="5212080" cy="4572000"/>
           </a:xfrm>
           <a:prstGeom prst="roundRect">
             <a:avLst/>
@@ -6467,22 +6290,106 @@
               </a:defRPr>
             </a:pPr>
             <a:r>
-              <a:t>⏱️ Streamlined Turn Economy (Zero Bloat)</a:t>
-            </a:r>
-          </a:p>
-          <a:p>
-            <a:pPr>
-              <a:spcAft>
-                <a:spcPts val="300"/>
-              </a:spcAft>
-              <a:defRPr sz="1150">
-                <a:solidFill>
-                  <a:srgbClr val="F3F4F6"/>
-                </a:solidFill>
-              </a:defRPr>
-            </a:pPr>
-            <a:r>
-              <a:t>Deliberate tactical depth with zero slog. Clean 1 Move + 1 Combat Action per unit, hybrid attack-terraforming, and Ghost UI prediction—respecting player time.</a:t>
+              <a:t>⏳ 2. Solving 'Setup Tax'</a:t>
+            </a:r>
+          </a:p>
+          <a:p>
+            <a:pPr>
+              <a:spcAft>
+                <a:spcPts val="300"/>
+              </a:spcAft>
+              <a:defRPr sz="1150">
+                <a:solidFill>
+                  <a:srgbClr val="F3F4F6"/>
+                </a:solidFill>
+              </a:defRPr>
+            </a:pPr>
+            <a:r>
+              <a:t>The Problem in Classic SRPGs:</a:t>
+            </a:r>
+          </a:p>
+          <a:p>
+            <a:pPr>
+              <a:spcAft>
+                <a:spcPts val="300"/>
+              </a:spcAft>
+              <a:defRPr sz="1150">
+                <a:solidFill>
+                  <a:srgbClr val="F3F4F6"/>
+                </a:solidFill>
+              </a:defRPr>
+            </a:pPr>
+            <a:r>
+              <a:t>Players hate wasting valuable turns just preparing terrain or placing elemental tiles without dealing actual damage to enemies.</a:t>
+            </a:r>
+          </a:p>
+          <a:p>
+            <a:pPr>
+              <a:spcAft>
+                <a:spcPts val="300"/>
+              </a:spcAft>
+              <a:defRPr sz="1150">
+                <a:solidFill>
+                  <a:srgbClr val="F3F4F6"/>
+                </a:solidFill>
+              </a:defRPr>
+            </a:pPr>
+          </a:p>
+          <a:p>
+            <a:pPr>
+              <a:spcAft>
+                <a:spcPts val="300"/>
+              </a:spcAft>
+              <a:defRPr sz="1150">
+                <a:solidFill>
+                  <a:srgbClr val="F3F4F6"/>
+                </a:solidFill>
+              </a:defRPr>
+            </a:pPr>
+            <a:r>
+              <a:t>Our Solution: Hybrid Attack-Spells</a:t>
+            </a:r>
+          </a:p>
+          <a:p>
+            <a:pPr>
+              <a:spcAft>
+                <a:spcPts val="300"/>
+              </a:spcAft>
+              <a:defRPr sz="1150">
+                <a:solidFill>
+                  <a:srgbClr val="F3F4F6"/>
+                </a:solidFill>
+              </a:defRPr>
+            </a:pPr>
+            <a:r>
+              <a:t>Every spell acts simultaneously! Fireball deals direct damage to the target AND mutates the ground into lava in 1 action. Kinetic Push deals damage AND displaces.</a:t>
+            </a:r>
+          </a:p>
+          <a:p>
+            <a:pPr>
+              <a:spcAft>
+                <a:spcPts val="300"/>
+              </a:spcAft>
+              <a:defRPr sz="1150">
+                <a:solidFill>
+                  <a:srgbClr val="F3F4F6"/>
+                </a:solidFill>
+              </a:defRPr>
+            </a:pPr>
+          </a:p>
+          <a:p>
+            <a:pPr>
+              <a:spcAft>
+                <a:spcPts val="300"/>
+              </a:spcAft>
+              <a:defRPr sz="1150">
+                <a:solidFill>
+                  <a:srgbClr val="F3F4F6"/>
+                </a:solidFill>
+              </a:defRPr>
+            </a:pPr>
+            <a:r>
+              <a:t>Result: Streamlined combat flow where every turn advances the battle.</a:t>
             </a:r>
           </a:p>
         </p:txBody>
@@ -6543,7 +6450,7 @@
               </a:defRPr>
             </a:pPr>
             <a:r>
-              <a:t>TOGE GAME FUND INITIATIVE (TGFI) PITCH</a:t>
+              <a:t>TGFI PITCH SECTION 3: COMPETITOR BENCHMARK</a:t>
             </a:r>
           </a:p>
           <a:p>
@@ -6555,7 +6462,1543 @@
               </a:defRPr>
             </a:pPr>
             <a:r>
-              <a:t>Gameplay Demo: Verified Vertical Slice</a:t>
+              <a:t>Market Opportunity: Competitor Matrix</a:t>
+            </a:r>
+          </a:p>
+        </p:txBody>
+      </p:sp>
+      <p:sp>
+        <p:nvSpPr>
+          <p:cNvPr id="3" name="Rounded Rectangle 2"/>
+          <p:cNvSpPr/>
+          <p:nvPr/>
+        </p:nvSpPr>
+        <p:spPr>
+          <a:xfrm>
+            <a:off x="731520" y="1600200"/>
+            <a:ext cx="5212080" cy="1828800"/>
+          </a:xfrm>
+          <a:prstGeom prst="roundRect">
+            <a:avLst/>
+          </a:prstGeom>
+          <a:solidFill>
+            <a:srgbClr val="161B22"/>
+          </a:solidFill>
+          <a:ln w="19050">
+            <a:solidFill>
+              <a:srgbClr val="06B6D4"/>
+            </a:solidFill>
+          </a:ln>
+        </p:spPr>
+        <p:style>
+          <a:lnRef idx="1">
+            <a:schemeClr val="accent1"/>
+          </a:lnRef>
+          <a:fillRef idx="3">
+            <a:schemeClr val="accent1"/>
+          </a:fillRef>
+          <a:effectRef idx="2">
+            <a:schemeClr val="accent1"/>
+          </a:effectRef>
+          <a:fontRef idx="minor">
+            <a:schemeClr val="lt1"/>
+          </a:fontRef>
+        </p:style>
+        <p:txBody>
+          <a:bodyPr rtlCol="0" anchor="ctr" wrap="square" lIns="182880" rIns="182880" tIns="164592" bIns="164592"/>
+          <a:lstStyle/>
+          <a:p>
+            <a:pPr algn="ctr">
+              <a:spcAft>
+                <a:spcPts val="500"/>
+              </a:spcAft>
+              <a:defRPr b="1" sz="1350">
+                <a:solidFill>
+                  <a:srgbClr val="06B6D4"/>
+                </a:solidFill>
+              </a:defRPr>
+            </a:pPr>
+            <a:r>
+              <a:t>♟️ Brigandine: Runersia (Happinet)</a:t>
+            </a:r>
+          </a:p>
+          <a:p>
+            <a:pPr>
+              <a:spcAft>
+                <a:spcPts val="300"/>
+              </a:spcAft>
+              <a:defRPr sz="1150">
+                <a:solidFill>
+                  <a:srgbClr val="F3F4F6"/>
+                </a:solidFill>
+              </a:defRPr>
+            </a:pPr>
+            <a:r>
+              <a:t>Publisher: Happinet (Very Positive, 1,300+ Steam Reviews)</a:t>
+            </a:r>
+          </a:p>
+          <a:p>
+            <a:pPr>
+              <a:spcAft>
+                <a:spcPts val="300"/>
+              </a:spcAft>
+              <a:defRPr sz="1150">
+                <a:solidFill>
+                  <a:srgbClr val="F3F4F6"/>
+                </a:solidFill>
+              </a:defRPr>
+            </a:pPr>
+            <a:r>
+              <a:t>What Players Love: Deep hex-grid tactics, monster commanding &amp; terrain affinities.</a:t>
+            </a:r>
+          </a:p>
+          <a:p>
+            <a:pPr>
+              <a:spcAft>
+                <a:spcPts val="300"/>
+              </a:spcAft>
+              <a:defRPr sz="1150">
+                <a:solidFill>
+                  <a:srgbClr val="F3F4F6"/>
+                </a:solidFill>
+              </a:defRPr>
+            </a:pPr>
+            <a:r>
+              <a:t>How We Differentiate: Replaces slow 45-min AA battle animations with streamlined tactical skirmishes; transforms passive terrain buffs into Active Terraforming.</a:t>
+            </a:r>
+          </a:p>
+        </p:txBody>
+      </p:sp>
+      <p:sp>
+        <p:nvSpPr>
+          <p:cNvPr id="4" name="Rounded Rectangle 3"/>
+          <p:cNvSpPr/>
+          <p:nvPr/>
+        </p:nvSpPr>
+        <p:spPr>
+          <a:xfrm>
+            <a:off x="6217920" y="1600200"/>
+            <a:ext cx="5212080" cy="1828800"/>
+          </a:xfrm>
+          <a:prstGeom prst="roundRect">
+            <a:avLst/>
+          </a:prstGeom>
+          <a:solidFill>
+            <a:srgbClr val="161B22"/>
+          </a:solidFill>
+          <a:ln w="19050">
+            <a:solidFill>
+              <a:srgbClr val="F59E0B"/>
+            </a:solidFill>
+          </a:ln>
+        </p:spPr>
+        <p:style>
+          <a:lnRef idx="1">
+            <a:schemeClr val="accent1"/>
+          </a:lnRef>
+          <a:fillRef idx="3">
+            <a:schemeClr val="accent1"/>
+          </a:fillRef>
+          <a:effectRef idx="2">
+            <a:schemeClr val="accent1"/>
+          </a:effectRef>
+          <a:fontRef idx="minor">
+            <a:schemeClr val="lt1"/>
+          </a:fontRef>
+        </p:style>
+        <p:txBody>
+          <a:bodyPr rtlCol="0" anchor="ctr" wrap="square" lIns="182880" rIns="182880" tIns="164592" bIns="164592"/>
+          <a:lstStyle/>
+          <a:p>
+            <a:pPr algn="ctr">
+              <a:spcAft>
+                <a:spcPts val="500"/>
+              </a:spcAft>
+              <a:defRPr b="1" sz="1350">
+                <a:solidFill>
+                  <a:srgbClr val="F59E0B"/>
+                </a:solidFill>
+              </a:defRPr>
+            </a:pPr>
+            <a:r>
+              <a:t>🛡️ Vanaris Tactics (Toge)</a:t>
+            </a:r>
+          </a:p>
+          <a:p>
+            <a:pPr>
+              <a:spcAft>
+                <a:spcPts val="300"/>
+              </a:spcAft>
+              <a:defRPr sz="1150">
+                <a:solidFill>
+                  <a:srgbClr val="F3F4F6"/>
+                </a:solidFill>
+              </a:defRPr>
+            </a:pPr>
+            <a:r>
+              <a:t>Publisher: Toge Productions (Beloved Retro Tactics)</a:t>
+            </a:r>
+          </a:p>
+          <a:p>
+            <a:pPr>
+              <a:spcAft>
+                <a:spcPts val="300"/>
+              </a:spcAft>
+              <a:defRPr sz="1150">
+                <a:solidFill>
+                  <a:srgbClr val="F3F4F6"/>
+                </a:solidFill>
+              </a:defRPr>
+            </a:pPr>
+            <a:r>
+              <a:t>What Players Love: Classic retro FFT charm, beloved pixel art storytelling.</a:t>
+            </a:r>
+          </a:p>
+          <a:p>
+            <a:pPr>
+              <a:spcAft>
+                <a:spcPts val="300"/>
+              </a:spcAft>
+              <a:defRPr sz="1150">
+                <a:solidFill>
+                  <a:srgbClr val="F3F4F6"/>
+                </a:solidFill>
+              </a:defRPr>
+            </a:pPr>
+            <a:r>
+              <a:t>How We Differentiate: Adds 3D multi-level hex elevations, kinetic shove impact physics, and real-time elemental landscape destruction.</a:t>
+            </a:r>
+          </a:p>
+        </p:txBody>
+      </p:sp>
+      <p:sp>
+        <p:nvSpPr>
+          <p:cNvPr id="5" name="Rounded Rectangle 4"/>
+          <p:cNvSpPr/>
+          <p:nvPr/>
+        </p:nvSpPr>
+        <p:spPr>
+          <a:xfrm>
+            <a:off x="731520" y="3566160"/>
+            <a:ext cx="5212080" cy="1828800"/>
+          </a:xfrm>
+          <a:prstGeom prst="roundRect">
+            <a:avLst/>
+          </a:prstGeom>
+          <a:solidFill>
+            <a:srgbClr val="161B22"/>
+          </a:solidFill>
+          <a:ln w="19050">
+            <a:solidFill>
+              <a:srgbClr val="10B981"/>
+            </a:solidFill>
+          </a:ln>
+        </p:spPr>
+        <p:style>
+          <a:lnRef idx="1">
+            <a:schemeClr val="accent1"/>
+          </a:lnRef>
+          <a:fillRef idx="3">
+            <a:schemeClr val="accent1"/>
+          </a:fillRef>
+          <a:effectRef idx="2">
+            <a:schemeClr val="accent1"/>
+          </a:effectRef>
+          <a:fontRef idx="minor">
+            <a:schemeClr val="lt1"/>
+          </a:fontRef>
+        </p:style>
+        <p:txBody>
+          <a:bodyPr rtlCol="0" anchor="ctr" wrap="square" lIns="182880" rIns="182880" tIns="164592" bIns="164592"/>
+          <a:lstStyle/>
+          <a:p>
+            <a:pPr algn="ctr">
+              <a:spcAft>
+                <a:spcPts val="500"/>
+              </a:spcAft>
+              <a:defRPr b="1" sz="1350">
+                <a:solidFill>
+                  <a:srgbClr val="10B981"/>
+                </a:solidFill>
+              </a:defRPr>
+            </a:pPr>
+            <a:r>
+              <a:t>💥 Into the Breach (Subset)</a:t>
+            </a:r>
+          </a:p>
+          <a:p>
+            <a:pPr>
+              <a:spcAft>
+                <a:spcPts val="300"/>
+              </a:spcAft>
+              <a:defRPr sz="1150">
+                <a:solidFill>
+                  <a:srgbClr val="F3F4F6"/>
+                </a:solidFill>
+              </a:defRPr>
+            </a:pPr>
+            <a:r>
+              <a:t>Publisher: Subset Games (Overwhelmingly Positive)</a:t>
+            </a:r>
+          </a:p>
+          <a:p>
+            <a:pPr>
+              <a:spcAft>
+                <a:spcPts val="300"/>
+              </a:spcAft>
+              <a:defRPr sz="1150">
+                <a:solidFill>
+                  <a:srgbClr val="F3F4F6"/>
+                </a:solidFill>
+              </a:defRPr>
+            </a:pPr>
+            <a:r>
+              <a:t>What Players Love: Masterpiece of kinetic knockback puzzles.</a:t>
+            </a:r>
+          </a:p>
+          <a:p>
+            <a:pPr>
+              <a:spcAft>
+                <a:spcPts val="300"/>
+              </a:spcAft>
+              <a:defRPr sz="1150">
+                <a:solidFill>
+                  <a:srgbClr val="F3F4F6"/>
+                </a:solidFill>
+              </a:defRPr>
+            </a:pPr>
+            <a:r>
+              <a:t>How We Differentiate: Marries push puzzles with fantasy RPG squad progression, elevation tiers, and land siphoning for Titan cataclysms.</a:t>
+            </a:r>
+          </a:p>
+        </p:txBody>
+      </p:sp>
+      <p:sp>
+        <p:nvSpPr>
+          <p:cNvPr id="6" name="Rounded Rectangle 5"/>
+          <p:cNvSpPr/>
+          <p:nvPr/>
+        </p:nvSpPr>
+        <p:spPr>
+          <a:xfrm>
+            <a:off x="6217920" y="3566160"/>
+            <a:ext cx="5212080" cy="1828800"/>
+          </a:xfrm>
+          <a:prstGeom prst="roundRect">
+            <a:avLst/>
+          </a:prstGeom>
+          <a:solidFill>
+            <a:srgbClr val="161B22"/>
+          </a:solidFill>
+          <a:ln w="19050">
+            <a:solidFill>
+              <a:srgbClr val="06B6D4"/>
+            </a:solidFill>
+          </a:ln>
+        </p:spPr>
+        <p:style>
+          <a:lnRef idx="1">
+            <a:schemeClr val="accent1"/>
+          </a:lnRef>
+          <a:fillRef idx="3">
+            <a:schemeClr val="accent1"/>
+          </a:fillRef>
+          <a:effectRef idx="2">
+            <a:schemeClr val="accent1"/>
+          </a:effectRef>
+          <a:fontRef idx="minor">
+            <a:schemeClr val="lt1"/>
+          </a:fontRef>
+        </p:style>
+        <p:txBody>
+          <a:bodyPr rtlCol="0" anchor="ctr" wrap="square" lIns="182880" rIns="182880" tIns="164592" bIns="164592"/>
+          <a:lstStyle/>
+          <a:p>
+            <a:pPr algn="ctr">
+              <a:spcAft>
+                <a:spcPts val="500"/>
+              </a:spcAft>
+              <a:defRPr b="1" sz="1350">
+                <a:solidFill>
+                  <a:srgbClr val="06B6D4"/>
+                </a:solidFill>
+              </a:defRPr>
+            </a:pPr>
+            <a:r>
+              <a:t>⚔️ Triangle Strategy (Square Enix)</a:t>
+            </a:r>
+          </a:p>
+          <a:p>
+            <a:pPr>
+              <a:spcAft>
+                <a:spcPts val="300"/>
+              </a:spcAft>
+              <a:defRPr sz="1150">
+                <a:solidFill>
+                  <a:srgbClr val="F3F4F6"/>
+                </a:solidFill>
+              </a:defRPr>
+            </a:pPr>
+            <a:r>
+              <a:t>Publisher: Square Enix (HD-2D Tactical RPG)</a:t>
+            </a:r>
+          </a:p>
+          <a:p>
+            <a:pPr>
+              <a:spcAft>
+                <a:spcPts val="300"/>
+              </a:spcAft>
+              <a:defRPr sz="1150">
+                <a:solidFill>
+                  <a:srgbClr val="F3F4F6"/>
+                </a:solidFill>
+              </a:defRPr>
+            </a:pPr>
+            <a:r>
+              <a:t>What Players Love: Modern HD-2D presentation &amp; elemental interactions.</a:t>
+            </a:r>
+          </a:p>
+          <a:p>
+            <a:pPr>
+              <a:spcAft>
+                <a:spcPts val="300"/>
+              </a:spcAft>
+              <a:defRPr sz="1150">
+                <a:solidFill>
+                  <a:srgbClr val="F3F4F6"/>
+                </a:solidFill>
+              </a:defRPr>
+            </a:pPr>
+            <a:r>
+              <a:t>How We Differentiate: Streamlined tactical flow designed for modern indie players with zero level-grinding and deeper terrain chemistry.</a:t>
+            </a:r>
+          </a:p>
+        </p:txBody>
+      </p:sp>
+      <p:sp>
+        <p:nvSpPr>
+          <p:cNvPr id="7" name="Rounded Rectangle 6"/>
+          <p:cNvSpPr/>
+          <p:nvPr/>
+        </p:nvSpPr>
+        <p:spPr>
+          <a:xfrm>
+            <a:off x="731520" y="5532120"/>
+            <a:ext cx="10698480" cy="777240"/>
+          </a:xfrm>
+          <a:prstGeom prst="roundRect">
+            <a:avLst/>
+          </a:prstGeom>
+          <a:solidFill>
+            <a:srgbClr val="161B22"/>
+          </a:solidFill>
+          <a:ln w="19050">
+            <a:solidFill>
+              <a:srgbClr val="F59E0B"/>
+            </a:solidFill>
+          </a:ln>
+        </p:spPr>
+        <p:style>
+          <a:lnRef idx="1">
+            <a:schemeClr val="accent1"/>
+          </a:lnRef>
+          <a:fillRef idx="3">
+            <a:schemeClr val="accent1"/>
+          </a:fillRef>
+          <a:effectRef idx="2">
+            <a:schemeClr val="accent1"/>
+          </a:effectRef>
+          <a:fontRef idx="minor">
+            <a:schemeClr val="lt1"/>
+          </a:fontRef>
+        </p:style>
+        <p:txBody>
+          <a:bodyPr rtlCol="0" anchor="ctr" wrap="square" lIns="182880" rIns="182880" tIns="164592" bIns="164592"/>
+          <a:lstStyle/>
+          <a:p>
+            <a:pPr algn="ctr">
+              <a:spcAft>
+                <a:spcPts val="500"/>
+              </a:spcAft>
+              <a:defRPr b="1" sz="1350">
+                <a:solidFill>
+                  <a:srgbClr val="F59E0B"/>
+                </a:solidFill>
+              </a:defRPr>
+            </a:pPr>
+            <a:r>
+              <a:t>🎯 The Market Opportunity</a:t>
+            </a:r>
+          </a:p>
+          <a:p>
+            <a:pPr>
+              <a:spcAft>
+                <a:spcPts val="300"/>
+              </a:spcAft>
+              <a:defRPr sz="1150">
+                <a:solidFill>
+                  <a:srgbClr val="F3F4F6"/>
+                </a:solidFill>
+              </a:defRPr>
+            </a:pPr>
+            <a:r>
+              <a:t>Players love Brigandine's hex-grid monster fantasy and Into the Breach's puzzle clarity—Elemental Hex Tactics marries both into streamlined, deliberate HD-2D matches with active terraforming.</a:t>
+            </a:r>
+          </a:p>
+        </p:txBody>
+      </p:sp>
+    </p:spTree>
+  </p:cSld>
+  <p:clrMapOvr>
+    <a:masterClrMapping/>
+  </p:clrMapOvr>
+</p:sld>
+</file>
+
+<file path=ppt/slides/slide5.xml><?xml version="1.0" encoding="utf-8"?>
+<p:sld xmlns:a="http://schemas.openxmlformats.org/drawingml/2006/main" xmlns:p="http://schemas.openxmlformats.org/presentationml/2006/main" xmlns:r="http://schemas.openxmlformats.org/officeDocument/2006/relationships">
+  <p:cSld>
+    <p:bg>
+      <p:bgPr>
+        <a:solidFill>
+          <a:srgbClr val="0D1117"/>
+        </a:solidFill>
+        <a:effectLst/>
+      </p:bgPr>
+    </p:bg>
+    <p:spTree>
+      <p:nvGrpSpPr>
+        <p:cNvPr id="1" name=""/>
+        <p:cNvGrpSpPr/>
+        <p:nvPr/>
+      </p:nvGrpSpPr>
+      <p:grpSpPr/>
+      <p:sp>
+        <p:nvSpPr>
+          <p:cNvPr id="2" name="TextBox 1"/>
+          <p:cNvSpPr txBox="1"/>
+          <p:nvPr/>
+        </p:nvSpPr>
+        <p:spPr>
+          <a:xfrm>
+            <a:off x="731520" y="411480"/>
+            <a:ext cx="10698480" cy="1005840"/>
+          </a:xfrm>
+          <a:prstGeom prst="rect">
+            <a:avLst/>
+          </a:prstGeom>
+          <a:noFill/>
+        </p:spPr>
+        <p:txBody>
+          <a:bodyPr wrap="square" lIns="0" tIns="0" rIns="0" bIns="0">
+            <a:spAutoFit/>
+          </a:bodyPr>
+          <a:lstStyle/>
+          <a:p>
+            <a:pPr>
+              <a:defRPr sz="1100" b="1">
+                <a:solidFill>
+                  <a:srgbClr val="06B6D4"/>
+                </a:solidFill>
+              </a:defRPr>
+            </a:pPr>
+            <a:r>
+              <a:t>TGFI PITCH SECTION 4: GAME FLOW &amp; CORE LOOP</a:t>
+            </a:r>
+          </a:p>
+          <a:p>
+            <a:pPr>
+              <a:defRPr sz="2400" b="1">
+                <a:solidFill>
+                  <a:srgbClr val="F3F4F6"/>
+                </a:solidFill>
+              </a:defRPr>
+            </a:pPr>
+            <a:r>
+              <a:t>Product &amp; Solution: The Ecosystem of War</a:t>
+            </a:r>
+          </a:p>
+        </p:txBody>
+      </p:sp>
+      <p:sp>
+        <p:nvSpPr>
+          <p:cNvPr id="3" name="Rounded Rectangle 2"/>
+          <p:cNvSpPr/>
+          <p:nvPr/>
+        </p:nvSpPr>
+        <p:spPr>
+          <a:xfrm>
+            <a:off x="731520" y="1645920"/>
+            <a:ext cx="10698480" cy="777240"/>
+          </a:xfrm>
+          <a:prstGeom prst="roundRect">
+            <a:avLst/>
+          </a:prstGeom>
+          <a:solidFill>
+            <a:srgbClr val="161B22"/>
+          </a:solidFill>
+          <a:ln w="19050">
+            <a:solidFill>
+              <a:srgbClr val="06B6D4"/>
+            </a:solidFill>
+          </a:ln>
+        </p:spPr>
+        <p:style>
+          <a:lnRef idx="1">
+            <a:schemeClr val="accent1"/>
+          </a:lnRef>
+          <a:fillRef idx="3">
+            <a:schemeClr val="accent1"/>
+          </a:fillRef>
+          <a:effectRef idx="2">
+            <a:schemeClr val="accent1"/>
+          </a:effectRef>
+          <a:fontRef idx="minor">
+            <a:schemeClr val="lt1"/>
+          </a:fontRef>
+        </p:style>
+        <p:txBody>
+          <a:bodyPr rtlCol="0" anchor="ctr" wrap="square" lIns="182880" rIns="182880" tIns="164592" bIns="164592"/>
+          <a:lstStyle/>
+          <a:p>
+            <a:pPr algn="ctr">
+              <a:spcAft>
+                <a:spcPts val="500"/>
+              </a:spcAft>
+              <a:defRPr b="1" sz="1350">
+                <a:solidFill>
+                  <a:srgbClr val="06B6D4"/>
+                </a:solidFill>
+              </a:defRPr>
+            </a:pPr>
+            <a:r>
+              <a:t>THE 3-STEP TACTICAL LOOP</a:t>
+            </a:r>
+          </a:p>
+          <a:p>
+            <a:pPr>
+              <a:spcAft>
+                <a:spcPts val="300"/>
+              </a:spcAft>
+              <a:defRPr sz="1150">
+                <a:solidFill>
+                  <a:srgbClr val="F3F4F6"/>
+                </a:solidFill>
+              </a:defRPr>
+            </a:pPr>
+            <a:r>
+              <a:t>1. Master Infuses (Terraform)   ➔   2. Monster Attunes (Adapt)   ➔   3. Monster Consumes (Unleash)</a:t>
+            </a:r>
+          </a:p>
+        </p:txBody>
+      </p:sp>
+      <p:sp>
+        <p:nvSpPr>
+          <p:cNvPr id="4" name="Rounded Rectangle 3"/>
+          <p:cNvSpPr/>
+          <p:nvPr/>
+        </p:nvSpPr>
+        <p:spPr>
+          <a:xfrm>
+            <a:off x="731520" y="2651760"/>
+            <a:ext cx="3383280" cy="2560320"/>
+          </a:xfrm>
+          <a:prstGeom prst="roundRect">
+            <a:avLst/>
+          </a:prstGeom>
+          <a:solidFill>
+            <a:srgbClr val="161B22"/>
+          </a:solidFill>
+          <a:ln w="19050">
+            <a:solidFill>
+              <a:srgbClr val="30363D"/>
+            </a:solidFill>
+          </a:ln>
+        </p:spPr>
+        <p:style>
+          <a:lnRef idx="1">
+            <a:schemeClr val="accent1"/>
+          </a:lnRef>
+          <a:fillRef idx="3">
+            <a:schemeClr val="accent1"/>
+          </a:fillRef>
+          <a:effectRef idx="2">
+            <a:schemeClr val="accent1"/>
+          </a:effectRef>
+          <a:fontRef idx="minor">
+            <a:schemeClr val="lt1"/>
+          </a:fontRef>
+        </p:style>
+        <p:txBody>
+          <a:bodyPr rtlCol="0" anchor="ctr" wrap="square" lIns="182880" rIns="182880" tIns="164592" bIns="164592"/>
+          <a:lstStyle/>
+          <a:p>
+            <a:pPr algn="ctr">
+              <a:spcAft>
+                <a:spcPts val="500"/>
+              </a:spcAft>
+              <a:defRPr b="1" sz="1350">
+                <a:solidFill>
+                  <a:srgbClr val="F59E0B"/>
+                </a:solidFill>
+              </a:defRPr>
+            </a:pPr>
+            <a:r>
+              <a:t>🧙 1. Master Infuses (Terraform)</a:t>
+            </a:r>
+          </a:p>
+          <a:p>
+            <a:pPr>
+              <a:spcAft>
+                <a:spcPts val="300"/>
+              </a:spcAft>
+              <a:defRPr sz="1150">
+                <a:solidFill>
+                  <a:srgbClr val="F3F4F6"/>
+                </a:solidFill>
+              </a:defRPr>
+            </a:pPr>
+            <a:r>
+              <a:t>Human Masters reshape the battlefield with magic.</a:t>
+            </a:r>
+          </a:p>
+          <a:p>
+            <a:pPr>
+              <a:spcAft>
+                <a:spcPts val="300"/>
+              </a:spcAft>
+              <a:defRPr sz="1150">
+                <a:solidFill>
+                  <a:srgbClr val="F3F4F6"/>
+                </a:solidFill>
+              </a:defRPr>
+            </a:pPr>
+          </a:p>
+          <a:p>
+            <a:pPr>
+              <a:spcAft>
+                <a:spcPts val="300"/>
+              </a:spcAft>
+              <a:defRPr sz="1150">
+                <a:solidFill>
+                  <a:srgbClr val="F3F4F6"/>
+                </a:solidFill>
+              </a:defRPr>
+            </a:pPr>
+            <a:r>
+              <a:t>Fireballs scorch grass into molten lava moats; water blasts douse flames and create concealing steam clouds.</a:t>
+            </a:r>
+          </a:p>
+        </p:txBody>
+      </p:sp>
+      <p:sp>
+        <p:nvSpPr>
+          <p:cNvPr id="5" name="Rounded Rectangle 4"/>
+          <p:cNvSpPr/>
+          <p:nvPr/>
+        </p:nvSpPr>
+        <p:spPr>
+          <a:xfrm>
+            <a:off x="4389120" y="2651760"/>
+            <a:ext cx="3383280" cy="2560320"/>
+          </a:xfrm>
+          <a:prstGeom prst="roundRect">
+            <a:avLst/>
+          </a:prstGeom>
+          <a:solidFill>
+            <a:srgbClr val="161B22"/>
+          </a:solidFill>
+          <a:ln w="19050">
+            <a:solidFill>
+              <a:srgbClr val="30363D"/>
+            </a:solidFill>
+          </a:ln>
+        </p:spPr>
+        <p:style>
+          <a:lnRef idx="1">
+            <a:schemeClr val="accent1"/>
+          </a:lnRef>
+          <a:fillRef idx="3">
+            <a:schemeClr val="accent1"/>
+          </a:fillRef>
+          <a:effectRef idx="2">
+            <a:schemeClr val="accent1"/>
+          </a:effectRef>
+          <a:fontRef idx="minor">
+            <a:schemeClr val="lt1"/>
+          </a:fontRef>
+        </p:style>
+        <p:txBody>
+          <a:bodyPr rtlCol="0" anchor="ctr" wrap="square" lIns="182880" rIns="182880" tIns="164592" bIns="164592"/>
+          <a:lstStyle/>
+          <a:p>
+            <a:pPr algn="ctr">
+              <a:spcAft>
+                <a:spcPts val="500"/>
+              </a:spcAft>
+              <a:defRPr b="1" sz="1350">
+                <a:solidFill>
+                  <a:srgbClr val="F59E0B"/>
+                </a:solidFill>
+              </a:defRPr>
+            </a:pPr>
+            <a:r>
+              <a:t>🐉 2. Monster Attunes (Adapt)</a:t>
+            </a:r>
+          </a:p>
+          <a:p>
+            <a:pPr>
+              <a:spcAft>
+                <a:spcPts val="300"/>
+              </a:spcAft>
+              <a:defRPr sz="1150">
+                <a:solidFill>
+                  <a:srgbClr val="F3F4F6"/>
+                </a:solidFill>
+              </a:defRPr>
+            </a:pPr>
+            <a:r>
+              <a:t>Allied Monsters thrive in their native elements.</a:t>
+            </a:r>
+          </a:p>
+          <a:p>
+            <a:pPr>
+              <a:spcAft>
+                <a:spcPts val="300"/>
+              </a:spcAft>
+              <a:defRPr sz="1150">
+                <a:solidFill>
+                  <a:srgbClr val="F3F4F6"/>
+                </a:solidFill>
+              </a:defRPr>
+            </a:pPr>
+          </a:p>
+          <a:p>
+            <a:pPr>
+              <a:spcAft>
+                <a:spcPts val="300"/>
+              </a:spcAft>
+              <a:defRPr sz="1150">
+                <a:solidFill>
+                  <a:srgbClr val="F3F4F6"/>
+                </a:solidFill>
+              </a:defRPr>
+            </a:pPr>
+            <a:r>
+              <a:t>Standing on lava grants fire beasts +2 ATK and complete burn immunity. Positioning monsters on matching tiles is key.</a:t>
+            </a:r>
+          </a:p>
+        </p:txBody>
+      </p:sp>
+      <p:sp>
+        <p:nvSpPr>
+          <p:cNvPr id="6" name="Rounded Rectangle 5"/>
+          <p:cNvSpPr/>
+          <p:nvPr/>
+        </p:nvSpPr>
+        <p:spPr>
+          <a:xfrm>
+            <a:off x="8046720" y="2651760"/>
+            <a:ext cx="3383280" cy="2560320"/>
+          </a:xfrm>
+          <a:prstGeom prst="roundRect">
+            <a:avLst/>
+          </a:prstGeom>
+          <a:solidFill>
+            <a:srgbClr val="161B22"/>
+          </a:solidFill>
+          <a:ln w="19050">
+            <a:solidFill>
+              <a:srgbClr val="EF4444"/>
+            </a:solidFill>
+          </a:ln>
+        </p:spPr>
+        <p:style>
+          <a:lnRef idx="1">
+            <a:schemeClr val="accent1"/>
+          </a:lnRef>
+          <a:fillRef idx="3">
+            <a:schemeClr val="accent1"/>
+          </a:fillRef>
+          <a:effectRef idx="2">
+            <a:schemeClr val="accent1"/>
+          </a:effectRef>
+          <a:fontRef idx="minor">
+            <a:schemeClr val="lt1"/>
+          </a:fontRef>
+        </p:style>
+        <p:txBody>
+          <a:bodyPr rtlCol="0" anchor="ctr" wrap="square" lIns="182880" rIns="182880" tIns="164592" bIns="164592"/>
+          <a:lstStyle/>
+          <a:p>
+            <a:pPr algn="ctr">
+              <a:spcAft>
+                <a:spcPts val="500"/>
+              </a:spcAft>
+              <a:defRPr b="1" sz="1350">
+                <a:solidFill>
+                  <a:srgbClr val="EF4444"/>
+                </a:solidFill>
+              </a:defRPr>
+            </a:pPr>
+            <a:r>
+              <a:t>⚡ 3. Monster Consumes (Unleash)</a:t>
+            </a:r>
+          </a:p>
+          <a:p>
+            <a:pPr>
+              <a:spcAft>
+                <a:spcPts val="300"/>
+              </a:spcAft>
+              <a:defRPr sz="1150">
+                <a:solidFill>
+                  <a:srgbClr val="F3F4F6"/>
+                </a:solidFill>
+              </a:defRPr>
+            </a:pPr>
+            <a:r>
+              <a:t>Titans siphon active lava or water, mutating the land into Barren Earth.</a:t>
+            </a:r>
+          </a:p>
+          <a:p>
+            <a:pPr>
+              <a:spcAft>
+                <a:spcPts val="300"/>
+              </a:spcAft>
+              <a:defRPr sz="1150">
+                <a:solidFill>
+                  <a:srgbClr val="F3F4F6"/>
+                </a:solidFill>
+              </a:defRPr>
+            </a:pPr>
+          </a:p>
+          <a:p>
+            <a:pPr>
+              <a:spcAft>
+                <a:spcPts val="300"/>
+              </a:spcAft>
+              <a:defRPr sz="1150">
+                <a:solidFill>
+                  <a:srgbClr val="F3F4F6"/>
+                </a:solidFill>
+              </a:defRPr>
+            </a:pPr>
+            <a:r>
+              <a:t>Harvesting land generates Elemental Cores to trigger room-clearing ultimate Cataclysms.</a:t>
+            </a:r>
+          </a:p>
+        </p:txBody>
+      </p:sp>
+      <p:sp>
+        <p:nvSpPr>
+          <p:cNvPr id="7" name="Rounded Rectangle 6"/>
+          <p:cNvSpPr/>
+          <p:nvPr/>
+        </p:nvSpPr>
+        <p:spPr>
+          <a:xfrm>
+            <a:off x="731520" y="5440680"/>
+            <a:ext cx="10698480" cy="822960"/>
+          </a:xfrm>
+          <a:prstGeom prst="roundRect">
+            <a:avLst/>
+          </a:prstGeom>
+          <a:solidFill>
+            <a:srgbClr val="161B22"/>
+          </a:solidFill>
+          <a:ln w="19050">
+            <a:solidFill>
+              <a:srgbClr val="F59E0B"/>
+            </a:solidFill>
+          </a:ln>
+        </p:spPr>
+        <p:style>
+          <a:lnRef idx="1">
+            <a:schemeClr val="accent1"/>
+          </a:lnRef>
+          <a:fillRef idx="3">
+            <a:schemeClr val="accent1"/>
+          </a:fillRef>
+          <a:effectRef idx="2">
+            <a:schemeClr val="accent1"/>
+          </a:effectRef>
+          <a:fontRef idx="minor">
+            <a:schemeClr val="lt1"/>
+          </a:fontRef>
+        </p:style>
+        <p:txBody>
+          <a:bodyPr rtlCol="0" anchor="ctr" wrap="square" lIns="182880" rIns="182880" tIns="164592" bIns="164592"/>
+          <a:lstStyle/>
+          <a:p>
+            <a:pPr algn="ctr">
+              <a:spcAft>
+                <a:spcPts val="500"/>
+              </a:spcAft>
+              <a:defRPr b="1" sz="1350">
+                <a:solidFill>
+                  <a:srgbClr val="F59E0B"/>
+                </a:solidFill>
+              </a:defRPr>
+            </a:pPr>
+            <a:r>
+              <a:t>💡 Master &amp; Monster Dual-Command</a:t>
+            </a:r>
+          </a:p>
+          <a:p>
+            <a:pPr>
+              <a:spcAft>
+                <a:spcPts val="300"/>
+              </a:spcAft>
+              <a:defRPr sz="1150">
+                <a:solidFill>
+                  <a:srgbClr val="F3F4F6"/>
+                </a:solidFill>
+              </a:defRPr>
+            </a:pPr>
+            <a:r>
+              <a:t>The Master sculpts the space and knocks enemies into traps; the Monster holds the frontline, thrives in the hazards, and consumes the land for decisive finishers.</a:t>
+            </a:r>
+          </a:p>
+        </p:txBody>
+      </p:sp>
+    </p:spTree>
+  </p:cSld>
+  <p:clrMapOvr>
+    <a:masterClrMapping/>
+  </p:clrMapOvr>
+</p:sld>
+</file>
+
+<file path=ppt/slides/slide6.xml><?xml version="1.0" encoding="utf-8"?>
+<p:sld xmlns:a="http://schemas.openxmlformats.org/drawingml/2006/main" xmlns:p="http://schemas.openxmlformats.org/presentationml/2006/main" xmlns:r="http://schemas.openxmlformats.org/officeDocument/2006/relationships">
+  <p:cSld>
+    <p:bg>
+      <p:bgPr>
+        <a:solidFill>
+          <a:srgbClr val="0D1117"/>
+        </a:solidFill>
+        <a:effectLst/>
+      </p:bgPr>
+    </p:bg>
+    <p:spTree>
+      <p:nvGrpSpPr>
+        <p:cNvPr id="1" name=""/>
+        <p:cNvGrpSpPr/>
+        <p:nvPr/>
+      </p:nvGrpSpPr>
+      <p:grpSpPr/>
+      <p:sp>
+        <p:nvSpPr>
+          <p:cNvPr id="2" name="TextBox 1"/>
+          <p:cNvSpPr txBox="1"/>
+          <p:nvPr/>
+        </p:nvSpPr>
+        <p:spPr>
+          <a:xfrm>
+            <a:off x="731520" y="411480"/>
+            <a:ext cx="10698480" cy="1005840"/>
+          </a:xfrm>
+          <a:prstGeom prst="rect">
+            <a:avLst/>
+          </a:prstGeom>
+          <a:noFill/>
+        </p:spPr>
+        <p:txBody>
+          <a:bodyPr wrap="square" lIns="0" tIns="0" rIns="0" bIns="0">
+            <a:spAutoFit/>
+          </a:bodyPr>
+          <a:lstStyle/>
+          <a:p>
+            <a:pPr>
+              <a:defRPr sz="1100" b="1">
+                <a:solidFill>
+                  <a:srgbClr val="06B6D4"/>
+                </a:solidFill>
+              </a:defRPr>
+            </a:pPr>
+            <a:r>
+              <a:t>TGFI PITCH SECTION 4: DESIGN PILLARS &amp; ARCHETYPES</a:t>
+            </a:r>
+          </a:p>
+          <a:p>
+            <a:pPr>
+              <a:defRPr sz="2400" b="1">
+                <a:solidFill>
+                  <a:srgbClr val="F3F4F6"/>
+                </a:solidFill>
+              </a:defRPr>
+            </a:pPr>
+            <a:r>
+              <a:t>Product &amp; Solution: Unit Asymmetry &amp; Pillars</a:t>
+            </a:r>
+          </a:p>
+        </p:txBody>
+      </p:sp>
+      <p:sp>
+        <p:nvSpPr>
+          <p:cNvPr id="3" name="Rounded Rectangle 2"/>
+          <p:cNvSpPr/>
+          <p:nvPr/>
+        </p:nvSpPr>
+        <p:spPr>
+          <a:xfrm>
+            <a:off x="731520" y="1645920"/>
+            <a:ext cx="5212080" cy="2240280"/>
+          </a:xfrm>
+          <a:prstGeom prst="roundRect">
+            <a:avLst/>
+          </a:prstGeom>
+          <a:solidFill>
+            <a:srgbClr val="161B22"/>
+          </a:solidFill>
+          <a:ln w="19050">
+            <a:solidFill>
+              <a:srgbClr val="06B6D4"/>
+            </a:solidFill>
+          </a:ln>
+        </p:spPr>
+        <p:style>
+          <a:lnRef idx="1">
+            <a:schemeClr val="accent1"/>
+          </a:lnRef>
+          <a:fillRef idx="3">
+            <a:schemeClr val="accent1"/>
+          </a:fillRef>
+          <a:effectRef idx="2">
+            <a:schemeClr val="accent1"/>
+          </a:effectRef>
+          <a:fontRef idx="minor">
+            <a:schemeClr val="lt1"/>
+          </a:fontRef>
+        </p:style>
+        <p:txBody>
+          <a:bodyPr rtlCol="0" anchor="ctr" wrap="square" lIns="182880" rIns="182880" tIns="164592" bIns="164592"/>
+          <a:lstStyle/>
+          <a:p>
+            <a:pPr algn="ctr">
+              <a:spcAft>
+                <a:spcPts val="500"/>
+              </a:spcAft>
+              <a:defRPr b="1" sz="1350">
+                <a:solidFill>
+                  <a:srgbClr val="06B6D4"/>
+                </a:solidFill>
+              </a:defRPr>
+            </a:pPr>
+            <a:r>
+              <a:t>🧙 Human Masters (The Shapers)</a:t>
+            </a:r>
+          </a:p>
+          <a:p>
+            <a:pPr>
+              <a:spcAft>
+                <a:spcPts val="300"/>
+              </a:spcAft>
+              <a:defRPr sz="1150">
+                <a:solidFill>
+                  <a:srgbClr val="F3F4F6"/>
+                </a:solidFill>
+              </a:defRPr>
+            </a:pPr>
+            <a:r>
+              <a:t>ROLE: Spatial Manipulator (Low HP, High Mobility, Map Shaper)</a:t>
+            </a:r>
+          </a:p>
+          <a:p>
+            <a:pPr>
+              <a:spcAft>
+                <a:spcPts val="300"/>
+              </a:spcAft>
+              <a:defRPr sz="1150">
+                <a:solidFill>
+                  <a:srgbClr val="F3F4F6"/>
+                </a:solidFill>
+              </a:defRPr>
+            </a:pPr>
+          </a:p>
+          <a:p>
+            <a:pPr>
+              <a:spcAft>
+                <a:spcPts val="300"/>
+              </a:spcAft>
+              <a:defRPr sz="1150">
+                <a:solidFill>
+                  <a:srgbClr val="F3F4F6"/>
+                </a:solidFill>
+              </a:defRPr>
+            </a:pPr>
+            <a:r>
+              <a:t>Player-controlled caster. Squishy but agile. Casts ranged Fireballs, Water Surges, and Kinetic Pushes to reshape terrain and manipulate enemy positioning.</a:t>
+            </a:r>
+          </a:p>
+        </p:txBody>
+      </p:sp>
+      <p:sp>
+        <p:nvSpPr>
+          <p:cNvPr id="4" name="Rounded Rectangle 3"/>
+          <p:cNvSpPr/>
+          <p:nvPr/>
+        </p:nvSpPr>
+        <p:spPr>
+          <a:xfrm>
+            <a:off x="6217920" y="1645920"/>
+            <a:ext cx="5212080" cy="2240280"/>
+          </a:xfrm>
+          <a:prstGeom prst="roundRect">
+            <a:avLst/>
+          </a:prstGeom>
+          <a:solidFill>
+            <a:srgbClr val="161B22"/>
+          </a:solidFill>
+          <a:ln w="19050">
+            <a:solidFill>
+              <a:srgbClr val="EF4444"/>
+            </a:solidFill>
+          </a:ln>
+        </p:spPr>
+        <p:style>
+          <a:lnRef idx="1">
+            <a:schemeClr val="accent1"/>
+          </a:lnRef>
+          <a:fillRef idx="3">
+            <a:schemeClr val="accent1"/>
+          </a:fillRef>
+          <a:effectRef idx="2">
+            <a:schemeClr val="accent1"/>
+          </a:effectRef>
+          <a:fontRef idx="minor">
+            <a:schemeClr val="lt1"/>
+          </a:fontRef>
+        </p:style>
+        <p:txBody>
+          <a:bodyPr rtlCol="0" anchor="ctr" wrap="square" lIns="182880" rIns="182880" tIns="164592" bIns="164592"/>
+          <a:lstStyle/>
+          <a:p>
+            <a:pPr algn="ctr">
+              <a:spcAft>
+                <a:spcPts val="500"/>
+              </a:spcAft>
+              <a:defRPr b="1" sz="1350">
+                <a:solidFill>
+                  <a:srgbClr val="EF4444"/>
+                </a:solidFill>
+              </a:defRPr>
+            </a:pPr>
+            <a:r>
+              <a:t>🐉 Allied Monsters (The Titans)</a:t>
+            </a:r>
+          </a:p>
+          <a:p>
+            <a:pPr>
+              <a:spcAft>
+                <a:spcPts val="300"/>
+              </a:spcAft>
+              <a:defRPr sz="1150">
+                <a:solidFill>
+                  <a:srgbClr val="F3F4F6"/>
+                </a:solidFill>
+              </a:defRPr>
+            </a:pPr>
+            <a:r>
+              <a:t>ROLE: Frontline Anchor (Colossal 14 HP, Hazard-Immune)</a:t>
+            </a:r>
+          </a:p>
+          <a:p>
+            <a:pPr>
+              <a:spcAft>
+                <a:spcPts val="300"/>
+              </a:spcAft>
+              <a:defRPr sz="1150">
+                <a:solidFill>
+                  <a:srgbClr val="F3F4F6"/>
+                </a:solidFill>
+              </a:defRPr>
+            </a:pPr>
+          </a:p>
+          <a:p>
+            <a:pPr>
+              <a:spcAft>
+                <a:spcPts val="300"/>
+              </a:spcAft>
+              <a:defRPr sz="1150">
+                <a:solidFill>
+                  <a:srgbClr val="F3F4F6"/>
+                </a:solidFill>
+              </a:defRPr>
+            </a:pPr>
+            <a:r>
+              <a:t>Player-controlled behemoth. Naturally immune to molten lava, holds down the frontline with heavy melee strikes, and harvests land to trigger Magma Cataclysms.</a:t>
+            </a:r>
+          </a:p>
+        </p:txBody>
+      </p:sp>
+      <p:sp>
+        <p:nvSpPr>
+          <p:cNvPr id="5" name="Rounded Rectangle 4"/>
+          <p:cNvSpPr/>
+          <p:nvPr/>
+        </p:nvSpPr>
+        <p:spPr>
+          <a:xfrm>
+            <a:off x="731520" y="4160520"/>
+            <a:ext cx="5212080" cy="2103120"/>
+          </a:xfrm>
+          <a:prstGeom prst="roundRect">
+            <a:avLst/>
+          </a:prstGeom>
+          <a:solidFill>
+            <a:srgbClr val="161B22"/>
+          </a:solidFill>
+          <a:ln w="19050">
+            <a:solidFill>
+              <a:srgbClr val="F59E0B"/>
+            </a:solidFill>
+          </a:ln>
+        </p:spPr>
+        <p:style>
+          <a:lnRef idx="1">
+            <a:schemeClr val="accent1"/>
+          </a:lnRef>
+          <a:fillRef idx="3">
+            <a:schemeClr val="accent1"/>
+          </a:fillRef>
+          <a:effectRef idx="2">
+            <a:schemeClr val="accent1"/>
+          </a:effectRef>
+          <a:fontRef idx="minor">
+            <a:schemeClr val="lt1"/>
+          </a:fontRef>
+        </p:style>
+        <p:txBody>
+          <a:bodyPr rtlCol="0" anchor="ctr" wrap="square" lIns="182880" rIns="182880" tIns="164592" bIns="164592"/>
+          <a:lstStyle/>
+          <a:p>
+            <a:pPr algn="ctr">
+              <a:spcAft>
+                <a:spcPts val="500"/>
+              </a:spcAft>
+              <a:defRPr b="1" sz="1350">
+                <a:solidFill>
+                  <a:srgbClr val="F59E0B"/>
+                </a:solidFill>
+              </a:defRPr>
+            </a:pPr>
+            <a:r>
+              <a:t>🔥 Dracomancers (Enemy Rival Masters)</a:t>
+            </a:r>
+          </a:p>
+          <a:p>
+            <a:pPr>
+              <a:spcAft>
+                <a:spcPts val="300"/>
+              </a:spcAft>
+              <a:defRPr sz="1150">
+                <a:solidFill>
+                  <a:srgbClr val="F3F4F6"/>
+                </a:solidFill>
+              </a:defRPr>
+            </a:pPr>
+            <a:r>
+              <a:t>ROLE: Tactical Rival Pyromancer</a:t>
+            </a:r>
+          </a:p>
+          <a:p>
+            <a:pPr>
+              <a:spcAft>
+                <a:spcPts val="300"/>
+              </a:spcAft>
+              <a:defRPr sz="1150">
+                <a:solidFill>
+                  <a:srgbClr val="F3F4F6"/>
+                </a:solidFill>
+              </a:defRPr>
+            </a:pPr>
+          </a:p>
+          <a:p>
+            <a:pPr>
+              <a:spcAft>
+                <a:spcPts val="300"/>
+              </a:spcAft>
+              <a:defRPr sz="1150">
+                <a:solidFill>
+                  <a:srgbClr val="F3F4F6"/>
+                </a:solidFill>
+              </a:defRPr>
+            </a:pPr>
+            <a:r>
+              <a:t>Commands enemy squads, casts long-range fire spells, and uses kinetic knockbacks to shove player units off high ground into hazards.</a:t>
+            </a:r>
+          </a:p>
+        </p:txBody>
+      </p:sp>
+      <p:sp>
+        <p:nvSpPr>
+          <p:cNvPr id="6" name="Rounded Rectangle 5"/>
+          <p:cNvSpPr/>
+          <p:nvPr/>
+        </p:nvSpPr>
+        <p:spPr>
+          <a:xfrm>
+            <a:off x="6217920" y="4160520"/>
+            <a:ext cx="5212080" cy="2103120"/>
+          </a:xfrm>
+          <a:prstGeom prst="roundRect">
+            <a:avLst/>
+          </a:prstGeom>
+          <a:solidFill>
+            <a:srgbClr val="161B22"/>
+          </a:solidFill>
+          <a:ln w="19050">
+            <a:solidFill>
+              <a:srgbClr val="30363D"/>
+            </a:solidFill>
+          </a:ln>
+        </p:spPr>
+        <p:style>
+          <a:lnRef idx="1">
+            <a:schemeClr val="accent1"/>
+          </a:lnRef>
+          <a:fillRef idx="3">
+            <a:schemeClr val="accent1"/>
+          </a:fillRef>
+          <a:effectRef idx="2">
+            <a:schemeClr val="accent1"/>
+          </a:effectRef>
+          <a:fontRef idx="minor">
+            <a:schemeClr val="lt1"/>
+          </a:fontRef>
+        </p:style>
+        <p:txBody>
+          <a:bodyPr rtlCol="0" anchor="ctr" wrap="square" lIns="182880" rIns="182880" tIns="164592" bIns="164592"/>
+          <a:lstStyle/>
+          <a:p>
+            <a:pPr algn="ctr">
+              <a:spcAft>
+                <a:spcPts val="500"/>
+              </a:spcAft>
+              <a:defRPr b="1" sz="1350">
+                <a:solidFill>
+                  <a:srgbClr val="F59E0B"/>
+                </a:solidFill>
+              </a:defRPr>
+            </a:pPr>
+            <a:r>
+              <a:t>👿 Demon Slimes (Aggressive Minions)</a:t>
+            </a:r>
+          </a:p>
+          <a:p>
+            <a:pPr>
+              <a:spcAft>
+                <a:spcPts val="300"/>
+              </a:spcAft>
+              <a:defRPr sz="1150">
+                <a:solidFill>
+                  <a:srgbClr val="F3F4F6"/>
+                </a:solidFill>
+              </a:defRPr>
+            </a:pPr>
+            <a:r>
+              <a:t>ROLE: Fast Flanking Melee Minions</a:t>
+            </a:r>
+          </a:p>
+          <a:p>
+            <a:pPr>
+              <a:spcAft>
+                <a:spcPts val="300"/>
+              </a:spcAft>
+              <a:defRPr sz="1150">
+                <a:solidFill>
+                  <a:srgbClr val="F3F4F6"/>
+                </a:solidFill>
+              </a:defRPr>
+            </a:pPr>
+          </a:p>
+          <a:p>
+            <a:pPr>
+              <a:spcAft>
+                <a:spcPts val="300"/>
+              </a:spcAft>
+              <a:defRPr sz="1150">
+                <a:solidFill>
+                  <a:srgbClr val="F3F4F6"/>
+                </a:solidFill>
+              </a:defRPr>
+            </a:pPr>
+            <a:r>
+              <a:t>Aggressive swarmers that navigate around hazards to flank your Master and attempt to knock him off elevated plateaus.</a:t>
+            </a:r>
+          </a:p>
+        </p:txBody>
+      </p:sp>
+    </p:spTree>
+  </p:cSld>
+  <p:clrMapOvr>
+    <a:masterClrMapping/>
+  </p:clrMapOvr>
+</p:sld>
+</file>
+
+<file path=ppt/slides/slide7.xml><?xml version="1.0" encoding="utf-8"?>
+<p:sld xmlns:a="http://schemas.openxmlformats.org/drawingml/2006/main" xmlns:p="http://schemas.openxmlformats.org/presentationml/2006/main" xmlns:r="http://schemas.openxmlformats.org/officeDocument/2006/relationships">
+  <p:cSld>
+    <p:bg>
+      <p:bgPr>
+        <a:solidFill>
+          <a:srgbClr val="0D1117"/>
+        </a:solidFill>
+        <a:effectLst/>
+      </p:bgPr>
+    </p:bg>
+    <p:spTree>
+      <p:nvGrpSpPr>
+        <p:cNvPr id="1" name=""/>
+        <p:cNvGrpSpPr/>
+        <p:nvPr/>
+      </p:nvGrpSpPr>
+      <p:grpSpPr/>
+      <p:sp>
+        <p:nvSpPr>
+          <p:cNvPr id="2" name="TextBox 1"/>
+          <p:cNvSpPr txBox="1"/>
+          <p:nvPr/>
+        </p:nvSpPr>
+        <p:spPr>
+          <a:xfrm>
+            <a:off x="731520" y="411480"/>
+            <a:ext cx="10698480" cy="1005840"/>
+          </a:xfrm>
+          <a:prstGeom prst="rect">
+            <a:avLst/>
+          </a:prstGeom>
+          <a:noFill/>
+        </p:spPr>
+        <p:txBody>
+          <a:bodyPr wrap="square" lIns="0" tIns="0" rIns="0" bIns="0">
+            <a:spAutoFit/>
+          </a:bodyPr>
+          <a:lstStyle/>
+          <a:p>
+            <a:pPr>
+              <a:defRPr sz="1100" b="1">
+                <a:solidFill>
+                  <a:srgbClr val="06B6D4"/>
+                </a:solidFill>
+              </a:defRPr>
+            </a:pPr>
+            <a:r>
+              <a:t>TGFI PITCH SECTION 4: PROOF OF CONCEPT &amp; VALIDATION</a:t>
+            </a:r>
+          </a:p>
+          <a:p>
+            <a:pPr>
+              <a:defRPr sz="2400" b="1">
+                <a:solidFill>
+                  <a:srgbClr val="F3F4F6"/>
+                </a:solidFill>
+              </a:defRPr>
+            </a:pPr>
+            <a:r>
+              <a:t>Product &amp; Solution: Verified Vertical Slice</a:t>
             </a:r>
           </a:p>
         </p:txBody>
@@ -6841,1329 +8284,6 @@
 </p:sld>
 </file>
 
-<file path=ppt/slides/slide5.xml><?xml version="1.0" encoding="utf-8"?>
-<p:sld xmlns:a="http://schemas.openxmlformats.org/drawingml/2006/main" xmlns:p="http://schemas.openxmlformats.org/presentationml/2006/main" xmlns:r="http://schemas.openxmlformats.org/officeDocument/2006/relationships">
-  <p:cSld>
-    <p:bg>
-      <p:bgPr>
-        <a:solidFill>
-          <a:srgbClr val="0D1117"/>
-        </a:solidFill>
-        <a:effectLst/>
-      </p:bgPr>
-    </p:bg>
-    <p:spTree>
-      <p:nvGrpSpPr>
-        <p:cNvPr id="1" name=""/>
-        <p:cNvGrpSpPr/>
-        <p:nvPr/>
-      </p:nvGrpSpPr>
-      <p:grpSpPr/>
-      <p:sp>
-        <p:nvSpPr>
-          <p:cNvPr id="2" name="TextBox 1"/>
-          <p:cNvSpPr txBox="1"/>
-          <p:nvPr/>
-        </p:nvSpPr>
-        <p:spPr>
-          <a:xfrm>
-            <a:off x="731520" y="411480"/>
-            <a:ext cx="10698480" cy="1005840"/>
-          </a:xfrm>
-          <a:prstGeom prst="rect">
-            <a:avLst/>
-          </a:prstGeom>
-          <a:noFill/>
-        </p:spPr>
-        <p:txBody>
-          <a:bodyPr wrap="square" lIns="0" tIns="0" rIns="0" bIns="0">
-            <a:spAutoFit/>
-          </a:bodyPr>
-          <a:lstStyle/>
-          <a:p>
-            <a:pPr>
-              <a:defRPr sz="1100" b="1">
-                <a:solidFill>
-                  <a:srgbClr val="06B6D4"/>
-                </a:solidFill>
-              </a:defRPr>
-            </a:pPr>
-            <a:r>
-              <a:t>TOGE GAME FUND INITIATIVE (TGFI) PITCH</a:t>
-            </a:r>
-          </a:p>
-          <a:p>
-            <a:pPr>
-              <a:defRPr sz="2400" b="1">
-                <a:solidFill>
-                  <a:srgbClr val="F3F4F6"/>
-                </a:solidFill>
-              </a:defRPr>
-            </a:pPr>
-            <a:r>
-              <a:t>Game Design Solutions: Streamlined Tactical Flow</a:t>
-            </a:r>
-          </a:p>
-        </p:txBody>
-      </p:sp>
-      <p:sp>
-        <p:nvSpPr>
-          <p:cNvPr id="3" name="Rounded Rectangle 2"/>
-          <p:cNvSpPr/>
-          <p:nvPr/>
-        </p:nvSpPr>
-        <p:spPr>
-          <a:xfrm>
-            <a:off x="731520" y="1645920"/>
-            <a:ext cx="5212080" cy="4572000"/>
-          </a:xfrm>
-          <a:prstGeom prst="roundRect">
-            <a:avLst/>
-          </a:prstGeom>
-          <a:solidFill>
-            <a:srgbClr val="161B22"/>
-          </a:solidFill>
-          <a:ln w="19050">
-            <a:solidFill>
-              <a:srgbClr val="F59E0B"/>
-            </a:solidFill>
-          </a:ln>
-        </p:spPr>
-        <p:style>
-          <a:lnRef idx="1">
-            <a:schemeClr val="accent1"/>
-          </a:lnRef>
-          <a:fillRef idx="3">
-            <a:schemeClr val="accent1"/>
-          </a:fillRef>
-          <a:effectRef idx="2">
-            <a:schemeClr val="accent1"/>
-          </a:effectRef>
-          <a:fontRef idx="minor">
-            <a:schemeClr val="lt1"/>
-          </a:fontRef>
-        </p:style>
-        <p:txBody>
-          <a:bodyPr rtlCol="0" anchor="ctr" wrap="square" lIns="182880" rIns="182880" tIns="164592" bIns="164592"/>
-          <a:lstStyle/>
-          <a:p>
-            <a:pPr algn="ctr">
-              <a:spcAft>
-                <a:spcPts val="500"/>
-              </a:spcAft>
-              <a:defRPr b="1" sz="1350">
-                <a:solidFill>
-                  <a:srgbClr val="F59E0B"/>
-                </a:solidFill>
-              </a:defRPr>
-            </a:pPr>
-            <a:r>
-              <a:t>🧠 1. Solving 'Cognitive Overload'</a:t>
-            </a:r>
-          </a:p>
-          <a:p>
-            <a:pPr>
-              <a:spcAft>
-                <a:spcPts val="300"/>
-              </a:spcAft>
-              <a:defRPr sz="1150">
-                <a:solidFill>
-                  <a:srgbClr val="F3F4F6"/>
-                </a:solidFill>
-              </a:defRPr>
-            </a:pPr>
-            <a:r>
-              <a:t>The Problem in Classic SRPGs:</a:t>
-            </a:r>
-          </a:p>
-          <a:p>
-            <a:pPr>
-              <a:spcAft>
-                <a:spcPts val="300"/>
-              </a:spcAft>
-              <a:defRPr sz="1150">
-                <a:solidFill>
-                  <a:srgbClr val="F3F4F6"/>
-                </a:solidFill>
-              </a:defRPr>
-            </a:pPr>
-            <a:r>
-              <a:t>Classic elemental tactics games overwhelm players with dozens of confusing status effect icons, elemental charts, and hidden percentage calculation tables.</a:t>
-            </a:r>
-          </a:p>
-          <a:p>
-            <a:pPr>
-              <a:spcAft>
-                <a:spcPts val="300"/>
-              </a:spcAft>
-              <a:defRPr sz="1150">
-                <a:solidFill>
-                  <a:srgbClr val="F3F4F6"/>
-                </a:solidFill>
-              </a:defRPr>
-            </a:pPr>
-          </a:p>
-          <a:p>
-            <a:pPr>
-              <a:spcAft>
-                <a:spcPts val="300"/>
-              </a:spcAft>
-              <a:defRPr sz="1150">
-                <a:solidFill>
-                  <a:srgbClr val="F3F4F6"/>
-                </a:solidFill>
-              </a:defRPr>
-            </a:pPr>
-            <a:r>
-              <a:t>Our Solution: Ghost UI (Predictive Preview)</a:t>
-            </a:r>
-          </a:p>
-          <a:p>
-            <a:pPr>
-              <a:spcAft>
-                <a:spcPts val="300"/>
-              </a:spcAft>
-              <a:defRPr sz="1150">
-                <a:solidFill>
-                  <a:srgbClr val="F3F4F6"/>
-                </a:solidFill>
-              </a:defRPr>
-            </a:pPr>
-            <a:r>
-              <a:t>Hovering any spell or push action over a tile immediately previews the exact physical terrain reaction and knockback path before the player commits.</a:t>
-            </a:r>
-          </a:p>
-          <a:p>
-            <a:pPr>
-              <a:spcAft>
-                <a:spcPts val="300"/>
-              </a:spcAft>
-              <a:defRPr sz="1150">
-                <a:solidFill>
-                  <a:srgbClr val="F3F4F6"/>
-                </a:solidFill>
-              </a:defRPr>
-            </a:pPr>
-          </a:p>
-          <a:p>
-            <a:pPr>
-              <a:spcAft>
-                <a:spcPts val="300"/>
-              </a:spcAft>
-              <a:defRPr sz="1150">
-                <a:solidFill>
-                  <a:srgbClr val="F3F4F6"/>
-                </a:solidFill>
-              </a:defRPr>
-            </a:pPr>
-            <a:r>
-              <a:t>Result: Deep tactical planning with zero mental fatigue.</a:t>
-            </a:r>
-          </a:p>
-        </p:txBody>
-      </p:sp>
-      <p:sp>
-        <p:nvSpPr>
-          <p:cNvPr id="4" name="Rounded Rectangle 3"/>
-          <p:cNvSpPr/>
-          <p:nvPr/>
-        </p:nvSpPr>
-        <p:spPr>
-          <a:xfrm>
-            <a:off x="6217920" y="1645920"/>
-            <a:ext cx="5212080" cy="4572000"/>
-          </a:xfrm>
-          <a:prstGeom prst="roundRect">
-            <a:avLst/>
-          </a:prstGeom>
-          <a:solidFill>
-            <a:srgbClr val="161B22"/>
-          </a:solidFill>
-          <a:ln w="19050">
-            <a:solidFill>
-              <a:srgbClr val="06B6D4"/>
-            </a:solidFill>
-          </a:ln>
-        </p:spPr>
-        <p:style>
-          <a:lnRef idx="1">
-            <a:schemeClr val="accent1"/>
-          </a:lnRef>
-          <a:fillRef idx="3">
-            <a:schemeClr val="accent1"/>
-          </a:fillRef>
-          <a:effectRef idx="2">
-            <a:schemeClr val="accent1"/>
-          </a:effectRef>
-          <a:fontRef idx="minor">
-            <a:schemeClr val="lt1"/>
-          </a:fontRef>
-        </p:style>
-        <p:txBody>
-          <a:bodyPr rtlCol="0" anchor="ctr" wrap="square" lIns="182880" rIns="182880" tIns="164592" bIns="164592"/>
-          <a:lstStyle/>
-          <a:p>
-            <a:pPr algn="ctr">
-              <a:spcAft>
-                <a:spcPts val="500"/>
-              </a:spcAft>
-              <a:defRPr b="1" sz="1350">
-                <a:solidFill>
-                  <a:srgbClr val="06B6D4"/>
-                </a:solidFill>
-              </a:defRPr>
-            </a:pPr>
-            <a:r>
-              <a:t>⏳ 2. Solving 'Setup Tax'</a:t>
-            </a:r>
-          </a:p>
-          <a:p>
-            <a:pPr>
-              <a:spcAft>
-                <a:spcPts val="300"/>
-              </a:spcAft>
-              <a:defRPr sz="1150">
-                <a:solidFill>
-                  <a:srgbClr val="F3F4F6"/>
-                </a:solidFill>
-              </a:defRPr>
-            </a:pPr>
-            <a:r>
-              <a:t>The Problem in Classic SRPGs:</a:t>
-            </a:r>
-          </a:p>
-          <a:p>
-            <a:pPr>
-              <a:spcAft>
-                <a:spcPts val="300"/>
-              </a:spcAft>
-              <a:defRPr sz="1150">
-                <a:solidFill>
-                  <a:srgbClr val="F3F4F6"/>
-                </a:solidFill>
-              </a:defRPr>
-            </a:pPr>
-            <a:r>
-              <a:t>Players hate wasting valuable turns just preparing terrain or placing elemental tiles without dealing actual damage to enemies.</a:t>
-            </a:r>
-          </a:p>
-          <a:p>
-            <a:pPr>
-              <a:spcAft>
-                <a:spcPts val="300"/>
-              </a:spcAft>
-              <a:defRPr sz="1150">
-                <a:solidFill>
-                  <a:srgbClr val="F3F4F6"/>
-                </a:solidFill>
-              </a:defRPr>
-            </a:pPr>
-          </a:p>
-          <a:p>
-            <a:pPr>
-              <a:spcAft>
-                <a:spcPts val="300"/>
-              </a:spcAft>
-              <a:defRPr sz="1150">
-                <a:solidFill>
-                  <a:srgbClr val="F3F4F6"/>
-                </a:solidFill>
-              </a:defRPr>
-            </a:pPr>
-            <a:r>
-              <a:t>Our Solution: Hybrid Attack-Spells</a:t>
-            </a:r>
-          </a:p>
-          <a:p>
-            <a:pPr>
-              <a:spcAft>
-                <a:spcPts val="300"/>
-              </a:spcAft>
-              <a:defRPr sz="1150">
-                <a:solidFill>
-                  <a:srgbClr val="F3F4F6"/>
-                </a:solidFill>
-              </a:defRPr>
-            </a:pPr>
-            <a:r>
-              <a:t>Every spell acts simultaneously! Fireball deals direct damage to the target AND mutates the ground into lava in 1 action. Kinetic Push deals damage AND displaces.</a:t>
-            </a:r>
-          </a:p>
-          <a:p>
-            <a:pPr>
-              <a:spcAft>
-                <a:spcPts val="300"/>
-              </a:spcAft>
-              <a:defRPr sz="1150">
-                <a:solidFill>
-                  <a:srgbClr val="F3F4F6"/>
-                </a:solidFill>
-              </a:defRPr>
-            </a:pPr>
-          </a:p>
-          <a:p>
-            <a:pPr>
-              <a:spcAft>
-                <a:spcPts val="300"/>
-              </a:spcAft>
-              <a:defRPr sz="1150">
-                <a:solidFill>
-                  <a:srgbClr val="F3F4F6"/>
-                </a:solidFill>
-              </a:defRPr>
-            </a:pPr>
-            <a:r>
-              <a:t>Result: Streamlined combat flow where every turn advances the battle.</a:t>
-            </a:r>
-          </a:p>
-        </p:txBody>
-      </p:sp>
-    </p:spTree>
-  </p:cSld>
-  <p:clrMapOvr>
-    <a:masterClrMapping/>
-  </p:clrMapOvr>
-</p:sld>
-</file>
-
-<file path=ppt/slides/slide6.xml><?xml version="1.0" encoding="utf-8"?>
-<p:sld xmlns:a="http://schemas.openxmlformats.org/drawingml/2006/main" xmlns:p="http://schemas.openxmlformats.org/presentationml/2006/main" xmlns:r="http://schemas.openxmlformats.org/officeDocument/2006/relationships">
-  <p:cSld>
-    <p:bg>
-      <p:bgPr>
-        <a:solidFill>
-          <a:srgbClr val="0D1117"/>
-        </a:solidFill>
-        <a:effectLst/>
-      </p:bgPr>
-    </p:bg>
-    <p:spTree>
-      <p:nvGrpSpPr>
-        <p:cNvPr id="1" name=""/>
-        <p:cNvGrpSpPr/>
-        <p:nvPr/>
-      </p:nvGrpSpPr>
-      <p:grpSpPr/>
-      <p:sp>
-        <p:nvSpPr>
-          <p:cNvPr id="2" name="TextBox 1"/>
-          <p:cNvSpPr txBox="1"/>
-          <p:nvPr/>
-        </p:nvSpPr>
-        <p:spPr>
-          <a:xfrm>
-            <a:off x="731520" y="411480"/>
-            <a:ext cx="10698480" cy="1005840"/>
-          </a:xfrm>
-          <a:prstGeom prst="rect">
-            <a:avLst/>
-          </a:prstGeom>
-          <a:noFill/>
-        </p:spPr>
-        <p:txBody>
-          <a:bodyPr wrap="square" lIns="0" tIns="0" rIns="0" bIns="0">
-            <a:spAutoFit/>
-          </a:bodyPr>
-          <a:lstStyle/>
-          <a:p>
-            <a:pPr>
-              <a:defRPr sz="1100" b="1">
-                <a:solidFill>
-                  <a:srgbClr val="06B6D4"/>
-                </a:solidFill>
-              </a:defRPr>
-            </a:pPr>
-            <a:r>
-              <a:t>TOGE GAME FUND INITIATIVE (TGFI) PITCH</a:t>
-            </a:r>
-          </a:p>
-          <a:p>
-            <a:pPr>
-              <a:defRPr sz="2400" b="1">
-                <a:solidFill>
-                  <a:srgbClr val="F3F4F6"/>
-                </a:solidFill>
-              </a:defRPr>
-            </a:pPr>
-            <a:r>
-              <a:t>Unit Asymmetry: Masters vs. Monsters</a:t>
-            </a:r>
-          </a:p>
-        </p:txBody>
-      </p:sp>
-      <p:sp>
-        <p:nvSpPr>
-          <p:cNvPr id="3" name="Rounded Rectangle 2"/>
-          <p:cNvSpPr/>
-          <p:nvPr/>
-        </p:nvSpPr>
-        <p:spPr>
-          <a:xfrm>
-            <a:off x="731520" y="1645920"/>
-            <a:ext cx="5212080" cy="2240280"/>
-          </a:xfrm>
-          <a:prstGeom prst="roundRect">
-            <a:avLst/>
-          </a:prstGeom>
-          <a:solidFill>
-            <a:srgbClr val="161B22"/>
-          </a:solidFill>
-          <a:ln w="19050">
-            <a:solidFill>
-              <a:srgbClr val="06B6D4"/>
-            </a:solidFill>
-          </a:ln>
-        </p:spPr>
-        <p:style>
-          <a:lnRef idx="1">
-            <a:schemeClr val="accent1"/>
-          </a:lnRef>
-          <a:fillRef idx="3">
-            <a:schemeClr val="accent1"/>
-          </a:fillRef>
-          <a:effectRef idx="2">
-            <a:schemeClr val="accent1"/>
-          </a:effectRef>
-          <a:fontRef idx="minor">
-            <a:schemeClr val="lt1"/>
-          </a:fontRef>
-        </p:style>
-        <p:txBody>
-          <a:bodyPr rtlCol="0" anchor="ctr" wrap="square" lIns="182880" rIns="182880" tIns="164592" bIns="164592"/>
-          <a:lstStyle/>
-          <a:p>
-            <a:pPr algn="ctr">
-              <a:spcAft>
-                <a:spcPts val="500"/>
-              </a:spcAft>
-              <a:defRPr b="1" sz="1350">
-                <a:solidFill>
-                  <a:srgbClr val="06B6D4"/>
-                </a:solidFill>
-              </a:defRPr>
-            </a:pPr>
-            <a:r>
-              <a:t>🧙 Human Masters (The Shapers)</a:t>
-            </a:r>
-          </a:p>
-          <a:p>
-            <a:pPr>
-              <a:spcAft>
-                <a:spcPts val="300"/>
-              </a:spcAft>
-              <a:defRPr sz="1150">
-                <a:solidFill>
-                  <a:srgbClr val="F3F4F6"/>
-                </a:solidFill>
-              </a:defRPr>
-            </a:pPr>
-            <a:r>
-              <a:t>ROLE: Spatial Manipulator (Low HP, High Mobility, Map Shaper)</a:t>
-            </a:r>
-          </a:p>
-          <a:p>
-            <a:pPr>
-              <a:spcAft>
-                <a:spcPts val="300"/>
-              </a:spcAft>
-              <a:defRPr sz="1150">
-                <a:solidFill>
-                  <a:srgbClr val="F3F4F6"/>
-                </a:solidFill>
-              </a:defRPr>
-            </a:pPr>
-          </a:p>
-          <a:p>
-            <a:pPr>
-              <a:spcAft>
-                <a:spcPts val="300"/>
-              </a:spcAft>
-              <a:defRPr sz="1150">
-                <a:solidFill>
-                  <a:srgbClr val="F3F4F6"/>
-                </a:solidFill>
-              </a:defRPr>
-            </a:pPr>
-            <a:r>
-              <a:t>Player-controlled caster. Squishy but agile. Casts ranged Fireballs, Water Surges, and Kinetic Pushes to reshape terrain and manipulate enemy positioning.</a:t>
-            </a:r>
-          </a:p>
-        </p:txBody>
-      </p:sp>
-      <p:sp>
-        <p:nvSpPr>
-          <p:cNvPr id="4" name="Rounded Rectangle 3"/>
-          <p:cNvSpPr/>
-          <p:nvPr/>
-        </p:nvSpPr>
-        <p:spPr>
-          <a:xfrm>
-            <a:off x="6217920" y="1645920"/>
-            <a:ext cx="5212080" cy="2240280"/>
-          </a:xfrm>
-          <a:prstGeom prst="roundRect">
-            <a:avLst/>
-          </a:prstGeom>
-          <a:solidFill>
-            <a:srgbClr val="161B22"/>
-          </a:solidFill>
-          <a:ln w="19050">
-            <a:solidFill>
-              <a:srgbClr val="EF4444"/>
-            </a:solidFill>
-          </a:ln>
-        </p:spPr>
-        <p:style>
-          <a:lnRef idx="1">
-            <a:schemeClr val="accent1"/>
-          </a:lnRef>
-          <a:fillRef idx="3">
-            <a:schemeClr val="accent1"/>
-          </a:fillRef>
-          <a:effectRef idx="2">
-            <a:schemeClr val="accent1"/>
-          </a:effectRef>
-          <a:fontRef idx="minor">
-            <a:schemeClr val="lt1"/>
-          </a:fontRef>
-        </p:style>
-        <p:txBody>
-          <a:bodyPr rtlCol="0" anchor="ctr" wrap="square" lIns="182880" rIns="182880" tIns="164592" bIns="164592"/>
-          <a:lstStyle/>
-          <a:p>
-            <a:pPr algn="ctr">
-              <a:spcAft>
-                <a:spcPts val="500"/>
-              </a:spcAft>
-              <a:defRPr b="1" sz="1350">
-                <a:solidFill>
-                  <a:srgbClr val="EF4444"/>
-                </a:solidFill>
-              </a:defRPr>
-            </a:pPr>
-            <a:r>
-              <a:t>🐉 Allied Monsters (The Titans)</a:t>
-            </a:r>
-          </a:p>
-          <a:p>
-            <a:pPr>
-              <a:spcAft>
-                <a:spcPts val="300"/>
-              </a:spcAft>
-              <a:defRPr sz="1150">
-                <a:solidFill>
-                  <a:srgbClr val="F3F4F6"/>
-                </a:solidFill>
-              </a:defRPr>
-            </a:pPr>
-            <a:r>
-              <a:t>ROLE: Frontline Anchor (Colossal 14 HP, Hazard-Immune)</a:t>
-            </a:r>
-          </a:p>
-          <a:p>
-            <a:pPr>
-              <a:spcAft>
-                <a:spcPts val="300"/>
-              </a:spcAft>
-              <a:defRPr sz="1150">
-                <a:solidFill>
-                  <a:srgbClr val="F3F4F6"/>
-                </a:solidFill>
-              </a:defRPr>
-            </a:pPr>
-          </a:p>
-          <a:p>
-            <a:pPr>
-              <a:spcAft>
-                <a:spcPts val="300"/>
-              </a:spcAft>
-              <a:defRPr sz="1150">
-                <a:solidFill>
-                  <a:srgbClr val="F3F4F6"/>
-                </a:solidFill>
-              </a:defRPr>
-            </a:pPr>
-            <a:r>
-              <a:t>Player-controlled behemoth. Naturally immune to molten lava, holds down the frontline with heavy melee strikes, and harvests land to trigger Magma Cataclysms.</a:t>
-            </a:r>
-          </a:p>
-        </p:txBody>
-      </p:sp>
-      <p:sp>
-        <p:nvSpPr>
-          <p:cNvPr id="5" name="Rounded Rectangle 4"/>
-          <p:cNvSpPr/>
-          <p:nvPr/>
-        </p:nvSpPr>
-        <p:spPr>
-          <a:xfrm>
-            <a:off x="731520" y="4160520"/>
-            <a:ext cx="5212080" cy="2103120"/>
-          </a:xfrm>
-          <a:prstGeom prst="roundRect">
-            <a:avLst/>
-          </a:prstGeom>
-          <a:solidFill>
-            <a:srgbClr val="161B22"/>
-          </a:solidFill>
-          <a:ln w="19050">
-            <a:solidFill>
-              <a:srgbClr val="F59E0B"/>
-            </a:solidFill>
-          </a:ln>
-        </p:spPr>
-        <p:style>
-          <a:lnRef idx="1">
-            <a:schemeClr val="accent1"/>
-          </a:lnRef>
-          <a:fillRef idx="3">
-            <a:schemeClr val="accent1"/>
-          </a:fillRef>
-          <a:effectRef idx="2">
-            <a:schemeClr val="accent1"/>
-          </a:effectRef>
-          <a:fontRef idx="minor">
-            <a:schemeClr val="lt1"/>
-          </a:fontRef>
-        </p:style>
-        <p:txBody>
-          <a:bodyPr rtlCol="0" anchor="ctr" wrap="square" lIns="182880" rIns="182880" tIns="164592" bIns="164592"/>
-          <a:lstStyle/>
-          <a:p>
-            <a:pPr algn="ctr">
-              <a:spcAft>
-                <a:spcPts val="500"/>
-              </a:spcAft>
-              <a:defRPr b="1" sz="1350">
-                <a:solidFill>
-                  <a:srgbClr val="F59E0B"/>
-                </a:solidFill>
-              </a:defRPr>
-            </a:pPr>
-            <a:r>
-              <a:t>🔥 Dracomancers (Enemy Rival Masters)</a:t>
-            </a:r>
-          </a:p>
-          <a:p>
-            <a:pPr>
-              <a:spcAft>
-                <a:spcPts val="300"/>
-              </a:spcAft>
-              <a:defRPr sz="1150">
-                <a:solidFill>
-                  <a:srgbClr val="F3F4F6"/>
-                </a:solidFill>
-              </a:defRPr>
-            </a:pPr>
-            <a:r>
-              <a:t>ROLE: Tactical Rival Pyromancer</a:t>
-            </a:r>
-          </a:p>
-          <a:p>
-            <a:pPr>
-              <a:spcAft>
-                <a:spcPts val="300"/>
-              </a:spcAft>
-              <a:defRPr sz="1150">
-                <a:solidFill>
-                  <a:srgbClr val="F3F4F6"/>
-                </a:solidFill>
-              </a:defRPr>
-            </a:pPr>
-          </a:p>
-          <a:p>
-            <a:pPr>
-              <a:spcAft>
-                <a:spcPts val="300"/>
-              </a:spcAft>
-              <a:defRPr sz="1150">
-                <a:solidFill>
-                  <a:srgbClr val="F3F4F6"/>
-                </a:solidFill>
-              </a:defRPr>
-            </a:pPr>
-            <a:r>
-              <a:t>Commands enemy squads, casts long-range fire spells, and uses kinetic knockbacks to shove player units off high ground into hazards.</a:t>
-            </a:r>
-          </a:p>
-        </p:txBody>
-      </p:sp>
-      <p:sp>
-        <p:nvSpPr>
-          <p:cNvPr id="6" name="Rounded Rectangle 5"/>
-          <p:cNvSpPr/>
-          <p:nvPr/>
-        </p:nvSpPr>
-        <p:spPr>
-          <a:xfrm>
-            <a:off x="6217920" y="4160520"/>
-            <a:ext cx="5212080" cy="2103120"/>
-          </a:xfrm>
-          <a:prstGeom prst="roundRect">
-            <a:avLst/>
-          </a:prstGeom>
-          <a:solidFill>
-            <a:srgbClr val="161B22"/>
-          </a:solidFill>
-          <a:ln w="19050">
-            <a:solidFill>
-              <a:srgbClr val="30363D"/>
-            </a:solidFill>
-          </a:ln>
-        </p:spPr>
-        <p:style>
-          <a:lnRef idx="1">
-            <a:schemeClr val="accent1"/>
-          </a:lnRef>
-          <a:fillRef idx="3">
-            <a:schemeClr val="accent1"/>
-          </a:fillRef>
-          <a:effectRef idx="2">
-            <a:schemeClr val="accent1"/>
-          </a:effectRef>
-          <a:fontRef idx="minor">
-            <a:schemeClr val="lt1"/>
-          </a:fontRef>
-        </p:style>
-        <p:txBody>
-          <a:bodyPr rtlCol="0" anchor="ctr" wrap="square" lIns="182880" rIns="182880" tIns="164592" bIns="164592"/>
-          <a:lstStyle/>
-          <a:p>
-            <a:pPr algn="ctr">
-              <a:spcAft>
-                <a:spcPts val="500"/>
-              </a:spcAft>
-              <a:defRPr b="1" sz="1350">
-                <a:solidFill>
-                  <a:srgbClr val="F59E0B"/>
-                </a:solidFill>
-              </a:defRPr>
-            </a:pPr>
-            <a:r>
-              <a:t>👿 Demon Slimes (Aggressive Minions)</a:t>
-            </a:r>
-          </a:p>
-          <a:p>
-            <a:pPr>
-              <a:spcAft>
-                <a:spcPts val="300"/>
-              </a:spcAft>
-              <a:defRPr sz="1150">
-                <a:solidFill>
-                  <a:srgbClr val="F3F4F6"/>
-                </a:solidFill>
-              </a:defRPr>
-            </a:pPr>
-            <a:r>
-              <a:t>ROLE: Fast Flanking Melee Minions</a:t>
-            </a:r>
-          </a:p>
-          <a:p>
-            <a:pPr>
-              <a:spcAft>
-                <a:spcPts val="300"/>
-              </a:spcAft>
-              <a:defRPr sz="1150">
-                <a:solidFill>
-                  <a:srgbClr val="F3F4F6"/>
-                </a:solidFill>
-              </a:defRPr>
-            </a:pPr>
-          </a:p>
-          <a:p>
-            <a:pPr>
-              <a:spcAft>
-                <a:spcPts val="300"/>
-              </a:spcAft>
-              <a:defRPr sz="1150">
-                <a:solidFill>
-                  <a:srgbClr val="F3F4F6"/>
-                </a:solidFill>
-              </a:defRPr>
-            </a:pPr>
-            <a:r>
-              <a:t>Aggressive swarmers that navigate around hazards to flank your Master and attempt to knock him off elevated plateaus.</a:t>
-            </a:r>
-          </a:p>
-        </p:txBody>
-      </p:sp>
-    </p:spTree>
-  </p:cSld>
-  <p:clrMapOvr>
-    <a:masterClrMapping/>
-  </p:clrMapOvr>
-</p:sld>
-</file>
-
-<file path=ppt/slides/slide7.xml><?xml version="1.0" encoding="utf-8"?>
-<p:sld xmlns:a="http://schemas.openxmlformats.org/drawingml/2006/main" xmlns:p="http://schemas.openxmlformats.org/presentationml/2006/main" xmlns:r="http://schemas.openxmlformats.org/officeDocument/2006/relationships">
-  <p:cSld>
-    <p:bg>
-      <p:bgPr>
-        <a:solidFill>
-          <a:srgbClr val="0D1117"/>
-        </a:solidFill>
-        <a:effectLst/>
-      </p:bgPr>
-    </p:bg>
-    <p:spTree>
-      <p:nvGrpSpPr>
-        <p:cNvPr id="1" name=""/>
-        <p:cNvGrpSpPr/>
-        <p:nvPr/>
-      </p:nvGrpSpPr>
-      <p:grpSpPr/>
-      <p:sp>
-        <p:nvSpPr>
-          <p:cNvPr id="2" name="TextBox 1"/>
-          <p:cNvSpPr txBox="1"/>
-          <p:nvPr/>
-        </p:nvSpPr>
-        <p:spPr>
-          <a:xfrm>
-            <a:off x="731520" y="411480"/>
-            <a:ext cx="10698480" cy="1005840"/>
-          </a:xfrm>
-          <a:prstGeom prst="rect">
-            <a:avLst/>
-          </a:prstGeom>
-          <a:noFill/>
-        </p:spPr>
-        <p:txBody>
-          <a:bodyPr wrap="square" lIns="0" tIns="0" rIns="0" bIns="0">
-            <a:spAutoFit/>
-          </a:bodyPr>
-          <a:lstStyle/>
-          <a:p>
-            <a:pPr>
-              <a:defRPr sz="1100" b="1">
-                <a:solidFill>
-                  <a:srgbClr val="06B6D4"/>
-                </a:solidFill>
-              </a:defRPr>
-            </a:pPr>
-            <a:r>
-              <a:t>TOGE GAME FUND INITIATIVE (TGFI) PITCH</a:t>
-            </a:r>
-          </a:p>
-          <a:p>
-            <a:pPr>
-              <a:defRPr sz="2400" b="1">
-                <a:solidFill>
-                  <a:srgbClr val="F3F4F6"/>
-                </a:solidFill>
-              </a:defRPr>
-            </a:pPr>
-            <a:r>
-              <a:t>Campaign Structure: Expeditions &amp; Progression</a:t>
-            </a:r>
-          </a:p>
-        </p:txBody>
-      </p:sp>
-      <p:sp>
-        <p:nvSpPr>
-          <p:cNvPr id="3" name="Rounded Rectangle 2"/>
-          <p:cNvSpPr/>
-          <p:nvPr/>
-        </p:nvSpPr>
-        <p:spPr>
-          <a:xfrm>
-            <a:off x="731520" y="1645920"/>
-            <a:ext cx="3383280" cy="3566160"/>
-          </a:xfrm>
-          <a:prstGeom prst="roundRect">
-            <a:avLst/>
-          </a:prstGeom>
-          <a:solidFill>
-            <a:srgbClr val="161B22"/>
-          </a:solidFill>
-          <a:ln w="19050">
-            <a:solidFill>
-              <a:srgbClr val="30363D"/>
-            </a:solidFill>
-          </a:ln>
-        </p:spPr>
-        <p:style>
-          <a:lnRef idx="1">
-            <a:schemeClr val="accent1"/>
-          </a:lnRef>
-          <a:fillRef idx="3">
-            <a:schemeClr val="accent1"/>
-          </a:fillRef>
-          <a:effectRef idx="2">
-            <a:schemeClr val="accent1"/>
-          </a:effectRef>
-          <a:fontRef idx="minor">
-            <a:schemeClr val="lt1"/>
-          </a:fontRef>
-        </p:style>
-        <p:txBody>
-          <a:bodyPr rtlCol="0" anchor="ctr" wrap="square" lIns="182880" rIns="182880" tIns="164592" bIns="164592"/>
-          <a:lstStyle/>
-          <a:p>
-            <a:pPr algn="ctr">
-              <a:spcAft>
-                <a:spcPts val="500"/>
-              </a:spcAft>
-              <a:defRPr b="1" sz="1350">
-                <a:solidFill>
-                  <a:srgbClr val="F59E0B"/>
-                </a:solidFill>
-              </a:defRPr>
-            </a:pPr>
-            <a:r>
-              <a:t>🗺️ Node-Based Map</a:t>
-            </a:r>
-          </a:p>
-          <a:p>
-            <a:pPr>
-              <a:spcAft>
-                <a:spcPts val="300"/>
-              </a:spcAft>
-              <a:defRPr sz="1150">
-                <a:solidFill>
-                  <a:srgbClr val="F3F4F6"/>
-                </a:solidFill>
-              </a:defRPr>
-            </a:pPr>
-            <a:r>
-              <a:t>Branching expedition map inspired by Slay the Spire and Brigandine.</a:t>
-            </a:r>
-          </a:p>
-          <a:p>
-            <a:pPr>
-              <a:spcAft>
-                <a:spcPts val="300"/>
-              </a:spcAft>
-              <a:defRPr sz="1150">
-                <a:solidFill>
-                  <a:srgbClr val="F3F4F6"/>
-                </a:solidFill>
-              </a:defRPr>
-            </a:pPr>
-          </a:p>
-          <a:p>
-            <a:pPr>
-              <a:spcAft>
-                <a:spcPts val="300"/>
-              </a:spcAft>
-              <a:defRPr sz="1150">
-                <a:solidFill>
-                  <a:srgbClr val="F3F4F6"/>
-                </a:solidFill>
-              </a:defRPr>
-            </a:pPr>
-            <a:r>
-              <a:t>Choose your path through skirmishes, elemental shrines, mystery encounters, and rest camps.</a:t>
-            </a:r>
-          </a:p>
-          <a:p>
-            <a:pPr>
-              <a:spcAft>
-                <a:spcPts val="300"/>
-              </a:spcAft>
-              <a:defRPr sz="1150">
-                <a:solidFill>
-                  <a:srgbClr val="F3F4F6"/>
-                </a:solidFill>
-              </a:defRPr>
-            </a:pPr>
-          </a:p>
-          <a:p>
-            <a:pPr>
-              <a:spcAft>
-                <a:spcPts val="300"/>
-              </a:spcAft>
-              <a:defRPr sz="1150">
-                <a:solidFill>
-                  <a:srgbClr val="F3F4F6"/>
-                </a:solidFill>
-              </a:defRPr>
-            </a:pPr>
-            <a:r>
-              <a:t>Every run presents unique terrain challenges.</a:t>
-            </a:r>
-          </a:p>
-        </p:txBody>
-      </p:sp>
-      <p:sp>
-        <p:nvSpPr>
-          <p:cNvPr id="4" name="Rounded Rectangle 3"/>
-          <p:cNvSpPr/>
-          <p:nvPr/>
-        </p:nvSpPr>
-        <p:spPr>
-          <a:xfrm>
-            <a:off x="4389120" y="1645920"/>
-            <a:ext cx="3383280" cy="3566160"/>
-          </a:xfrm>
-          <a:prstGeom prst="roundRect">
-            <a:avLst/>
-          </a:prstGeom>
-          <a:solidFill>
-            <a:srgbClr val="161B22"/>
-          </a:solidFill>
-          <a:ln w="19050">
-            <a:solidFill>
-              <a:srgbClr val="30363D"/>
-            </a:solidFill>
-          </a:ln>
-        </p:spPr>
-        <p:style>
-          <a:lnRef idx="1">
-            <a:schemeClr val="accent1"/>
-          </a:lnRef>
-          <a:fillRef idx="3">
-            <a:schemeClr val="accent1"/>
-          </a:fillRef>
-          <a:effectRef idx="2">
-            <a:schemeClr val="accent1"/>
-          </a:effectRef>
-          <a:fontRef idx="minor">
-            <a:schemeClr val="lt1"/>
-          </a:fontRef>
-        </p:style>
-        <p:txBody>
-          <a:bodyPr rtlCol="0" anchor="ctr" wrap="square" lIns="182880" rIns="182880" tIns="164592" bIns="164592"/>
-          <a:lstStyle/>
-          <a:p>
-            <a:pPr algn="ctr">
-              <a:spcAft>
-                <a:spcPts val="500"/>
-              </a:spcAft>
-              <a:defRPr b="1" sz="1350">
-                <a:solidFill>
-                  <a:srgbClr val="F59E0B"/>
-                </a:solidFill>
-              </a:defRPr>
-            </a:pPr>
-            <a:r>
-              <a:t>🔮 Spellbooks &amp; Monsters</a:t>
-            </a:r>
-          </a:p>
-          <a:p>
-            <a:pPr>
-              <a:spcAft>
-                <a:spcPts val="300"/>
-              </a:spcAft>
-              <a:defRPr sz="1150">
-                <a:solidFill>
-                  <a:srgbClr val="F3F4F6"/>
-                </a:solidFill>
-              </a:defRPr>
-            </a:pPr>
-            <a:r>
-              <a:t>Unlock new elemental disciplines for your Master (Ice, Lightning, Earth).</a:t>
-            </a:r>
-          </a:p>
-          <a:p>
-            <a:pPr>
-              <a:spcAft>
-                <a:spcPts val="300"/>
-              </a:spcAft>
-              <a:defRPr sz="1150">
-                <a:solidFill>
-                  <a:srgbClr val="F3F4F6"/>
-                </a:solidFill>
-              </a:defRPr>
-            </a:pPr>
-          </a:p>
-          <a:p>
-            <a:pPr>
-              <a:spcAft>
-                <a:spcPts val="300"/>
-              </a:spcAft>
-              <a:defRPr sz="1150">
-                <a:solidFill>
-                  <a:srgbClr val="F3F4F6"/>
-                </a:solidFill>
-              </a:defRPr>
-            </a:pPr>
-            <a:r>
-              <a:t>Hatch, evolve, and attune new Monster cohorts with unique passive immunities and Cataclysm ultimates.</a:t>
-            </a:r>
-          </a:p>
-        </p:txBody>
-      </p:sp>
-      <p:sp>
-        <p:nvSpPr>
-          <p:cNvPr id="5" name="Rounded Rectangle 4"/>
-          <p:cNvSpPr/>
-          <p:nvPr/>
-        </p:nvSpPr>
-        <p:spPr>
-          <a:xfrm>
-            <a:off x="8046720" y="1645920"/>
-            <a:ext cx="3383280" cy="3566160"/>
-          </a:xfrm>
-          <a:prstGeom prst="roundRect">
-            <a:avLst/>
-          </a:prstGeom>
-          <a:solidFill>
-            <a:srgbClr val="161B22"/>
-          </a:solidFill>
-          <a:ln w="19050">
-            <a:solidFill>
-              <a:srgbClr val="30363D"/>
-            </a:solidFill>
-          </a:ln>
-        </p:spPr>
-        <p:style>
-          <a:lnRef idx="1">
-            <a:schemeClr val="accent1"/>
-          </a:lnRef>
-          <a:fillRef idx="3">
-            <a:schemeClr val="accent1"/>
-          </a:fillRef>
-          <a:effectRef idx="2">
-            <a:schemeClr val="accent1"/>
-          </a:effectRef>
-          <a:fontRef idx="minor">
-            <a:schemeClr val="lt1"/>
-          </a:fontRef>
-        </p:style>
-        <p:txBody>
-          <a:bodyPr rtlCol="0" anchor="ctr" wrap="square" lIns="182880" rIns="182880" tIns="164592" bIns="164592"/>
-          <a:lstStyle/>
-          <a:p>
-            <a:pPr algn="ctr">
-              <a:spcAft>
-                <a:spcPts val="500"/>
-              </a:spcAft>
-              <a:defRPr b="1" sz="1350">
-                <a:solidFill>
-                  <a:srgbClr val="F59E0B"/>
-                </a:solidFill>
-              </a:defRPr>
-            </a:pPr>
-            <a:r>
-              <a:t>⏱️ Zero-Grind Tactical Depth</a:t>
-            </a:r>
-          </a:p>
-          <a:p>
-            <a:pPr>
-              <a:spcAft>
-                <a:spcPts val="300"/>
-              </a:spcAft>
-              <a:defRPr sz="1150">
-                <a:solidFill>
-                  <a:srgbClr val="F3F4F6"/>
-                </a:solidFill>
-              </a:defRPr>
-            </a:pPr>
-            <a:r>
-              <a:t>No 20-hour stat grinding.</a:t>
-            </a:r>
-          </a:p>
-          <a:p>
-            <a:pPr>
-              <a:spcAft>
-                <a:spcPts val="300"/>
-              </a:spcAft>
-              <a:defRPr sz="1150">
-                <a:solidFill>
-                  <a:srgbClr val="F3F4F6"/>
-                </a:solidFill>
-              </a:defRPr>
-            </a:pPr>
-          </a:p>
-          <a:p>
-            <a:pPr>
-              <a:spcAft>
-                <a:spcPts val="300"/>
-              </a:spcAft>
-              <a:defRPr sz="1150">
-                <a:solidFill>
-                  <a:srgbClr val="F3F4F6"/>
-                </a:solidFill>
-              </a:defRPr>
-            </a:pPr>
-            <a:r>
-              <a:t>Thoughtful, deliberate turn-based tactical battles where success is driven by player skill, positioning, and creative terrain combos—never stat checks.</a:t>
-            </a:r>
-          </a:p>
-        </p:txBody>
-      </p:sp>
-      <p:sp>
-        <p:nvSpPr>
-          <p:cNvPr id="6" name="Rounded Rectangle 5"/>
-          <p:cNvSpPr/>
-          <p:nvPr/>
-        </p:nvSpPr>
-        <p:spPr>
-          <a:xfrm>
-            <a:off x="731520" y="5440680"/>
-            <a:ext cx="10698480" cy="822960"/>
-          </a:xfrm>
-          <a:prstGeom prst="roundRect">
-            <a:avLst/>
-          </a:prstGeom>
-          <a:solidFill>
-            <a:srgbClr val="161B22"/>
-          </a:solidFill>
-          <a:ln w="19050">
-            <a:solidFill>
-              <a:srgbClr val="F59E0B"/>
-            </a:solidFill>
-          </a:ln>
-        </p:spPr>
-        <p:style>
-          <a:lnRef idx="1">
-            <a:schemeClr val="accent1"/>
-          </a:lnRef>
-          <a:fillRef idx="3">
-            <a:schemeClr val="accent1"/>
-          </a:fillRef>
-          <a:effectRef idx="2">
-            <a:schemeClr val="accent1"/>
-          </a:effectRef>
-          <a:fontRef idx="minor">
-            <a:schemeClr val="lt1"/>
-          </a:fontRef>
-        </p:style>
-        <p:txBody>
-          <a:bodyPr rtlCol="0" anchor="ctr" wrap="square" lIns="182880" rIns="182880" tIns="164592" bIns="164592"/>
-          <a:lstStyle/>
-          <a:p>
-            <a:pPr algn="ctr">
-              <a:spcAft>
-                <a:spcPts val="500"/>
-              </a:spcAft>
-              <a:defRPr b="1" sz="1350">
-                <a:solidFill>
-                  <a:srgbClr val="F59E0B"/>
-                </a:solidFill>
-              </a:defRPr>
-            </a:pPr>
-            <a:r>
-              <a:t>🔄 High Replayability</a:t>
-            </a:r>
-          </a:p>
-          <a:p>
-            <a:pPr>
-              <a:spcAft>
-                <a:spcPts val="300"/>
-              </a:spcAft>
-              <a:defRPr sz="1150">
-                <a:solidFill>
-                  <a:srgbClr val="F3F4F6"/>
-                </a:solidFill>
-              </a:defRPr>
-            </a:pPr>
-            <a:r>
-              <a:t>Procedural encounter routes, emergent environmental chemistry, and diverse Master-Monster squad combinations ensure no two runs feel identical.</a:t>
-            </a:r>
-          </a:p>
-        </p:txBody>
-      </p:sp>
-    </p:spTree>
-  </p:cSld>
-  <p:clrMapOvr>
-    <a:masterClrMapping/>
-  </p:clrMapOvr>
-</p:sld>
-</file>
-
 <file path=ppt/slides/slide8.xml><?xml version="1.0" encoding="utf-8"?>
 <p:sld xmlns:a="http://schemas.openxmlformats.org/drawingml/2006/main" xmlns:p="http://schemas.openxmlformats.org/presentationml/2006/main" xmlns:r="http://schemas.openxmlformats.org/officeDocument/2006/relationships">
   <p:cSld>
@@ -8212,7 +8332,7 @@
               </a:defRPr>
             </a:pPr>
             <a:r>
-              <a:t>TOGE GAME FUND INITIATIVE (TGFI) PITCH</a:t>
+              <a:t>TGFI PITCH SECTION 4: ART STYLE &amp; VISUAL BENCHMARK</a:t>
             </a:r>
           </a:p>
           <a:p>
@@ -8224,7 +8344,7 @@
               </a:defRPr>
             </a:pPr>
             <a:r>
-              <a:t>Market Analysis: Target Audience &amp; Comps</a:t>
+              <a:t>Product &amp; Solution: HD-2D Visual Target &amp; Pipeline</a:t>
             </a:r>
           </a:p>
         </p:txBody>
@@ -8237,8 +8357,110 @@
         </p:nvSpPr>
         <p:spPr>
           <a:xfrm>
-            <a:off x="731520" y="1600200"/>
-            <a:ext cx="5212080" cy="1828800"/>
+            <a:off x="731520" y="1645920"/>
+            <a:ext cx="5303520" cy="2240280"/>
+          </a:xfrm>
+          <a:prstGeom prst="roundRect">
+            <a:avLst/>
+          </a:prstGeom>
+          <a:solidFill>
+            <a:srgbClr val="161B22"/>
+          </a:solidFill>
+          <a:ln w="19050">
+            <a:solidFill>
+              <a:srgbClr val="F59E0B"/>
+            </a:solidFill>
+          </a:ln>
+        </p:spPr>
+        <p:style>
+          <a:lnRef idx="1">
+            <a:schemeClr val="accent1"/>
+          </a:lnRef>
+          <a:fillRef idx="3">
+            <a:schemeClr val="accent1"/>
+          </a:fillRef>
+          <a:effectRef idx="2">
+            <a:schemeClr val="accent1"/>
+          </a:effectRef>
+          <a:fontRef idx="minor">
+            <a:schemeClr val="lt1"/>
+          </a:fontRef>
+        </p:style>
+        <p:txBody>
+          <a:bodyPr rtlCol="0" anchor="ctr" wrap="square" lIns="182880" rIns="182880" tIns="164592" bIns="164592"/>
+          <a:lstStyle/>
+          <a:p>
+            <a:pPr algn="ctr">
+              <a:spcAft>
+                <a:spcPts val="500"/>
+              </a:spcAft>
+              <a:defRPr b="1" sz="1350">
+                <a:solidFill>
+                  <a:srgbClr val="F59E0B"/>
+                </a:solidFill>
+              </a:defRPr>
+            </a:pPr>
+            <a:r>
+              <a:t>🎨 Visual Target: HD-2D Aesthetic</a:t>
+            </a:r>
+          </a:p>
+          <a:p>
+            <a:pPr>
+              <a:spcAft>
+                <a:spcPts val="300"/>
+              </a:spcAft>
+              <a:defRPr sz="1150">
+                <a:solidFill>
+                  <a:srgbClr val="F3F4F6"/>
+                </a:solidFill>
+              </a:defRPr>
+            </a:pPr>
+            <a:r>
+              <a:t>• Atmosphere &amp; Lighting: Triangle Strategy tilt-shift depth-of-field, dynamic real-time shadows, and glowing emissive lava veins in Unity 6.</a:t>
+            </a:r>
+          </a:p>
+          <a:p>
+            <a:pPr>
+              <a:spcAft>
+                <a:spcPts val="300"/>
+              </a:spcAft>
+              <a:defRPr sz="1150">
+                <a:solidFill>
+                  <a:srgbClr val="F3F4F6"/>
+                </a:solidFill>
+              </a:defRPr>
+            </a:pPr>
+            <a:r>
+              <a:t>• Silhouettes: Final Fantasy Tactics / Tactics Ogre standees.</a:t>
+            </a:r>
+          </a:p>
+          <a:p>
+            <a:pPr>
+              <a:spcAft>
+                <a:spcPts val="300"/>
+              </a:spcAft>
+              <a:defRPr sz="1150">
+                <a:solidFill>
+                  <a:srgbClr val="F3F4F6"/>
+                </a:solidFill>
+              </a:defRPr>
+            </a:pPr>
+            <a:r>
+              <a:t>• Palette: Vanaris Tactics rich fantasy environmental tones.</a:t>
+            </a:r>
+          </a:p>
+        </p:txBody>
+      </p:sp>
+      <p:sp>
+        <p:nvSpPr>
+          <p:cNvPr id="4" name="Rounded Rectangle 3"/>
+          <p:cNvSpPr/>
+          <p:nvPr/>
+        </p:nvSpPr>
+        <p:spPr>
+          <a:xfrm>
+            <a:off x="731520" y="4160520"/>
+            <a:ext cx="5303520" cy="2103120"/>
           </a:xfrm>
           <a:prstGeom prst="roundRect">
             <a:avLst/>
@@ -8281,434 +8503,80 @@
               </a:defRPr>
             </a:pPr>
             <a:r>
-              <a:t>♟️ Brigandine: Runersia (Happinet)</a:t>
-            </a:r>
-          </a:p>
-          <a:p>
-            <a:pPr>
-              <a:spcAft>
-                <a:spcPts val="300"/>
-              </a:spcAft>
-              <a:defRPr sz="1150">
-                <a:solidFill>
-                  <a:srgbClr val="F3F4F6"/>
-                </a:solidFill>
-              </a:defRPr>
-            </a:pPr>
-            <a:r>
-              <a:t>Publisher: Happinet (Very Positive, 1,300+ Steam Reviews)</a:t>
-            </a:r>
-          </a:p>
-          <a:p>
-            <a:pPr>
-              <a:spcAft>
-                <a:spcPts val="300"/>
-              </a:spcAft>
-              <a:defRPr sz="1150">
-                <a:solidFill>
-                  <a:srgbClr val="F3F4F6"/>
-                </a:solidFill>
-              </a:defRPr>
-            </a:pPr>
-            <a:r>
-              <a:t>What Players Love: Deep hex-grid tactics, monster commanding &amp; terrain affinities.</a:t>
-            </a:r>
-          </a:p>
-          <a:p>
-            <a:pPr>
-              <a:spcAft>
-                <a:spcPts val="300"/>
-              </a:spcAft>
-              <a:defRPr sz="1150">
-                <a:solidFill>
-                  <a:srgbClr val="F3F4F6"/>
-                </a:solidFill>
-              </a:defRPr>
-            </a:pPr>
-            <a:r>
-              <a:t>How We Differentiate: Replaces slow 45-min AA battle animations with streamlined tactical skirmishes; transforms passive terrain buffs into Active Terraforming.</a:t>
-            </a:r>
-          </a:p>
-        </p:txBody>
-      </p:sp>
-      <p:sp>
-        <p:nvSpPr>
-          <p:cNvPr id="4" name="Rounded Rectangle 3"/>
-          <p:cNvSpPr/>
+              <a:t>🖌️ Sprite Animation Framework (Lean &amp; Viable)</a:t>
+            </a:r>
+          </a:p>
+          <a:p>
+            <a:pPr>
+              <a:spcAft>
+                <a:spcPts val="300"/>
+              </a:spcAft>
+              <a:defRPr sz="1150">
+                <a:solidFill>
+                  <a:srgbClr val="F3F4F6"/>
+                </a:solidFill>
+              </a:defRPr>
+            </a:pPr>
+            <a:r>
+              <a:t>• Format: 2-Directional Isometric Standees (Front &amp; Back-Quarter, like Disgaea &amp; Ragnarok Online).</a:t>
+            </a:r>
+          </a:p>
+          <a:p>
+            <a:pPr>
+              <a:spcAft>
+                <a:spcPts val="300"/>
+              </a:spcAft>
+              <a:defRPr sz="1150">
+                <a:solidFill>
+                  <a:srgbClr val="F3F4F6"/>
+                </a:solidFill>
+              </a:defRPr>
+            </a:pPr>
+            <a:r>
+              <a:t>• Snappy Retro Loops: 3-frame combat loops (Idle, Hop, Attack, Hurt).</a:t>
+            </a:r>
+          </a:p>
+          <a:p>
+            <a:pPr>
+              <a:spcAft>
+                <a:spcPts val="300"/>
+              </a:spcAft>
+              <a:defRPr sz="1150">
+                <a:solidFill>
+                  <a:srgbClr val="F3F4F6"/>
+                </a:solidFill>
+              </a:defRPr>
+            </a:pPr>
+            <a:r>
+              <a:t>• Mathematical Sanity: 6 classes x 2 dirs x 10 keyframes = ~120 frames total. Highly viable for $1,200 ($200/class).</a:t>
+            </a:r>
+          </a:p>
+        </p:txBody>
+      </p:sp>
+      <p:pic>
+        <p:nvPicPr>
+          <p:cNvPr id="5" name="Picture 4" descr="slide9_visual_benchmark.png"/>
+          <p:cNvPicPr>
+            <a:picLocks noChangeAspect="1"/>
+          </p:cNvPicPr>
           <p:nvPr/>
-        </p:nvSpPr>
+        </p:nvPicPr>
+        <p:blipFill>
+          <a:blip r:embed="rId2"/>
+          <a:stretch>
+            <a:fillRect/>
+          </a:stretch>
+        </p:blipFill>
         <p:spPr>
           <a:xfrm>
-            <a:off x="6217920" y="1600200"/>
-            <a:ext cx="5212080" cy="1828800"/>
+            <a:off x="6400800" y="1463040"/>
+            <a:ext cx="4214191" cy="4846320"/>
           </a:xfrm>
-          <a:prstGeom prst="roundRect">
+          <a:prstGeom prst="rect">
             <a:avLst/>
           </a:prstGeom>
-          <a:solidFill>
-            <a:srgbClr val="161B22"/>
-          </a:solidFill>
-          <a:ln w="19050">
-            <a:solidFill>
-              <a:srgbClr val="F59E0B"/>
-            </a:solidFill>
-          </a:ln>
         </p:spPr>
-        <p:style>
-          <a:lnRef idx="1">
-            <a:schemeClr val="accent1"/>
-          </a:lnRef>
-          <a:fillRef idx="3">
-            <a:schemeClr val="accent1"/>
-          </a:fillRef>
-          <a:effectRef idx="2">
-            <a:schemeClr val="accent1"/>
-          </a:effectRef>
-          <a:fontRef idx="minor">
-            <a:schemeClr val="lt1"/>
-          </a:fontRef>
-        </p:style>
-        <p:txBody>
-          <a:bodyPr rtlCol="0" anchor="ctr" wrap="square" lIns="182880" rIns="182880" tIns="164592" bIns="164592"/>
-          <a:lstStyle/>
-          <a:p>
-            <a:pPr algn="ctr">
-              <a:spcAft>
-                <a:spcPts val="500"/>
-              </a:spcAft>
-              <a:defRPr b="1" sz="1350">
-                <a:solidFill>
-                  <a:srgbClr val="F59E0B"/>
-                </a:solidFill>
-              </a:defRPr>
-            </a:pPr>
-            <a:r>
-              <a:t>🛡️ Vanaris Tactics (Toge)</a:t>
-            </a:r>
-          </a:p>
-          <a:p>
-            <a:pPr>
-              <a:spcAft>
-                <a:spcPts val="300"/>
-              </a:spcAft>
-              <a:defRPr sz="1150">
-                <a:solidFill>
-                  <a:srgbClr val="F3F4F6"/>
-                </a:solidFill>
-              </a:defRPr>
-            </a:pPr>
-            <a:r>
-              <a:t>Publisher: Toge Productions (Beloved Retro Tactics)</a:t>
-            </a:r>
-          </a:p>
-          <a:p>
-            <a:pPr>
-              <a:spcAft>
-                <a:spcPts val="300"/>
-              </a:spcAft>
-              <a:defRPr sz="1150">
-                <a:solidFill>
-                  <a:srgbClr val="F3F4F6"/>
-                </a:solidFill>
-              </a:defRPr>
-            </a:pPr>
-            <a:r>
-              <a:t>What Players Love: Classic retro FFT charm, beloved pixel art storytelling.</a:t>
-            </a:r>
-          </a:p>
-          <a:p>
-            <a:pPr>
-              <a:spcAft>
-                <a:spcPts val="300"/>
-              </a:spcAft>
-              <a:defRPr sz="1150">
-                <a:solidFill>
-                  <a:srgbClr val="F3F4F6"/>
-                </a:solidFill>
-              </a:defRPr>
-            </a:pPr>
-            <a:r>
-              <a:t>How We Differentiate: Adds 3D multi-level hex elevations, kinetic shove impact physics, and real-time elemental landscape destruction.</a:t>
-            </a:r>
-          </a:p>
-        </p:txBody>
-      </p:sp>
-      <p:sp>
-        <p:nvSpPr>
-          <p:cNvPr id="5" name="Rounded Rectangle 4"/>
-          <p:cNvSpPr/>
-          <p:nvPr/>
-        </p:nvSpPr>
-        <p:spPr>
-          <a:xfrm>
-            <a:off x="731520" y="3566160"/>
-            <a:ext cx="5212080" cy="1828800"/>
-          </a:xfrm>
-          <a:prstGeom prst="roundRect">
-            <a:avLst/>
-          </a:prstGeom>
-          <a:solidFill>
-            <a:srgbClr val="161B22"/>
-          </a:solidFill>
-          <a:ln w="19050">
-            <a:solidFill>
-              <a:srgbClr val="10B981"/>
-            </a:solidFill>
-          </a:ln>
-        </p:spPr>
-        <p:style>
-          <a:lnRef idx="1">
-            <a:schemeClr val="accent1"/>
-          </a:lnRef>
-          <a:fillRef idx="3">
-            <a:schemeClr val="accent1"/>
-          </a:fillRef>
-          <a:effectRef idx="2">
-            <a:schemeClr val="accent1"/>
-          </a:effectRef>
-          <a:fontRef idx="minor">
-            <a:schemeClr val="lt1"/>
-          </a:fontRef>
-        </p:style>
-        <p:txBody>
-          <a:bodyPr rtlCol="0" anchor="ctr" wrap="square" lIns="182880" rIns="182880" tIns="164592" bIns="164592"/>
-          <a:lstStyle/>
-          <a:p>
-            <a:pPr algn="ctr">
-              <a:spcAft>
-                <a:spcPts val="500"/>
-              </a:spcAft>
-              <a:defRPr b="1" sz="1350">
-                <a:solidFill>
-                  <a:srgbClr val="10B981"/>
-                </a:solidFill>
-              </a:defRPr>
-            </a:pPr>
-            <a:r>
-              <a:t>💥 Into the Breach (Subset)</a:t>
-            </a:r>
-          </a:p>
-          <a:p>
-            <a:pPr>
-              <a:spcAft>
-                <a:spcPts val="300"/>
-              </a:spcAft>
-              <a:defRPr sz="1150">
-                <a:solidFill>
-                  <a:srgbClr val="F3F4F6"/>
-                </a:solidFill>
-              </a:defRPr>
-            </a:pPr>
-            <a:r>
-              <a:t>Publisher: Subset Games (Overwhelmingly Positive)</a:t>
-            </a:r>
-          </a:p>
-          <a:p>
-            <a:pPr>
-              <a:spcAft>
-                <a:spcPts val="300"/>
-              </a:spcAft>
-              <a:defRPr sz="1150">
-                <a:solidFill>
-                  <a:srgbClr val="F3F4F6"/>
-                </a:solidFill>
-              </a:defRPr>
-            </a:pPr>
-            <a:r>
-              <a:t>What Players Love: Masterpiece of kinetic knockback puzzles.</a:t>
-            </a:r>
-          </a:p>
-          <a:p>
-            <a:pPr>
-              <a:spcAft>
-                <a:spcPts val="300"/>
-              </a:spcAft>
-              <a:defRPr sz="1150">
-                <a:solidFill>
-                  <a:srgbClr val="F3F4F6"/>
-                </a:solidFill>
-              </a:defRPr>
-            </a:pPr>
-            <a:r>
-              <a:t>How We Differentiate: Marries push puzzles with fantasy RPG squad progression, elevation tiers, and land siphoning for Titan cataclysms.</a:t>
-            </a:r>
-          </a:p>
-        </p:txBody>
-      </p:sp>
-      <p:sp>
-        <p:nvSpPr>
-          <p:cNvPr id="6" name="Rounded Rectangle 5"/>
-          <p:cNvSpPr/>
-          <p:nvPr/>
-        </p:nvSpPr>
-        <p:spPr>
-          <a:xfrm>
-            <a:off x="6217920" y="3566160"/>
-            <a:ext cx="5212080" cy="1828800"/>
-          </a:xfrm>
-          <a:prstGeom prst="roundRect">
-            <a:avLst/>
-          </a:prstGeom>
-          <a:solidFill>
-            <a:srgbClr val="161B22"/>
-          </a:solidFill>
-          <a:ln w="19050">
-            <a:solidFill>
-              <a:srgbClr val="06B6D4"/>
-            </a:solidFill>
-          </a:ln>
-        </p:spPr>
-        <p:style>
-          <a:lnRef idx="1">
-            <a:schemeClr val="accent1"/>
-          </a:lnRef>
-          <a:fillRef idx="3">
-            <a:schemeClr val="accent1"/>
-          </a:fillRef>
-          <a:effectRef idx="2">
-            <a:schemeClr val="accent1"/>
-          </a:effectRef>
-          <a:fontRef idx="minor">
-            <a:schemeClr val="lt1"/>
-          </a:fontRef>
-        </p:style>
-        <p:txBody>
-          <a:bodyPr rtlCol="0" anchor="ctr" wrap="square" lIns="182880" rIns="182880" tIns="164592" bIns="164592"/>
-          <a:lstStyle/>
-          <a:p>
-            <a:pPr algn="ctr">
-              <a:spcAft>
-                <a:spcPts val="500"/>
-              </a:spcAft>
-              <a:defRPr b="1" sz="1350">
-                <a:solidFill>
-                  <a:srgbClr val="06B6D4"/>
-                </a:solidFill>
-              </a:defRPr>
-            </a:pPr>
-            <a:r>
-              <a:t>⚔️ Triangle Strategy (Square Enix)</a:t>
-            </a:r>
-          </a:p>
-          <a:p>
-            <a:pPr>
-              <a:spcAft>
-                <a:spcPts val="300"/>
-              </a:spcAft>
-              <a:defRPr sz="1150">
-                <a:solidFill>
-                  <a:srgbClr val="F3F4F6"/>
-                </a:solidFill>
-              </a:defRPr>
-            </a:pPr>
-            <a:r>
-              <a:t>Publisher: Square Enix (HD-2D Tactical RPG)</a:t>
-            </a:r>
-          </a:p>
-          <a:p>
-            <a:pPr>
-              <a:spcAft>
-                <a:spcPts val="300"/>
-              </a:spcAft>
-              <a:defRPr sz="1150">
-                <a:solidFill>
-                  <a:srgbClr val="F3F4F6"/>
-                </a:solidFill>
-              </a:defRPr>
-            </a:pPr>
-            <a:r>
-              <a:t>What Players Love: Modern HD-2D presentation &amp; elemental interactions.</a:t>
-            </a:r>
-          </a:p>
-          <a:p>
-            <a:pPr>
-              <a:spcAft>
-                <a:spcPts val="300"/>
-              </a:spcAft>
-              <a:defRPr sz="1150">
-                <a:solidFill>
-                  <a:srgbClr val="F3F4F6"/>
-                </a:solidFill>
-              </a:defRPr>
-            </a:pPr>
-            <a:r>
-              <a:t>How We Differentiate: Streamlined tactical flow designed for modern indie players with zero level-grinding and deeper terrain chemistry.</a:t>
-            </a:r>
-          </a:p>
-        </p:txBody>
-      </p:sp>
-      <p:sp>
-        <p:nvSpPr>
-          <p:cNvPr id="7" name="Rounded Rectangle 6"/>
-          <p:cNvSpPr/>
-          <p:nvPr/>
-        </p:nvSpPr>
-        <p:spPr>
-          <a:xfrm>
-            <a:off x="731520" y="5532120"/>
-            <a:ext cx="10698480" cy="777240"/>
-          </a:xfrm>
-          <a:prstGeom prst="roundRect">
-            <a:avLst/>
-          </a:prstGeom>
-          <a:solidFill>
-            <a:srgbClr val="161B22"/>
-          </a:solidFill>
-          <a:ln w="19050">
-            <a:solidFill>
-              <a:srgbClr val="F59E0B"/>
-            </a:solidFill>
-          </a:ln>
-        </p:spPr>
-        <p:style>
-          <a:lnRef idx="1">
-            <a:schemeClr val="accent1"/>
-          </a:lnRef>
-          <a:fillRef idx="3">
-            <a:schemeClr val="accent1"/>
-          </a:fillRef>
-          <a:effectRef idx="2">
-            <a:schemeClr val="accent1"/>
-          </a:effectRef>
-          <a:fontRef idx="minor">
-            <a:schemeClr val="lt1"/>
-          </a:fontRef>
-        </p:style>
-        <p:txBody>
-          <a:bodyPr rtlCol="0" anchor="ctr" wrap="square" lIns="182880" rIns="182880" tIns="164592" bIns="164592"/>
-          <a:lstStyle/>
-          <a:p>
-            <a:pPr algn="ctr">
-              <a:spcAft>
-                <a:spcPts val="500"/>
-              </a:spcAft>
-              <a:defRPr b="1" sz="1350">
-                <a:solidFill>
-                  <a:srgbClr val="F59E0B"/>
-                </a:solidFill>
-              </a:defRPr>
-            </a:pPr>
-            <a:r>
-              <a:t>🎯 The Market Opportunity</a:t>
-            </a:r>
-          </a:p>
-          <a:p>
-            <a:pPr>
-              <a:spcAft>
-                <a:spcPts val="300"/>
-              </a:spcAft>
-              <a:defRPr sz="1150">
-                <a:solidFill>
-                  <a:srgbClr val="F3F4F6"/>
-                </a:solidFill>
-              </a:defRPr>
-            </a:pPr>
-            <a:r>
-              <a:t>Players love Brigandine's hex-grid monster fantasy and Into the Breach's puzzle clarity—Elemental Hex Tactics marries both into streamlined, deliberate HD-2D matches with active terraforming.</a:t>
-            </a:r>
-          </a:p>
-        </p:txBody>
-      </p:sp>
+      </p:pic>
     </p:spTree>
   </p:cSld>
   <p:clrMapOvr>
@@ -8765,7 +8633,7 @@
               </a:defRPr>
             </a:pPr>
             <a:r>
-              <a:t>ART DIRECTION &amp; PRODUCTION BENCHMARK</a:t>
+              <a:t>TGFI PITCH SECTION 4: META STRUCTURE &amp; REPLAYABILITY</a:t>
             </a:r>
           </a:p>
           <a:p>
@@ -8777,7 +8645,7 @@
               </a:defRPr>
             </a:pPr>
             <a:r>
-              <a:t>Visual Target: HD-2D Aesthetic &amp; Reference Pipeline</a:t>
+              <a:t>Product &amp; Solution: Campaign &amp; Progression</a:t>
             </a:r>
           </a:p>
         </p:txBody>
@@ -8791,7 +8659,331 @@
         <p:spPr>
           <a:xfrm>
             <a:off x="731520" y="1645920"/>
-            <a:ext cx="5303520" cy="2240280"/>
+            <a:ext cx="3383280" cy="3566160"/>
+          </a:xfrm>
+          <a:prstGeom prst="roundRect">
+            <a:avLst/>
+          </a:prstGeom>
+          <a:solidFill>
+            <a:srgbClr val="161B22"/>
+          </a:solidFill>
+          <a:ln w="19050">
+            <a:solidFill>
+              <a:srgbClr val="30363D"/>
+            </a:solidFill>
+          </a:ln>
+        </p:spPr>
+        <p:style>
+          <a:lnRef idx="1">
+            <a:schemeClr val="accent1"/>
+          </a:lnRef>
+          <a:fillRef idx="3">
+            <a:schemeClr val="accent1"/>
+          </a:fillRef>
+          <a:effectRef idx="2">
+            <a:schemeClr val="accent1"/>
+          </a:effectRef>
+          <a:fontRef idx="minor">
+            <a:schemeClr val="lt1"/>
+          </a:fontRef>
+        </p:style>
+        <p:txBody>
+          <a:bodyPr rtlCol="0" anchor="ctr" wrap="square" lIns="182880" rIns="182880" tIns="164592" bIns="164592"/>
+          <a:lstStyle/>
+          <a:p>
+            <a:pPr algn="ctr">
+              <a:spcAft>
+                <a:spcPts val="500"/>
+              </a:spcAft>
+              <a:defRPr b="1" sz="1350">
+                <a:solidFill>
+                  <a:srgbClr val="F59E0B"/>
+                </a:solidFill>
+              </a:defRPr>
+            </a:pPr>
+            <a:r>
+              <a:t>🗺️ Node-Based Map</a:t>
+            </a:r>
+          </a:p>
+          <a:p>
+            <a:pPr>
+              <a:spcAft>
+                <a:spcPts val="300"/>
+              </a:spcAft>
+              <a:defRPr sz="1150">
+                <a:solidFill>
+                  <a:srgbClr val="F3F4F6"/>
+                </a:solidFill>
+              </a:defRPr>
+            </a:pPr>
+            <a:r>
+              <a:t>Branching expedition map inspired by Slay the Spire and Brigandine.</a:t>
+            </a:r>
+          </a:p>
+          <a:p>
+            <a:pPr>
+              <a:spcAft>
+                <a:spcPts val="300"/>
+              </a:spcAft>
+              <a:defRPr sz="1150">
+                <a:solidFill>
+                  <a:srgbClr val="F3F4F6"/>
+                </a:solidFill>
+              </a:defRPr>
+            </a:pPr>
+          </a:p>
+          <a:p>
+            <a:pPr>
+              <a:spcAft>
+                <a:spcPts val="300"/>
+              </a:spcAft>
+              <a:defRPr sz="1150">
+                <a:solidFill>
+                  <a:srgbClr val="F3F4F6"/>
+                </a:solidFill>
+              </a:defRPr>
+            </a:pPr>
+            <a:r>
+              <a:t>Choose your path through skirmishes, elemental shrines, mystery encounters, and rest camps.</a:t>
+            </a:r>
+          </a:p>
+          <a:p>
+            <a:pPr>
+              <a:spcAft>
+                <a:spcPts val="300"/>
+              </a:spcAft>
+              <a:defRPr sz="1150">
+                <a:solidFill>
+                  <a:srgbClr val="F3F4F6"/>
+                </a:solidFill>
+              </a:defRPr>
+            </a:pPr>
+          </a:p>
+          <a:p>
+            <a:pPr>
+              <a:spcAft>
+                <a:spcPts val="300"/>
+              </a:spcAft>
+              <a:defRPr sz="1150">
+                <a:solidFill>
+                  <a:srgbClr val="F3F4F6"/>
+                </a:solidFill>
+              </a:defRPr>
+            </a:pPr>
+            <a:r>
+              <a:t>Every run presents unique terrain challenges.</a:t>
+            </a:r>
+          </a:p>
+        </p:txBody>
+      </p:sp>
+      <p:sp>
+        <p:nvSpPr>
+          <p:cNvPr id="4" name="Rounded Rectangle 3"/>
+          <p:cNvSpPr/>
+          <p:nvPr/>
+        </p:nvSpPr>
+        <p:spPr>
+          <a:xfrm>
+            <a:off x="4389120" y="1645920"/>
+            <a:ext cx="3383280" cy="3566160"/>
+          </a:xfrm>
+          <a:prstGeom prst="roundRect">
+            <a:avLst/>
+          </a:prstGeom>
+          <a:solidFill>
+            <a:srgbClr val="161B22"/>
+          </a:solidFill>
+          <a:ln w="19050">
+            <a:solidFill>
+              <a:srgbClr val="30363D"/>
+            </a:solidFill>
+          </a:ln>
+        </p:spPr>
+        <p:style>
+          <a:lnRef idx="1">
+            <a:schemeClr val="accent1"/>
+          </a:lnRef>
+          <a:fillRef idx="3">
+            <a:schemeClr val="accent1"/>
+          </a:fillRef>
+          <a:effectRef idx="2">
+            <a:schemeClr val="accent1"/>
+          </a:effectRef>
+          <a:fontRef idx="minor">
+            <a:schemeClr val="lt1"/>
+          </a:fontRef>
+        </p:style>
+        <p:txBody>
+          <a:bodyPr rtlCol="0" anchor="ctr" wrap="square" lIns="182880" rIns="182880" tIns="164592" bIns="164592"/>
+          <a:lstStyle/>
+          <a:p>
+            <a:pPr algn="ctr">
+              <a:spcAft>
+                <a:spcPts val="500"/>
+              </a:spcAft>
+              <a:defRPr b="1" sz="1350">
+                <a:solidFill>
+                  <a:srgbClr val="F59E0B"/>
+                </a:solidFill>
+              </a:defRPr>
+            </a:pPr>
+            <a:r>
+              <a:t>🔮 Spellbooks &amp; Monsters</a:t>
+            </a:r>
+          </a:p>
+          <a:p>
+            <a:pPr>
+              <a:spcAft>
+                <a:spcPts val="300"/>
+              </a:spcAft>
+              <a:defRPr sz="1150">
+                <a:solidFill>
+                  <a:srgbClr val="F3F4F6"/>
+                </a:solidFill>
+              </a:defRPr>
+            </a:pPr>
+            <a:r>
+              <a:t>Unlock new elemental disciplines for your Master (Ice, Lightning, Earth).</a:t>
+            </a:r>
+          </a:p>
+          <a:p>
+            <a:pPr>
+              <a:spcAft>
+                <a:spcPts val="300"/>
+              </a:spcAft>
+              <a:defRPr sz="1150">
+                <a:solidFill>
+                  <a:srgbClr val="F3F4F6"/>
+                </a:solidFill>
+              </a:defRPr>
+            </a:pPr>
+          </a:p>
+          <a:p>
+            <a:pPr>
+              <a:spcAft>
+                <a:spcPts val="300"/>
+              </a:spcAft>
+              <a:defRPr sz="1150">
+                <a:solidFill>
+                  <a:srgbClr val="F3F4F6"/>
+                </a:solidFill>
+              </a:defRPr>
+            </a:pPr>
+            <a:r>
+              <a:t>Hatch, evolve, and attune new Monster cohorts with unique passive immunities and Cataclysm ultimates.</a:t>
+            </a:r>
+          </a:p>
+        </p:txBody>
+      </p:sp>
+      <p:sp>
+        <p:nvSpPr>
+          <p:cNvPr id="5" name="Rounded Rectangle 4"/>
+          <p:cNvSpPr/>
+          <p:nvPr/>
+        </p:nvSpPr>
+        <p:spPr>
+          <a:xfrm>
+            <a:off x="8046720" y="1645920"/>
+            <a:ext cx="3383280" cy="3566160"/>
+          </a:xfrm>
+          <a:prstGeom prst="roundRect">
+            <a:avLst/>
+          </a:prstGeom>
+          <a:solidFill>
+            <a:srgbClr val="161B22"/>
+          </a:solidFill>
+          <a:ln w="19050">
+            <a:solidFill>
+              <a:srgbClr val="30363D"/>
+            </a:solidFill>
+          </a:ln>
+        </p:spPr>
+        <p:style>
+          <a:lnRef idx="1">
+            <a:schemeClr val="accent1"/>
+          </a:lnRef>
+          <a:fillRef idx="3">
+            <a:schemeClr val="accent1"/>
+          </a:fillRef>
+          <a:effectRef idx="2">
+            <a:schemeClr val="accent1"/>
+          </a:effectRef>
+          <a:fontRef idx="minor">
+            <a:schemeClr val="lt1"/>
+          </a:fontRef>
+        </p:style>
+        <p:txBody>
+          <a:bodyPr rtlCol="0" anchor="ctr" wrap="square" lIns="182880" rIns="182880" tIns="164592" bIns="164592"/>
+          <a:lstStyle/>
+          <a:p>
+            <a:pPr algn="ctr">
+              <a:spcAft>
+                <a:spcPts val="500"/>
+              </a:spcAft>
+              <a:defRPr b="1" sz="1350">
+                <a:solidFill>
+                  <a:srgbClr val="F59E0B"/>
+                </a:solidFill>
+              </a:defRPr>
+            </a:pPr>
+            <a:r>
+              <a:t>⏱️ Zero-Grind Tactical Depth</a:t>
+            </a:r>
+          </a:p>
+          <a:p>
+            <a:pPr>
+              <a:spcAft>
+                <a:spcPts val="300"/>
+              </a:spcAft>
+              <a:defRPr sz="1150">
+                <a:solidFill>
+                  <a:srgbClr val="F3F4F6"/>
+                </a:solidFill>
+              </a:defRPr>
+            </a:pPr>
+            <a:r>
+              <a:t>No 20-hour stat grinding.</a:t>
+            </a:r>
+          </a:p>
+          <a:p>
+            <a:pPr>
+              <a:spcAft>
+                <a:spcPts val="300"/>
+              </a:spcAft>
+              <a:defRPr sz="1150">
+                <a:solidFill>
+                  <a:srgbClr val="F3F4F6"/>
+                </a:solidFill>
+              </a:defRPr>
+            </a:pPr>
+          </a:p>
+          <a:p>
+            <a:pPr>
+              <a:spcAft>
+                <a:spcPts val="300"/>
+              </a:spcAft>
+              <a:defRPr sz="1150">
+                <a:solidFill>
+                  <a:srgbClr val="F3F4F6"/>
+                </a:solidFill>
+              </a:defRPr>
+            </a:pPr>
+            <a:r>
+              <a:t>Thoughtful, deliberate turn-based tactical battles where success is driven by player skill, positioning, and creative terrain combos—never stat checks.</a:t>
+            </a:r>
+          </a:p>
+        </p:txBody>
+      </p:sp>
+      <p:sp>
+        <p:nvSpPr>
+          <p:cNvPr id="6" name="Rounded Rectangle 5"/>
+          <p:cNvSpPr/>
+          <p:nvPr/>
+        </p:nvSpPr>
+        <p:spPr>
+          <a:xfrm>
+            <a:off x="731520" y="5440680"/>
+            <a:ext cx="10698480" cy="822960"/>
           </a:xfrm>
           <a:prstGeom prst="roundRect">
             <a:avLst/>
@@ -8834,182 +9026,26 @@
               </a:defRPr>
             </a:pPr>
             <a:r>
-              <a:t>🎨 Visual Target: HD-2D Aesthetic</a:t>
-            </a:r>
-          </a:p>
-          <a:p>
-            <a:pPr>
-              <a:spcAft>
-                <a:spcPts val="300"/>
-              </a:spcAft>
-              <a:defRPr sz="1150">
-                <a:solidFill>
-                  <a:srgbClr val="F3F4F6"/>
-                </a:solidFill>
-              </a:defRPr>
-            </a:pPr>
-            <a:r>
-              <a:t>• Atmosphere &amp; Lighting: Triangle Strategy tilt-shift depth-of-field, dynamic real-time shadows, and glowing emissive lava veins.</a:t>
-            </a:r>
-          </a:p>
-          <a:p>
-            <a:pPr>
-              <a:spcAft>
-                <a:spcPts val="300"/>
-              </a:spcAft>
-              <a:defRPr sz="1150">
-                <a:solidFill>
-                  <a:srgbClr val="F3F4F6"/>
-                </a:solidFill>
-              </a:defRPr>
-            </a:pPr>
-            <a:r>
-              <a:t>• Silhouettes: Final Fantasy Tactics / Tactics Ogre standees.</a:t>
-            </a:r>
-          </a:p>
-          <a:p>
-            <a:pPr>
-              <a:spcAft>
-                <a:spcPts val="300"/>
-              </a:spcAft>
-              <a:defRPr sz="1150">
-                <a:solidFill>
-                  <a:srgbClr val="F3F4F6"/>
-                </a:solidFill>
-              </a:defRPr>
-            </a:pPr>
-            <a:r>
-              <a:t>• Palette: Vanaris Tactics rich fantasy environmental tones.</a:t>
-            </a:r>
-          </a:p>
-        </p:txBody>
-      </p:sp>
-      <p:sp>
-        <p:nvSpPr>
-          <p:cNvPr id="4" name="Rounded Rectangle 3"/>
-          <p:cNvSpPr/>
-          <p:nvPr/>
-        </p:nvSpPr>
-        <p:spPr>
-          <a:xfrm>
-            <a:off x="731520" y="4160520"/>
-            <a:ext cx="5303520" cy="2103120"/>
-          </a:xfrm>
-          <a:prstGeom prst="roundRect">
-            <a:avLst/>
-          </a:prstGeom>
-          <a:solidFill>
-            <a:srgbClr val="161B22"/>
-          </a:solidFill>
-          <a:ln w="19050">
-            <a:solidFill>
-              <a:srgbClr val="06B6D4"/>
-            </a:solidFill>
-          </a:ln>
-        </p:spPr>
-        <p:style>
-          <a:lnRef idx="1">
-            <a:schemeClr val="accent1"/>
-          </a:lnRef>
-          <a:fillRef idx="3">
-            <a:schemeClr val="accent1"/>
-          </a:fillRef>
-          <a:effectRef idx="2">
-            <a:schemeClr val="accent1"/>
-          </a:effectRef>
-          <a:fontRef idx="minor">
-            <a:schemeClr val="lt1"/>
-          </a:fontRef>
-        </p:style>
-        <p:txBody>
-          <a:bodyPr rtlCol="0" anchor="ctr" wrap="square" lIns="182880" rIns="182880" tIns="164592" bIns="164592"/>
-          <a:lstStyle/>
-          <a:p>
-            <a:pPr algn="ctr">
-              <a:spcAft>
-                <a:spcPts val="500"/>
-              </a:spcAft>
-              <a:defRPr b="1" sz="1350">
-                <a:solidFill>
-                  <a:srgbClr val="06B6D4"/>
-                </a:solidFill>
-              </a:defRPr>
-            </a:pPr>
-            <a:r>
-              <a:t>🖌️ Sprite Animation Framework (Lean &amp; Viable)</a:t>
-            </a:r>
-          </a:p>
-          <a:p>
-            <a:pPr>
-              <a:spcAft>
-                <a:spcPts val="300"/>
-              </a:spcAft>
-              <a:defRPr sz="1150">
-                <a:solidFill>
-                  <a:srgbClr val="F3F4F6"/>
-                </a:solidFill>
-              </a:defRPr>
-            </a:pPr>
-            <a:r>
-              <a:t>• Format: 2-Directional Isometric Standees (Front &amp; Back-Quarter, like Disgaea &amp; Ragnarok Online).</a:t>
-            </a:r>
-          </a:p>
-          <a:p>
-            <a:pPr>
-              <a:spcAft>
-                <a:spcPts val="300"/>
-              </a:spcAft>
-              <a:defRPr sz="1150">
-                <a:solidFill>
-                  <a:srgbClr val="F3F4F6"/>
-                </a:solidFill>
-              </a:defRPr>
-            </a:pPr>
-            <a:r>
-              <a:t>• Snappy Retro Loops: 3-frame combat loops (Idle, Hop, Attack, Hurt).</a:t>
-            </a:r>
-          </a:p>
-          <a:p>
-            <a:pPr>
-              <a:spcAft>
-                <a:spcPts val="300"/>
-              </a:spcAft>
-              <a:defRPr sz="1150">
-                <a:solidFill>
-                  <a:srgbClr val="F3F4F6"/>
-                </a:solidFill>
-              </a:defRPr>
-            </a:pPr>
-            <a:r>
-              <a:t>• Mathematical Sanity: 6 classes x 2 dirs x 10 keyframes = ~120 frames total. Highly viable for $1,200 ($200/class).</a:t>
-            </a:r>
-          </a:p>
-        </p:txBody>
-      </p:sp>
-      <p:pic>
-        <p:nvPicPr>
-          <p:cNvPr id="5" name="Picture 4" descr="slide9_visual_benchmark.png"/>
-          <p:cNvPicPr>
-            <a:picLocks noChangeAspect="1"/>
-          </p:cNvPicPr>
-          <p:nvPr/>
-        </p:nvPicPr>
-        <p:blipFill>
-          <a:blip r:embed="rId2"/>
-          <a:stretch>
-            <a:fillRect/>
-          </a:stretch>
-        </p:blipFill>
-        <p:spPr>
-          <a:xfrm>
-            <a:off x="6400800" y="1463040"/>
-            <a:ext cx="4214191" cy="4846320"/>
-          </a:xfrm>
-          <a:prstGeom prst="rect">
-            <a:avLst/>
-          </a:prstGeom>
-        </p:spPr>
-      </p:pic>
+              <a:t>🔄 High Replayability</a:t>
+            </a:r>
+          </a:p>
+          <a:p>
+            <a:pPr>
+              <a:spcAft>
+                <a:spcPts val="300"/>
+              </a:spcAft>
+              <a:defRPr sz="1150">
+                <a:solidFill>
+                  <a:srgbClr val="F3F4F6"/>
+                </a:solidFill>
+              </a:defRPr>
+            </a:pPr>
+            <a:r>
+              <a:t>Procedural encounter routes, emergent environmental chemistry, and diverse Master-Monster squad combinations ensure no two runs feel identical.</a:t>
+            </a:r>
+          </a:p>
+        </p:txBody>
+      </p:sp>
     </p:spTree>
   </p:cSld>
   <p:clrMapOvr>

--- a/ElementalHexTactics_PitchDeck.pptx
+++ b/ElementalHexTactics_PitchDeck.pptx
@@ -12,10 +12,6 @@
     <p:sldId id="260" r:id="rId12"/>
     <p:sldId id="261" r:id="rId13"/>
     <p:sldId id="262" r:id="rId14"/>
-    <p:sldId id="263" r:id="rId15"/>
-    <p:sldId id="264" r:id="rId16"/>
-    <p:sldId id="265" r:id="rId17"/>
-    <p:sldId id="266" r:id="rId18"/>
   </p:sldIdLst>
   <p:sldSz cx="12191695" cy="6858000" type="screen4x3"/>
   <p:notesSz cx="6858000" cy="9144000"/>
@@ -512,147 +508,7 @@
           <a:lstStyle/>
           <a:p>
             <a:r>
-              <a:t>Hi Kris and the Toge team, I'm Elang, a solo indie developer from Indonesia. Today I'm pitching Elemental Hex Tactics, a 2.5D tactical RPG inspired by Brigandine and Final Fantasy Tactics, where players command both Masters and Monsters while terraforming the board as an interactive weapon.</a:t>
-            </a:r>
-          </a:p>
-        </p:txBody>
-      </p:sp>
-      <p:sp>
-        <p:nvSpPr>
-          <p:cNvPr id="4" name="Slide Number Placeholder 3"/>
-          <p:cNvSpPr>
-            <a:spLocks noGrp="1"/>
-          </p:cNvSpPr>
-          <p:nvPr>
-            <p:ph type="sldNum" idx="5" sz="quarter"/>
-          </p:nvPr>
-        </p:nvSpPr>
-        <p:spPr/>
-      </p:sp>
-    </p:spTree>
-  </p:cSld>
-  <p:clrMapOvr>
-    <a:masterClrMapping/>
-  </p:clrMapOvr>
-</p:notes>
-</file>
-
-<file path=ppt/notesSlides/notesSlide10.xml><?xml version="1.0" encoding="utf-8"?>
-<p:notes xmlns:a="http://schemas.openxmlformats.org/drawingml/2006/main" xmlns:p="http://schemas.openxmlformats.org/presentationml/2006/main" xmlns:r="http://schemas.openxmlformats.org/officeDocument/2006/relationships">
-  <p:cSld>
-    <p:spTree>
-      <p:nvGrpSpPr>
-        <p:cNvPr id="1" name=""/>
-        <p:cNvGrpSpPr/>
-        <p:nvPr/>
-      </p:nvGrpSpPr>
-      <p:grpSpPr>
-        <a:xfrm>
-          <a:off x="0" y="0"/>
-          <a:ext cx="0" cy="0"/>
-          <a:chOff x="0" y="0"/>
-          <a:chExt cx="0" cy="0"/>
-        </a:xfrm>
-      </p:grpSpPr>
-      <p:sp>
-        <p:nvSpPr>
-          <p:cNvPr id="2" name="Slide Image Placeholder 1"/>
-          <p:cNvSpPr>
-            <a:spLocks noGrp="1"/>
-          </p:cNvSpPr>
-          <p:nvPr>
-            <p:ph type="sldImg" idx="2"/>
-          </p:nvPr>
-        </p:nvSpPr>
-        <p:spPr/>
-      </p:sp>
-      <p:sp>
-        <p:nvSpPr>
-          <p:cNvPr id="3" name="Notes Placeholder 2"/>
-          <p:cNvSpPr>
-            <a:spLocks noGrp="1"/>
-          </p:cNvSpPr>
-          <p:nvPr>
-            <p:ph type="body" idx="3" sz="quarter"/>
-          </p:nvPr>
-        </p:nvSpPr>
-        <p:spPr/>
-        <p:txBody>
-          <a:bodyPr/>
-          <a:lstStyle/>
-          <a:p>
-            <a:r>
-              <a:t>With the core game mechanics and physics already proven in Unity, the next 6 months are focused purely on production: commissioning custom sprite animations, adding 2 more biomes, and shipping a public Steam demo.</a:t>
-            </a:r>
-          </a:p>
-        </p:txBody>
-      </p:sp>
-      <p:sp>
-        <p:nvSpPr>
-          <p:cNvPr id="4" name="Slide Number Placeholder 3"/>
-          <p:cNvSpPr>
-            <a:spLocks noGrp="1"/>
-          </p:cNvSpPr>
-          <p:nvPr>
-            <p:ph type="sldNum" idx="5" sz="quarter"/>
-          </p:nvPr>
-        </p:nvSpPr>
-        <p:spPr/>
-      </p:sp>
-    </p:spTree>
-  </p:cSld>
-  <p:clrMapOvr>
-    <a:masterClrMapping/>
-  </p:clrMapOvr>
-</p:notes>
-</file>
-
-<file path=ppt/notesSlides/notesSlide11.xml><?xml version="1.0" encoding="utf-8"?>
-<p:notes xmlns:a="http://schemas.openxmlformats.org/drawingml/2006/main" xmlns:p="http://schemas.openxmlformats.org/presentationml/2006/main" xmlns:r="http://schemas.openxmlformats.org/officeDocument/2006/relationships">
-  <p:cSld>
-    <p:spTree>
-      <p:nvGrpSpPr>
-        <p:cNvPr id="1" name=""/>
-        <p:cNvGrpSpPr/>
-        <p:nvPr/>
-      </p:nvGrpSpPr>
-      <p:grpSpPr>
-        <a:xfrm>
-          <a:off x="0" y="0"/>
-          <a:ext cx="0" cy="0"/>
-          <a:chOff x="0" y="0"/>
-          <a:chExt cx="0" cy="0"/>
-        </a:xfrm>
-      </p:grpSpPr>
-      <p:sp>
-        <p:nvSpPr>
-          <p:cNvPr id="2" name="Slide Image Placeholder 1"/>
-          <p:cNvSpPr>
-            <a:spLocks noGrp="1"/>
-          </p:cNvSpPr>
-          <p:nvPr>
-            <p:ph type="sldImg" idx="2"/>
-          </p:nvPr>
-        </p:nvSpPr>
-        <p:spPr/>
-      </p:sp>
-      <p:sp>
-        <p:nvSpPr>
-          <p:cNvPr id="3" name="Notes Placeholder 2"/>
-          <p:cNvSpPr>
-            <a:spLocks noGrp="1"/>
-          </p:cNvSpPr>
-          <p:nvPr>
-            <p:ph type="body" idx="3" sz="quarter"/>
-          </p:nvPr>
-        </p:nvSpPr>
-        <p:spPr/>
-        <p:txBody>
-          <a:bodyPr/>
-          <a:lstStyle/>
-          <a:p>
-            <a:r>
-              <a:t>I chose a disciplined $6,000 budget. $600 a month covers my living costs in Indonesia so I can commit full-time for 6 months, while the rest commissions dedicated pixel art, music, and covers the Steam fee. Thank you for your time!</a:t>
+              <a:t>Hi Kris and the Toge team, I'm Elang, a solo indie developer from Indonesia. Today I'm pitching Elemental Hex Tactics, a 2.5D tactical RPG inspired by Brigandine and Final Fantasy Tactics, where players directly command both human Masters and monster cohorts while terraforming the board as an interactive weapon.</a:t>
             </a:r>
           </a:p>
         </p:txBody>
@@ -792,7 +648,7 @@
           <a:lstStyle/>
           <a:p>
             <a:r>
-              <a:t>We solved two major tactical RPG frustrations: Ghost UI eliminates cognitive overload by previewing reactions before casting, and hybrid attack-spells remove setup tax so every single turn feels impactful.</a:t>
+              <a:t>Slide 3 combines our target persona, the two major SRPG frustrations we solve with Ghost UI and Hybrid Spells, and our benchmark matrix against Brigandine, Vanaris, Into the Breach, and Triangle Strategy.</a:t>
             </a:r>
           </a:p>
         </p:txBody>
@@ -862,7 +718,7 @@
           <a:lstStyle/>
           <a:p>
             <a:r>
-              <a:t>Brigandine proved that players love hex-grid monster commanding on Steam. Vanaris and Into the Breach proved the market for retro tactics and kinetic shoves. Elemental Hex Tactics combines these proven elements into streamlined, deliberate HD-2D matches.</a:t>
+              <a:t>Slide 4 delivers the complete product solution: our 3-Step core loop, our verified Month 0 working prototype in Unity 6, and our 3-part visual progression panel showing Prototype, Brigandine reference, and the HD-2D visual benchmark.</a:t>
             </a:r>
           </a:p>
         </p:txBody>
@@ -932,7 +788,7 @@
           <a:lstStyle/>
           <a:p>
             <a:r>
-              <a:t>Our core loop connects Master and Monster: your Master alters the terrain and pushes enemies, while your Monster holds the frontline, buffs itself on the elemental tiles, drains the land for energy, and wipes out the opposition with Cataclysms.</a:t>
+              <a:t>Slide 5 covers our execution plan: a 6-month roadmap leading to a public Steam Next Fest demo, backed by a disciplined $6,000 budget where $3,600 covers my living costs in Indonesia and $2,400 covers art, music, and Steam fees.</a:t>
             </a:r>
           </a:p>
         </p:txBody>
@@ -1002,7 +858,7 @@
           <a:lstStyle/>
           <a:p>
             <a:r>
-              <a:t>Every squad features asymmetric roles: your fragile Master shapes the terrain and controls space, while your Monster holds the frontline, absorbs environmental energy, and delivers the finishing blows.</a:t>
+              <a:t>Slide 6 outlines our ask: $6,000 in prototype grant funding and production mentorship, in exchange for transparent milestones and Right of First Refusal for a full publishing deal.</a:t>
             </a:r>
           </a:p>
         </p:txBody>
@@ -1072,147 +928,7 @@
           <a:lstStyle/>
           <a:p>
             <a:r>
-              <a:t>We aren't pitching an unproven idea. The vertical slice is completely built, tested, and playable today. You can run the Windows build from my submission and experience the Master and Titan synergy firsthand.</a:t>
-            </a:r>
-          </a:p>
-        </p:txBody>
-      </p:sp>
-      <p:sp>
-        <p:nvSpPr>
-          <p:cNvPr id="4" name="Slide Number Placeholder 3"/>
-          <p:cNvSpPr>
-            <a:spLocks noGrp="1"/>
-          </p:cNvSpPr>
-          <p:nvPr>
-            <p:ph type="sldNum" idx="5" sz="quarter"/>
-          </p:nvPr>
-        </p:nvSpPr>
-        <p:spPr/>
-      </p:sp>
-    </p:spTree>
-  </p:cSld>
-  <p:clrMapOvr>
-    <a:masterClrMapping/>
-  </p:clrMapOvr>
-</p:notes>
-</file>
-
-<file path=ppt/notesSlides/notesSlide8.xml><?xml version="1.0" encoding="utf-8"?>
-<p:notes xmlns:a="http://schemas.openxmlformats.org/drawingml/2006/main" xmlns:p="http://schemas.openxmlformats.org/presentationml/2006/main" xmlns:r="http://schemas.openxmlformats.org/officeDocument/2006/relationships">
-  <p:cSld>
-    <p:spTree>
-      <p:nvGrpSpPr>
-        <p:cNvPr id="1" name=""/>
-        <p:cNvGrpSpPr/>
-        <p:nvPr/>
-      </p:nvGrpSpPr>
-      <p:grpSpPr>
-        <a:xfrm>
-          <a:off x="0" y="0"/>
-          <a:ext cx="0" cy="0"/>
-          <a:chOff x="0" y="0"/>
-          <a:chExt cx="0" cy="0"/>
-        </a:xfrm>
-      </p:grpSpPr>
-      <p:sp>
-        <p:nvSpPr>
-          <p:cNvPr id="2" name="Slide Image Placeholder 1"/>
-          <p:cNvSpPr>
-            <a:spLocks noGrp="1"/>
-          </p:cNvSpPr>
-          <p:nvPr>
-            <p:ph type="sldImg" idx="2"/>
-          </p:nvPr>
-        </p:nvSpPr>
-        <p:spPr/>
-      </p:sp>
-      <p:sp>
-        <p:nvSpPr>
-          <p:cNvPr id="3" name="Notes Placeholder 2"/>
-          <p:cNvSpPr>
-            <a:spLocks noGrp="1"/>
-          </p:cNvSpPr>
-          <p:nvPr>
-            <p:ph type="body" idx="3" sz="quarter"/>
-          </p:nvPr>
-        </p:nvSpPr>
-        <p:spPr/>
-        <p:txBody>
-          <a:bodyPr/>
-          <a:lstStyle/>
-          <a:p>
-            <a:r>
-              <a:t>Here is our 3-part visual progression: our verified working prototype in Unity 6, our hex combat reference in Brigandine, and our target HD-2D visual benchmark. This proves we have a working foundation, a clear commercial reference, and a mathematically viable $1,200 asset pipeline.</a:t>
-            </a:r>
-          </a:p>
-        </p:txBody>
-      </p:sp>
-      <p:sp>
-        <p:nvSpPr>
-          <p:cNvPr id="4" name="Slide Number Placeholder 3"/>
-          <p:cNvSpPr>
-            <a:spLocks noGrp="1"/>
-          </p:cNvSpPr>
-          <p:nvPr>
-            <p:ph type="sldNum" idx="5" sz="quarter"/>
-          </p:nvPr>
-        </p:nvSpPr>
-        <p:spPr/>
-      </p:sp>
-    </p:spTree>
-  </p:cSld>
-  <p:clrMapOvr>
-    <a:masterClrMapping/>
-  </p:clrMapOvr>
-</p:notes>
-</file>
-
-<file path=ppt/notesSlides/notesSlide9.xml><?xml version="1.0" encoding="utf-8"?>
-<p:notes xmlns:a="http://schemas.openxmlformats.org/drawingml/2006/main" xmlns:p="http://schemas.openxmlformats.org/presentationml/2006/main" xmlns:r="http://schemas.openxmlformats.org/officeDocument/2006/relationships">
-  <p:cSld>
-    <p:spTree>
-      <p:nvGrpSpPr>
-        <p:cNvPr id="1" name=""/>
-        <p:cNvGrpSpPr/>
-        <p:nvPr/>
-      </p:nvGrpSpPr>
-      <p:grpSpPr>
-        <a:xfrm>
-          <a:off x="0" y="0"/>
-          <a:ext cx="0" cy="0"/>
-          <a:chOff x="0" y="0"/>
-          <a:chExt cx="0" cy="0"/>
-        </a:xfrm>
-      </p:grpSpPr>
-      <p:sp>
-        <p:nvSpPr>
-          <p:cNvPr id="2" name="Slide Image Placeholder 1"/>
-          <p:cNvSpPr>
-            <a:spLocks noGrp="1"/>
-          </p:cNvSpPr>
-          <p:nvPr>
-            <p:ph type="sldImg" idx="2"/>
-          </p:nvPr>
-        </p:nvSpPr>
-        <p:spPr/>
-      </p:sp>
-      <p:sp>
-        <p:nvSpPr>
-          <p:cNvPr id="3" name="Notes Placeholder 2"/>
-          <p:cNvSpPr>
-            <a:spLocks noGrp="1"/>
-          </p:cNvSpPr>
-          <p:nvPr>
-            <p:ph type="body" idx="3" sz="quarter"/>
-          </p:nvPr>
-        </p:nvSpPr>
-        <p:spPr/>
-        <p:txBody>
-          <a:bodyPr/>
-          <a:lstStyle/>
-          <a:p>
-            <a:r>
-              <a:t>Beyond individual battles, the campaign features a node-based expedition map with spellbook upgrades, monster squad customization, and zero level grinding.</a:t>
+              <a:t>Thank you Kris and the Toge team for your time and consideration. You can play the standalone Windows demo today and reach me at yelangesa@gmail.com.</a:t>
             </a:r>
           </a:p>
         </p:txBody>
@@ -4370,1109 +4086,6 @@
 </p:sld>
 </file>
 
-<file path=ppt/slides/slide10.xml><?xml version="1.0" encoding="utf-8"?>
-<p:sld xmlns:a="http://schemas.openxmlformats.org/drawingml/2006/main" xmlns:p="http://schemas.openxmlformats.org/presentationml/2006/main" xmlns:r="http://schemas.openxmlformats.org/officeDocument/2006/relationships">
-  <p:cSld>
-    <p:bg>
-      <p:bgPr>
-        <a:solidFill>
-          <a:srgbClr val="0D1117"/>
-        </a:solidFill>
-        <a:effectLst/>
-      </p:bgPr>
-    </p:bg>
-    <p:spTree>
-      <p:nvGrpSpPr>
-        <p:cNvPr id="1" name=""/>
-        <p:cNvGrpSpPr/>
-        <p:nvPr/>
-      </p:nvGrpSpPr>
-      <p:grpSpPr/>
-      <p:sp>
-        <p:nvSpPr>
-          <p:cNvPr id="2" name="TextBox 1"/>
-          <p:cNvSpPr txBox="1"/>
-          <p:nvPr/>
-        </p:nvSpPr>
-        <p:spPr>
-          <a:xfrm>
-            <a:off x="731520" y="411480"/>
-            <a:ext cx="10698480" cy="1005840"/>
-          </a:xfrm>
-          <a:prstGeom prst="rect">
-            <a:avLst/>
-          </a:prstGeom>
-          <a:noFill/>
-        </p:spPr>
-        <p:txBody>
-          <a:bodyPr wrap="square" lIns="0" tIns="0" rIns="0" bIns="0">
-            <a:spAutoFit/>
-          </a:bodyPr>
-          <a:lstStyle/>
-          <a:p>
-            <a:pPr>
-              <a:defRPr sz="1100" b="1">
-                <a:solidFill>
-                  <a:srgbClr val="06B6D4"/>
-                </a:solidFill>
-              </a:defRPr>
-            </a:pPr>
-            <a:r>
-              <a:t>TGFI PITCH SECTION 5: EXECUTION PLAN, TIMELINE &amp; BUDGET</a:t>
-            </a:r>
-          </a:p>
-          <a:p>
-            <a:pPr>
-              <a:defRPr sz="2400" b="1">
-                <a:solidFill>
-                  <a:srgbClr val="F3F4F6"/>
-                </a:solidFill>
-              </a:defRPr>
-            </a:pPr>
-            <a:r>
-              <a:t>Execution Plan: 6 Months to Steam Demo</a:t>
-            </a:r>
-          </a:p>
-        </p:txBody>
-      </p:sp>
-      <p:sp>
-        <p:nvSpPr>
-          <p:cNvPr id="3" name="Rounded Rectangle 2"/>
-          <p:cNvSpPr/>
-          <p:nvPr/>
-        </p:nvSpPr>
-        <p:spPr>
-          <a:xfrm>
-            <a:off x="731520" y="1645920"/>
-            <a:ext cx="5212080" cy="2194560"/>
-          </a:xfrm>
-          <a:prstGeom prst="roundRect">
-            <a:avLst/>
-          </a:prstGeom>
-          <a:solidFill>
-            <a:srgbClr val="161B22"/>
-          </a:solidFill>
-          <a:ln w="19050">
-            <a:solidFill>
-              <a:srgbClr val="30363D"/>
-            </a:solidFill>
-          </a:ln>
-        </p:spPr>
-        <p:style>
-          <a:lnRef idx="1">
-            <a:schemeClr val="accent1"/>
-          </a:lnRef>
-          <a:fillRef idx="3">
-            <a:schemeClr val="accent1"/>
-          </a:fillRef>
-          <a:effectRef idx="2">
-            <a:schemeClr val="accent1"/>
-          </a:effectRef>
-          <a:fontRef idx="minor">
-            <a:schemeClr val="lt1"/>
-          </a:fontRef>
-        </p:style>
-        <p:txBody>
-          <a:bodyPr rtlCol="0" anchor="ctr" wrap="square" lIns="182880" rIns="182880" tIns="164592" bIns="164592"/>
-          <a:lstStyle/>
-          <a:p>
-            <a:pPr algn="ctr">
-              <a:spcAft>
-                <a:spcPts val="500"/>
-              </a:spcAft>
-              <a:defRPr b="1" sz="1350">
-                <a:solidFill>
-                  <a:srgbClr val="F59E0B"/>
-                </a:solidFill>
-              </a:defRPr>
-            </a:pPr>
-            <a:r>
-              <a:t>Month 1–2: Art Commissions &amp; Sprites</a:t>
-            </a:r>
-          </a:p>
-          <a:p>
-            <a:pPr>
-              <a:spcAft>
-                <a:spcPts val="300"/>
-              </a:spcAft>
-              <a:defRPr sz="1150">
-                <a:solidFill>
-                  <a:srgbClr val="F3F4F6"/>
-                </a:solidFill>
-              </a:defRPr>
-            </a:pPr>
-            <a:r>
-              <a:t>Commission freelance pixel artist for 2-directional animated sprite sheets (6 classes) and character portrait illustrations.</a:t>
-            </a:r>
-          </a:p>
-          <a:p>
-            <a:pPr>
-              <a:spcAft>
-                <a:spcPts val="300"/>
-              </a:spcAft>
-              <a:defRPr sz="1150">
-                <a:solidFill>
-                  <a:srgbClr val="F3F4F6"/>
-                </a:solidFill>
-              </a:defRPr>
-            </a:pPr>
-          </a:p>
-          <a:p>
-            <a:pPr>
-              <a:spcAft>
-                <a:spcPts val="300"/>
-              </a:spcAft>
-              <a:defRPr sz="1150">
-                <a:solidFill>
-                  <a:srgbClr val="F3F4F6"/>
-                </a:solidFill>
-              </a:defRPr>
-            </a:pPr>
-            <a:r>
-              <a:t>Implement sprite animation state controller.</a:t>
-            </a:r>
-          </a:p>
-        </p:txBody>
-      </p:sp>
-      <p:sp>
-        <p:nvSpPr>
-          <p:cNvPr id="4" name="Rounded Rectangle 3"/>
-          <p:cNvSpPr/>
-          <p:nvPr/>
-        </p:nvSpPr>
-        <p:spPr>
-          <a:xfrm>
-            <a:off x="6217920" y="1645920"/>
-            <a:ext cx="5212080" cy="2194560"/>
-          </a:xfrm>
-          <a:prstGeom prst="roundRect">
-            <a:avLst/>
-          </a:prstGeom>
-          <a:solidFill>
-            <a:srgbClr val="161B22"/>
-          </a:solidFill>
-          <a:ln w="19050">
-            <a:solidFill>
-              <a:srgbClr val="30363D"/>
-            </a:solidFill>
-          </a:ln>
-        </p:spPr>
-        <p:style>
-          <a:lnRef idx="1">
-            <a:schemeClr val="accent1"/>
-          </a:lnRef>
-          <a:fillRef idx="3">
-            <a:schemeClr val="accent1"/>
-          </a:fillRef>
-          <a:effectRef idx="2">
-            <a:schemeClr val="accent1"/>
-          </a:effectRef>
-          <a:fontRef idx="minor">
-            <a:schemeClr val="lt1"/>
-          </a:fontRef>
-        </p:style>
-        <p:txBody>
-          <a:bodyPr rtlCol="0" anchor="ctr" wrap="square" lIns="182880" rIns="182880" tIns="164592" bIns="164592"/>
-          <a:lstStyle/>
-          <a:p>
-            <a:pPr algn="ctr">
-              <a:spcAft>
-                <a:spcPts val="500"/>
-              </a:spcAft>
-              <a:defRPr b="1" sz="1350">
-                <a:solidFill>
-                  <a:srgbClr val="F59E0B"/>
-                </a:solidFill>
-              </a:defRPr>
-            </a:pPr>
-            <a:r>
-              <a:t>Month 3: New Biomes &amp; Mechanics</a:t>
-            </a:r>
-          </a:p>
-          <a:p>
-            <a:pPr>
-              <a:spcAft>
-                <a:spcPts val="300"/>
-              </a:spcAft>
-              <a:defRPr sz="1150">
-                <a:solidFill>
-                  <a:srgbClr val="F3F4F6"/>
-                </a:solidFill>
-              </a:defRPr>
-            </a:pPr>
-            <a:r>
-              <a:t>Implement Glacial Peak (ice slide shove physics) and Conductive Marsh (water + lightning chain electrocution).</a:t>
-            </a:r>
-          </a:p>
-          <a:p>
-            <a:pPr>
-              <a:spcAft>
-                <a:spcPts val="300"/>
-              </a:spcAft>
-              <a:defRPr sz="1150">
-                <a:solidFill>
-                  <a:srgbClr val="F3F4F6"/>
-                </a:solidFill>
-              </a:defRPr>
-            </a:pPr>
-          </a:p>
-          <a:p>
-            <a:pPr>
-              <a:spcAft>
-                <a:spcPts val="300"/>
-              </a:spcAft>
-              <a:defRPr sz="1150">
-                <a:solidFill>
-                  <a:srgbClr val="F3F4F6"/>
-                </a:solidFill>
-              </a:defRPr>
-            </a:pPr>
-            <a:r>
-              <a:t>Expand elemental interactions matrix.</a:t>
-            </a:r>
-          </a:p>
-        </p:txBody>
-      </p:sp>
-      <p:sp>
-        <p:nvSpPr>
-          <p:cNvPr id="5" name="Rounded Rectangle 4"/>
-          <p:cNvSpPr/>
-          <p:nvPr/>
-        </p:nvSpPr>
-        <p:spPr>
-          <a:xfrm>
-            <a:off x="731520" y="4069080"/>
-            <a:ext cx="5212080" cy="2011680"/>
-          </a:xfrm>
-          <a:prstGeom prst="roundRect">
-            <a:avLst/>
-          </a:prstGeom>
-          <a:solidFill>
-            <a:srgbClr val="161B22"/>
-          </a:solidFill>
-          <a:ln w="19050">
-            <a:solidFill>
-              <a:srgbClr val="F59E0B"/>
-            </a:solidFill>
-          </a:ln>
-        </p:spPr>
-        <p:style>
-          <a:lnRef idx="1">
-            <a:schemeClr val="accent1"/>
-          </a:lnRef>
-          <a:fillRef idx="3">
-            <a:schemeClr val="accent1"/>
-          </a:fillRef>
-          <a:effectRef idx="2">
-            <a:schemeClr val="accent1"/>
-          </a:effectRef>
-          <a:fontRef idx="minor">
-            <a:schemeClr val="lt1"/>
-          </a:fontRef>
-        </p:style>
-        <p:txBody>
-          <a:bodyPr rtlCol="0" anchor="ctr" wrap="square" lIns="182880" rIns="182880" tIns="164592" bIns="164592"/>
-          <a:lstStyle/>
-          <a:p>
-            <a:pPr algn="ctr">
-              <a:spcAft>
-                <a:spcPts val="500"/>
-              </a:spcAft>
-              <a:defRPr b="1" sz="1350">
-                <a:solidFill>
-                  <a:srgbClr val="F59E0B"/>
-                </a:solidFill>
-              </a:defRPr>
-            </a:pPr>
-            <a:r>
-              <a:t>Month 4: Campaign Map &amp; Smart AI</a:t>
-            </a:r>
-          </a:p>
-          <a:p>
-            <a:pPr>
-              <a:spcAft>
-                <a:spcPts val="300"/>
-              </a:spcAft>
-              <a:defRPr sz="1150">
-                <a:solidFill>
-                  <a:srgbClr val="F3F4F6"/>
-                </a:solidFill>
-              </a:defRPr>
-            </a:pPr>
-            <a:r>
-              <a:t>Build node-based world map progression and enhance enemy AI (flanking, hazard evasion, and tactical retreating).</a:t>
-            </a:r>
-          </a:p>
-          <a:p>
-            <a:pPr>
-              <a:spcAft>
-                <a:spcPts val="300"/>
-              </a:spcAft>
-              <a:defRPr sz="1150">
-                <a:solidFill>
-                  <a:srgbClr val="F3F4F6"/>
-                </a:solidFill>
-              </a:defRPr>
-            </a:pPr>
-          </a:p>
-          <a:p>
-            <a:pPr>
-              <a:spcAft>
-                <a:spcPts val="300"/>
-              </a:spcAft>
-              <a:defRPr sz="1150">
-                <a:solidFill>
-                  <a:srgbClr val="F3F4F6"/>
-                </a:solidFill>
-              </a:defRPr>
-            </a:pPr>
-            <a:r>
-              <a:t>Balance difficulty pacing.</a:t>
-            </a:r>
-          </a:p>
-        </p:txBody>
-      </p:sp>
-      <p:sp>
-        <p:nvSpPr>
-          <p:cNvPr id="6" name="Rounded Rectangle 5"/>
-          <p:cNvSpPr/>
-          <p:nvPr/>
-        </p:nvSpPr>
-        <p:spPr>
-          <a:xfrm>
-            <a:off x="6217920" y="4069080"/>
-            <a:ext cx="5212080" cy="2011680"/>
-          </a:xfrm>
-          <a:prstGeom prst="roundRect">
-            <a:avLst/>
-          </a:prstGeom>
-          <a:solidFill>
-            <a:srgbClr val="161B22"/>
-          </a:solidFill>
-          <a:ln w="19050">
-            <a:solidFill>
-              <a:srgbClr val="06B6D4"/>
-            </a:solidFill>
-          </a:ln>
-        </p:spPr>
-        <p:style>
-          <a:lnRef idx="1">
-            <a:schemeClr val="accent1"/>
-          </a:lnRef>
-          <a:fillRef idx="3">
-            <a:schemeClr val="accent1"/>
-          </a:fillRef>
-          <a:effectRef idx="2">
-            <a:schemeClr val="accent1"/>
-          </a:effectRef>
-          <a:fontRef idx="minor">
-            <a:schemeClr val="lt1"/>
-          </a:fontRef>
-        </p:style>
-        <p:txBody>
-          <a:bodyPr rtlCol="0" anchor="ctr" wrap="square" lIns="182880" rIns="182880" tIns="164592" bIns="164592"/>
-          <a:lstStyle/>
-          <a:p>
-            <a:pPr algn="ctr">
-              <a:spcAft>
-                <a:spcPts val="500"/>
-              </a:spcAft>
-              <a:defRPr b="1" sz="1350">
-                <a:solidFill>
-                  <a:srgbClr val="06B6D4"/>
-                </a:solidFill>
-              </a:defRPr>
-            </a:pPr>
-            <a:r>
-              <a:t>Month 5–6: Steam Demo &amp; Next Fest</a:t>
-            </a:r>
-          </a:p>
-          <a:p>
-            <a:pPr>
-              <a:spcAft>
-                <a:spcPts val="300"/>
-              </a:spcAft>
-              <a:defRPr sz="1150">
-                <a:solidFill>
-                  <a:srgbClr val="F3F4F6"/>
-                </a:solidFill>
-              </a:defRPr>
-            </a:pPr>
-            <a:r>
-              <a:t>Commission OST battle themes, polish UI/audio, and release a public 30-minute playable demo for Steam Next Fest.</a:t>
-            </a:r>
-          </a:p>
-          <a:p>
-            <a:pPr>
-              <a:spcAft>
-                <a:spcPts val="300"/>
-              </a:spcAft>
-              <a:defRPr sz="1150">
-                <a:solidFill>
-                  <a:srgbClr val="F3F4F6"/>
-                </a:solidFill>
-              </a:defRPr>
-            </a:pPr>
-          </a:p>
-          <a:p>
-            <a:pPr>
-              <a:spcAft>
-                <a:spcPts val="300"/>
-              </a:spcAft>
-              <a:defRPr sz="1150">
-                <a:solidFill>
-                  <a:srgbClr val="F3F4F6"/>
-                </a:solidFill>
-              </a:defRPr>
-            </a:pPr>
-            <a:r>
-              <a:t>Open commercial publisher negotiations.</a:t>
-            </a:r>
-          </a:p>
-        </p:txBody>
-      </p:sp>
-      <p:sp>
-        <p:nvSpPr>
-          <p:cNvPr id="7" name="Rounded Rectangle 6"/>
-          <p:cNvSpPr/>
-          <p:nvPr/>
-        </p:nvSpPr>
-        <p:spPr>
-          <a:xfrm>
-            <a:off x="731520" y="5532120"/>
-            <a:ext cx="10698480" cy="731520"/>
-          </a:xfrm>
-          <a:prstGeom prst="roundRect">
-            <a:avLst/>
-          </a:prstGeom>
-          <a:solidFill>
-            <a:srgbClr val="161B22"/>
-          </a:solidFill>
-          <a:ln w="19050">
-            <a:solidFill>
-              <a:srgbClr val="10B981"/>
-            </a:solidFill>
-          </a:ln>
-        </p:spPr>
-        <p:style>
-          <a:lnRef idx="1">
-            <a:schemeClr val="accent1"/>
-          </a:lnRef>
-          <a:fillRef idx="3">
-            <a:schemeClr val="accent1"/>
-          </a:fillRef>
-          <a:effectRef idx="2">
-            <a:schemeClr val="accent1"/>
-          </a:effectRef>
-          <a:fontRef idx="minor">
-            <a:schemeClr val="lt1"/>
-          </a:fontRef>
-        </p:style>
-        <p:txBody>
-          <a:bodyPr rtlCol="0" anchor="ctr" wrap="square" lIns="182880" rIns="182880" tIns="164592" bIns="164592"/>
-          <a:lstStyle/>
-          <a:p>
-            <a:pPr algn="ctr">
-              <a:spcAft>
-                <a:spcPts val="500"/>
-              </a:spcAft>
-              <a:defRPr b="1" sz="1350">
-                <a:solidFill>
-                  <a:srgbClr val="10B981"/>
-                </a:solidFill>
-              </a:defRPr>
-            </a:pPr>
-            <a:r>
-              <a:t>🛡️ Execution Risk = Near Zero</a:t>
-            </a:r>
-          </a:p>
-          <a:p>
-            <a:pPr>
-              <a:spcAft>
-                <a:spcPts val="300"/>
-              </a:spcAft>
-              <a:defRPr sz="1150">
-                <a:solidFill>
-                  <a:srgbClr val="F3F4F6"/>
-                </a:solidFill>
-              </a:defRPr>
-            </a:pPr>
-            <a:r>
-              <a:t>Core combat engine, hex grid math, kinetic displacement, and land-siphoning loops are ALREADY complete (Month 0). Months 1–6 are strictly for content, art pipeline, and AI tuning.</a:t>
-            </a:r>
-          </a:p>
-        </p:txBody>
-      </p:sp>
-    </p:spTree>
-  </p:cSld>
-  <p:clrMapOvr>
-    <a:masterClrMapping/>
-  </p:clrMapOvr>
-</p:sld>
-</file>
-
-<file path=ppt/slides/slide11.xml><?xml version="1.0" encoding="utf-8"?>
-<p:sld xmlns:a="http://schemas.openxmlformats.org/drawingml/2006/main" xmlns:p="http://schemas.openxmlformats.org/presentationml/2006/main" xmlns:r="http://schemas.openxmlformats.org/officeDocument/2006/relationships">
-  <p:cSld>
-    <p:bg>
-      <p:bgPr>
-        <a:solidFill>
-          <a:srgbClr val="0D1117"/>
-        </a:solidFill>
-        <a:effectLst/>
-      </p:bgPr>
-    </p:bg>
-    <p:spTree>
-      <p:nvGrpSpPr>
-        <p:cNvPr id="1" name=""/>
-        <p:cNvGrpSpPr/>
-        <p:nvPr/>
-      </p:nvGrpSpPr>
-      <p:grpSpPr/>
-      <p:sp>
-        <p:nvSpPr>
-          <p:cNvPr id="2" name="TextBox 1"/>
-          <p:cNvSpPr txBox="1"/>
-          <p:nvPr/>
-        </p:nvSpPr>
-        <p:spPr>
-          <a:xfrm>
-            <a:off x="731520" y="411480"/>
-            <a:ext cx="10698480" cy="1005840"/>
-          </a:xfrm>
-          <a:prstGeom prst="rect">
-            <a:avLst/>
-          </a:prstGeom>
-          <a:noFill/>
-        </p:spPr>
-        <p:txBody>
-          <a:bodyPr wrap="square" lIns="0" tIns="0" rIns="0" bIns="0">
-            <a:spAutoFit/>
-          </a:bodyPr>
-          <a:lstStyle/>
-          <a:p>
-            <a:pPr>
-              <a:defRPr sz="1100" b="1">
-                <a:solidFill>
-                  <a:srgbClr val="06B6D4"/>
-                </a:solidFill>
-              </a:defRPr>
-            </a:pPr>
-            <a:r>
-              <a:t>TGFI PITCH SECTIONS 6 &amp; 7: THE ASK &amp; MORE INFO</a:t>
-            </a:r>
-          </a:p>
-          <a:p>
-            <a:pPr>
-              <a:defRPr sz="2400" b="1">
-                <a:solidFill>
-                  <a:srgbClr val="F3F4F6"/>
-                </a:solidFill>
-              </a:defRPr>
-            </a:pPr>
-            <a:r>
-              <a:t>The Ask: $6,000 USD Lean Budget &amp; Next Stage</a:t>
-            </a:r>
-          </a:p>
-        </p:txBody>
-      </p:sp>
-      <p:sp>
-        <p:nvSpPr>
-          <p:cNvPr id="3" name="Rounded Rectangle 2"/>
-          <p:cNvSpPr/>
-          <p:nvPr/>
-        </p:nvSpPr>
-        <p:spPr>
-          <a:xfrm>
-            <a:off x="731520" y="1645920"/>
-            <a:ext cx="5669280" cy="4663440"/>
-          </a:xfrm>
-          <a:prstGeom prst="roundRect">
-            <a:avLst/>
-          </a:prstGeom>
-          <a:solidFill>
-            <a:srgbClr val="161B22"/>
-          </a:solidFill>
-          <a:ln w="19050">
-            <a:solidFill>
-              <a:srgbClr val="10B981"/>
-            </a:solidFill>
-          </a:ln>
-        </p:spPr>
-        <p:style>
-          <a:lnRef idx="1">
-            <a:schemeClr val="accent1"/>
-          </a:lnRef>
-          <a:fillRef idx="3">
-            <a:schemeClr val="accent1"/>
-          </a:fillRef>
-          <a:effectRef idx="2">
-            <a:schemeClr val="accent1"/>
-          </a:effectRef>
-          <a:fontRef idx="minor">
-            <a:schemeClr val="lt1"/>
-          </a:fontRef>
-        </p:style>
-        <p:txBody>
-          <a:bodyPr rtlCol="0" anchor="ctr" wrap="square" lIns="182880" rIns="182880" tIns="164592" bIns="164592"/>
-          <a:lstStyle/>
-          <a:p>
-            <a:pPr algn="ctr">
-              <a:spcAft>
-                <a:spcPts val="500"/>
-              </a:spcAft>
-              <a:defRPr b="1" sz="1350">
-                <a:solidFill>
-                  <a:srgbClr val="10B981"/>
-                </a:solidFill>
-              </a:defRPr>
-            </a:pPr>
-            <a:r>
-              <a:t>💰 High-Approval Budget Allocation</a:t>
-            </a:r>
-          </a:p>
-          <a:p>
-            <a:pPr>
-              <a:spcAft>
-                <a:spcPts val="300"/>
-              </a:spcAft>
-              <a:defRPr sz="1150">
-                <a:solidFill>
-                  <a:srgbClr val="F3F4F6"/>
-                </a:solidFill>
-              </a:defRPr>
-            </a:pPr>
-            <a:r>
-              <a:t>• [60%] Solo Dev Living Runway (6 Mos @ $600/mo): $3,600</a:t>
-            </a:r>
-          </a:p>
-          <a:p>
-            <a:pPr>
-              <a:spcAft>
-                <a:spcPts val="300"/>
-              </a:spcAft>
-              <a:defRPr sz="1150">
-                <a:solidFill>
-                  <a:srgbClr val="F3F4F6"/>
-                </a:solidFill>
-              </a:defRPr>
-            </a:pPr>
-            <a:r>
-              <a:t>  (~Rp 9.300.000/month living runway to work full-time)</a:t>
-            </a:r>
-          </a:p>
-          <a:p>
-            <a:pPr>
-              <a:spcAft>
-                <a:spcPts val="300"/>
-              </a:spcAft>
-              <a:defRPr sz="1150">
-                <a:solidFill>
-                  <a:srgbClr val="F3F4F6"/>
-                </a:solidFill>
-              </a:defRPr>
-            </a:pPr>
-          </a:p>
-          <a:p>
-            <a:pPr>
-              <a:spcAft>
-                <a:spcPts val="300"/>
-              </a:spcAft>
-              <a:defRPr sz="1150">
-                <a:solidFill>
-                  <a:srgbClr val="F3F4F6"/>
-                </a:solidFill>
-              </a:defRPr>
-            </a:pPr>
-            <a:r>
-              <a:t>• [20%] Core Character Sprite Pipeline (Demo Milestone): $1,200</a:t>
-            </a:r>
-          </a:p>
-          <a:p>
-            <a:pPr>
-              <a:spcAft>
-                <a:spcPts val="300"/>
-              </a:spcAft>
-              <a:defRPr sz="1150">
-                <a:solidFill>
-                  <a:srgbClr val="F3F4F6"/>
-                </a:solidFill>
-              </a:defRPr>
-            </a:pPr>
-            <a:r>
-              <a:t>  (6 foundational classes with 2-dir retro loops; scalable to 20+ classes upon full publishing deal)</a:t>
-            </a:r>
-          </a:p>
-          <a:p>
-            <a:pPr>
-              <a:spcAft>
-                <a:spcPts val="300"/>
-              </a:spcAft>
-              <a:defRPr sz="1150">
-                <a:solidFill>
-                  <a:srgbClr val="F3F4F6"/>
-                </a:solidFill>
-              </a:defRPr>
-            </a:pPr>
-          </a:p>
-          <a:p>
-            <a:pPr>
-              <a:spcAft>
-                <a:spcPts val="300"/>
-              </a:spcAft>
-              <a:defRPr sz="1150">
-                <a:solidFill>
-                  <a:srgbClr val="F3F4F6"/>
-                </a:solidFill>
-              </a:defRPr>
-            </a:pPr>
-            <a:r>
-              <a:t>• [10%] Original Tactical Soundtrack Commission: $600</a:t>
-            </a:r>
-          </a:p>
-          <a:p>
-            <a:pPr>
-              <a:spcAft>
-                <a:spcPts val="300"/>
-              </a:spcAft>
-              <a:defRPr sz="1150">
-                <a:solidFill>
-                  <a:srgbClr val="F3F4F6"/>
-                </a:solidFill>
-              </a:defRPr>
-            </a:pPr>
-            <a:r>
-              <a:t>  (2 tactical battle themes by an indie composer)</a:t>
-            </a:r>
-          </a:p>
-          <a:p>
-            <a:pPr>
-              <a:spcAft>
-                <a:spcPts val="300"/>
-              </a:spcAft>
-              <a:defRPr sz="1150">
-                <a:solidFill>
-                  <a:srgbClr val="F3F4F6"/>
-                </a:solidFill>
-              </a:defRPr>
-            </a:pPr>
-          </a:p>
-          <a:p>
-            <a:pPr>
-              <a:spcAft>
-                <a:spcPts val="300"/>
-              </a:spcAft>
-              <a:defRPr sz="1150">
-                <a:solidFill>
-                  <a:srgbClr val="F3F4F6"/>
-                </a:solidFill>
-              </a:defRPr>
-            </a:pPr>
-            <a:r>
-              <a:t>• [10%] Steam Listing Fee &amp; Unity Editor Tools: $600</a:t>
-            </a:r>
-          </a:p>
-          <a:p>
-            <a:pPr>
-              <a:spcAft>
-                <a:spcPts val="300"/>
-              </a:spcAft>
-              <a:defRPr sz="1150">
-                <a:solidFill>
-                  <a:srgbClr val="F3F4F6"/>
-                </a:solidFill>
-              </a:defRPr>
-            </a:pPr>
-            <a:r>
-              <a:t>  ($100 Steam fee + essential editor productivity tools)</a:t>
-            </a:r>
-          </a:p>
-          <a:p>
-            <a:pPr>
-              <a:spcAft>
-                <a:spcPts val="300"/>
-              </a:spcAft>
-              <a:defRPr sz="1150">
-                <a:solidFill>
-                  <a:srgbClr val="F3F4F6"/>
-                </a:solidFill>
-              </a:defRPr>
-            </a:pPr>
-          </a:p>
-          <a:p>
-            <a:pPr>
-              <a:spcAft>
-                <a:spcPts val="300"/>
-              </a:spcAft>
-              <a:defRPr sz="1150">
-                <a:solidFill>
-                  <a:srgbClr val="F3F4F6"/>
-                </a:solidFill>
-              </a:defRPr>
-            </a:pPr>
-            <a:r>
-              <a:t>TOTAL REQUESTED: $6,000 USD (~Rp 93.000.000)</a:t>
-            </a:r>
-          </a:p>
-        </p:txBody>
-      </p:sp>
-      <p:sp>
-        <p:nvSpPr>
-          <p:cNvPr id="4" name="Rounded Rectangle 3"/>
-          <p:cNvSpPr/>
-          <p:nvPr/>
-        </p:nvSpPr>
-        <p:spPr>
-          <a:xfrm>
-            <a:off x="6675120" y="1645920"/>
-            <a:ext cx="4754880" cy="2468880"/>
-          </a:xfrm>
-          <a:prstGeom prst="roundRect">
-            <a:avLst/>
-          </a:prstGeom>
-          <a:solidFill>
-            <a:srgbClr val="161B22"/>
-          </a:solidFill>
-          <a:ln w="19050">
-            <a:solidFill>
-              <a:srgbClr val="F59E0B"/>
-            </a:solidFill>
-          </a:ln>
-        </p:spPr>
-        <p:style>
-          <a:lnRef idx="1">
-            <a:schemeClr val="accent1"/>
-          </a:lnRef>
-          <a:fillRef idx="3">
-            <a:schemeClr val="accent1"/>
-          </a:fillRef>
-          <a:effectRef idx="2">
-            <a:schemeClr val="accent1"/>
-          </a:effectRef>
-          <a:fontRef idx="minor">
-            <a:schemeClr val="lt1"/>
-          </a:fontRef>
-        </p:style>
-        <p:txBody>
-          <a:bodyPr rtlCol="0" anchor="ctr" wrap="square" lIns="182880" rIns="182880" tIns="164592" bIns="164592"/>
-          <a:lstStyle/>
-          <a:p>
-            <a:pPr algn="ctr">
-              <a:spcAft>
-                <a:spcPts val="500"/>
-              </a:spcAft>
-              <a:defRPr b="1" sz="1350">
-                <a:solidFill>
-                  <a:srgbClr val="F59E0B"/>
-                </a:solidFill>
-              </a:defRPr>
-            </a:pPr>
-            <a:r>
-              <a:t>👤 Developer Profile &amp; Contact</a:t>
-            </a:r>
-          </a:p>
-          <a:p>
-            <a:pPr>
-              <a:spcAft>
-                <a:spcPts val="300"/>
-              </a:spcAft>
-              <a:defRPr sz="1150">
-                <a:solidFill>
-                  <a:srgbClr val="F3F4F6"/>
-                </a:solidFill>
-              </a:defRPr>
-            </a:pPr>
-            <a:r>
-              <a:t>Developer: Elang Esa Yudhistira</a:t>
-            </a:r>
-          </a:p>
-          <a:p>
-            <a:pPr>
-              <a:spcAft>
-                <a:spcPts val="300"/>
-              </a:spcAft>
-              <a:defRPr sz="1150">
-                <a:solidFill>
-                  <a:srgbClr val="F3F4F6"/>
-                </a:solidFill>
-              </a:defRPr>
-            </a:pPr>
-            <a:r>
-              <a:t>Role: Solo Game Designer &amp; Lead Programmer</a:t>
-            </a:r>
-          </a:p>
-          <a:p>
-            <a:pPr>
-              <a:spcAft>
-                <a:spcPts val="300"/>
-              </a:spcAft>
-              <a:defRPr sz="1150">
-                <a:solidFill>
-                  <a:srgbClr val="F3F4F6"/>
-                </a:solidFill>
-              </a:defRPr>
-            </a:pPr>
-            <a:r>
-              <a:t>Location: Indonesia 🇮🇩</a:t>
-            </a:r>
-          </a:p>
-          <a:p>
-            <a:pPr>
-              <a:spcAft>
-                <a:spcPts val="300"/>
-              </a:spcAft>
-              <a:defRPr sz="1150">
-                <a:solidFill>
-                  <a:srgbClr val="F3F4F6"/>
-                </a:solidFill>
-              </a:defRPr>
-            </a:pPr>
-            <a:r>
-              <a:t>Portfolio: https://nealverse.itch.io</a:t>
-            </a:r>
-          </a:p>
-          <a:p>
-            <a:pPr>
-              <a:spcAft>
-                <a:spcPts val="300"/>
-              </a:spcAft>
-              <a:defRPr sz="1150">
-                <a:solidFill>
-                  <a:srgbClr val="F3F4F6"/>
-                </a:solidFill>
-              </a:defRPr>
-            </a:pPr>
-            <a:r>
-              <a:t>Email: yelangesa@gmail.com</a:t>
-            </a:r>
-          </a:p>
-          <a:p>
-            <a:pPr>
-              <a:spcAft>
-                <a:spcPts val="300"/>
-              </a:spcAft>
-              <a:defRPr sz="1150">
-                <a:solidFill>
-                  <a:srgbClr val="F3F4F6"/>
-                </a:solidFill>
-              </a:defRPr>
-            </a:pPr>
-            <a:r>
-              <a:t>GitHub: https://github.com/nealverseprime</a:t>
-            </a:r>
-          </a:p>
-        </p:txBody>
-      </p:sp>
-      <p:sp>
-        <p:nvSpPr>
-          <p:cNvPr id="5" name="Rounded Rectangle 4"/>
-          <p:cNvSpPr/>
-          <p:nvPr/>
-        </p:nvSpPr>
-        <p:spPr>
-          <a:xfrm>
-            <a:off x="6675120" y="4297680"/>
-            <a:ext cx="4754880" cy="2011680"/>
-          </a:xfrm>
-          <a:prstGeom prst="roundRect">
-            <a:avLst/>
-          </a:prstGeom>
-          <a:solidFill>
-            <a:srgbClr val="161B22"/>
-          </a:solidFill>
-          <a:ln w="19050">
-            <a:solidFill>
-              <a:srgbClr val="06B6D4"/>
-            </a:solidFill>
-          </a:ln>
-        </p:spPr>
-        <p:style>
-          <a:lnRef idx="1">
-            <a:schemeClr val="accent1"/>
-          </a:lnRef>
-          <a:fillRef idx="3">
-            <a:schemeClr val="accent1"/>
-          </a:fillRef>
-          <a:effectRef idx="2">
-            <a:schemeClr val="accent1"/>
-          </a:effectRef>
-          <a:fontRef idx="minor">
-            <a:schemeClr val="lt1"/>
-          </a:fontRef>
-        </p:style>
-        <p:txBody>
-          <a:bodyPr rtlCol="0" anchor="ctr" wrap="square" lIns="182880" rIns="182880" tIns="164592" bIns="164592"/>
-          <a:lstStyle/>
-          <a:p>
-            <a:pPr algn="ctr">
-              <a:spcAft>
-                <a:spcPts val="500"/>
-              </a:spcAft>
-              <a:defRPr b="1" sz="1350">
-                <a:solidFill>
-                  <a:srgbClr val="06B6D4"/>
-                </a:solidFill>
-              </a:defRPr>
-            </a:pPr>
-            <a:r>
-              <a:t>🤝 What Toge Gets &amp; Demo Link</a:t>
-            </a:r>
-          </a:p>
-          <a:p>
-            <a:pPr>
-              <a:spcAft>
-                <a:spcPts val="300"/>
-              </a:spcAft>
-              <a:defRPr sz="1150">
-                <a:solidFill>
-                  <a:srgbClr val="F3F4F6"/>
-                </a:solidFill>
-              </a:defRPr>
-            </a:pPr>
-            <a:r>
-              <a:t>• Verified Windows Prototype: Standalone .exe included</a:t>
-            </a:r>
-          </a:p>
-          <a:p>
-            <a:pPr>
-              <a:spcAft>
-                <a:spcPts val="300"/>
-              </a:spcAft>
-              <a:defRPr sz="1150">
-                <a:solidFill>
-                  <a:srgbClr val="F3F4F6"/>
-                </a:solidFill>
-              </a:defRPr>
-            </a:pPr>
-            <a:r>
-              <a:t>• Right of First Refusal: Full publishing commercial deal ($50k-$150k) for 20+ classes and full campaign</a:t>
-            </a:r>
-          </a:p>
-          <a:p>
-            <a:pPr>
-              <a:spcAft>
-                <a:spcPts val="300"/>
-              </a:spcAft>
-              <a:defRPr sz="1150">
-                <a:solidFill>
-                  <a:srgbClr val="F3F4F6"/>
-                </a:solidFill>
-              </a:defRPr>
-            </a:pPr>
-            <a:r>
-              <a:t>• Accountability: Bi-weekly milestone builds uploaded to private itch.io / GitHub milestone branches.</a:t>
-            </a:r>
-          </a:p>
-        </p:txBody>
-      </p:sp>
-    </p:spTree>
-  </p:cSld>
-  <p:clrMapOvr>
-    <a:masterClrMapping/>
-  </p:clrMapOvr>
-</p:sld>
-</file>
-
 <file path=ppt/slides/slide2.xml><?xml version="1.0" encoding="utf-8"?>
 <p:sld xmlns:a="http://schemas.openxmlformats.org/drawingml/2006/main" xmlns:p="http://schemas.openxmlformats.org/presentationml/2006/main" xmlns:r="http://schemas.openxmlformats.org/officeDocument/2006/relationships">
   <p:cSld>
@@ -5581,9 +4194,9 @@
           <a:p>
             <a:pPr algn="ctr">
               <a:spcAft>
-                <a:spcPts val="500"/>
-              </a:spcAft>
-              <a:defRPr b="1" sz="1350">
+                <a:spcPts val="400"/>
+              </a:spcAft>
+              <a:defRPr b="1" sz="1300">
                 <a:solidFill>
                   <a:srgbClr val="06B6D4"/>
                 </a:solidFill>
@@ -5596,9 +4209,9 @@
           <a:p>
             <a:pPr>
               <a:spcAft>
-                <a:spcPts val="300"/>
-              </a:spcAft>
-              <a:defRPr sz="1150">
+                <a:spcPts val="250"/>
+              </a:spcAft>
+              <a:defRPr sz="1100">
                 <a:solidFill>
                   <a:srgbClr val="F3F4F6"/>
                 </a:solidFill>
@@ -5611,9 +4224,9 @@
           <a:p>
             <a:pPr>
               <a:spcAft>
-                <a:spcPts val="300"/>
-              </a:spcAft>
-              <a:defRPr sz="1150">
+                <a:spcPts val="250"/>
+              </a:spcAft>
+              <a:defRPr sz="1100">
                 <a:solidFill>
                   <a:srgbClr val="F3F4F6"/>
                 </a:solidFill>
@@ -5626,21 +4239,21 @@
           <a:p>
             <a:pPr>
               <a:spcAft>
-                <a:spcPts val="300"/>
-              </a:spcAft>
-              <a:defRPr sz="1150">
-                <a:solidFill>
-                  <a:srgbClr val="F3F4F6"/>
-                </a:solidFill>
-              </a:defRPr>
-            </a:pPr>
-          </a:p>
-          <a:p>
-            <a:pPr>
-              <a:spcAft>
-                <a:spcPts val="300"/>
-              </a:spcAft>
-              <a:defRPr sz="1150">
+                <a:spcPts val="250"/>
+              </a:spcAft>
+              <a:defRPr sz="1100">
+                <a:solidFill>
+                  <a:srgbClr val="F3F4F6"/>
+                </a:solidFill>
+              </a:defRPr>
+            </a:pPr>
+          </a:p>
+          <a:p>
+            <a:pPr>
+              <a:spcAft>
+                <a:spcPts val="250"/>
+              </a:spcAft>
+              <a:defRPr sz="1100">
                 <a:solidFill>
                   <a:srgbClr val="F3F4F6"/>
                 </a:solidFill>
@@ -5653,9 +4266,9 @@
           <a:p>
             <a:pPr>
               <a:spcAft>
-                <a:spcPts val="300"/>
-              </a:spcAft>
-              <a:defRPr sz="1150">
+                <a:spcPts val="250"/>
+              </a:spcAft>
+              <a:defRPr sz="1100">
                 <a:solidFill>
                   <a:srgbClr val="F3F4F6"/>
                 </a:solidFill>
@@ -5668,21 +4281,21 @@
           <a:p>
             <a:pPr>
               <a:spcAft>
-                <a:spcPts val="300"/>
-              </a:spcAft>
-              <a:defRPr sz="1150">
-                <a:solidFill>
-                  <a:srgbClr val="F3F4F6"/>
-                </a:solidFill>
-              </a:defRPr>
-            </a:pPr>
-          </a:p>
-          <a:p>
-            <a:pPr>
-              <a:spcAft>
-                <a:spcPts val="300"/>
-              </a:spcAft>
-              <a:defRPr sz="1150">
+                <a:spcPts val="250"/>
+              </a:spcAft>
+              <a:defRPr sz="1100">
+                <a:solidFill>
+                  <a:srgbClr val="F3F4F6"/>
+                </a:solidFill>
+              </a:defRPr>
+            </a:pPr>
+          </a:p>
+          <a:p>
+            <a:pPr>
+              <a:spcAft>
+                <a:spcPts val="250"/>
+              </a:spcAft>
+              <a:defRPr sz="1100">
                 <a:solidFill>
                   <a:srgbClr val="F3F4F6"/>
                 </a:solidFill>
@@ -5695,9 +4308,9 @@
           <a:p>
             <a:pPr>
               <a:spcAft>
-                <a:spcPts val="300"/>
-              </a:spcAft>
-              <a:defRPr sz="1150">
+                <a:spcPts val="250"/>
+              </a:spcAft>
+              <a:defRPr sz="1100">
                 <a:solidFill>
                   <a:srgbClr val="F3F4F6"/>
                 </a:solidFill>
@@ -5710,21 +4323,21 @@
           <a:p>
             <a:pPr>
               <a:spcAft>
-                <a:spcPts val="300"/>
-              </a:spcAft>
-              <a:defRPr sz="1150">
-                <a:solidFill>
-                  <a:srgbClr val="F3F4F6"/>
-                </a:solidFill>
-              </a:defRPr>
-            </a:pPr>
-          </a:p>
-          <a:p>
-            <a:pPr>
-              <a:spcAft>
-                <a:spcPts val="300"/>
-              </a:spcAft>
-              <a:defRPr sz="1150">
+                <a:spcPts val="250"/>
+              </a:spcAft>
+              <a:defRPr sz="1100">
+                <a:solidFill>
+                  <a:srgbClr val="F3F4F6"/>
+                </a:solidFill>
+              </a:defRPr>
+            </a:pPr>
+          </a:p>
+          <a:p>
+            <a:pPr>
+              <a:spcAft>
+                <a:spcPts val="250"/>
+              </a:spcAft>
+              <a:defRPr sz="1100">
                 <a:solidFill>
                   <a:srgbClr val="F3F4F6"/>
                 </a:solidFill>
@@ -5737,9 +4350,9 @@
           <a:p>
             <a:pPr>
               <a:spcAft>
-                <a:spcPts val="300"/>
-              </a:spcAft>
-              <a:defRPr sz="1150">
+                <a:spcPts val="250"/>
+              </a:spcAft>
+              <a:defRPr sz="1100">
                 <a:solidFill>
                   <a:srgbClr val="F3F4F6"/>
                 </a:solidFill>
@@ -5752,9 +4365,9 @@
           <a:p>
             <a:pPr>
               <a:spcAft>
-                <a:spcPts val="300"/>
-              </a:spcAft>
-              <a:defRPr sz="1150">
+                <a:spcPts val="250"/>
+              </a:spcAft>
+              <a:defRPr sz="1100">
                 <a:solidFill>
                   <a:srgbClr val="F3F4F6"/>
                 </a:solidFill>
@@ -5767,9 +4380,9 @@
           <a:p>
             <a:pPr>
               <a:spcAft>
-                <a:spcPts val="300"/>
-              </a:spcAft>
-              <a:defRPr sz="1150">
+                <a:spcPts val="250"/>
+              </a:spcAft>
+              <a:defRPr sz="1100">
                 <a:solidFill>
                   <a:srgbClr val="F3F4F6"/>
                 </a:solidFill>
@@ -5782,9 +4395,9 @@
           <a:p>
             <a:pPr>
               <a:spcAft>
-                <a:spcPts val="300"/>
-              </a:spcAft>
-              <a:defRPr sz="1150">
+                <a:spcPts val="250"/>
+              </a:spcAft>
+              <a:defRPr sz="1100">
                 <a:solidFill>
                   <a:srgbClr val="F3F4F6"/>
                 </a:solidFill>
@@ -5839,9 +4452,9 @@
           <a:p>
             <a:pPr algn="ctr">
               <a:spcAft>
-                <a:spcPts val="500"/>
-              </a:spcAft>
-              <a:defRPr b="1" sz="1350">
+                <a:spcPts val="400"/>
+              </a:spcAft>
+              <a:defRPr b="1" sz="1300">
                 <a:solidFill>
                   <a:srgbClr val="F59E0B"/>
                 </a:solidFill>
@@ -5854,9 +4467,9 @@
           <a:p>
             <a:pPr>
               <a:spcAft>
-                <a:spcPts val="300"/>
-              </a:spcAft>
-              <a:defRPr sz="1150">
+                <a:spcPts val="250"/>
+              </a:spcAft>
+              <a:defRPr sz="1100">
                 <a:solidFill>
                   <a:srgbClr val="F3F4F6"/>
                 </a:solidFill>
@@ -5869,9 +4482,9 @@
           <a:p>
             <a:pPr>
               <a:spcAft>
-                <a:spcPts val="300"/>
-              </a:spcAft>
-              <a:defRPr sz="1150">
+                <a:spcPts val="250"/>
+              </a:spcAft>
+              <a:defRPr sz="1100">
                 <a:solidFill>
                   <a:srgbClr val="F3F4F6"/>
                 </a:solidFill>
@@ -5884,21 +4497,21 @@
           <a:p>
             <a:pPr>
               <a:spcAft>
-                <a:spcPts val="300"/>
-              </a:spcAft>
-              <a:defRPr sz="1150">
-                <a:solidFill>
-                  <a:srgbClr val="F3F4F6"/>
-                </a:solidFill>
-              </a:defRPr>
-            </a:pPr>
-          </a:p>
-          <a:p>
-            <a:pPr>
-              <a:spcAft>
-                <a:spcPts val="300"/>
-              </a:spcAft>
-              <a:defRPr sz="1150">
+                <a:spcPts val="250"/>
+              </a:spcAft>
+              <a:defRPr sz="1100">
+                <a:solidFill>
+                  <a:srgbClr val="F3F4F6"/>
+                </a:solidFill>
+              </a:defRPr>
+            </a:pPr>
+          </a:p>
+          <a:p>
+            <a:pPr>
+              <a:spcAft>
+                <a:spcPts val="250"/>
+              </a:spcAft>
+              <a:defRPr sz="1100">
                 <a:solidFill>
                   <a:srgbClr val="F3F4F6"/>
                 </a:solidFill>
@@ -5911,9 +4524,9 @@
           <a:p>
             <a:pPr>
               <a:spcAft>
-                <a:spcPts val="300"/>
-              </a:spcAft>
-              <a:defRPr sz="1150">
+                <a:spcPts val="250"/>
+              </a:spcAft>
+              <a:defRPr sz="1100">
                 <a:solidFill>
                   <a:srgbClr val="F3F4F6"/>
                 </a:solidFill>
@@ -5926,21 +4539,21 @@
           <a:p>
             <a:pPr>
               <a:spcAft>
-                <a:spcPts val="300"/>
-              </a:spcAft>
-              <a:defRPr sz="1150">
-                <a:solidFill>
-                  <a:srgbClr val="F3F4F6"/>
-                </a:solidFill>
-              </a:defRPr>
-            </a:pPr>
-          </a:p>
-          <a:p>
-            <a:pPr>
-              <a:spcAft>
-                <a:spcPts val="300"/>
-              </a:spcAft>
-              <a:defRPr sz="1150">
+                <a:spcPts val="250"/>
+              </a:spcAft>
+              <a:defRPr sz="1100">
+                <a:solidFill>
+                  <a:srgbClr val="F3F4F6"/>
+                </a:solidFill>
+              </a:defRPr>
+            </a:pPr>
+          </a:p>
+          <a:p>
+            <a:pPr>
+              <a:spcAft>
+                <a:spcPts val="250"/>
+              </a:spcAft>
+              <a:defRPr sz="1100">
                 <a:solidFill>
                   <a:srgbClr val="F3F4F6"/>
                 </a:solidFill>
@@ -5953,9 +4566,9 @@
           <a:p>
             <a:pPr>
               <a:spcAft>
-                <a:spcPts val="300"/>
-              </a:spcAft>
-              <a:defRPr sz="1150">
+                <a:spcPts val="250"/>
+              </a:spcAft>
+              <a:defRPr sz="1100">
                 <a:solidFill>
                   <a:srgbClr val="F3F4F6"/>
                 </a:solidFill>
@@ -5968,21 +4581,21 @@
           <a:p>
             <a:pPr>
               <a:spcAft>
-                <a:spcPts val="300"/>
-              </a:spcAft>
-              <a:defRPr sz="1150">
-                <a:solidFill>
-                  <a:srgbClr val="F3F4F6"/>
-                </a:solidFill>
-              </a:defRPr>
-            </a:pPr>
-          </a:p>
-          <a:p>
-            <a:pPr>
-              <a:spcAft>
-                <a:spcPts val="300"/>
-              </a:spcAft>
-              <a:defRPr sz="1150">
+                <a:spcPts val="250"/>
+              </a:spcAft>
+              <a:defRPr sz="1100">
+                <a:solidFill>
+                  <a:srgbClr val="F3F4F6"/>
+                </a:solidFill>
+              </a:defRPr>
+            </a:pPr>
+          </a:p>
+          <a:p>
+            <a:pPr>
+              <a:spcAft>
+                <a:spcPts val="250"/>
+              </a:spcAft>
+              <a:defRPr sz="1100">
                 <a:solidFill>
                   <a:srgbClr val="F3F4F6"/>
                 </a:solidFill>
@@ -5995,9 +4608,9 @@
           <a:p>
             <a:pPr>
               <a:spcAft>
-                <a:spcPts val="300"/>
-              </a:spcAft>
-              <a:defRPr sz="1150">
+                <a:spcPts val="250"/>
+              </a:spcAft>
+              <a:defRPr sz="1100">
                 <a:solidFill>
                   <a:srgbClr val="F3F4F6"/>
                 </a:solidFill>
@@ -6077,7 +4690,7 @@
               </a:defRPr>
             </a:pPr>
             <a:r>
-              <a:t>Market Opportunity: Solving SRPG Frustrations</a:t>
+              <a:t>Market Opportunity: Problems, Solutions &amp; Benchmark</a:t>
             </a:r>
           </a:p>
         </p:txBody>
@@ -6090,8 +4703,8 @@
         </p:nvSpPr>
         <p:spPr>
           <a:xfrm>
-            <a:off x="731520" y="1645920"/>
-            <a:ext cx="5212080" cy="4572000"/>
+            <a:off x="731520" y="1600200"/>
+            <a:ext cx="5212080" cy="1920240"/>
           </a:xfrm>
           <a:prstGeom prst="roundRect">
             <a:avLst/>
@@ -6125,115 +4738,88 @@
           <a:p>
             <a:pPr algn="ctr">
               <a:spcAft>
-                <a:spcPts val="500"/>
-              </a:spcAft>
-              <a:defRPr b="1" sz="1350">
+                <a:spcPts val="400"/>
+              </a:spcAft>
+              <a:defRPr b="1" sz="1300">
                 <a:solidFill>
                   <a:srgbClr val="F59E0B"/>
                 </a:solidFill>
               </a:defRPr>
             </a:pPr>
             <a:r>
-              <a:t>🧠 1. Solving 'Cognitive Overload'</a:t>
-            </a:r>
-          </a:p>
-          <a:p>
-            <a:pPr>
-              <a:spcAft>
-                <a:spcPts val="300"/>
-              </a:spcAft>
-              <a:defRPr sz="1150">
-                <a:solidFill>
-                  <a:srgbClr val="F3F4F6"/>
-                </a:solidFill>
-              </a:defRPr>
-            </a:pPr>
-            <a:r>
-              <a:t>The Problem in Classic SRPGs:</a:t>
-            </a:r>
-          </a:p>
-          <a:p>
-            <a:pPr>
-              <a:spcAft>
-                <a:spcPts val="300"/>
-              </a:spcAft>
-              <a:defRPr sz="1150">
-                <a:solidFill>
-                  <a:srgbClr val="F3F4F6"/>
-                </a:solidFill>
-              </a:defRPr>
-            </a:pPr>
-            <a:r>
-              <a:t>Classic elemental tactics games overwhelm players with dozens of confusing status effect icons, elemental charts, and hidden percentage calculation tables.</a:t>
-            </a:r>
-          </a:p>
-          <a:p>
-            <a:pPr>
-              <a:spcAft>
-                <a:spcPts val="300"/>
-              </a:spcAft>
-              <a:defRPr sz="1150">
-                <a:solidFill>
-                  <a:srgbClr val="F3F4F6"/>
-                </a:solidFill>
-              </a:defRPr>
-            </a:pPr>
-          </a:p>
-          <a:p>
-            <a:pPr>
-              <a:spcAft>
-                <a:spcPts val="300"/>
-              </a:spcAft>
-              <a:defRPr sz="1150">
-                <a:solidFill>
-                  <a:srgbClr val="F3F4F6"/>
-                </a:solidFill>
-              </a:defRPr>
-            </a:pPr>
-            <a:r>
-              <a:t>Our Solution: Ghost UI (Predictive Preview)</a:t>
-            </a:r>
-          </a:p>
-          <a:p>
-            <a:pPr>
-              <a:spcAft>
-                <a:spcPts val="300"/>
-              </a:spcAft>
-              <a:defRPr sz="1150">
-                <a:solidFill>
-                  <a:srgbClr val="F3F4F6"/>
-                </a:solidFill>
-              </a:defRPr>
-            </a:pPr>
-            <a:r>
-              <a:t>Hovering any spell or push action over a tile immediately previews the exact physical terrain reaction and knockback path before the player commits.</a:t>
-            </a:r>
-          </a:p>
-          <a:p>
-            <a:pPr>
-              <a:spcAft>
-                <a:spcPts val="300"/>
-              </a:spcAft>
-              <a:defRPr sz="1150">
-                <a:solidFill>
-                  <a:srgbClr val="F3F4F6"/>
-                </a:solidFill>
-              </a:defRPr>
-            </a:pPr>
-          </a:p>
-          <a:p>
-            <a:pPr>
-              <a:spcAft>
-                <a:spcPts val="300"/>
-              </a:spcAft>
-              <a:defRPr sz="1150">
-                <a:solidFill>
-                  <a:srgbClr val="F3F4F6"/>
-                </a:solidFill>
-              </a:defRPr>
-            </a:pPr>
-            <a:r>
-              <a:t>Result: Deep tactical planning with zero mental fatigue.</a:t>
+              <a:t>🧠 Problem 1: Cognitive Overload</a:t>
+            </a:r>
+          </a:p>
+          <a:p>
+            <a:pPr>
+              <a:spcAft>
+                <a:spcPts val="250"/>
+              </a:spcAft>
+              <a:defRPr sz="1100">
+                <a:solidFill>
+                  <a:srgbClr val="F3F4F6"/>
+                </a:solidFill>
+              </a:defRPr>
+            </a:pPr>
+            <a:r>
+              <a:t>The Frustration in Classic SRPGs:</a:t>
+            </a:r>
+          </a:p>
+          <a:p>
+            <a:pPr>
+              <a:spcAft>
+                <a:spcPts val="250"/>
+              </a:spcAft>
+              <a:defRPr sz="1100">
+                <a:solidFill>
+                  <a:srgbClr val="F3F4F6"/>
+                </a:solidFill>
+              </a:defRPr>
+            </a:pPr>
+            <a:r>
+              <a:t>Confusing status effect spreadsheets, hidden percentage tables, and mental fatigue.</a:t>
+            </a:r>
+          </a:p>
+          <a:p>
+            <a:pPr>
+              <a:spcAft>
+                <a:spcPts val="250"/>
+              </a:spcAft>
+              <a:defRPr sz="1100">
+                <a:solidFill>
+                  <a:srgbClr val="F3F4F6"/>
+                </a:solidFill>
+              </a:defRPr>
+            </a:pPr>
+          </a:p>
+          <a:p>
+            <a:pPr>
+              <a:spcAft>
+                <a:spcPts val="250"/>
+              </a:spcAft>
+              <a:defRPr sz="1100">
+                <a:solidFill>
+                  <a:srgbClr val="F3F4F6"/>
+                </a:solidFill>
+              </a:defRPr>
+            </a:pPr>
+            <a:r>
+              <a:t>➔ Our Solution: Ghost UI (Predictive Preview)</a:t>
+            </a:r>
+          </a:p>
+          <a:p>
+            <a:pPr>
+              <a:spcAft>
+                <a:spcPts val="250"/>
+              </a:spcAft>
+              <a:defRPr sz="1100">
+                <a:solidFill>
+                  <a:srgbClr val="F3F4F6"/>
+                </a:solidFill>
+              </a:defRPr>
+            </a:pPr>
+            <a:r>
+              <a:t>Hovering any spell previews exact terrain mutation &amp; shove trajectory before committing. Deep tactics, zero fatigue.</a:t>
             </a:r>
           </a:p>
         </p:txBody>
@@ -6246,8 +4832,8 @@
         </p:nvSpPr>
         <p:spPr>
           <a:xfrm>
-            <a:off x="6217920" y="1645920"/>
-            <a:ext cx="5212080" cy="4572000"/>
+            <a:off x="6217920" y="1600200"/>
+            <a:ext cx="5212080" cy="1920240"/>
           </a:xfrm>
           <a:prstGeom prst="roundRect">
             <a:avLst/>
@@ -6281,202 +4867,231 @@
           <a:p>
             <a:pPr algn="ctr">
               <a:spcAft>
-                <a:spcPts val="500"/>
-              </a:spcAft>
-              <a:defRPr b="1" sz="1350">
+                <a:spcPts val="400"/>
+              </a:spcAft>
+              <a:defRPr b="1" sz="1300">
                 <a:solidFill>
                   <a:srgbClr val="06B6D4"/>
                 </a:solidFill>
               </a:defRPr>
             </a:pPr>
             <a:r>
-              <a:t>⏳ 2. Solving 'Setup Tax'</a:t>
-            </a:r>
-          </a:p>
-          <a:p>
-            <a:pPr>
-              <a:spcAft>
-                <a:spcPts val="300"/>
-              </a:spcAft>
-              <a:defRPr sz="1150">
-                <a:solidFill>
-                  <a:srgbClr val="F3F4F6"/>
-                </a:solidFill>
-              </a:defRPr>
-            </a:pPr>
-            <a:r>
-              <a:t>The Problem in Classic SRPGs:</a:t>
-            </a:r>
-          </a:p>
-          <a:p>
-            <a:pPr>
-              <a:spcAft>
-                <a:spcPts val="300"/>
-              </a:spcAft>
-              <a:defRPr sz="1150">
-                <a:solidFill>
-                  <a:srgbClr val="F3F4F6"/>
-                </a:solidFill>
-              </a:defRPr>
-            </a:pPr>
-            <a:r>
-              <a:t>Players hate wasting valuable turns just preparing terrain or placing elemental tiles without dealing actual damage to enemies.</a:t>
-            </a:r>
-          </a:p>
-          <a:p>
-            <a:pPr>
-              <a:spcAft>
-                <a:spcPts val="300"/>
-              </a:spcAft>
-              <a:defRPr sz="1150">
-                <a:solidFill>
-                  <a:srgbClr val="F3F4F6"/>
-                </a:solidFill>
-              </a:defRPr>
-            </a:pPr>
-          </a:p>
-          <a:p>
-            <a:pPr>
-              <a:spcAft>
-                <a:spcPts val="300"/>
-              </a:spcAft>
-              <a:defRPr sz="1150">
-                <a:solidFill>
-                  <a:srgbClr val="F3F4F6"/>
-                </a:solidFill>
-              </a:defRPr>
-            </a:pPr>
-            <a:r>
-              <a:t>Our Solution: Hybrid Attack-Spells</a:t>
-            </a:r>
-          </a:p>
-          <a:p>
-            <a:pPr>
-              <a:spcAft>
-                <a:spcPts val="300"/>
-              </a:spcAft>
-              <a:defRPr sz="1150">
-                <a:solidFill>
-                  <a:srgbClr val="F3F4F6"/>
-                </a:solidFill>
-              </a:defRPr>
-            </a:pPr>
-            <a:r>
-              <a:t>Every spell acts simultaneously! Fireball deals direct damage to the target AND mutates the ground into lava in 1 action. Kinetic Push deals damage AND displaces.</a:t>
-            </a:r>
-          </a:p>
-          <a:p>
-            <a:pPr>
-              <a:spcAft>
-                <a:spcPts val="300"/>
-              </a:spcAft>
-              <a:defRPr sz="1150">
-                <a:solidFill>
-                  <a:srgbClr val="F3F4F6"/>
-                </a:solidFill>
-              </a:defRPr>
-            </a:pPr>
-          </a:p>
-          <a:p>
-            <a:pPr>
-              <a:spcAft>
-                <a:spcPts val="300"/>
-              </a:spcAft>
-              <a:defRPr sz="1150">
-                <a:solidFill>
-                  <a:srgbClr val="F3F4F6"/>
-                </a:solidFill>
-              </a:defRPr>
-            </a:pPr>
-            <a:r>
-              <a:t>Result: Streamlined combat flow where every turn advances the battle.</a:t>
-            </a:r>
-          </a:p>
-        </p:txBody>
-      </p:sp>
-    </p:spTree>
-  </p:cSld>
-  <p:clrMapOvr>
-    <a:masterClrMapping/>
-  </p:clrMapOvr>
-</p:sld>
-</file>
-
-<file path=ppt/slides/slide4.xml><?xml version="1.0" encoding="utf-8"?>
-<p:sld xmlns:a="http://schemas.openxmlformats.org/drawingml/2006/main" xmlns:p="http://schemas.openxmlformats.org/presentationml/2006/main" xmlns:r="http://schemas.openxmlformats.org/officeDocument/2006/relationships">
-  <p:cSld>
-    <p:bg>
-      <p:bgPr>
-        <a:solidFill>
-          <a:srgbClr val="0D1117"/>
-        </a:solidFill>
-        <a:effectLst/>
-      </p:bgPr>
-    </p:bg>
-    <p:spTree>
-      <p:nvGrpSpPr>
-        <p:cNvPr id="1" name=""/>
-        <p:cNvGrpSpPr/>
-        <p:nvPr/>
-      </p:nvGrpSpPr>
-      <p:grpSpPr/>
-      <p:sp>
-        <p:nvSpPr>
-          <p:cNvPr id="2" name="TextBox 1"/>
-          <p:cNvSpPr txBox="1"/>
+              <a:t>⏳ Problem 2: Setup Tax</a:t>
+            </a:r>
+          </a:p>
+          <a:p>
+            <a:pPr>
+              <a:spcAft>
+                <a:spcPts val="250"/>
+              </a:spcAft>
+              <a:defRPr sz="1100">
+                <a:solidFill>
+                  <a:srgbClr val="F3F4F6"/>
+                </a:solidFill>
+              </a:defRPr>
+            </a:pPr>
+            <a:r>
+              <a:t>The Frustration in Classic SRPGs:</a:t>
+            </a:r>
+          </a:p>
+          <a:p>
+            <a:pPr>
+              <a:spcAft>
+                <a:spcPts val="250"/>
+              </a:spcAft>
+              <a:defRPr sz="1100">
+                <a:solidFill>
+                  <a:srgbClr val="F3F4F6"/>
+                </a:solidFill>
+              </a:defRPr>
+            </a:pPr>
+            <a:r>
+              <a:t>Wasting valuable turns just setting tiles without dealing damage to enemies.</a:t>
+            </a:r>
+          </a:p>
+          <a:p>
+            <a:pPr>
+              <a:spcAft>
+                <a:spcPts val="250"/>
+              </a:spcAft>
+              <a:defRPr sz="1100">
+                <a:solidFill>
+                  <a:srgbClr val="F3F4F6"/>
+                </a:solidFill>
+              </a:defRPr>
+            </a:pPr>
+          </a:p>
+          <a:p>
+            <a:pPr>
+              <a:spcAft>
+                <a:spcPts val="250"/>
+              </a:spcAft>
+              <a:defRPr sz="1100">
+                <a:solidFill>
+                  <a:srgbClr val="F3F4F6"/>
+                </a:solidFill>
+              </a:defRPr>
+            </a:pPr>
+            <a:r>
+              <a:t>➔ Our Solution: Hybrid Attack-Spells</a:t>
+            </a:r>
+          </a:p>
+          <a:p>
+            <a:pPr>
+              <a:spcAft>
+                <a:spcPts val="250"/>
+              </a:spcAft>
+              <a:defRPr sz="1100">
+                <a:solidFill>
+                  <a:srgbClr val="F3F4F6"/>
+                </a:solidFill>
+              </a:defRPr>
+            </a:pPr>
+            <a:r>
+              <a:t>Every spell attacks AND mutates terrain in 1 action (Fireball burns lava; Push deals damage). Zero filler turns.</a:t>
+            </a:r>
+          </a:p>
+        </p:txBody>
+      </p:sp>
+      <p:sp>
+        <p:nvSpPr>
+          <p:cNvPr id="5" name="Rounded Rectangle 4"/>
+          <p:cNvSpPr/>
           <p:nvPr/>
         </p:nvSpPr>
         <p:spPr>
           <a:xfrm>
-            <a:off x="731520" y="411480"/>
-            <a:ext cx="10698480" cy="1005840"/>
+            <a:off x="731520" y="3657600"/>
+            <a:ext cx="5212080" cy="2011680"/>
           </a:xfrm>
-          <a:prstGeom prst="rect">
+          <a:prstGeom prst="roundRect">
             <a:avLst/>
           </a:prstGeom>
-          <a:noFill/>
+          <a:solidFill>
+            <a:srgbClr val="161B22"/>
+          </a:solidFill>
+          <a:ln w="19050">
+            <a:solidFill>
+              <a:srgbClr val="10B981"/>
+            </a:solidFill>
+          </a:ln>
         </p:spPr>
-        <p:txBody>
-          <a:bodyPr wrap="square" lIns="0" tIns="0" rIns="0" bIns="0">
-            <a:spAutoFit/>
-          </a:bodyPr>
+        <p:style>
+          <a:lnRef idx="1">
+            <a:schemeClr val="accent1"/>
+          </a:lnRef>
+          <a:fillRef idx="3">
+            <a:schemeClr val="accent1"/>
+          </a:fillRef>
+          <a:effectRef idx="2">
+            <a:schemeClr val="accent1"/>
+          </a:effectRef>
+          <a:fontRef idx="minor">
+            <a:schemeClr val="lt1"/>
+          </a:fontRef>
+        </p:style>
+        <p:txBody>
+          <a:bodyPr rtlCol="0" anchor="ctr" wrap="square" lIns="182880" rIns="182880" tIns="164592" bIns="164592"/>
           <a:lstStyle/>
           <a:p>
-            <a:pPr>
-              <a:defRPr sz="1100" b="1">
-                <a:solidFill>
-                  <a:srgbClr val="06B6D4"/>
-                </a:solidFill>
-              </a:defRPr>
-            </a:pPr>
-            <a:r>
-              <a:t>TGFI PITCH SECTION 3: COMPETITOR BENCHMARK</a:t>
-            </a:r>
-          </a:p>
-          <a:p>
-            <a:pPr>
-              <a:defRPr sz="2400" b="1">
-                <a:solidFill>
-                  <a:srgbClr val="F3F4F6"/>
-                </a:solidFill>
-              </a:defRPr>
-            </a:pPr>
-            <a:r>
-              <a:t>Market Opportunity: Competitor Matrix</a:t>
-            </a:r>
-          </a:p>
-        </p:txBody>
-      </p:sp>
-      <p:sp>
-        <p:nvSpPr>
-          <p:cNvPr id="3" name="Rounded Rectangle 2"/>
+            <a:pPr algn="ctr">
+              <a:spcAft>
+                <a:spcPts val="400"/>
+              </a:spcAft>
+              <a:defRPr b="1" sz="1300">
+                <a:solidFill>
+                  <a:srgbClr val="10B981"/>
+                </a:solidFill>
+              </a:defRPr>
+            </a:pPr>
+            <a:r>
+              <a:t>♟️ Hex &amp; Tactical RPG Comps</a:t>
+            </a:r>
+          </a:p>
+          <a:p>
+            <a:pPr>
+              <a:spcAft>
+                <a:spcPts val="250"/>
+              </a:spcAft>
+              <a:defRPr sz="1100">
+                <a:solidFill>
+                  <a:srgbClr val="F3F4F6"/>
+                </a:solidFill>
+              </a:defRPr>
+            </a:pPr>
+            <a:r>
+              <a:t>• Brigandine: Runersia (Happinet | 1,300+ Reviews, Very Positive):</a:t>
+            </a:r>
+          </a:p>
+          <a:p>
+            <a:pPr>
+              <a:spcAft>
+                <a:spcPts val="250"/>
+              </a:spcAft>
+              <a:defRPr sz="1100">
+                <a:solidFill>
+                  <a:srgbClr val="F3F4F6"/>
+                </a:solidFill>
+              </a:defRPr>
+            </a:pPr>
+            <a:r>
+              <a:t>  Proves hex-grid monster commanding market. We replace slow 45-min AA battle animations with streamlined tactical flow and Active Terraforming.</a:t>
+            </a:r>
+          </a:p>
+          <a:p>
+            <a:pPr>
+              <a:spcAft>
+                <a:spcPts val="250"/>
+              </a:spcAft>
+              <a:defRPr sz="1100">
+                <a:solidFill>
+                  <a:srgbClr val="F3F4F6"/>
+                </a:solidFill>
+              </a:defRPr>
+            </a:pPr>
+          </a:p>
+          <a:p>
+            <a:pPr>
+              <a:spcAft>
+                <a:spcPts val="250"/>
+              </a:spcAft>
+              <a:defRPr sz="1100">
+                <a:solidFill>
+                  <a:srgbClr val="F3F4F6"/>
+                </a:solidFill>
+              </a:defRPr>
+            </a:pPr>
+            <a:r>
+              <a:t>• Vanaris Tactics (Toge Productions):</a:t>
+            </a:r>
+          </a:p>
+          <a:p>
+            <a:pPr>
+              <a:spcAft>
+                <a:spcPts val="250"/>
+              </a:spcAft>
+              <a:defRPr sz="1100">
+                <a:solidFill>
+                  <a:srgbClr val="F3F4F6"/>
+                </a:solidFill>
+              </a:defRPr>
+            </a:pPr>
+            <a:r>
+              <a:t>  Proves retro FFT charm. We add 3D multi-level elevations, kinetic shoves, and terrain harvesting.</a:t>
+            </a:r>
+          </a:p>
+        </p:txBody>
+      </p:sp>
+      <p:sp>
+        <p:nvSpPr>
+          <p:cNvPr id="6" name="Rounded Rectangle 5"/>
           <p:cNvSpPr/>
           <p:nvPr/>
         </p:nvSpPr>
         <p:spPr>
           <a:xfrm>
-            <a:off x="731520" y="1600200"/>
-            <a:ext cx="5212080" cy="1828800"/>
+            <a:off x="6217920" y="3657600"/>
+            <a:ext cx="5212080" cy="2011680"/>
           </a:xfrm>
           <a:prstGeom prst="roundRect">
             <a:avLst/>
@@ -6510,75 +5125,102 @@
           <a:p>
             <a:pPr algn="ctr">
               <a:spcAft>
-                <a:spcPts val="500"/>
-              </a:spcAft>
-              <a:defRPr b="1" sz="1350">
+                <a:spcPts val="400"/>
+              </a:spcAft>
+              <a:defRPr b="1" sz="1300">
                 <a:solidFill>
                   <a:srgbClr val="06B6D4"/>
                 </a:solidFill>
               </a:defRPr>
             </a:pPr>
             <a:r>
-              <a:t>♟️ Brigandine: Runersia (Happinet)</a:t>
-            </a:r>
-          </a:p>
-          <a:p>
-            <a:pPr>
-              <a:spcAft>
-                <a:spcPts val="300"/>
-              </a:spcAft>
-              <a:defRPr sz="1150">
-                <a:solidFill>
-                  <a:srgbClr val="F3F4F6"/>
-                </a:solidFill>
-              </a:defRPr>
-            </a:pPr>
-            <a:r>
-              <a:t>Publisher: Happinet (Very Positive, 1,300+ Steam Reviews)</a:t>
-            </a:r>
-          </a:p>
-          <a:p>
-            <a:pPr>
-              <a:spcAft>
-                <a:spcPts val="300"/>
-              </a:spcAft>
-              <a:defRPr sz="1150">
-                <a:solidFill>
-                  <a:srgbClr val="F3F4F6"/>
-                </a:solidFill>
-              </a:defRPr>
-            </a:pPr>
-            <a:r>
-              <a:t>What Players Love: Deep hex-grid tactics, monster commanding &amp; terrain affinities.</a:t>
-            </a:r>
-          </a:p>
-          <a:p>
-            <a:pPr>
-              <a:spcAft>
-                <a:spcPts val="300"/>
-              </a:spcAft>
-              <a:defRPr sz="1150">
-                <a:solidFill>
-                  <a:srgbClr val="F3F4F6"/>
-                </a:solidFill>
-              </a:defRPr>
-            </a:pPr>
-            <a:r>
-              <a:t>How We Differentiate: Replaces slow 45-min AA battle animations with streamlined tactical skirmishes; transforms passive terrain buffs into Active Terraforming.</a:t>
-            </a:r>
-          </a:p>
-        </p:txBody>
-      </p:sp>
-      <p:sp>
-        <p:nvSpPr>
-          <p:cNvPr id="4" name="Rounded Rectangle 3"/>
+              <a:t>⚔️ Push Puzzle &amp; HD-2D Comps</a:t>
+            </a:r>
+          </a:p>
+          <a:p>
+            <a:pPr>
+              <a:spcAft>
+                <a:spcPts val="250"/>
+              </a:spcAft>
+              <a:defRPr sz="1100">
+                <a:solidFill>
+                  <a:srgbClr val="F3F4F6"/>
+                </a:solidFill>
+              </a:defRPr>
+            </a:pPr>
+            <a:r>
+              <a:t>• Into the Breach (Subset Games | Overwhelmingly Positive):</a:t>
+            </a:r>
+          </a:p>
+          <a:p>
+            <a:pPr>
+              <a:spcAft>
+                <a:spcPts val="250"/>
+              </a:spcAft>
+              <a:defRPr sz="1100">
+                <a:solidFill>
+                  <a:srgbClr val="F3F4F6"/>
+                </a:solidFill>
+              </a:defRPr>
+            </a:pPr>
+            <a:r>
+              <a:t>  Masterpiece of shove puzzles. We marry push physics with fantasy RPG squad progression and land siphoning for Titan cataclysms.</a:t>
+            </a:r>
+          </a:p>
+          <a:p>
+            <a:pPr>
+              <a:spcAft>
+                <a:spcPts val="250"/>
+              </a:spcAft>
+              <a:defRPr sz="1100">
+                <a:solidFill>
+                  <a:srgbClr val="F3F4F6"/>
+                </a:solidFill>
+              </a:defRPr>
+            </a:pPr>
+          </a:p>
+          <a:p>
+            <a:pPr>
+              <a:spcAft>
+                <a:spcPts val="250"/>
+              </a:spcAft>
+              <a:defRPr sz="1100">
+                <a:solidFill>
+                  <a:srgbClr val="F3F4F6"/>
+                </a:solidFill>
+              </a:defRPr>
+            </a:pPr>
+            <a:r>
+              <a:t>• Triangle Strategy (Square Enix):</a:t>
+            </a:r>
+          </a:p>
+          <a:p>
+            <a:pPr>
+              <a:spcAft>
+                <a:spcPts val="250"/>
+              </a:spcAft>
+              <a:defRPr sz="1100">
+                <a:solidFill>
+                  <a:srgbClr val="F3F4F6"/>
+                </a:solidFill>
+              </a:defRPr>
+            </a:pPr>
+            <a:r>
+              <a:t>  HD-2D tactical presentation. We eliminate 20-hour level grinding, focusing on pure spatial skill.</a:t>
+            </a:r>
+          </a:p>
+        </p:txBody>
+      </p:sp>
+      <p:sp>
+        <p:nvSpPr>
+          <p:cNvPr id="7" name="Rounded Rectangle 6"/>
           <p:cNvSpPr/>
           <p:nvPr/>
         </p:nvSpPr>
         <p:spPr>
           <a:xfrm>
-            <a:off x="6217920" y="1600200"/>
-            <a:ext cx="5212080" cy="1828800"/>
+            <a:off x="731520" y="5779008"/>
+            <a:ext cx="10698480" cy="594360"/>
           </a:xfrm>
           <a:prstGeom prst="roundRect">
             <a:avLst/>
@@ -6612,75 +5254,301 @@
           <a:p>
             <a:pPr algn="ctr">
               <a:spcAft>
-                <a:spcPts val="500"/>
-              </a:spcAft>
-              <a:defRPr b="1" sz="1350">
-                <a:solidFill>
-                  <a:srgbClr val="F59E0B"/>
-                </a:solidFill>
-              </a:defRPr>
-            </a:pPr>
-            <a:r>
-              <a:t>🛡️ Vanaris Tactics (Toge)</a:t>
-            </a:r>
-          </a:p>
-          <a:p>
-            <a:pPr>
-              <a:spcAft>
-                <a:spcPts val="300"/>
-              </a:spcAft>
-              <a:defRPr sz="1150">
-                <a:solidFill>
-                  <a:srgbClr val="F3F4F6"/>
-                </a:solidFill>
-              </a:defRPr>
-            </a:pPr>
-            <a:r>
-              <a:t>Publisher: Toge Productions (Beloved Retro Tactics)</a:t>
-            </a:r>
-          </a:p>
-          <a:p>
-            <a:pPr>
-              <a:spcAft>
-                <a:spcPts val="300"/>
-              </a:spcAft>
-              <a:defRPr sz="1150">
-                <a:solidFill>
-                  <a:srgbClr val="F3F4F6"/>
-                </a:solidFill>
-              </a:defRPr>
-            </a:pPr>
-            <a:r>
-              <a:t>What Players Love: Classic retro FFT charm, beloved pixel art storytelling.</a:t>
-            </a:r>
-          </a:p>
-          <a:p>
-            <a:pPr>
-              <a:spcAft>
-                <a:spcPts val="300"/>
-              </a:spcAft>
-              <a:defRPr sz="1150">
-                <a:solidFill>
-                  <a:srgbClr val="F3F4F6"/>
-                </a:solidFill>
-              </a:defRPr>
-            </a:pPr>
-            <a:r>
-              <a:t>How We Differentiate: Adds 3D multi-level hex elevations, kinetic shove impact physics, and real-time elemental landscape destruction.</a:t>
-            </a:r>
-          </a:p>
-        </p:txBody>
-      </p:sp>
-      <p:sp>
-        <p:nvSpPr>
-          <p:cNvPr id="5" name="Rounded Rectangle 4"/>
+                <a:spcPts val="250"/>
+              </a:spcAft>
+              <a:defRPr sz="1100">
+                <a:solidFill>
+                  <a:srgbClr val="F3F4F6"/>
+                </a:solidFill>
+              </a:defRPr>
+            </a:pPr>
+            <a:r>
+              <a:t>🎯 Market Opportunity: Tactics fans crave Brigandine's monster fantasy and FFT's nostalgic depth, but want streamlined pacing without spreadsheet bloat.</a:t>
+            </a:r>
+          </a:p>
+        </p:txBody>
+      </p:sp>
+    </p:spTree>
+  </p:cSld>
+  <p:clrMapOvr>
+    <a:masterClrMapping/>
+  </p:clrMapOvr>
+</p:sld>
+</file>
+
+<file path=ppt/slides/slide4.xml><?xml version="1.0" encoding="utf-8"?>
+<p:sld xmlns:a="http://schemas.openxmlformats.org/drawingml/2006/main" xmlns:p="http://schemas.openxmlformats.org/presentationml/2006/main" xmlns:r="http://schemas.openxmlformats.org/officeDocument/2006/relationships">
+  <p:cSld>
+    <p:bg>
+      <p:bgPr>
+        <a:solidFill>
+          <a:srgbClr val="0D1117"/>
+        </a:solidFill>
+        <a:effectLst/>
+      </p:bgPr>
+    </p:bg>
+    <p:spTree>
+      <p:nvGrpSpPr>
+        <p:cNvPr id="1" name=""/>
+        <p:cNvGrpSpPr/>
+        <p:nvPr/>
+      </p:nvGrpSpPr>
+      <p:grpSpPr/>
+      <p:sp>
+        <p:nvSpPr>
+          <p:cNvPr id="2" name="TextBox 1"/>
+          <p:cNvSpPr txBox="1"/>
+          <p:nvPr/>
+        </p:nvSpPr>
+        <p:spPr>
+          <a:xfrm>
+            <a:off x="731520" y="411480"/>
+            <a:ext cx="10698480" cy="1005840"/>
+          </a:xfrm>
+          <a:prstGeom prst="rect">
+            <a:avLst/>
+          </a:prstGeom>
+          <a:noFill/>
+        </p:spPr>
+        <p:txBody>
+          <a:bodyPr wrap="square" lIns="0" tIns="0" rIns="0" bIns="0">
+            <a:spAutoFit/>
+          </a:bodyPr>
+          <a:lstStyle/>
+          <a:p>
+            <a:pPr>
+              <a:defRPr sz="1100" b="1">
+                <a:solidFill>
+                  <a:srgbClr val="06B6D4"/>
+                </a:solidFill>
+              </a:defRPr>
+            </a:pPr>
+            <a:r>
+              <a:t>TGFI PITCH SECTION 4: PRODUCT &amp; SOLUTION</a:t>
+            </a:r>
+          </a:p>
+          <a:p>
+            <a:pPr>
+              <a:defRPr sz="2400" b="1">
+                <a:solidFill>
+                  <a:srgbClr val="F3F4F6"/>
+                </a:solidFill>
+              </a:defRPr>
+            </a:pPr>
+            <a:r>
+              <a:t>Product &amp; Solution: Gameplay, Prototype &amp; Visual Target</a:t>
+            </a:r>
+          </a:p>
+        </p:txBody>
+      </p:sp>
+      <p:sp>
+        <p:nvSpPr>
+          <p:cNvPr id="3" name="Rounded Rectangle 2"/>
           <p:cNvSpPr/>
           <p:nvPr/>
         </p:nvSpPr>
         <p:spPr>
           <a:xfrm>
-            <a:off x="731520" y="3566160"/>
-            <a:ext cx="5212080" cy="1828800"/>
+            <a:off x="731520" y="1600200"/>
+            <a:ext cx="5303520" cy="2286000"/>
+          </a:xfrm>
+          <a:prstGeom prst="roundRect">
+            <a:avLst/>
+          </a:prstGeom>
+          <a:solidFill>
+            <a:srgbClr val="161B22"/>
+          </a:solidFill>
+          <a:ln w="19050">
+            <a:solidFill>
+              <a:srgbClr val="06B6D4"/>
+            </a:solidFill>
+          </a:ln>
+        </p:spPr>
+        <p:style>
+          <a:lnRef idx="1">
+            <a:schemeClr val="accent1"/>
+          </a:lnRef>
+          <a:fillRef idx="3">
+            <a:schemeClr val="accent1"/>
+          </a:fillRef>
+          <a:effectRef idx="2">
+            <a:schemeClr val="accent1"/>
+          </a:effectRef>
+          <a:fontRef idx="minor">
+            <a:schemeClr val="lt1"/>
+          </a:fontRef>
+        </p:style>
+        <p:txBody>
+          <a:bodyPr rtlCol="0" anchor="ctr" wrap="square" lIns="182880" rIns="182880" tIns="164592" bIns="164592"/>
+          <a:lstStyle/>
+          <a:p>
+            <a:pPr algn="ctr">
+              <a:spcAft>
+                <a:spcPts val="400"/>
+              </a:spcAft>
+              <a:defRPr b="1" sz="1300">
+                <a:solidFill>
+                  <a:srgbClr val="06B6D4"/>
+                </a:solidFill>
+              </a:defRPr>
+            </a:pPr>
+            <a:r>
+              <a:t>⚡ The 3-Step Tactical Loop</a:t>
+            </a:r>
+          </a:p>
+          <a:p>
+            <a:pPr>
+              <a:spcAft>
+                <a:spcPts val="250"/>
+              </a:spcAft>
+              <a:defRPr sz="1100">
+                <a:solidFill>
+                  <a:srgbClr val="F3F4F6"/>
+                </a:solidFill>
+              </a:defRPr>
+            </a:pPr>
+            <a:r>
+              <a:t>• 1. Master Infuses (Terraform):</a:t>
+            </a:r>
+          </a:p>
+          <a:p>
+            <a:pPr>
+              <a:spcAft>
+                <a:spcPts val="250"/>
+              </a:spcAft>
+              <a:defRPr sz="1100">
+                <a:solidFill>
+                  <a:srgbClr val="F3F4F6"/>
+                </a:solidFill>
+              </a:defRPr>
+            </a:pPr>
+            <a:r>
+              <a:t>  Fireballs scorch grass into molten lava moats; water blasts create steam.</a:t>
+            </a:r>
+          </a:p>
+          <a:p>
+            <a:pPr>
+              <a:spcAft>
+                <a:spcPts val="250"/>
+              </a:spcAft>
+              <a:defRPr sz="1100">
+                <a:solidFill>
+                  <a:srgbClr val="F3F4F6"/>
+                </a:solidFill>
+              </a:defRPr>
+            </a:pPr>
+          </a:p>
+          <a:p>
+            <a:pPr>
+              <a:spcAft>
+                <a:spcPts val="250"/>
+              </a:spcAft>
+              <a:defRPr sz="1100">
+                <a:solidFill>
+                  <a:srgbClr val="F3F4F6"/>
+                </a:solidFill>
+              </a:defRPr>
+            </a:pPr>
+            <a:r>
+              <a:t>• 2. Monster Attunes (Adapt):</a:t>
+            </a:r>
+          </a:p>
+          <a:p>
+            <a:pPr>
+              <a:spcAft>
+                <a:spcPts val="250"/>
+              </a:spcAft>
+              <a:defRPr sz="1100">
+                <a:solidFill>
+                  <a:srgbClr val="F3F4F6"/>
+                </a:solidFill>
+              </a:defRPr>
+            </a:pPr>
+            <a:r>
+              <a:t>  Allied Monsters thrive in their element (fire beasts gain +2 ATK on lava).</a:t>
+            </a:r>
+          </a:p>
+          <a:p>
+            <a:pPr>
+              <a:spcAft>
+                <a:spcPts val="250"/>
+              </a:spcAft>
+              <a:defRPr sz="1100">
+                <a:solidFill>
+                  <a:srgbClr val="F3F4F6"/>
+                </a:solidFill>
+              </a:defRPr>
+            </a:pPr>
+          </a:p>
+          <a:p>
+            <a:pPr>
+              <a:spcAft>
+                <a:spcPts val="250"/>
+              </a:spcAft>
+              <a:defRPr sz="1100">
+                <a:solidFill>
+                  <a:srgbClr val="F3F4F6"/>
+                </a:solidFill>
+              </a:defRPr>
+            </a:pPr>
+            <a:r>
+              <a:t>• 3. Monster Consumes (Unleash):</a:t>
+            </a:r>
+          </a:p>
+          <a:p>
+            <a:pPr>
+              <a:spcAft>
+                <a:spcPts val="250"/>
+              </a:spcAft>
+              <a:defRPr sz="1100">
+                <a:solidFill>
+                  <a:srgbClr val="F3F4F6"/>
+                </a:solidFill>
+              </a:defRPr>
+            </a:pPr>
+            <a:r>
+              <a:t>  Titans siphon active terrain into Barren Earth to trigger Magma Cataclysms.</a:t>
+            </a:r>
+          </a:p>
+          <a:p>
+            <a:pPr>
+              <a:spcAft>
+                <a:spcPts val="250"/>
+              </a:spcAft>
+              <a:defRPr sz="1100">
+                <a:solidFill>
+                  <a:srgbClr val="F3F4F6"/>
+                </a:solidFill>
+              </a:defRPr>
+            </a:pPr>
+          </a:p>
+          <a:p>
+            <a:pPr>
+              <a:spcAft>
+                <a:spcPts val="250"/>
+              </a:spcAft>
+              <a:defRPr sz="1100">
+                <a:solidFill>
+                  <a:srgbClr val="F3F4F6"/>
+                </a:solidFill>
+              </a:defRPr>
+            </a:pPr>
+            <a:r>
+              <a:t>💡 Dual-Command: Master shapes the map; Monster anchors the frontline.</a:t>
+            </a:r>
+          </a:p>
+        </p:txBody>
+      </p:sp>
+      <p:sp>
+        <p:nvSpPr>
+          <p:cNvPr id="4" name="Rounded Rectangle 3"/>
+          <p:cNvSpPr/>
+          <p:nvPr/>
+        </p:nvSpPr>
+        <p:spPr>
+          <a:xfrm>
+            <a:off x="731520" y="4023360"/>
+            <a:ext cx="5303520" cy="2377440"/>
           </a:xfrm>
           <a:prstGeom prst="roundRect">
             <a:avLst/>
@@ -6714,75 +5582,1040 @@
           <a:p>
             <a:pPr algn="ctr">
               <a:spcAft>
-                <a:spcPts val="500"/>
-              </a:spcAft>
-              <a:defRPr b="1" sz="1350">
+                <a:spcPts val="400"/>
+              </a:spcAft>
+              <a:defRPr b="1" sz="1300">
                 <a:solidFill>
                   <a:srgbClr val="10B981"/>
                 </a:solidFill>
               </a:defRPr>
             </a:pPr>
             <a:r>
-              <a:t>💥 Into the Breach (Subset)</a:t>
-            </a:r>
-          </a:p>
-          <a:p>
-            <a:pPr>
-              <a:spcAft>
-                <a:spcPts val="300"/>
-              </a:spcAft>
-              <a:defRPr sz="1150">
-                <a:solidFill>
-                  <a:srgbClr val="F3F4F6"/>
-                </a:solidFill>
-              </a:defRPr>
-            </a:pPr>
-            <a:r>
-              <a:t>Publisher: Subset Games (Overwhelmingly Positive)</a:t>
-            </a:r>
-          </a:p>
-          <a:p>
-            <a:pPr>
-              <a:spcAft>
-                <a:spcPts val="300"/>
-              </a:spcAft>
-              <a:defRPr sz="1150">
-                <a:solidFill>
-                  <a:srgbClr val="F3F4F6"/>
-                </a:solidFill>
-              </a:defRPr>
-            </a:pPr>
-            <a:r>
-              <a:t>What Players Love: Masterpiece of kinetic knockback puzzles.</a:t>
-            </a:r>
-          </a:p>
-          <a:p>
-            <a:pPr>
-              <a:spcAft>
-                <a:spcPts val="300"/>
-              </a:spcAft>
-              <a:defRPr sz="1150">
-                <a:solidFill>
-                  <a:srgbClr val="F3F4F6"/>
-                </a:solidFill>
-              </a:defRPr>
-            </a:pPr>
-            <a:r>
-              <a:t>How We Differentiate: Marries push puzzles with fantasy RPG squad progression, elevation tiers, and land siphoning for Titan cataclysms.</a:t>
-            </a:r>
-          </a:p>
-        </p:txBody>
-      </p:sp>
-      <p:sp>
-        <p:nvSpPr>
-          <p:cNvPr id="6" name="Rounded Rectangle 5"/>
+              <a:t>🏆 Verified Working Vertical Slice (Month 0)</a:t>
+            </a:r>
+          </a:p>
+          <a:p>
+            <a:pPr>
+              <a:spcAft>
+                <a:spcPts val="250"/>
+              </a:spcAft>
+              <a:defRPr sz="1100">
+                <a:solidFill>
+                  <a:srgbClr val="F3F4F6"/>
+                </a:solidFill>
+              </a:defRPr>
+            </a:pPr>
+            <a:r>
+              <a:t>• Fully working 2v2 skirmish (Master + Titan vs Boss + Minion) in Unity 6</a:t>
+            </a:r>
+          </a:p>
+          <a:p>
+            <a:pPr>
+              <a:spcAft>
+                <a:spcPts val="250"/>
+              </a:spcAft>
+              <a:defRPr sz="1100">
+                <a:solidFill>
+                  <a:srgbClr val="F3F4F6"/>
+                </a:solidFill>
+              </a:defRPr>
+            </a:pPr>
+            <a:r>
+              <a:t>• 3D procedural hex grid with multi-level cliff elevations</a:t>
+            </a:r>
+          </a:p>
+          <a:p>
+            <a:pPr>
+              <a:spcAft>
+                <a:spcPts val="250"/>
+              </a:spcAft>
+              <a:defRPr sz="1100">
+                <a:solidFill>
+                  <a:srgbClr val="F3F4F6"/>
+                </a:solidFill>
+              </a:defRPr>
+            </a:pPr>
+            <a:r>
+              <a:t>• Kinetic shove physics with wall-impact collisions &amp; lava hazard burns</a:t>
+            </a:r>
+          </a:p>
+          <a:p>
+            <a:pPr>
+              <a:spcAft>
+                <a:spcPts val="250"/>
+              </a:spcAft>
+              <a:defRPr sz="1100">
+                <a:solidFill>
+                  <a:srgbClr val="F3F4F6"/>
+                </a:solidFill>
+              </a:defRPr>
+            </a:pPr>
+            <a:r>
+              <a:t>• Land siphoning &amp; camera screen-shake Magma Cataclysm</a:t>
+            </a:r>
+          </a:p>
+          <a:p>
+            <a:pPr>
+              <a:spcAft>
+                <a:spcPts val="250"/>
+              </a:spcAft>
+              <a:defRPr sz="1100">
+                <a:solidFill>
+                  <a:srgbClr val="F3F4F6"/>
+                </a:solidFill>
+              </a:defRPr>
+            </a:pPr>
+            <a:r>
+              <a:t>• Zero-dependency procedural audio engine with mute toggle active</a:t>
+            </a:r>
+          </a:p>
+          <a:p>
+            <a:pPr>
+              <a:spcAft>
+                <a:spcPts val="250"/>
+              </a:spcAft>
+              <a:defRPr sz="1100">
+                <a:solidFill>
+                  <a:srgbClr val="F3F4F6"/>
+                </a:solidFill>
+              </a:defRPr>
+            </a:pPr>
+            <a:r>
+              <a:t>• Standalone playable Windows .exe build ready for review</a:t>
+            </a:r>
+          </a:p>
+        </p:txBody>
+      </p:sp>
+      <p:pic>
+        <p:nvPicPr>
+          <p:cNvPr id="5" name="Picture 4" descr="slide9_visual_benchmark.png"/>
+          <p:cNvPicPr>
+            <a:picLocks noChangeAspect="1"/>
+          </p:cNvPicPr>
+          <p:nvPr/>
+        </p:nvPicPr>
+        <p:blipFill>
+          <a:blip r:embed="rId2"/>
+          <a:stretch>
+            <a:fillRect/>
+          </a:stretch>
+        </p:blipFill>
+        <p:spPr>
+          <a:xfrm>
+            <a:off x="6309360" y="1600200"/>
+            <a:ext cx="4174435" cy="4800600"/>
+          </a:xfrm>
+          <a:prstGeom prst="rect">
+            <a:avLst/>
+          </a:prstGeom>
+        </p:spPr>
+      </p:pic>
+    </p:spTree>
+  </p:cSld>
+  <p:clrMapOvr>
+    <a:masterClrMapping/>
+  </p:clrMapOvr>
+</p:sld>
+</file>
+
+<file path=ppt/slides/slide5.xml><?xml version="1.0" encoding="utf-8"?>
+<p:sld xmlns:a="http://schemas.openxmlformats.org/drawingml/2006/main" xmlns:p="http://schemas.openxmlformats.org/presentationml/2006/main" xmlns:r="http://schemas.openxmlformats.org/officeDocument/2006/relationships">
+  <p:cSld>
+    <p:bg>
+      <p:bgPr>
+        <a:solidFill>
+          <a:srgbClr val="0D1117"/>
+        </a:solidFill>
+        <a:effectLst/>
+      </p:bgPr>
+    </p:bg>
+    <p:spTree>
+      <p:nvGrpSpPr>
+        <p:cNvPr id="1" name=""/>
+        <p:cNvGrpSpPr/>
+        <p:nvPr/>
+      </p:nvGrpSpPr>
+      <p:grpSpPr/>
+      <p:sp>
+        <p:nvSpPr>
+          <p:cNvPr id="2" name="TextBox 1"/>
+          <p:cNvSpPr txBox="1"/>
+          <p:nvPr/>
+        </p:nvSpPr>
+        <p:spPr>
+          <a:xfrm>
+            <a:off x="731520" y="411480"/>
+            <a:ext cx="10698480" cy="1005840"/>
+          </a:xfrm>
+          <a:prstGeom prst="rect">
+            <a:avLst/>
+          </a:prstGeom>
+          <a:noFill/>
+        </p:spPr>
+        <p:txBody>
+          <a:bodyPr wrap="square" lIns="0" tIns="0" rIns="0" bIns="0">
+            <a:spAutoFit/>
+          </a:bodyPr>
+          <a:lstStyle/>
+          <a:p>
+            <a:pPr>
+              <a:defRPr sz="1100" b="1">
+                <a:solidFill>
+                  <a:srgbClr val="06B6D4"/>
+                </a:solidFill>
+              </a:defRPr>
+            </a:pPr>
+            <a:r>
+              <a:t>TGFI PITCH SECTION 5: EXECUTION PLAN</a:t>
+            </a:r>
+          </a:p>
+          <a:p>
+            <a:pPr>
+              <a:defRPr sz="2400" b="1">
+                <a:solidFill>
+                  <a:srgbClr val="F3F4F6"/>
+                </a:solidFill>
+              </a:defRPr>
+            </a:pPr>
+            <a:r>
+              <a:t>Execution Plan: Scope, Timeline &amp; $6,000 Budget</a:t>
+            </a:r>
+          </a:p>
+        </p:txBody>
+      </p:sp>
+      <p:sp>
+        <p:nvSpPr>
+          <p:cNvPr id="3" name="Rounded Rectangle 2"/>
           <p:cNvSpPr/>
           <p:nvPr/>
         </p:nvSpPr>
         <p:spPr>
           <a:xfrm>
-            <a:off x="6217920" y="3566160"/>
-            <a:ext cx="5212080" cy="1828800"/>
+            <a:off x="731520" y="1645920"/>
+            <a:ext cx="5212080" cy="4663440"/>
+          </a:xfrm>
+          <a:prstGeom prst="roundRect">
+            <a:avLst/>
+          </a:prstGeom>
+          <a:solidFill>
+            <a:srgbClr val="161B22"/>
+          </a:solidFill>
+          <a:ln w="19050">
+            <a:solidFill>
+              <a:srgbClr val="F59E0B"/>
+            </a:solidFill>
+          </a:ln>
+        </p:spPr>
+        <p:style>
+          <a:lnRef idx="1">
+            <a:schemeClr val="accent1"/>
+          </a:lnRef>
+          <a:fillRef idx="3">
+            <a:schemeClr val="accent1"/>
+          </a:fillRef>
+          <a:effectRef idx="2">
+            <a:schemeClr val="accent1"/>
+          </a:effectRef>
+          <a:fontRef idx="minor">
+            <a:schemeClr val="lt1"/>
+          </a:fontRef>
+        </p:style>
+        <p:txBody>
+          <a:bodyPr rtlCol="0" anchor="ctr" wrap="square" lIns="182880" rIns="182880" tIns="164592" bIns="164592"/>
+          <a:lstStyle/>
+          <a:p>
+            <a:pPr algn="ctr">
+              <a:spcAft>
+                <a:spcPts val="400"/>
+              </a:spcAft>
+              <a:defRPr b="1" sz="1300">
+                <a:solidFill>
+                  <a:srgbClr val="F59E0B"/>
+                </a:solidFill>
+              </a:defRPr>
+            </a:pPr>
+            <a:r>
+              <a:t>🗺️ 6-Month Production Roadmap to Steam Demo</a:t>
+            </a:r>
+          </a:p>
+          <a:p>
+            <a:pPr>
+              <a:spcAft>
+                <a:spcPts val="250"/>
+              </a:spcAft>
+              <a:defRPr sz="1100">
+                <a:solidFill>
+                  <a:srgbClr val="F3F4F6"/>
+                </a:solidFill>
+              </a:defRPr>
+            </a:pPr>
+            <a:r>
+              <a:t>• Month 1–2: Character Sprite Pipeline</a:t>
+            </a:r>
+          </a:p>
+          <a:p>
+            <a:pPr>
+              <a:spcAft>
+                <a:spcPts val="250"/>
+              </a:spcAft>
+              <a:defRPr sz="1100">
+                <a:solidFill>
+                  <a:srgbClr val="F3F4F6"/>
+                </a:solidFill>
+              </a:defRPr>
+            </a:pPr>
+            <a:r>
+              <a:t>  Commission freelance pixel artist for 2-directional animated sprite sheets (6 classes) and character portraits. Implement sprite animation controller.</a:t>
+            </a:r>
+          </a:p>
+          <a:p>
+            <a:pPr>
+              <a:spcAft>
+                <a:spcPts val="250"/>
+              </a:spcAft>
+              <a:defRPr sz="1100">
+                <a:solidFill>
+                  <a:srgbClr val="F3F4F6"/>
+                </a:solidFill>
+              </a:defRPr>
+            </a:pPr>
+          </a:p>
+          <a:p>
+            <a:pPr>
+              <a:spcAft>
+                <a:spcPts val="250"/>
+              </a:spcAft>
+              <a:defRPr sz="1100">
+                <a:solidFill>
+                  <a:srgbClr val="F3F4F6"/>
+                </a:solidFill>
+              </a:defRPr>
+            </a:pPr>
+            <a:r>
+              <a:t>• Month 3: New Biomes &amp; Mechanics</a:t>
+            </a:r>
+          </a:p>
+          <a:p>
+            <a:pPr>
+              <a:spcAft>
+                <a:spcPts val="250"/>
+              </a:spcAft>
+              <a:defRPr sz="1100">
+                <a:solidFill>
+                  <a:srgbClr val="F3F4F6"/>
+                </a:solidFill>
+              </a:defRPr>
+            </a:pPr>
+            <a:r>
+              <a:t>  Implement Glacial Peak (ice slide shove physics) and Conductive Marsh (water + lightning chain electrocution).</a:t>
+            </a:r>
+          </a:p>
+          <a:p>
+            <a:pPr>
+              <a:spcAft>
+                <a:spcPts val="250"/>
+              </a:spcAft>
+              <a:defRPr sz="1100">
+                <a:solidFill>
+                  <a:srgbClr val="F3F4F6"/>
+                </a:solidFill>
+              </a:defRPr>
+            </a:pPr>
+          </a:p>
+          <a:p>
+            <a:pPr>
+              <a:spcAft>
+                <a:spcPts val="250"/>
+              </a:spcAft>
+              <a:defRPr sz="1100">
+                <a:solidFill>
+                  <a:srgbClr val="F3F4F6"/>
+                </a:solidFill>
+              </a:defRPr>
+            </a:pPr>
+            <a:r>
+              <a:t>• Month 4: Campaign Node Map &amp; Smart AI</a:t>
+            </a:r>
+          </a:p>
+          <a:p>
+            <a:pPr>
+              <a:spcAft>
+                <a:spcPts val="250"/>
+              </a:spcAft>
+              <a:defRPr sz="1100">
+                <a:solidFill>
+                  <a:srgbClr val="F3F4F6"/>
+                </a:solidFill>
+              </a:defRPr>
+            </a:pPr>
+            <a:r>
+              <a:t>  Build node-based world map progression and enhance enemy AI (flanking, hazard evasion, and tactical retreating).</a:t>
+            </a:r>
+          </a:p>
+          <a:p>
+            <a:pPr>
+              <a:spcAft>
+                <a:spcPts val="250"/>
+              </a:spcAft>
+              <a:defRPr sz="1100">
+                <a:solidFill>
+                  <a:srgbClr val="F3F4F6"/>
+                </a:solidFill>
+              </a:defRPr>
+            </a:pPr>
+          </a:p>
+          <a:p>
+            <a:pPr>
+              <a:spcAft>
+                <a:spcPts val="250"/>
+              </a:spcAft>
+              <a:defRPr sz="1100">
+                <a:solidFill>
+                  <a:srgbClr val="F3F4F6"/>
+                </a:solidFill>
+              </a:defRPr>
+            </a:pPr>
+            <a:r>
+              <a:t>• Month 5–6: Steam Demo &amp; Next Fest</a:t>
+            </a:r>
+          </a:p>
+          <a:p>
+            <a:pPr>
+              <a:spcAft>
+                <a:spcPts val="250"/>
+              </a:spcAft>
+              <a:defRPr sz="1100">
+                <a:solidFill>
+                  <a:srgbClr val="F3F4F6"/>
+                </a:solidFill>
+              </a:defRPr>
+            </a:pPr>
+            <a:r>
+              <a:t>  Commission OST battle themes, polish UI/audio, and release a public 30-minute playable demo for Steam Next Fest.</a:t>
+            </a:r>
+          </a:p>
+          <a:p>
+            <a:pPr>
+              <a:spcAft>
+                <a:spcPts val="250"/>
+              </a:spcAft>
+              <a:defRPr sz="1100">
+                <a:solidFill>
+                  <a:srgbClr val="F3F4F6"/>
+                </a:solidFill>
+              </a:defRPr>
+            </a:pPr>
+          </a:p>
+          <a:p>
+            <a:pPr>
+              <a:spcAft>
+                <a:spcPts val="250"/>
+              </a:spcAft>
+              <a:defRPr sz="1100">
+                <a:solidFill>
+                  <a:srgbClr val="F3F4F6"/>
+                </a:solidFill>
+              </a:defRPr>
+            </a:pPr>
+            <a:r>
+              <a:t>🛡️ Execution Risk = Near Zero:</a:t>
+            </a:r>
+          </a:p>
+          <a:p>
+            <a:pPr>
+              <a:spcAft>
+                <a:spcPts val="250"/>
+              </a:spcAft>
+              <a:defRPr sz="1100">
+                <a:solidFill>
+                  <a:srgbClr val="F3F4F6"/>
+                </a:solidFill>
+              </a:defRPr>
+            </a:pPr>
+            <a:r>
+              <a:t>Core combat engine, hex math, kinetic displacement, and land-siphoning loops are ALREADY complete (Month 0). Months 1–6 are strictly for content &amp; asset commissioning.</a:t>
+            </a:r>
+          </a:p>
+        </p:txBody>
+      </p:sp>
+      <p:sp>
+        <p:nvSpPr>
+          <p:cNvPr id="4" name="Rounded Rectangle 3"/>
+          <p:cNvSpPr/>
+          <p:nvPr/>
+        </p:nvSpPr>
+        <p:spPr>
+          <a:xfrm>
+            <a:off x="6217920" y="1645920"/>
+            <a:ext cx="5212080" cy="4663440"/>
+          </a:xfrm>
+          <a:prstGeom prst="roundRect">
+            <a:avLst/>
+          </a:prstGeom>
+          <a:solidFill>
+            <a:srgbClr val="161B22"/>
+          </a:solidFill>
+          <a:ln w="19050">
+            <a:solidFill>
+              <a:srgbClr val="10B981"/>
+            </a:solidFill>
+          </a:ln>
+        </p:spPr>
+        <p:style>
+          <a:lnRef idx="1">
+            <a:schemeClr val="accent1"/>
+          </a:lnRef>
+          <a:fillRef idx="3">
+            <a:schemeClr val="accent1"/>
+          </a:fillRef>
+          <a:effectRef idx="2">
+            <a:schemeClr val="accent1"/>
+          </a:effectRef>
+          <a:fontRef idx="minor">
+            <a:schemeClr val="lt1"/>
+          </a:fontRef>
+        </p:style>
+        <p:txBody>
+          <a:bodyPr rtlCol="0" anchor="ctr" wrap="square" lIns="182880" rIns="182880" tIns="164592" bIns="164592"/>
+          <a:lstStyle/>
+          <a:p>
+            <a:pPr algn="ctr">
+              <a:spcAft>
+                <a:spcPts val="400"/>
+              </a:spcAft>
+              <a:defRPr b="1" sz="1300">
+                <a:solidFill>
+                  <a:srgbClr val="10B981"/>
+                </a:solidFill>
+              </a:defRPr>
+            </a:pPr>
+            <a:r>
+              <a:t>💰 High-Approval $6,000 USD Lean Budget</a:t>
+            </a:r>
+          </a:p>
+          <a:p>
+            <a:pPr>
+              <a:spcAft>
+                <a:spcPts val="250"/>
+              </a:spcAft>
+              <a:defRPr sz="1100">
+                <a:solidFill>
+                  <a:srgbClr val="F3F4F6"/>
+                </a:solidFill>
+              </a:defRPr>
+            </a:pPr>
+            <a:r>
+              <a:t>• [60%] Solo Dev Living Runway (6 Mos @ $600/mo): $3,600</a:t>
+            </a:r>
+          </a:p>
+          <a:p>
+            <a:pPr>
+              <a:spcAft>
+                <a:spcPts val="250"/>
+              </a:spcAft>
+              <a:defRPr sz="1100">
+                <a:solidFill>
+                  <a:srgbClr val="F3F4F6"/>
+                </a:solidFill>
+              </a:defRPr>
+            </a:pPr>
+            <a:r>
+              <a:t>  (~Rp 9.300.000/month living runway to work full-time in Indonesia)</a:t>
+            </a:r>
+          </a:p>
+          <a:p>
+            <a:pPr>
+              <a:spcAft>
+                <a:spcPts val="250"/>
+              </a:spcAft>
+              <a:defRPr sz="1100">
+                <a:solidFill>
+                  <a:srgbClr val="F3F4F6"/>
+                </a:solidFill>
+              </a:defRPr>
+            </a:pPr>
+          </a:p>
+          <a:p>
+            <a:pPr>
+              <a:spcAft>
+                <a:spcPts val="250"/>
+              </a:spcAft>
+              <a:defRPr sz="1100">
+                <a:solidFill>
+                  <a:srgbClr val="F3F4F6"/>
+                </a:solidFill>
+              </a:defRPr>
+            </a:pPr>
+            <a:r>
+              <a:t>• [20%] Core Character Sprite Pipeline (Demo Milestone): $1,200</a:t>
+            </a:r>
+          </a:p>
+          <a:p>
+            <a:pPr>
+              <a:spcAft>
+                <a:spcPts val="250"/>
+              </a:spcAft>
+              <a:defRPr sz="1100">
+                <a:solidFill>
+                  <a:srgbClr val="F3F4F6"/>
+                </a:solidFill>
+              </a:defRPr>
+            </a:pPr>
+            <a:r>
+              <a:t>  (6 foundational classes with 2-dir retro loops; scalable to 20+ classes upon full publishing deal)</a:t>
+            </a:r>
+          </a:p>
+          <a:p>
+            <a:pPr>
+              <a:spcAft>
+                <a:spcPts val="250"/>
+              </a:spcAft>
+              <a:defRPr sz="1100">
+                <a:solidFill>
+                  <a:srgbClr val="F3F4F6"/>
+                </a:solidFill>
+              </a:defRPr>
+            </a:pPr>
+          </a:p>
+          <a:p>
+            <a:pPr>
+              <a:spcAft>
+                <a:spcPts val="250"/>
+              </a:spcAft>
+              <a:defRPr sz="1100">
+                <a:solidFill>
+                  <a:srgbClr val="F3F4F6"/>
+                </a:solidFill>
+              </a:defRPr>
+            </a:pPr>
+            <a:r>
+              <a:t>• [10%] Original Tactical Soundtrack Commission: $600</a:t>
+            </a:r>
+          </a:p>
+          <a:p>
+            <a:pPr>
+              <a:spcAft>
+                <a:spcPts val="250"/>
+              </a:spcAft>
+              <a:defRPr sz="1100">
+                <a:solidFill>
+                  <a:srgbClr val="F3F4F6"/>
+                </a:solidFill>
+              </a:defRPr>
+            </a:pPr>
+            <a:r>
+              <a:t>  (2 tactical battle themes by an indie composer)</a:t>
+            </a:r>
+          </a:p>
+          <a:p>
+            <a:pPr>
+              <a:spcAft>
+                <a:spcPts val="250"/>
+              </a:spcAft>
+              <a:defRPr sz="1100">
+                <a:solidFill>
+                  <a:srgbClr val="F3F4F6"/>
+                </a:solidFill>
+              </a:defRPr>
+            </a:pPr>
+          </a:p>
+          <a:p>
+            <a:pPr>
+              <a:spcAft>
+                <a:spcPts val="250"/>
+              </a:spcAft>
+              <a:defRPr sz="1100">
+                <a:solidFill>
+                  <a:srgbClr val="F3F4F6"/>
+                </a:solidFill>
+              </a:defRPr>
+            </a:pPr>
+            <a:r>
+              <a:t>• [10%] Steam Listing Fee &amp; Unity Editor Tools: $600</a:t>
+            </a:r>
+          </a:p>
+          <a:p>
+            <a:pPr>
+              <a:spcAft>
+                <a:spcPts val="250"/>
+              </a:spcAft>
+              <a:defRPr sz="1100">
+                <a:solidFill>
+                  <a:srgbClr val="F3F4F6"/>
+                </a:solidFill>
+              </a:defRPr>
+            </a:pPr>
+            <a:r>
+              <a:t>  ($100 Steam fee + essential editor productivity tools)</a:t>
+            </a:r>
+          </a:p>
+          <a:p>
+            <a:pPr>
+              <a:spcAft>
+                <a:spcPts val="250"/>
+              </a:spcAft>
+              <a:defRPr sz="1100">
+                <a:solidFill>
+                  <a:srgbClr val="F3F4F6"/>
+                </a:solidFill>
+              </a:defRPr>
+            </a:pPr>
+          </a:p>
+          <a:p>
+            <a:pPr>
+              <a:spcAft>
+                <a:spcPts val="250"/>
+              </a:spcAft>
+              <a:defRPr sz="1100">
+                <a:solidFill>
+                  <a:srgbClr val="F3F4F6"/>
+                </a:solidFill>
+              </a:defRPr>
+            </a:pPr>
+            <a:r>
+              <a:t>TOTAL REQUESTED: $6,000 USD (~Rp 93.000.000)</a:t>
+            </a:r>
+          </a:p>
+          <a:p>
+            <a:pPr>
+              <a:spcAft>
+                <a:spcPts val="250"/>
+              </a:spcAft>
+              <a:defRPr sz="1100">
+                <a:solidFill>
+                  <a:srgbClr val="F3F4F6"/>
+                </a:solidFill>
+              </a:defRPr>
+            </a:pPr>
+          </a:p>
+          <a:p>
+            <a:pPr>
+              <a:spcAft>
+                <a:spcPts val="250"/>
+              </a:spcAft>
+              <a:defRPr sz="1100">
+                <a:solidFill>
+                  <a:srgbClr val="F3F4F6"/>
+                </a:solidFill>
+              </a:defRPr>
+            </a:pPr>
+            <a:r>
+              <a:t>🤝 Accountability &amp; Milestone Tracking:</a:t>
+            </a:r>
+          </a:p>
+          <a:p>
+            <a:pPr>
+              <a:spcAft>
+                <a:spcPts val="250"/>
+              </a:spcAft>
+              <a:defRPr sz="1100">
+                <a:solidFill>
+                  <a:srgbClr val="F3F4F6"/>
+                </a:solidFill>
+              </a:defRPr>
+            </a:pPr>
+            <a:r>
+              <a:t>Bi-weekly playable builds uploaded to private itch.io / GitHub milestone branches for Toge production review.</a:t>
+            </a:r>
+          </a:p>
+        </p:txBody>
+      </p:sp>
+    </p:spTree>
+  </p:cSld>
+  <p:clrMapOvr>
+    <a:masterClrMapping/>
+  </p:clrMapOvr>
+</p:sld>
+</file>
+
+<file path=ppt/slides/slide6.xml><?xml version="1.0" encoding="utf-8"?>
+<p:sld xmlns:a="http://schemas.openxmlformats.org/drawingml/2006/main" xmlns:p="http://schemas.openxmlformats.org/presentationml/2006/main" xmlns:r="http://schemas.openxmlformats.org/officeDocument/2006/relationships">
+  <p:cSld>
+    <p:bg>
+      <p:bgPr>
+        <a:solidFill>
+          <a:srgbClr val="0D1117"/>
+        </a:solidFill>
+        <a:effectLst/>
+      </p:bgPr>
+    </p:bg>
+    <p:spTree>
+      <p:nvGrpSpPr>
+        <p:cNvPr id="1" name=""/>
+        <p:cNvGrpSpPr/>
+        <p:nvPr/>
+      </p:nvGrpSpPr>
+      <p:grpSpPr/>
+      <p:sp>
+        <p:nvSpPr>
+          <p:cNvPr id="2" name="TextBox 1"/>
+          <p:cNvSpPr txBox="1"/>
+          <p:nvPr/>
+        </p:nvSpPr>
+        <p:spPr>
+          <a:xfrm>
+            <a:off x="731520" y="411480"/>
+            <a:ext cx="10698480" cy="1005840"/>
+          </a:xfrm>
+          <a:prstGeom prst="rect">
+            <a:avLst/>
+          </a:prstGeom>
+          <a:noFill/>
+        </p:spPr>
+        <p:txBody>
+          <a:bodyPr wrap="square" lIns="0" tIns="0" rIns="0" bIns="0">
+            <a:spAutoFit/>
+          </a:bodyPr>
+          <a:lstStyle/>
+          <a:p>
+            <a:pPr>
+              <a:defRPr sz="1100" b="1">
+                <a:solidFill>
+                  <a:srgbClr val="06B6D4"/>
+                </a:solidFill>
+              </a:defRPr>
+            </a:pPr>
+            <a:r>
+              <a:t>TGFI PITCH SECTION 6: THE ASK</a:t>
+            </a:r>
+          </a:p>
+          <a:p>
+            <a:pPr>
+              <a:defRPr sz="2400" b="1">
+                <a:solidFill>
+                  <a:srgbClr val="F3F4F6"/>
+                </a:solidFill>
+              </a:defRPr>
+            </a:pPr>
+            <a:r>
+              <a:t>The Ask: Funding, Support &amp; Commercial Path</a:t>
+            </a:r>
+          </a:p>
+        </p:txBody>
+      </p:sp>
+      <p:sp>
+        <p:nvSpPr>
+          <p:cNvPr id="3" name="Rounded Rectangle 2"/>
+          <p:cNvSpPr/>
+          <p:nvPr/>
+        </p:nvSpPr>
+        <p:spPr>
+          <a:xfrm>
+            <a:off x="731520" y="1645920"/>
+            <a:ext cx="5212080" cy="4663440"/>
+          </a:xfrm>
+          <a:prstGeom prst="roundRect">
+            <a:avLst/>
+          </a:prstGeom>
+          <a:solidFill>
+            <a:srgbClr val="161B22"/>
+          </a:solidFill>
+          <a:ln w="19050">
+            <a:solidFill>
+              <a:srgbClr val="10B981"/>
+            </a:solidFill>
+          </a:ln>
+        </p:spPr>
+        <p:style>
+          <a:lnRef idx="1">
+            <a:schemeClr val="accent1"/>
+          </a:lnRef>
+          <a:fillRef idx="3">
+            <a:schemeClr val="accent1"/>
+          </a:fillRef>
+          <a:effectRef idx="2">
+            <a:schemeClr val="accent1"/>
+          </a:effectRef>
+          <a:fontRef idx="minor">
+            <a:schemeClr val="lt1"/>
+          </a:fontRef>
+        </p:style>
+        <p:txBody>
+          <a:bodyPr rtlCol="0" anchor="ctr" wrap="square" lIns="182880" rIns="182880" tIns="164592" bIns="164592"/>
+          <a:lstStyle/>
+          <a:p>
+            <a:pPr algn="ctr">
+              <a:spcAft>
+                <a:spcPts val="400"/>
+              </a:spcAft>
+              <a:defRPr b="1" sz="1300">
+                <a:solidFill>
+                  <a:srgbClr val="10B981"/>
+                </a:solidFill>
+              </a:defRPr>
+            </a:pPr>
+            <a:r>
+              <a:t>💰 Funding Request &amp; Milestone Deliverables</a:t>
+            </a:r>
+          </a:p>
+          <a:p>
+            <a:pPr>
+              <a:spcAft>
+                <a:spcPts val="250"/>
+              </a:spcAft>
+              <a:defRPr sz="1100">
+                <a:solidFill>
+                  <a:srgbClr val="F3F4F6"/>
+                </a:solidFill>
+              </a:defRPr>
+            </a:pPr>
+            <a:r>
+              <a:t>• Grant Funding Requested:</a:t>
+            </a:r>
+          </a:p>
+          <a:p>
+            <a:pPr>
+              <a:spcAft>
+                <a:spcPts val="250"/>
+              </a:spcAft>
+              <a:defRPr sz="1100">
+                <a:solidFill>
+                  <a:srgbClr val="F3F4F6"/>
+                </a:solidFill>
+              </a:defRPr>
+            </a:pPr>
+            <a:r>
+              <a:t>  $6,000 USD (~Rp 93.000.000) lean prototype funding from TGFI.</a:t>
+            </a:r>
+          </a:p>
+          <a:p>
+            <a:pPr>
+              <a:spcAft>
+                <a:spcPts val="250"/>
+              </a:spcAft>
+              <a:defRPr sz="1100">
+                <a:solidFill>
+                  <a:srgbClr val="F3F4F6"/>
+                </a:solidFill>
+              </a:defRPr>
+            </a:pPr>
+          </a:p>
+          <a:p>
+            <a:pPr>
+              <a:spcAft>
+                <a:spcPts val="250"/>
+              </a:spcAft>
+              <a:defRPr sz="1100">
+                <a:solidFill>
+                  <a:srgbClr val="F3F4F6"/>
+                </a:solidFill>
+              </a:defRPr>
+            </a:pPr>
+            <a:r>
+              <a:t>• Purpose of Funds:</a:t>
+            </a:r>
+          </a:p>
+          <a:p>
+            <a:pPr>
+              <a:spcAft>
+                <a:spcPts val="250"/>
+              </a:spcAft>
+              <a:defRPr sz="1100">
+                <a:solidFill>
+                  <a:srgbClr val="F3F4F6"/>
+                </a:solidFill>
+              </a:defRPr>
+            </a:pPr>
+            <a:r>
+              <a:t>  Directly funds 6 months of disciplined full-time solo development, professional pixel sprite sheets, tactical OST, and Steam release fees.</a:t>
+            </a:r>
+          </a:p>
+          <a:p>
+            <a:pPr>
+              <a:spcAft>
+                <a:spcPts val="250"/>
+              </a:spcAft>
+              <a:defRPr sz="1100">
+                <a:solidFill>
+                  <a:srgbClr val="F3F4F6"/>
+                </a:solidFill>
+              </a:defRPr>
+            </a:pPr>
+          </a:p>
+          <a:p>
+            <a:pPr>
+              <a:spcAft>
+                <a:spcPts val="250"/>
+              </a:spcAft>
+              <a:defRPr sz="1100">
+                <a:solidFill>
+                  <a:srgbClr val="F3F4F6"/>
+                </a:solidFill>
+              </a:defRPr>
+            </a:pPr>
+            <a:r>
+              <a:t>• Target Milestone Deliverable:</a:t>
+            </a:r>
+          </a:p>
+          <a:p>
+            <a:pPr>
+              <a:spcAft>
+                <a:spcPts val="250"/>
+              </a:spcAft>
+              <a:defRPr sz="1100">
+                <a:solidFill>
+                  <a:srgbClr val="F3F4F6"/>
+                </a:solidFill>
+              </a:defRPr>
+            </a:pPr>
+            <a:r>
+              <a:t>  A polished, feature-complete 30-minute playable demo ready for Steam Next Fest showcase.</a:t>
+            </a:r>
+          </a:p>
+          <a:p>
+            <a:pPr>
+              <a:spcAft>
+                <a:spcPts val="250"/>
+              </a:spcAft>
+              <a:defRPr sz="1100">
+                <a:solidFill>
+                  <a:srgbClr val="F3F4F6"/>
+                </a:solidFill>
+              </a:defRPr>
+            </a:pPr>
+          </a:p>
+          <a:p>
+            <a:pPr>
+              <a:spcAft>
+                <a:spcPts val="250"/>
+              </a:spcAft>
+              <a:defRPr sz="1100">
+                <a:solidFill>
+                  <a:srgbClr val="F3F4F6"/>
+                </a:solidFill>
+              </a:defRPr>
+            </a:pPr>
+            <a:r>
+              <a:t>• Lean &amp; Disciplined Management:</a:t>
+            </a:r>
+          </a:p>
+          <a:p>
+            <a:pPr>
+              <a:spcAft>
+                <a:spcPts val="250"/>
+              </a:spcAft>
+              <a:defRPr sz="1100">
+                <a:solidFill>
+                  <a:srgbClr val="F3F4F6"/>
+                </a:solidFill>
+              </a:defRPr>
+            </a:pPr>
+            <a:r>
+              <a:t>  Zero budget waste. Every dollar is mathematically allocated to living runway and essential external commissions.</a:t>
+            </a:r>
+          </a:p>
+        </p:txBody>
+      </p:sp>
+      <p:sp>
+        <p:nvSpPr>
+          <p:cNvPr id="4" name="Rounded Rectangle 3"/>
+          <p:cNvSpPr/>
+          <p:nvPr/>
+        </p:nvSpPr>
+        <p:spPr>
+          <a:xfrm>
+            <a:off x="6217920" y="1645920"/>
+            <a:ext cx="5212080" cy="4663440"/>
           </a:xfrm>
           <a:prstGeom prst="roundRect">
             <a:avLst/>
@@ -6816,75 +6649,466 @@
           <a:p>
             <a:pPr algn="ctr">
               <a:spcAft>
-                <a:spcPts val="500"/>
-              </a:spcAft>
-              <a:defRPr b="1" sz="1350">
+                <a:spcPts val="400"/>
+              </a:spcAft>
+              <a:defRPr b="1" sz="1300">
                 <a:solidFill>
                   <a:srgbClr val="06B6D4"/>
                 </a:solidFill>
               </a:defRPr>
             </a:pPr>
             <a:r>
-              <a:t>⚔️ Triangle Strategy (Square Enix)</a:t>
-            </a:r>
-          </a:p>
-          <a:p>
-            <a:pPr>
-              <a:spcAft>
-                <a:spcPts val="300"/>
-              </a:spcAft>
-              <a:defRPr sz="1150">
-                <a:solidFill>
-                  <a:srgbClr val="F3F4F6"/>
-                </a:solidFill>
-              </a:defRPr>
-            </a:pPr>
-            <a:r>
-              <a:t>Publisher: Square Enix (HD-2D Tactical RPG)</a:t>
-            </a:r>
-          </a:p>
-          <a:p>
-            <a:pPr>
-              <a:spcAft>
-                <a:spcPts val="300"/>
-              </a:spcAft>
-              <a:defRPr sz="1150">
-                <a:solidFill>
-                  <a:srgbClr val="F3F4F6"/>
-                </a:solidFill>
-              </a:defRPr>
-            </a:pPr>
-            <a:r>
-              <a:t>What Players Love: Modern HD-2D presentation &amp; elemental interactions.</a:t>
-            </a:r>
-          </a:p>
-          <a:p>
-            <a:pPr>
-              <a:spcAft>
-                <a:spcPts val="300"/>
-              </a:spcAft>
-              <a:defRPr sz="1150">
-                <a:solidFill>
-                  <a:srgbClr val="F3F4F6"/>
-                </a:solidFill>
-              </a:defRPr>
-            </a:pPr>
-            <a:r>
-              <a:t>How We Differentiate: Streamlined tactical flow designed for modern indie players with zero level-grinding and deeper terrain chemistry.</a:t>
-            </a:r>
-          </a:p>
-        </p:txBody>
-      </p:sp>
-      <p:sp>
-        <p:nvSpPr>
-          <p:cNvPr id="7" name="Rounded Rectangle 6"/>
+              <a:t>🤝 Publisher Support &amp; Commercial Path</a:t>
+            </a:r>
+          </a:p>
+          <a:p>
+            <a:pPr>
+              <a:spcAft>
+                <a:spcPts val="250"/>
+              </a:spcAft>
+              <a:defRPr sz="1100">
+                <a:solidFill>
+                  <a:srgbClr val="F3F4F6"/>
+                </a:solidFill>
+              </a:defRPr>
+            </a:pPr>
+            <a:r>
+              <a:t>• Support Needed from Toge:</a:t>
+            </a:r>
+          </a:p>
+          <a:p>
+            <a:pPr>
+              <a:spcAft>
+                <a:spcPts val="250"/>
+              </a:spcAft>
+              <a:defRPr sz="1100">
+                <a:solidFill>
+                  <a:srgbClr val="F3F4F6"/>
+                </a:solidFill>
+              </a:defRPr>
+            </a:pPr>
+            <a:r>
+              <a:t>  1. Milestone feedback &amp; production mentorship from Toge's veteran producers.</a:t>
+            </a:r>
+          </a:p>
+          <a:p>
+            <a:pPr>
+              <a:spcAft>
+                <a:spcPts val="250"/>
+              </a:spcAft>
+              <a:defRPr sz="1100">
+                <a:solidFill>
+                  <a:srgbClr val="F3F4F6"/>
+                </a:solidFill>
+              </a:defRPr>
+            </a:pPr>
+            <a:r>
+              <a:t>  2. Publishing evaluation and market positioning guidance for Steam Next Fest.</a:t>
+            </a:r>
+          </a:p>
+          <a:p>
+            <a:pPr>
+              <a:spcAft>
+                <a:spcPts val="250"/>
+              </a:spcAft>
+              <a:defRPr sz="1100">
+                <a:solidFill>
+                  <a:srgbClr val="F3F4F6"/>
+                </a:solidFill>
+              </a:defRPr>
+            </a:pPr>
+          </a:p>
+          <a:p>
+            <a:pPr>
+              <a:spcAft>
+                <a:spcPts val="250"/>
+              </a:spcAft>
+              <a:defRPr sz="1100">
+                <a:solidFill>
+                  <a:srgbClr val="F3F4F6"/>
+                </a:solidFill>
+              </a:defRPr>
+            </a:pPr>
+            <a:r>
+              <a:t>• What Toge Gets:</a:t>
+            </a:r>
+          </a:p>
+          <a:p>
+            <a:pPr>
+              <a:spcAft>
+                <a:spcPts val="250"/>
+              </a:spcAft>
+              <a:defRPr sz="1100">
+                <a:solidFill>
+                  <a:srgbClr val="F3F4F6"/>
+                </a:solidFill>
+              </a:defRPr>
+            </a:pPr>
+            <a:r>
+              <a:t>  1. Right of First Refusal (RoFR) for a full commercial publishing partnership ($50k–$150k USD) to expand into 20+ classes and full continental campaign.</a:t>
+            </a:r>
+          </a:p>
+          <a:p>
+            <a:pPr>
+              <a:spcAft>
+                <a:spcPts val="250"/>
+              </a:spcAft>
+              <a:defRPr sz="1100">
+                <a:solidFill>
+                  <a:srgbClr val="F3F4F6"/>
+                </a:solidFill>
+              </a:defRPr>
+            </a:pPr>
+            <a:r>
+              <a:t>  2. Transparent bi-weekly verified milestone builds.</a:t>
+            </a:r>
+          </a:p>
+          <a:p>
+            <a:pPr>
+              <a:spcAft>
+                <a:spcPts val="250"/>
+              </a:spcAft>
+              <a:defRPr sz="1100">
+                <a:solidFill>
+                  <a:srgbClr val="F3F4F6"/>
+                </a:solidFill>
+              </a:defRPr>
+            </a:pPr>
+            <a:r>
+              <a:t>  3. First access to a unique SEA tactical title marrying classic JRPG nostalgia with modern terraforming mechanics.</a:t>
+            </a:r>
+          </a:p>
+        </p:txBody>
+      </p:sp>
+    </p:spTree>
+  </p:cSld>
+  <p:clrMapOvr>
+    <a:masterClrMapping/>
+  </p:clrMapOvr>
+</p:sld>
+</file>
+
+<file path=ppt/slides/slide7.xml><?xml version="1.0" encoding="utf-8"?>
+<p:sld xmlns:a="http://schemas.openxmlformats.org/drawingml/2006/main" xmlns:p="http://schemas.openxmlformats.org/presentationml/2006/main" xmlns:r="http://schemas.openxmlformats.org/officeDocument/2006/relationships">
+  <p:cSld>
+    <p:bg>
+      <p:bgPr>
+        <a:solidFill>
+          <a:srgbClr val="0D1117"/>
+        </a:solidFill>
+        <a:effectLst/>
+      </p:bgPr>
+    </p:bg>
+    <p:spTree>
+      <p:nvGrpSpPr>
+        <p:cNvPr id="1" name=""/>
+        <p:cNvGrpSpPr/>
+        <p:nvPr/>
+      </p:nvGrpSpPr>
+      <p:grpSpPr/>
+      <p:sp>
+        <p:nvSpPr>
+          <p:cNvPr id="2" name="TextBox 1"/>
+          <p:cNvSpPr txBox="1"/>
+          <p:nvPr/>
+        </p:nvSpPr>
+        <p:spPr>
+          <a:xfrm>
+            <a:off x="731520" y="411480"/>
+            <a:ext cx="10698480" cy="1005840"/>
+          </a:xfrm>
+          <a:prstGeom prst="rect">
+            <a:avLst/>
+          </a:prstGeom>
+          <a:noFill/>
+        </p:spPr>
+        <p:txBody>
+          <a:bodyPr wrap="square" lIns="0" tIns="0" rIns="0" bIns="0">
+            <a:spAutoFit/>
+          </a:bodyPr>
+          <a:lstStyle/>
+          <a:p>
+            <a:pPr>
+              <a:defRPr sz="1100" b="1">
+                <a:solidFill>
+                  <a:srgbClr val="06B6D4"/>
+                </a:solidFill>
+              </a:defRPr>
+            </a:pPr>
+            <a:r>
+              <a:t>TGFI PITCH SECTION 7: MORE INFO</a:t>
+            </a:r>
+          </a:p>
+          <a:p>
+            <a:pPr>
+              <a:defRPr sz="2400" b="1">
+                <a:solidFill>
+                  <a:srgbClr val="F3F4F6"/>
+                </a:solidFill>
+              </a:defRPr>
+            </a:pPr>
+            <a:r>
+              <a:t>More Info: Playable Prototype &amp; Developer Profile</a:t>
+            </a:r>
+          </a:p>
+        </p:txBody>
+      </p:sp>
+      <p:sp>
+        <p:nvSpPr>
+          <p:cNvPr id="3" name="Rounded Rectangle 2"/>
           <p:cNvSpPr/>
           <p:nvPr/>
         </p:nvSpPr>
         <p:spPr>
           <a:xfrm>
-            <a:off x="731520" y="5532120"/>
-            <a:ext cx="10698480" cy="777240"/>
+            <a:off x="731520" y="1645920"/>
+            <a:ext cx="5212080" cy="4663440"/>
+          </a:xfrm>
+          <a:prstGeom prst="roundRect">
+            <a:avLst/>
+          </a:prstGeom>
+          <a:solidFill>
+            <a:srgbClr val="161B22"/>
+          </a:solidFill>
+          <a:ln w="19050">
+            <a:solidFill>
+              <a:srgbClr val="10B981"/>
+            </a:solidFill>
+          </a:ln>
+        </p:spPr>
+        <p:style>
+          <a:lnRef idx="1">
+            <a:schemeClr val="accent1"/>
+          </a:lnRef>
+          <a:fillRef idx="3">
+            <a:schemeClr val="accent1"/>
+          </a:fillRef>
+          <a:effectRef idx="2">
+            <a:schemeClr val="accent1"/>
+          </a:effectRef>
+          <a:fontRef idx="minor">
+            <a:schemeClr val="lt1"/>
+          </a:fontRef>
+        </p:style>
+        <p:txBody>
+          <a:bodyPr rtlCol="0" anchor="ctr" wrap="square" lIns="182880" rIns="182880" tIns="164592" bIns="164592"/>
+          <a:lstStyle/>
+          <a:p>
+            <a:pPr algn="ctr">
+              <a:spcAft>
+                <a:spcPts val="400"/>
+              </a:spcAft>
+              <a:defRPr b="1" sz="1300">
+                <a:solidFill>
+                  <a:srgbClr val="10B981"/>
+                </a:solidFill>
+              </a:defRPr>
+            </a:pPr>
+            <a:r>
+              <a:t>🎮 Playable Prototype (Verified in Unity 6)</a:t>
+            </a:r>
+          </a:p>
+          <a:p>
+            <a:pPr>
+              <a:spcAft>
+                <a:spcPts val="250"/>
+              </a:spcAft>
+              <a:defRPr sz="1100">
+                <a:solidFill>
+                  <a:srgbClr val="F3F4F6"/>
+                </a:solidFill>
+              </a:defRPr>
+            </a:pPr>
+            <a:r>
+              <a:t>• Standalone Windows Executable (.exe) Ready Today:</a:t>
+            </a:r>
+          </a:p>
+          <a:p>
+            <a:pPr>
+              <a:spcAft>
+                <a:spcPts val="250"/>
+              </a:spcAft>
+              <a:defRPr sz="1100">
+                <a:solidFill>
+                  <a:srgbClr val="F3F4F6"/>
+                </a:solidFill>
+              </a:defRPr>
+            </a:pPr>
+            <a:r>
+              <a:t>  A fully compiled Windows 10/11 standalone demo is ready for evaluation.</a:t>
+            </a:r>
+          </a:p>
+          <a:p>
+            <a:pPr>
+              <a:spcAft>
+                <a:spcPts val="250"/>
+              </a:spcAft>
+              <a:defRPr sz="1100">
+                <a:solidFill>
+                  <a:srgbClr val="F3F4F6"/>
+                </a:solidFill>
+              </a:defRPr>
+            </a:pPr>
+          </a:p>
+          <a:p>
+            <a:pPr>
+              <a:spcAft>
+                <a:spcPts val="250"/>
+              </a:spcAft>
+              <a:defRPr sz="1100">
+                <a:solidFill>
+                  <a:srgbClr val="F3F4F6"/>
+                </a:solidFill>
+              </a:defRPr>
+            </a:pPr>
+            <a:r>
+              <a:t>• What You Can Test Right Now:</a:t>
+            </a:r>
+          </a:p>
+          <a:p>
+            <a:pPr>
+              <a:spcAft>
+                <a:spcPts val="250"/>
+              </a:spcAft>
+              <a:defRPr sz="1100">
+                <a:solidFill>
+                  <a:srgbClr val="F3F4F6"/>
+                </a:solidFill>
+              </a:defRPr>
+            </a:pPr>
+            <a:r>
+              <a:t>  - Interactive 3D hex grid with dynamic 360° camera orbit</a:t>
+            </a:r>
+          </a:p>
+          <a:p>
+            <a:pPr>
+              <a:spcAft>
+                <a:spcPts val="250"/>
+              </a:spcAft>
+              <a:defRPr sz="1100">
+                <a:solidFill>
+                  <a:srgbClr val="F3F4F6"/>
+                </a:solidFill>
+              </a:defRPr>
+            </a:pPr>
+            <a:r>
+              <a:t>  - Master Fireball casting &amp; kinetic shove wall-slams</a:t>
+            </a:r>
+          </a:p>
+          <a:p>
+            <a:pPr>
+              <a:spcAft>
+                <a:spcPts val="250"/>
+              </a:spcAft>
+              <a:defRPr sz="1100">
+                <a:solidFill>
+                  <a:srgbClr val="F3F4F6"/>
+                </a:solidFill>
+              </a:defRPr>
+            </a:pPr>
+            <a:r>
+              <a:t>  - Real-time grass-to-lava terrain mutation</a:t>
+            </a:r>
+          </a:p>
+          <a:p>
+            <a:pPr>
+              <a:spcAft>
+                <a:spcPts val="250"/>
+              </a:spcAft>
+              <a:defRPr sz="1100">
+                <a:solidFill>
+                  <a:srgbClr val="F3F4F6"/>
+                </a:solidFill>
+              </a:defRPr>
+            </a:pPr>
+            <a:r>
+              <a:t>  - Titan lava immunity, attunement buffs &amp; land siphoning</a:t>
+            </a:r>
+          </a:p>
+          <a:p>
+            <a:pPr>
+              <a:spcAft>
+                <a:spcPts val="250"/>
+              </a:spcAft>
+              <a:defRPr sz="1100">
+                <a:solidFill>
+                  <a:srgbClr val="F3F4F6"/>
+                </a:solidFill>
+              </a:defRPr>
+            </a:pPr>
+            <a:r>
+              <a:t>  - Screen-shaking Magma Cataclysm finisher</a:t>
+            </a:r>
+          </a:p>
+          <a:p>
+            <a:pPr>
+              <a:spcAft>
+                <a:spcPts val="250"/>
+              </a:spcAft>
+              <a:defRPr sz="1100">
+                <a:solidFill>
+                  <a:srgbClr val="F3F4F6"/>
+                </a:solidFill>
+              </a:defRPr>
+            </a:pPr>
+            <a:r>
+              <a:t>  - Zero-dependency procedural audio engine</a:t>
+            </a:r>
+          </a:p>
+          <a:p>
+            <a:pPr>
+              <a:spcAft>
+                <a:spcPts val="250"/>
+              </a:spcAft>
+              <a:defRPr sz="1100">
+                <a:solidFill>
+                  <a:srgbClr val="F3F4F6"/>
+                </a:solidFill>
+              </a:defRPr>
+            </a:pPr>
+          </a:p>
+          <a:p>
+            <a:pPr>
+              <a:spcAft>
+                <a:spcPts val="250"/>
+              </a:spcAft>
+              <a:defRPr sz="1100">
+                <a:solidFill>
+                  <a:srgbClr val="F3F4F6"/>
+                </a:solidFill>
+              </a:defRPr>
+            </a:pPr>
+            <a:r>
+              <a:t>• Playable Demo Link:</a:t>
+            </a:r>
+          </a:p>
+          <a:p>
+            <a:pPr>
+              <a:spcAft>
+                <a:spcPts val="250"/>
+              </a:spcAft>
+              <a:defRPr sz="1100">
+                <a:solidFill>
+                  <a:srgbClr val="F3F4F6"/>
+                </a:solidFill>
+              </a:defRPr>
+            </a:pPr>
+            <a:r>
+              <a:t>  Included in TGFI submission form (Private itch.io / Google Drive link).</a:t>
+            </a:r>
+          </a:p>
+        </p:txBody>
+      </p:sp>
+      <p:sp>
+        <p:nvSpPr>
+          <p:cNvPr id="4" name="Rounded Rectangle 3"/>
+          <p:cNvSpPr/>
+          <p:nvPr/>
+        </p:nvSpPr>
+        <p:spPr>
+          <a:xfrm>
+            <a:off x="6217920" y="1645920"/>
+            <a:ext cx="5212080" cy="4663440"/>
           </a:xfrm>
           <a:prstGeom prst="roundRect">
             <a:avLst/>
@@ -6918,2130 +7142,232 @@
           <a:p>
             <a:pPr algn="ctr">
               <a:spcAft>
-                <a:spcPts val="500"/>
-              </a:spcAft>
-              <a:defRPr b="1" sz="1350">
+                <a:spcPts val="400"/>
+              </a:spcAft>
+              <a:defRPr b="1" sz="1300">
                 <a:solidFill>
                   <a:srgbClr val="F59E0B"/>
                 </a:solidFill>
               </a:defRPr>
             </a:pPr>
             <a:r>
-              <a:t>🎯 The Market Opportunity</a:t>
-            </a:r>
-          </a:p>
-          <a:p>
-            <a:pPr>
-              <a:spcAft>
-                <a:spcPts val="300"/>
-              </a:spcAft>
-              <a:defRPr sz="1150">
-                <a:solidFill>
-                  <a:srgbClr val="F3F4F6"/>
-                </a:solidFill>
-              </a:defRPr>
-            </a:pPr>
-            <a:r>
-              <a:t>Players love Brigandine's hex-grid monster fantasy and Into the Breach's puzzle clarity—Elemental Hex Tactics marries both into streamlined, deliberate HD-2D matches with active terraforming.</a:t>
-            </a:r>
-          </a:p>
-        </p:txBody>
-      </p:sp>
-    </p:spTree>
-  </p:cSld>
-  <p:clrMapOvr>
-    <a:masterClrMapping/>
-  </p:clrMapOvr>
-</p:sld>
-</file>
-
-<file path=ppt/slides/slide5.xml><?xml version="1.0" encoding="utf-8"?>
-<p:sld xmlns:a="http://schemas.openxmlformats.org/drawingml/2006/main" xmlns:p="http://schemas.openxmlformats.org/presentationml/2006/main" xmlns:r="http://schemas.openxmlformats.org/officeDocument/2006/relationships">
-  <p:cSld>
-    <p:bg>
-      <p:bgPr>
-        <a:solidFill>
-          <a:srgbClr val="0D1117"/>
-        </a:solidFill>
-        <a:effectLst/>
-      </p:bgPr>
-    </p:bg>
-    <p:spTree>
-      <p:nvGrpSpPr>
-        <p:cNvPr id="1" name=""/>
-        <p:cNvGrpSpPr/>
-        <p:nvPr/>
-      </p:nvGrpSpPr>
-      <p:grpSpPr/>
-      <p:sp>
-        <p:nvSpPr>
-          <p:cNvPr id="2" name="TextBox 1"/>
-          <p:cNvSpPr txBox="1"/>
-          <p:nvPr/>
-        </p:nvSpPr>
-        <p:spPr>
-          <a:xfrm>
-            <a:off x="731520" y="411480"/>
-            <a:ext cx="10698480" cy="1005840"/>
-          </a:xfrm>
-          <a:prstGeom prst="rect">
-            <a:avLst/>
-          </a:prstGeom>
-          <a:noFill/>
-        </p:spPr>
-        <p:txBody>
-          <a:bodyPr wrap="square" lIns="0" tIns="0" rIns="0" bIns="0">
-            <a:spAutoFit/>
-          </a:bodyPr>
-          <a:lstStyle/>
-          <a:p>
-            <a:pPr>
-              <a:defRPr sz="1100" b="1">
-                <a:solidFill>
-                  <a:srgbClr val="06B6D4"/>
-                </a:solidFill>
-              </a:defRPr>
-            </a:pPr>
-            <a:r>
-              <a:t>TGFI PITCH SECTION 4: GAME FLOW &amp; CORE LOOP</a:t>
-            </a:r>
-          </a:p>
-          <a:p>
-            <a:pPr>
-              <a:defRPr sz="2400" b="1">
-                <a:solidFill>
-                  <a:srgbClr val="F3F4F6"/>
-                </a:solidFill>
-              </a:defRPr>
-            </a:pPr>
-            <a:r>
-              <a:t>Product &amp; Solution: The Ecosystem of War</a:t>
-            </a:r>
-          </a:p>
-        </p:txBody>
-      </p:sp>
-      <p:sp>
-        <p:nvSpPr>
-          <p:cNvPr id="3" name="Rounded Rectangle 2"/>
-          <p:cNvSpPr/>
-          <p:nvPr/>
-        </p:nvSpPr>
-        <p:spPr>
-          <a:xfrm>
-            <a:off x="731520" y="1645920"/>
-            <a:ext cx="10698480" cy="777240"/>
-          </a:xfrm>
-          <a:prstGeom prst="roundRect">
-            <a:avLst/>
-          </a:prstGeom>
-          <a:solidFill>
-            <a:srgbClr val="161B22"/>
-          </a:solidFill>
-          <a:ln w="19050">
-            <a:solidFill>
-              <a:srgbClr val="06B6D4"/>
-            </a:solidFill>
-          </a:ln>
-        </p:spPr>
-        <p:style>
-          <a:lnRef idx="1">
-            <a:schemeClr val="accent1"/>
-          </a:lnRef>
-          <a:fillRef idx="3">
-            <a:schemeClr val="accent1"/>
-          </a:fillRef>
-          <a:effectRef idx="2">
-            <a:schemeClr val="accent1"/>
-          </a:effectRef>
-          <a:fontRef idx="minor">
-            <a:schemeClr val="lt1"/>
-          </a:fontRef>
-        </p:style>
-        <p:txBody>
-          <a:bodyPr rtlCol="0" anchor="ctr" wrap="square" lIns="182880" rIns="182880" tIns="164592" bIns="164592"/>
-          <a:lstStyle/>
-          <a:p>
-            <a:pPr algn="ctr">
-              <a:spcAft>
-                <a:spcPts val="500"/>
-              </a:spcAft>
-              <a:defRPr b="1" sz="1350">
-                <a:solidFill>
-                  <a:srgbClr val="06B6D4"/>
-                </a:solidFill>
-              </a:defRPr>
-            </a:pPr>
-            <a:r>
-              <a:t>THE 3-STEP TACTICAL LOOP</a:t>
-            </a:r>
-          </a:p>
-          <a:p>
-            <a:pPr>
-              <a:spcAft>
-                <a:spcPts val="300"/>
-              </a:spcAft>
-              <a:defRPr sz="1150">
-                <a:solidFill>
-                  <a:srgbClr val="F3F4F6"/>
-                </a:solidFill>
-              </a:defRPr>
-            </a:pPr>
-            <a:r>
-              <a:t>1. Master Infuses (Terraform)   ➔   2. Monster Attunes (Adapt)   ➔   3. Monster Consumes (Unleash)</a:t>
-            </a:r>
-          </a:p>
-        </p:txBody>
-      </p:sp>
-      <p:sp>
-        <p:nvSpPr>
-          <p:cNvPr id="4" name="Rounded Rectangle 3"/>
-          <p:cNvSpPr/>
-          <p:nvPr/>
-        </p:nvSpPr>
-        <p:spPr>
-          <a:xfrm>
-            <a:off x="731520" y="2651760"/>
-            <a:ext cx="3383280" cy="2560320"/>
-          </a:xfrm>
-          <a:prstGeom prst="roundRect">
-            <a:avLst/>
-          </a:prstGeom>
-          <a:solidFill>
-            <a:srgbClr val="161B22"/>
-          </a:solidFill>
-          <a:ln w="19050">
-            <a:solidFill>
-              <a:srgbClr val="30363D"/>
-            </a:solidFill>
-          </a:ln>
-        </p:spPr>
-        <p:style>
-          <a:lnRef idx="1">
-            <a:schemeClr val="accent1"/>
-          </a:lnRef>
-          <a:fillRef idx="3">
-            <a:schemeClr val="accent1"/>
-          </a:fillRef>
-          <a:effectRef idx="2">
-            <a:schemeClr val="accent1"/>
-          </a:effectRef>
-          <a:fontRef idx="minor">
-            <a:schemeClr val="lt1"/>
-          </a:fontRef>
-        </p:style>
-        <p:txBody>
-          <a:bodyPr rtlCol="0" anchor="ctr" wrap="square" lIns="182880" rIns="182880" tIns="164592" bIns="164592"/>
-          <a:lstStyle/>
-          <a:p>
-            <a:pPr algn="ctr">
-              <a:spcAft>
-                <a:spcPts val="500"/>
-              </a:spcAft>
-              <a:defRPr b="1" sz="1350">
-                <a:solidFill>
-                  <a:srgbClr val="F59E0B"/>
-                </a:solidFill>
-              </a:defRPr>
-            </a:pPr>
-            <a:r>
-              <a:t>🧙 1. Master Infuses (Terraform)</a:t>
-            </a:r>
-          </a:p>
-          <a:p>
-            <a:pPr>
-              <a:spcAft>
-                <a:spcPts val="300"/>
-              </a:spcAft>
-              <a:defRPr sz="1150">
-                <a:solidFill>
-                  <a:srgbClr val="F3F4F6"/>
-                </a:solidFill>
-              </a:defRPr>
-            </a:pPr>
-            <a:r>
-              <a:t>Human Masters reshape the battlefield with magic.</a:t>
-            </a:r>
-          </a:p>
-          <a:p>
-            <a:pPr>
-              <a:spcAft>
-                <a:spcPts val="300"/>
-              </a:spcAft>
-              <a:defRPr sz="1150">
-                <a:solidFill>
-                  <a:srgbClr val="F3F4F6"/>
-                </a:solidFill>
-              </a:defRPr>
-            </a:pPr>
-          </a:p>
-          <a:p>
-            <a:pPr>
-              <a:spcAft>
-                <a:spcPts val="300"/>
-              </a:spcAft>
-              <a:defRPr sz="1150">
-                <a:solidFill>
-                  <a:srgbClr val="F3F4F6"/>
-                </a:solidFill>
-              </a:defRPr>
-            </a:pPr>
-            <a:r>
-              <a:t>Fireballs scorch grass into molten lava moats; water blasts douse flames and create concealing steam clouds.</a:t>
-            </a:r>
-          </a:p>
-        </p:txBody>
-      </p:sp>
-      <p:sp>
-        <p:nvSpPr>
-          <p:cNvPr id="5" name="Rounded Rectangle 4"/>
-          <p:cNvSpPr/>
-          <p:nvPr/>
-        </p:nvSpPr>
-        <p:spPr>
-          <a:xfrm>
-            <a:off x="4389120" y="2651760"/>
-            <a:ext cx="3383280" cy="2560320"/>
-          </a:xfrm>
-          <a:prstGeom prst="roundRect">
-            <a:avLst/>
-          </a:prstGeom>
-          <a:solidFill>
-            <a:srgbClr val="161B22"/>
-          </a:solidFill>
-          <a:ln w="19050">
-            <a:solidFill>
-              <a:srgbClr val="30363D"/>
-            </a:solidFill>
-          </a:ln>
-        </p:spPr>
-        <p:style>
-          <a:lnRef idx="1">
-            <a:schemeClr val="accent1"/>
-          </a:lnRef>
-          <a:fillRef idx="3">
-            <a:schemeClr val="accent1"/>
-          </a:fillRef>
-          <a:effectRef idx="2">
-            <a:schemeClr val="accent1"/>
-          </a:effectRef>
-          <a:fontRef idx="minor">
-            <a:schemeClr val="lt1"/>
-          </a:fontRef>
-        </p:style>
-        <p:txBody>
-          <a:bodyPr rtlCol="0" anchor="ctr" wrap="square" lIns="182880" rIns="182880" tIns="164592" bIns="164592"/>
-          <a:lstStyle/>
-          <a:p>
-            <a:pPr algn="ctr">
-              <a:spcAft>
-                <a:spcPts val="500"/>
-              </a:spcAft>
-              <a:defRPr b="1" sz="1350">
-                <a:solidFill>
-                  <a:srgbClr val="F59E0B"/>
-                </a:solidFill>
-              </a:defRPr>
-            </a:pPr>
-            <a:r>
-              <a:t>🐉 2. Monster Attunes (Adapt)</a:t>
-            </a:r>
-          </a:p>
-          <a:p>
-            <a:pPr>
-              <a:spcAft>
-                <a:spcPts val="300"/>
-              </a:spcAft>
-              <a:defRPr sz="1150">
-                <a:solidFill>
-                  <a:srgbClr val="F3F4F6"/>
-                </a:solidFill>
-              </a:defRPr>
-            </a:pPr>
-            <a:r>
-              <a:t>Allied Monsters thrive in their native elements.</a:t>
-            </a:r>
-          </a:p>
-          <a:p>
-            <a:pPr>
-              <a:spcAft>
-                <a:spcPts val="300"/>
-              </a:spcAft>
-              <a:defRPr sz="1150">
-                <a:solidFill>
-                  <a:srgbClr val="F3F4F6"/>
-                </a:solidFill>
-              </a:defRPr>
-            </a:pPr>
-          </a:p>
-          <a:p>
-            <a:pPr>
-              <a:spcAft>
-                <a:spcPts val="300"/>
-              </a:spcAft>
-              <a:defRPr sz="1150">
-                <a:solidFill>
-                  <a:srgbClr val="F3F4F6"/>
-                </a:solidFill>
-              </a:defRPr>
-            </a:pPr>
-            <a:r>
-              <a:t>Standing on lava grants fire beasts +2 ATK and complete burn immunity. Positioning monsters on matching tiles is key.</a:t>
-            </a:r>
-          </a:p>
-        </p:txBody>
-      </p:sp>
-      <p:sp>
-        <p:nvSpPr>
-          <p:cNvPr id="6" name="Rounded Rectangle 5"/>
-          <p:cNvSpPr/>
-          <p:nvPr/>
-        </p:nvSpPr>
-        <p:spPr>
-          <a:xfrm>
-            <a:off x="8046720" y="2651760"/>
-            <a:ext cx="3383280" cy="2560320"/>
-          </a:xfrm>
-          <a:prstGeom prst="roundRect">
-            <a:avLst/>
-          </a:prstGeom>
-          <a:solidFill>
-            <a:srgbClr val="161B22"/>
-          </a:solidFill>
-          <a:ln w="19050">
-            <a:solidFill>
-              <a:srgbClr val="EF4444"/>
-            </a:solidFill>
-          </a:ln>
-        </p:spPr>
-        <p:style>
-          <a:lnRef idx="1">
-            <a:schemeClr val="accent1"/>
-          </a:lnRef>
-          <a:fillRef idx="3">
-            <a:schemeClr val="accent1"/>
-          </a:fillRef>
-          <a:effectRef idx="2">
-            <a:schemeClr val="accent1"/>
-          </a:effectRef>
-          <a:fontRef idx="minor">
-            <a:schemeClr val="lt1"/>
-          </a:fontRef>
-        </p:style>
-        <p:txBody>
-          <a:bodyPr rtlCol="0" anchor="ctr" wrap="square" lIns="182880" rIns="182880" tIns="164592" bIns="164592"/>
-          <a:lstStyle/>
-          <a:p>
-            <a:pPr algn="ctr">
-              <a:spcAft>
-                <a:spcPts val="500"/>
-              </a:spcAft>
-              <a:defRPr b="1" sz="1350">
-                <a:solidFill>
-                  <a:srgbClr val="EF4444"/>
-                </a:solidFill>
-              </a:defRPr>
-            </a:pPr>
-            <a:r>
-              <a:t>⚡ 3. Monster Consumes (Unleash)</a:t>
-            </a:r>
-          </a:p>
-          <a:p>
-            <a:pPr>
-              <a:spcAft>
-                <a:spcPts val="300"/>
-              </a:spcAft>
-              <a:defRPr sz="1150">
-                <a:solidFill>
-                  <a:srgbClr val="F3F4F6"/>
-                </a:solidFill>
-              </a:defRPr>
-            </a:pPr>
-            <a:r>
-              <a:t>Titans siphon active lava or water, mutating the land into Barren Earth.</a:t>
-            </a:r>
-          </a:p>
-          <a:p>
-            <a:pPr>
-              <a:spcAft>
-                <a:spcPts val="300"/>
-              </a:spcAft>
-              <a:defRPr sz="1150">
-                <a:solidFill>
-                  <a:srgbClr val="F3F4F6"/>
-                </a:solidFill>
-              </a:defRPr>
-            </a:pPr>
-          </a:p>
-          <a:p>
-            <a:pPr>
-              <a:spcAft>
-                <a:spcPts val="300"/>
-              </a:spcAft>
-              <a:defRPr sz="1150">
-                <a:solidFill>
-                  <a:srgbClr val="F3F4F6"/>
-                </a:solidFill>
-              </a:defRPr>
-            </a:pPr>
-            <a:r>
-              <a:t>Harvesting land generates Elemental Cores to trigger room-clearing ultimate Cataclysms.</a:t>
-            </a:r>
-          </a:p>
-        </p:txBody>
-      </p:sp>
-      <p:sp>
-        <p:nvSpPr>
-          <p:cNvPr id="7" name="Rounded Rectangle 6"/>
-          <p:cNvSpPr/>
-          <p:nvPr/>
-        </p:nvSpPr>
-        <p:spPr>
-          <a:xfrm>
-            <a:off x="731520" y="5440680"/>
-            <a:ext cx="10698480" cy="822960"/>
-          </a:xfrm>
-          <a:prstGeom prst="roundRect">
-            <a:avLst/>
-          </a:prstGeom>
-          <a:solidFill>
-            <a:srgbClr val="161B22"/>
-          </a:solidFill>
-          <a:ln w="19050">
-            <a:solidFill>
-              <a:srgbClr val="F59E0B"/>
-            </a:solidFill>
-          </a:ln>
-        </p:spPr>
-        <p:style>
-          <a:lnRef idx="1">
-            <a:schemeClr val="accent1"/>
-          </a:lnRef>
-          <a:fillRef idx="3">
-            <a:schemeClr val="accent1"/>
-          </a:fillRef>
-          <a:effectRef idx="2">
-            <a:schemeClr val="accent1"/>
-          </a:effectRef>
-          <a:fontRef idx="minor">
-            <a:schemeClr val="lt1"/>
-          </a:fontRef>
-        </p:style>
-        <p:txBody>
-          <a:bodyPr rtlCol="0" anchor="ctr" wrap="square" lIns="182880" rIns="182880" tIns="164592" bIns="164592"/>
-          <a:lstStyle/>
-          <a:p>
-            <a:pPr algn="ctr">
-              <a:spcAft>
-                <a:spcPts val="500"/>
-              </a:spcAft>
-              <a:defRPr b="1" sz="1350">
-                <a:solidFill>
-                  <a:srgbClr val="F59E0B"/>
-                </a:solidFill>
-              </a:defRPr>
-            </a:pPr>
-            <a:r>
-              <a:t>💡 Master &amp; Monster Dual-Command</a:t>
-            </a:r>
-          </a:p>
-          <a:p>
-            <a:pPr>
-              <a:spcAft>
-                <a:spcPts val="300"/>
-              </a:spcAft>
-              <a:defRPr sz="1150">
-                <a:solidFill>
-                  <a:srgbClr val="F3F4F6"/>
-                </a:solidFill>
-              </a:defRPr>
-            </a:pPr>
-            <a:r>
-              <a:t>The Master sculpts the space and knocks enemies into traps; the Monster holds the frontline, thrives in the hazards, and consumes the land for decisive finishers.</a:t>
-            </a:r>
-          </a:p>
-        </p:txBody>
-      </p:sp>
-    </p:spTree>
-  </p:cSld>
-  <p:clrMapOvr>
-    <a:masterClrMapping/>
-  </p:clrMapOvr>
-</p:sld>
-</file>
-
-<file path=ppt/slides/slide6.xml><?xml version="1.0" encoding="utf-8"?>
-<p:sld xmlns:a="http://schemas.openxmlformats.org/drawingml/2006/main" xmlns:p="http://schemas.openxmlformats.org/presentationml/2006/main" xmlns:r="http://schemas.openxmlformats.org/officeDocument/2006/relationships">
-  <p:cSld>
-    <p:bg>
-      <p:bgPr>
-        <a:solidFill>
-          <a:srgbClr val="0D1117"/>
-        </a:solidFill>
-        <a:effectLst/>
-      </p:bgPr>
-    </p:bg>
-    <p:spTree>
-      <p:nvGrpSpPr>
-        <p:cNvPr id="1" name=""/>
-        <p:cNvGrpSpPr/>
-        <p:nvPr/>
-      </p:nvGrpSpPr>
-      <p:grpSpPr/>
-      <p:sp>
-        <p:nvSpPr>
-          <p:cNvPr id="2" name="TextBox 1"/>
-          <p:cNvSpPr txBox="1"/>
-          <p:nvPr/>
-        </p:nvSpPr>
-        <p:spPr>
-          <a:xfrm>
-            <a:off x="731520" y="411480"/>
-            <a:ext cx="10698480" cy="1005840"/>
-          </a:xfrm>
-          <a:prstGeom prst="rect">
-            <a:avLst/>
-          </a:prstGeom>
-          <a:noFill/>
-        </p:spPr>
-        <p:txBody>
-          <a:bodyPr wrap="square" lIns="0" tIns="0" rIns="0" bIns="0">
-            <a:spAutoFit/>
-          </a:bodyPr>
-          <a:lstStyle/>
-          <a:p>
-            <a:pPr>
-              <a:defRPr sz="1100" b="1">
-                <a:solidFill>
-                  <a:srgbClr val="06B6D4"/>
-                </a:solidFill>
-              </a:defRPr>
-            </a:pPr>
-            <a:r>
-              <a:t>TGFI PITCH SECTION 4: DESIGN PILLARS &amp; ARCHETYPES</a:t>
-            </a:r>
-          </a:p>
-          <a:p>
-            <a:pPr>
-              <a:defRPr sz="2400" b="1">
-                <a:solidFill>
-                  <a:srgbClr val="F3F4F6"/>
-                </a:solidFill>
-              </a:defRPr>
-            </a:pPr>
-            <a:r>
-              <a:t>Product &amp; Solution: Unit Asymmetry &amp; Pillars</a:t>
-            </a:r>
-          </a:p>
-        </p:txBody>
-      </p:sp>
-      <p:sp>
-        <p:nvSpPr>
-          <p:cNvPr id="3" name="Rounded Rectangle 2"/>
-          <p:cNvSpPr/>
-          <p:nvPr/>
-        </p:nvSpPr>
-        <p:spPr>
-          <a:xfrm>
-            <a:off x="731520" y="1645920"/>
-            <a:ext cx="5212080" cy="2240280"/>
-          </a:xfrm>
-          <a:prstGeom prst="roundRect">
-            <a:avLst/>
-          </a:prstGeom>
-          <a:solidFill>
-            <a:srgbClr val="161B22"/>
-          </a:solidFill>
-          <a:ln w="19050">
-            <a:solidFill>
-              <a:srgbClr val="06B6D4"/>
-            </a:solidFill>
-          </a:ln>
-        </p:spPr>
-        <p:style>
-          <a:lnRef idx="1">
-            <a:schemeClr val="accent1"/>
-          </a:lnRef>
-          <a:fillRef idx="3">
-            <a:schemeClr val="accent1"/>
-          </a:fillRef>
-          <a:effectRef idx="2">
-            <a:schemeClr val="accent1"/>
-          </a:effectRef>
-          <a:fontRef idx="minor">
-            <a:schemeClr val="lt1"/>
-          </a:fontRef>
-        </p:style>
-        <p:txBody>
-          <a:bodyPr rtlCol="0" anchor="ctr" wrap="square" lIns="182880" rIns="182880" tIns="164592" bIns="164592"/>
-          <a:lstStyle/>
-          <a:p>
-            <a:pPr algn="ctr">
-              <a:spcAft>
-                <a:spcPts val="500"/>
-              </a:spcAft>
-              <a:defRPr b="1" sz="1350">
-                <a:solidFill>
-                  <a:srgbClr val="06B6D4"/>
-                </a:solidFill>
-              </a:defRPr>
-            </a:pPr>
-            <a:r>
-              <a:t>🧙 Human Masters (The Shapers)</a:t>
-            </a:r>
-          </a:p>
-          <a:p>
-            <a:pPr>
-              <a:spcAft>
-                <a:spcPts val="300"/>
-              </a:spcAft>
-              <a:defRPr sz="1150">
-                <a:solidFill>
-                  <a:srgbClr val="F3F4F6"/>
-                </a:solidFill>
-              </a:defRPr>
-            </a:pPr>
-            <a:r>
-              <a:t>ROLE: Spatial Manipulator (Low HP, High Mobility, Map Shaper)</a:t>
-            </a:r>
-          </a:p>
-          <a:p>
-            <a:pPr>
-              <a:spcAft>
-                <a:spcPts val="300"/>
-              </a:spcAft>
-              <a:defRPr sz="1150">
-                <a:solidFill>
-                  <a:srgbClr val="F3F4F6"/>
-                </a:solidFill>
-              </a:defRPr>
-            </a:pPr>
-          </a:p>
-          <a:p>
-            <a:pPr>
-              <a:spcAft>
-                <a:spcPts val="300"/>
-              </a:spcAft>
-              <a:defRPr sz="1150">
-                <a:solidFill>
-                  <a:srgbClr val="F3F4F6"/>
-                </a:solidFill>
-              </a:defRPr>
-            </a:pPr>
-            <a:r>
-              <a:t>Player-controlled caster. Squishy but agile. Casts ranged Fireballs, Water Surges, and Kinetic Pushes to reshape terrain and manipulate enemy positioning.</a:t>
-            </a:r>
-          </a:p>
-        </p:txBody>
-      </p:sp>
-      <p:sp>
-        <p:nvSpPr>
-          <p:cNvPr id="4" name="Rounded Rectangle 3"/>
-          <p:cNvSpPr/>
-          <p:nvPr/>
-        </p:nvSpPr>
-        <p:spPr>
-          <a:xfrm>
-            <a:off x="6217920" y="1645920"/>
-            <a:ext cx="5212080" cy="2240280"/>
-          </a:xfrm>
-          <a:prstGeom prst="roundRect">
-            <a:avLst/>
-          </a:prstGeom>
-          <a:solidFill>
-            <a:srgbClr val="161B22"/>
-          </a:solidFill>
-          <a:ln w="19050">
-            <a:solidFill>
-              <a:srgbClr val="EF4444"/>
-            </a:solidFill>
-          </a:ln>
-        </p:spPr>
-        <p:style>
-          <a:lnRef idx="1">
-            <a:schemeClr val="accent1"/>
-          </a:lnRef>
-          <a:fillRef idx="3">
-            <a:schemeClr val="accent1"/>
-          </a:fillRef>
-          <a:effectRef idx="2">
-            <a:schemeClr val="accent1"/>
-          </a:effectRef>
-          <a:fontRef idx="minor">
-            <a:schemeClr val="lt1"/>
-          </a:fontRef>
-        </p:style>
-        <p:txBody>
-          <a:bodyPr rtlCol="0" anchor="ctr" wrap="square" lIns="182880" rIns="182880" tIns="164592" bIns="164592"/>
-          <a:lstStyle/>
-          <a:p>
-            <a:pPr algn="ctr">
-              <a:spcAft>
-                <a:spcPts val="500"/>
-              </a:spcAft>
-              <a:defRPr b="1" sz="1350">
-                <a:solidFill>
-                  <a:srgbClr val="EF4444"/>
-                </a:solidFill>
-              </a:defRPr>
-            </a:pPr>
-            <a:r>
-              <a:t>🐉 Allied Monsters (The Titans)</a:t>
-            </a:r>
-          </a:p>
-          <a:p>
-            <a:pPr>
-              <a:spcAft>
-                <a:spcPts val="300"/>
-              </a:spcAft>
-              <a:defRPr sz="1150">
-                <a:solidFill>
-                  <a:srgbClr val="F3F4F6"/>
-                </a:solidFill>
-              </a:defRPr>
-            </a:pPr>
-            <a:r>
-              <a:t>ROLE: Frontline Anchor (Colossal 14 HP, Hazard-Immune)</a:t>
-            </a:r>
-          </a:p>
-          <a:p>
-            <a:pPr>
-              <a:spcAft>
-                <a:spcPts val="300"/>
-              </a:spcAft>
-              <a:defRPr sz="1150">
-                <a:solidFill>
-                  <a:srgbClr val="F3F4F6"/>
-                </a:solidFill>
-              </a:defRPr>
-            </a:pPr>
-          </a:p>
-          <a:p>
-            <a:pPr>
-              <a:spcAft>
-                <a:spcPts val="300"/>
-              </a:spcAft>
-              <a:defRPr sz="1150">
-                <a:solidFill>
-                  <a:srgbClr val="F3F4F6"/>
-                </a:solidFill>
-              </a:defRPr>
-            </a:pPr>
-            <a:r>
-              <a:t>Player-controlled behemoth. Naturally immune to molten lava, holds down the frontline with heavy melee strikes, and harvests land to trigger Magma Cataclysms.</a:t>
-            </a:r>
-          </a:p>
-        </p:txBody>
-      </p:sp>
-      <p:sp>
-        <p:nvSpPr>
-          <p:cNvPr id="5" name="Rounded Rectangle 4"/>
-          <p:cNvSpPr/>
-          <p:nvPr/>
-        </p:nvSpPr>
-        <p:spPr>
-          <a:xfrm>
-            <a:off x="731520" y="4160520"/>
-            <a:ext cx="5212080" cy="2103120"/>
-          </a:xfrm>
-          <a:prstGeom prst="roundRect">
-            <a:avLst/>
-          </a:prstGeom>
-          <a:solidFill>
-            <a:srgbClr val="161B22"/>
-          </a:solidFill>
-          <a:ln w="19050">
-            <a:solidFill>
-              <a:srgbClr val="F59E0B"/>
-            </a:solidFill>
-          </a:ln>
-        </p:spPr>
-        <p:style>
-          <a:lnRef idx="1">
-            <a:schemeClr val="accent1"/>
-          </a:lnRef>
-          <a:fillRef idx="3">
-            <a:schemeClr val="accent1"/>
-          </a:fillRef>
-          <a:effectRef idx="2">
-            <a:schemeClr val="accent1"/>
-          </a:effectRef>
-          <a:fontRef idx="minor">
-            <a:schemeClr val="lt1"/>
-          </a:fontRef>
-        </p:style>
-        <p:txBody>
-          <a:bodyPr rtlCol="0" anchor="ctr" wrap="square" lIns="182880" rIns="182880" tIns="164592" bIns="164592"/>
-          <a:lstStyle/>
-          <a:p>
-            <a:pPr algn="ctr">
-              <a:spcAft>
-                <a:spcPts val="500"/>
-              </a:spcAft>
-              <a:defRPr b="1" sz="1350">
-                <a:solidFill>
-                  <a:srgbClr val="F59E0B"/>
-                </a:solidFill>
-              </a:defRPr>
-            </a:pPr>
-            <a:r>
-              <a:t>🔥 Dracomancers (Enemy Rival Masters)</a:t>
-            </a:r>
-          </a:p>
-          <a:p>
-            <a:pPr>
-              <a:spcAft>
-                <a:spcPts val="300"/>
-              </a:spcAft>
-              <a:defRPr sz="1150">
-                <a:solidFill>
-                  <a:srgbClr val="F3F4F6"/>
-                </a:solidFill>
-              </a:defRPr>
-            </a:pPr>
-            <a:r>
-              <a:t>ROLE: Tactical Rival Pyromancer</a:t>
-            </a:r>
-          </a:p>
-          <a:p>
-            <a:pPr>
-              <a:spcAft>
-                <a:spcPts val="300"/>
-              </a:spcAft>
-              <a:defRPr sz="1150">
-                <a:solidFill>
-                  <a:srgbClr val="F3F4F6"/>
-                </a:solidFill>
-              </a:defRPr>
-            </a:pPr>
-          </a:p>
-          <a:p>
-            <a:pPr>
-              <a:spcAft>
-                <a:spcPts val="300"/>
-              </a:spcAft>
-              <a:defRPr sz="1150">
-                <a:solidFill>
-                  <a:srgbClr val="F3F4F6"/>
-                </a:solidFill>
-              </a:defRPr>
-            </a:pPr>
-            <a:r>
-              <a:t>Commands enemy squads, casts long-range fire spells, and uses kinetic knockbacks to shove player units off high ground into hazards.</a:t>
-            </a:r>
-          </a:p>
-        </p:txBody>
-      </p:sp>
-      <p:sp>
-        <p:nvSpPr>
-          <p:cNvPr id="6" name="Rounded Rectangle 5"/>
-          <p:cNvSpPr/>
-          <p:nvPr/>
-        </p:nvSpPr>
-        <p:spPr>
-          <a:xfrm>
-            <a:off x="6217920" y="4160520"/>
-            <a:ext cx="5212080" cy="2103120"/>
-          </a:xfrm>
-          <a:prstGeom prst="roundRect">
-            <a:avLst/>
-          </a:prstGeom>
-          <a:solidFill>
-            <a:srgbClr val="161B22"/>
-          </a:solidFill>
-          <a:ln w="19050">
-            <a:solidFill>
-              <a:srgbClr val="30363D"/>
-            </a:solidFill>
-          </a:ln>
-        </p:spPr>
-        <p:style>
-          <a:lnRef idx="1">
-            <a:schemeClr val="accent1"/>
-          </a:lnRef>
-          <a:fillRef idx="3">
-            <a:schemeClr val="accent1"/>
-          </a:fillRef>
-          <a:effectRef idx="2">
-            <a:schemeClr val="accent1"/>
-          </a:effectRef>
-          <a:fontRef idx="minor">
-            <a:schemeClr val="lt1"/>
-          </a:fontRef>
-        </p:style>
-        <p:txBody>
-          <a:bodyPr rtlCol="0" anchor="ctr" wrap="square" lIns="182880" rIns="182880" tIns="164592" bIns="164592"/>
-          <a:lstStyle/>
-          <a:p>
-            <a:pPr algn="ctr">
-              <a:spcAft>
-                <a:spcPts val="500"/>
-              </a:spcAft>
-              <a:defRPr b="1" sz="1350">
-                <a:solidFill>
-                  <a:srgbClr val="F59E0B"/>
-                </a:solidFill>
-              </a:defRPr>
-            </a:pPr>
-            <a:r>
-              <a:t>👿 Demon Slimes (Aggressive Minions)</a:t>
-            </a:r>
-          </a:p>
-          <a:p>
-            <a:pPr>
-              <a:spcAft>
-                <a:spcPts val="300"/>
-              </a:spcAft>
-              <a:defRPr sz="1150">
-                <a:solidFill>
-                  <a:srgbClr val="F3F4F6"/>
-                </a:solidFill>
-              </a:defRPr>
-            </a:pPr>
-            <a:r>
-              <a:t>ROLE: Fast Flanking Melee Minions</a:t>
-            </a:r>
-          </a:p>
-          <a:p>
-            <a:pPr>
-              <a:spcAft>
-                <a:spcPts val="300"/>
-              </a:spcAft>
-              <a:defRPr sz="1150">
-                <a:solidFill>
-                  <a:srgbClr val="F3F4F6"/>
-                </a:solidFill>
-              </a:defRPr>
-            </a:pPr>
-          </a:p>
-          <a:p>
-            <a:pPr>
-              <a:spcAft>
-                <a:spcPts val="300"/>
-              </a:spcAft>
-              <a:defRPr sz="1150">
-                <a:solidFill>
-                  <a:srgbClr val="F3F4F6"/>
-                </a:solidFill>
-              </a:defRPr>
-            </a:pPr>
-            <a:r>
-              <a:t>Aggressive swarmers that navigate around hazards to flank your Master and attempt to knock him off elevated plateaus.</a:t>
-            </a:r>
-          </a:p>
-        </p:txBody>
-      </p:sp>
-    </p:spTree>
-  </p:cSld>
-  <p:clrMapOvr>
-    <a:masterClrMapping/>
-  </p:clrMapOvr>
-</p:sld>
-</file>
-
-<file path=ppt/slides/slide7.xml><?xml version="1.0" encoding="utf-8"?>
-<p:sld xmlns:a="http://schemas.openxmlformats.org/drawingml/2006/main" xmlns:p="http://schemas.openxmlformats.org/presentationml/2006/main" xmlns:r="http://schemas.openxmlformats.org/officeDocument/2006/relationships">
-  <p:cSld>
-    <p:bg>
-      <p:bgPr>
-        <a:solidFill>
-          <a:srgbClr val="0D1117"/>
-        </a:solidFill>
-        <a:effectLst/>
-      </p:bgPr>
-    </p:bg>
-    <p:spTree>
-      <p:nvGrpSpPr>
-        <p:cNvPr id="1" name=""/>
-        <p:cNvGrpSpPr/>
-        <p:nvPr/>
-      </p:nvGrpSpPr>
-      <p:grpSpPr/>
-      <p:sp>
-        <p:nvSpPr>
-          <p:cNvPr id="2" name="TextBox 1"/>
-          <p:cNvSpPr txBox="1"/>
-          <p:nvPr/>
-        </p:nvSpPr>
-        <p:spPr>
-          <a:xfrm>
-            <a:off x="731520" y="411480"/>
-            <a:ext cx="10698480" cy="1005840"/>
-          </a:xfrm>
-          <a:prstGeom prst="rect">
-            <a:avLst/>
-          </a:prstGeom>
-          <a:noFill/>
-        </p:spPr>
-        <p:txBody>
-          <a:bodyPr wrap="square" lIns="0" tIns="0" rIns="0" bIns="0">
-            <a:spAutoFit/>
-          </a:bodyPr>
-          <a:lstStyle/>
-          <a:p>
-            <a:pPr>
-              <a:defRPr sz="1100" b="1">
-                <a:solidFill>
-                  <a:srgbClr val="06B6D4"/>
-                </a:solidFill>
-              </a:defRPr>
-            </a:pPr>
-            <a:r>
-              <a:t>TGFI PITCH SECTION 4: PROOF OF CONCEPT &amp; VALIDATION</a:t>
-            </a:r>
-          </a:p>
-          <a:p>
-            <a:pPr>
-              <a:defRPr sz="2400" b="1">
-                <a:solidFill>
-                  <a:srgbClr val="F3F4F6"/>
-                </a:solidFill>
-              </a:defRPr>
-            </a:pPr>
-            <a:r>
-              <a:t>Product &amp; Solution: Verified Vertical Slice</a:t>
-            </a:r>
-          </a:p>
-        </p:txBody>
-      </p:sp>
-      <p:sp>
-        <p:nvSpPr>
-          <p:cNvPr id="3" name="Rounded Rectangle 2"/>
-          <p:cNvSpPr/>
-          <p:nvPr/>
-        </p:nvSpPr>
-        <p:spPr>
-          <a:xfrm>
-            <a:off x="731520" y="1645920"/>
-            <a:ext cx="5486400" cy="3566160"/>
-          </a:xfrm>
-          <a:prstGeom prst="roundRect">
-            <a:avLst/>
-          </a:prstGeom>
-          <a:solidFill>
-            <a:srgbClr val="161B22"/>
-          </a:solidFill>
-          <a:ln w="19050">
-            <a:solidFill>
-              <a:srgbClr val="10B981"/>
-            </a:solidFill>
-          </a:ln>
-        </p:spPr>
-        <p:style>
-          <a:lnRef idx="1">
-            <a:schemeClr val="accent1"/>
-          </a:lnRef>
-          <a:fillRef idx="3">
-            <a:schemeClr val="accent1"/>
-          </a:fillRef>
-          <a:effectRef idx="2">
-            <a:schemeClr val="accent1"/>
-          </a:effectRef>
-          <a:fontRef idx="minor">
-            <a:schemeClr val="lt1"/>
-          </a:fontRef>
-        </p:style>
-        <p:txBody>
-          <a:bodyPr rtlCol="0" anchor="ctr" wrap="square" lIns="182880" rIns="182880" tIns="164592" bIns="164592"/>
-          <a:lstStyle/>
-          <a:p>
-            <a:pPr algn="ctr">
-              <a:spcAft>
-                <a:spcPts val="500"/>
-              </a:spcAft>
-              <a:defRPr b="1" sz="1350">
-                <a:solidFill>
-                  <a:srgbClr val="10B981"/>
-                </a:solidFill>
-              </a:defRPr>
-            </a:pPr>
-            <a:r>
-              <a:t>🏆 Fully Working 2v2 Skirmish in Unity 6</a:t>
-            </a:r>
-          </a:p>
-          <a:p>
-            <a:pPr>
-              <a:spcAft>
-                <a:spcPts val="300"/>
-              </a:spcAft>
-              <a:defRPr sz="1150">
-                <a:solidFill>
-                  <a:srgbClr val="F3F4F6"/>
-                </a:solidFill>
-              </a:defRPr>
-            </a:pPr>
-            <a:r>
-              <a:t>• Focused 2v2 prototype (Master + Titan vs Boss + Minion)</a:t>
-            </a:r>
-          </a:p>
-          <a:p>
-            <a:pPr>
-              <a:spcAft>
-                <a:spcPts val="300"/>
-              </a:spcAft>
-              <a:defRPr sz="1150">
-                <a:solidFill>
-                  <a:srgbClr val="F3F4F6"/>
-                </a:solidFill>
-              </a:defRPr>
-            </a:pPr>
-            <a:r>
-              <a:t>• 3D procedural hex grid with multi-level cliff elevations</a:t>
-            </a:r>
-          </a:p>
-          <a:p>
-            <a:pPr>
-              <a:spcAft>
-                <a:spcPts val="300"/>
-              </a:spcAft>
-              <a:defRPr sz="1150">
-                <a:solidFill>
-                  <a:srgbClr val="F3F4F6"/>
-                </a:solidFill>
-              </a:defRPr>
-            </a:pPr>
-            <a:r>
-              <a:t>• Kinetic shove physics with wall-impact damage &amp; lava burns</a:t>
-            </a:r>
-          </a:p>
-          <a:p>
-            <a:pPr>
-              <a:spcAft>
-                <a:spcPts val="300"/>
-              </a:spcAft>
-              <a:defRPr sz="1150">
-                <a:solidFill>
-                  <a:srgbClr val="F3F4F6"/>
-                </a:solidFill>
-              </a:defRPr>
-            </a:pPr>
-            <a:r>
-              <a:t>• Continuous turn-based hazard burn ticks</a:t>
-            </a:r>
-          </a:p>
-          <a:p>
-            <a:pPr>
-              <a:spcAft>
-                <a:spcPts val="300"/>
-              </a:spcAft>
-              <a:defRPr sz="1150">
-                <a:solidFill>
-                  <a:srgbClr val="F3F4F6"/>
-                </a:solidFill>
-              </a:defRPr>
-            </a:pPr>
-            <a:r>
-              <a:t>• Terrain attunement (Flame Surge buffs &amp; immunities)</a:t>
-            </a:r>
-          </a:p>
-          <a:p>
-            <a:pPr>
-              <a:spcAft>
-                <a:spcPts val="300"/>
-              </a:spcAft>
-              <a:defRPr sz="1150">
-                <a:solidFill>
-                  <a:srgbClr val="F3F4F6"/>
-                </a:solidFill>
-              </a:defRPr>
-            </a:pPr>
-            <a:r>
-              <a:t>• Land siphoning turning active terrain into Barren Earth</a:t>
-            </a:r>
-          </a:p>
-          <a:p>
-            <a:pPr>
-              <a:spcAft>
-                <a:spcPts val="300"/>
-              </a:spcAft>
-              <a:defRPr sz="1150">
-                <a:solidFill>
-                  <a:srgbClr val="F3F4F6"/>
-                </a:solidFill>
-              </a:defRPr>
-            </a:pPr>
-            <a:r>
-              <a:t>• Titan Magma Cataclysm with camera screen shake trauma</a:t>
-            </a:r>
-          </a:p>
-          <a:p>
-            <a:pPr>
-              <a:spcAft>
-                <a:spcPts val="300"/>
-              </a:spcAft>
-              <a:defRPr sz="1150">
-                <a:solidFill>
-                  <a:srgbClr val="F3F4F6"/>
-                </a:solidFill>
-              </a:defRPr>
-            </a:pPr>
-            <a:r>
-              <a:t>• Zero-dependency procedural audio engine with mute toggle</a:t>
-            </a:r>
-          </a:p>
-        </p:txBody>
-      </p:sp>
-      <p:sp>
-        <p:nvSpPr>
-          <p:cNvPr id="4" name="Rounded Rectangle 3"/>
-          <p:cNvSpPr/>
-          <p:nvPr/>
-        </p:nvSpPr>
-        <p:spPr>
-          <a:xfrm>
-            <a:off x="731520" y="5440680"/>
-            <a:ext cx="5486400" cy="822960"/>
-          </a:xfrm>
-          <a:prstGeom prst="roundRect">
-            <a:avLst/>
-          </a:prstGeom>
-          <a:solidFill>
-            <a:srgbClr val="161B22"/>
-          </a:solidFill>
-          <a:ln w="19050">
-            <a:solidFill>
-              <a:srgbClr val="F59E0B"/>
-            </a:solidFill>
-          </a:ln>
-        </p:spPr>
-        <p:style>
-          <a:lnRef idx="1">
-            <a:schemeClr val="accent1"/>
-          </a:lnRef>
-          <a:fillRef idx="3">
-            <a:schemeClr val="accent1"/>
-          </a:fillRef>
-          <a:effectRef idx="2">
-            <a:schemeClr val="accent1"/>
-          </a:effectRef>
-          <a:fontRef idx="minor">
-            <a:schemeClr val="lt1"/>
-          </a:fontRef>
-        </p:style>
-        <p:txBody>
-          <a:bodyPr rtlCol="0" anchor="ctr" wrap="square" lIns="182880" rIns="182880" tIns="164592" bIns="164592"/>
-          <a:lstStyle/>
-          <a:p>
-            <a:pPr algn="ctr">
-              <a:spcAft>
-                <a:spcPts val="500"/>
-              </a:spcAft>
-              <a:defRPr b="1" sz="1350">
-                <a:solidFill>
-                  <a:srgbClr val="F59E0B"/>
-                </a:solidFill>
-              </a:defRPr>
-            </a:pPr>
-            <a:r>
-              <a:t>🎥 The 30-Second Combat Sequence</a:t>
-            </a:r>
-          </a:p>
-          <a:p>
-            <a:pPr>
-              <a:spcAft>
-                <a:spcPts val="300"/>
-              </a:spcAft>
-              <a:defRPr sz="1150">
-                <a:solidFill>
-                  <a:srgbClr val="F3F4F6"/>
-                </a:solidFill>
-              </a:defRPr>
-            </a:pPr>
-            <a:r>
-              <a:t>Master casts Fireball ➔ Shove slams enemy into rock ➔ Dragon siphons lava (+1 Core) ➔ Magma Cataclysm wipes the board!</a:t>
-            </a:r>
-          </a:p>
-        </p:txBody>
-      </p:sp>
-      <p:pic>
-        <p:nvPicPr>
-          <p:cNvPr id="5" name="Picture 4" descr="gameplay_victory.png"/>
-          <p:cNvPicPr>
-            <a:picLocks noChangeAspect="1"/>
-          </p:cNvPicPr>
-          <p:nvPr/>
-        </p:nvPicPr>
-        <p:blipFill>
-          <a:blip r:embed="rId2"/>
-          <a:stretch>
-            <a:fillRect/>
-          </a:stretch>
-        </p:blipFill>
-        <p:spPr>
-          <a:xfrm>
-            <a:off x="6492240" y="1645920"/>
-            <a:ext cx="4937760" cy="3070274"/>
-          </a:xfrm>
-          <a:prstGeom prst="rect">
-            <a:avLst/>
-          </a:prstGeom>
-        </p:spPr>
-      </p:pic>
-    </p:spTree>
-  </p:cSld>
-  <p:clrMapOvr>
-    <a:masterClrMapping/>
-  </p:clrMapOvr>
-</p:sld>
-</file>
-
-<file path=ppt/slides/slide8.xml><?xml version="1.0" encoding="utf-8"?>
-<p:sld xmlns:a="http://schemas.openxmlformats.org/drawingml/2006/main" xmlns:p="http://schemas.openxmlformats.org/presentationml/2006/main" xmlns:r="http://schemas.openxmlformats.org/officeDocument/2006/relationships">
-  <p:cSld>
-    <p:bg>
-      <p:bgPr>
-        <a:solidFill>
-          <a:srgbClr val="0D1117"/>
-        </a:solidFill>
-        <a:effectLst/>
-      </p:bgPr>
-    </p:bg>
-    <p:spTree>
-      <p:nvGrpSpPr>
-        <p:cNvPr id="1" name=""/>
-        <p:cNvGrpSpPr/>
-        <p:nvPr/>
-      </p:nvGrpSpPr>
-      <p:grpSpPr/>
-      <p:sp>
-        <p:nvSpPr>
-          <p:cNvPr id="2" name="TextBox 1"/>
-          <p:cNvSpPr txBox="1"/>
-          <p:nvPr/>
-        </p:nvSpPr>
-        <p:spPr>
-          <a:xfrm>
-            <a:off x="731520" y="411480"/>
-            <a:ext cx="10698480" cy="1005840"/>
-          </a:xfrm>
-          <a:prstGeom prst="rect">
-            <a:avLst/>
-          </a:prstGeom>
-          <a:noFill/>
-        </p:spPr>
-        <p:txBody>
-          <a:bodyPr wrap="square" lIns="0" tIns="0" rIns="0" bIns="0">
-            <a:spAutoFit/>
-          </a:bodyPr>
-          <a:lstStyle/>
-          <a:p>
-            <a:pPr>
-              <a:defRPr sz="1100" b="1">
-                <a:solidFill>
-                  <a:srgbClr val="06B6D4"/>
-                </a:solidFill>
-              </a:defRPr>
-            </a:pPr>
-            <a:r>
-              <a:t>TGFI PITCH SECTION 4: ART STYLE &amp; VISUAL BENCHMARK</a:t>
-            </a:r>
-          </a:p>
-          <a:p>
-            <a:pPr>
-              <a:defRPr sz="2400" b="1">
-                <a:solidFill>
-                  <a:srgbClr val="F3F4F6"/>
-                </a:solidFill>
-              </a:defRPr>
-            </a:pPr>
-            <a:r>
-              <a:t>Product &amp; Solution: HD-2D Visual Target &amp; Pipeline</a:t>
-            </a:r>
-          </a:p>
-        </p:txBody>
-      </p:sp>
-      <p:sp>
-        <p:nvSpPr>
-          <p:cNvPr id="3" name="Rounded Rectangle 2"/>
-          <p:cNvSpPr/>
-          <p:nvPr/>
-        </p:nvSpPr>
-        <p:spPr>
-          <a:xfrm>
-            <a:off x="731520" y="1645920"/>
-            <a:ext cx="5303520" cy="2240280"/>
-          </a:xfrm>
-          <a:prstGeom prst="roundRect">
-            <a:avLst/>
-          </a:prstGeom>
-          <a:solidFill>
-            <a:srgbClr val="161B22"/>
-          </a:solidFill>
-          <a:ln w="19050">
-            <a:solidFill>
-              <a:srgbClr val="F59E0B"/>
-            </a:solidFill>
-          </a:ln>
-        </p:spPr>
-        <p:style>
-          <a:lnRef idx="1">
-            <a:schemeClr val="accent1"/>
-          </a:lnRef>
-          <a:fillRef idx="3">
-            <a:schemeClr val="accent1"/>
-          </a:fillRef>
-          <a:effectRef idx="2">
-            <a:schemeClr val="accent1"/>
-          </a:effectRef>
-          <a:fontRef idx="minor">
-            <a:schemeClr val="lt1"/>
-          </a:fontRef>
-        </p:style>
-        <p:txBody>
-          <a:bodyPr rtlCol="0" anchor="ctr" wrap="square" lIns="182880" rIns="182880" tIns="164592" bIns="164592"/>
-          <a:lstStyle/>
-          <a:p>
-            <a:pPr algn="ctr">
-              <a:spcAft>
-                <a:spcPts val="500"/>
-              </a:spcAft>
-              <a:defRPr b="1" sz="1350">
-                <a:solidFill>
-                  <a:srgbClr val="F59E0B"/>
-                </a:solidFill>
-              </a:defRPr>
-            </a:pPr>
-            <a:r>
-              <a:t>🎨 Visual Target: HD-2D Aesthetic</a:t>
-            </a:r>
-          </a:p>
-          <a:p>
-            <a:pPr>
-              <a:spcAft>
-                <a:spcPts val="300"/>
-              </a:spcAft>
-              <a:defRPr sz="1150">
-                <a:solidFill>
-                  <a:srgbClr val="F3F4F6"/>
-                </a:solidFill>
-              </a:defRPr>
-            </a:pPr>
-            <a:r>
-              <a:t>• Atmosphere &amp; Lighting: Triangle Strategy tilt-shift depth-of-field, dynamic real-time shadows, and glowing emissive lava veins in Unity 6.</a:t>
-            </a:r>
-          </a:p>
-          <a:p>
-            <a:pPr>
-              <a:spcAft>
-                <a:spcPts val="300"/>
-              </a:spcAft>
-              <a:defRPr sz="1150">
-                <a:solidFill>
-                  <a:srgbClr val="F3F4F6"/>
-                </a:solidFill>
-              </a:defRPr>
-            </a:pPr>
-            <a:r>
-              <a:t>• Silhouettes: Final Fantasy Tactics / Tactics Ogre standees.</a:t>
-            </a:r>
-          </a:p>
-          <a:p>
-            <a:pPr>
-              <a:spcAft>
-                <a:spcPts val="300"/>
-              </a:spcAft>
-              <a:defRPr sz="1150">
-                <a:solidFill>
-                  <a:srgbClr val="F3F4F6"/>
-                </a:solidFill>
-              </a:defRPr>
-            </a:pPr>
-            <a:r>
-              <a:t>• Palette: Vanaris Tactics rich fantasy environmental tones.</a:t>
-            </a:r>
-          </a:p>
-        </p:txBody>
-      </p:sp>
-      <p:sp>
-        <p:nvSpPr>
-          <p:cNvPr id="4" name="Rounded Rectangle 3"/>
-          <p:cNvSpPr/>
-          <p:nvPr/>
-        </p:nvSpPr>
-        <p:spPr>
-          <a:xfrm>
-            <a:off x="731520" y="4160520"/>
-            <a:ext cx="5303520" cy="2103120"/>
-          </a:xfrm>
-          <a:prstGeom prst="roundRect">
-            <a:avLst/>
-          </a:prstGeom>
-          <a:solidFill>
-            <a:srgbClr val="161B22"/>
-          </a:solidFill>
-          <a:ln w="19050">
-            <a:solidFill>
-              <a:srgbClr val="06B6D4"/>
-            </a:solidFill>
-          </a:ln>
-        </p:spPr>
-        <p:style>
-          <a:lnRef idx="1">
-            <a:schemeClr val="accent1"/>
-          </a:lnRef>
-          <a:fillRef idx="3">
-            <a:schemeClr val="accent1"/>
-          </a:fillRef>
-          <a:effectRef idx="2">
-            <a:schemeClr val="accent1"/>
-          </a:effectRef>
-          <a:fontRef idx="minor">
-            <a:schemeClr val="lt1"/>
-          </a:fontRef>
-        </p:style>
-        <p:txBody>
-          <a:bodyPr rtlCol="0" anchor="ctr" wrap="square" lIns="182880" rIns="182880" tIns="164592" bIns="164592"/>
-          <a:lstStyle/>
-          <a:p>
-            <a:pPr algn="ctr">
-              <a:spcAft>
-                <a:spcPts val="500"/>
-              </a:spcAft>
-              <a:defRPr b="1" sz="1350">
-                <a:solidFill>
-                  <a:srgbClr val="06B6D4"/>
-                </a:solidFill>
-              </a:defRPr>
-            </a:pPr>
-            <a:r>
-              <a:t>🖌️ Sprite Animation Framework (Lean &amp; Viable)</a:t>
-            </a:r>
-          </a:p>
-          <a:p>
-            <a:pPr>
-              <a:spcAft>
-                <a:spcPts val="300"/>
-              </a:spcAft>
-              <a:defRPr sz="1150">
-                <a:solidFill>
-                  <a:srgbClr val="F3F4F6"/>
-                </a:solidFill>
-              </a:defRPr>
-            </a:pPr>
-            <a:r>
-              <a:t>• Format: 2-Directional Isometric Standees (Front &amp; Back-Quarter, like Disgaea &amp; Ragnarok Online).</a:t>
-            </a:r>
-          </a:p>
-          <a:p>
-            <a:pPr>
-              <a:spcAft>
-                <a:spcPts val="300"/>
-              </a:spcAft>
-              <a:defRPr sz="1150">
-                <a:solidFill>
-                  <a:srgbClr val="F3F4F6"/>
-                </a:solidFill>
-              </a:defRPr>
-            </a:pPr>
-            <a:r>
-              <a:t>• Snappy Retro Loops: 3-frame combat loops (Idle, Hop, Attack, Hurt).</a:t>
-            </a:r>
-          </a:p>
-          <a:p>
-            <a:pPr>
-              <a:spcAft>
-                <a:spcPts val="300"/>
-              </a:spcAft>
-              <a:defRPr sz="1150">
-                <a:solidFill>
-                  <a:srgbClr val="F3F4F6"/>
-                </a:solidFill>
-              </a:defRPr>
-            </a:pPr>
-            <a:r>
-              <a:t>• Mathematical Sanity: 6 classes x 2 dirs x 10 keyframes = ~120 frames total. Highly viable for $1,200 ($200/class).</a:t>
-            </a:r>
-          </a:p>
-        </p:txBody>
-      </p:sp>
-      <p:pic>
-        <p:nvPicPr>
-          <p:cNvPr id="5" name="Picture 4" descr="slide9_visual_benchmark.png"/>
-          <p:cNvPicPr>
-            <a:picLocks noChangeAspect="1"/>
-          </p:cNvPicPr>
-          <p:nvPr/>
-        </p:nvPicPr>
-        <p:blipFill>
-          <a:blip r:embed="rId2"/>
-          <a:stretch>
-            <a:fillRect/>
-          </a:stretch>
-        </p:blipFill>
-        <p:spPr>
-          <a:xfrm>
-            <a:off x="6400800" y="1463040"/>
-            <a:ext cx="4214191" cy="4846320"/>
-          </a:xfrm>
-          <a:prstGeom prst="rect">
-            <a:avLst/>
-          </a:prstGeom>
-        </p:spPr>
-      </p:pic>
-    </p:spTree>
-  </p:cSld>
-  <p:clrMapOvr>
-    <a:masterClrMapping/>
-  </p:clrMapOvr>
-</p:sld>
-</file>
-
-<file path=ppt/slides/slide9.xml><?xml version="1.0" encoding="utf-8"?>
-<p:sld xmlns:a="http://schemas.openxmlformats.org/drawingml/2006/main" xmlns:p="http://schemas.openxmlformats.org/presentationml/2006/main" xmlns:r="http://schemas.openxmlformats.org/officeDocument/2006/relationships">
-  <p:cSld>
-    <p:bg>
-      <p:bgPr>
-        <a:solidFill>
-          <a:srgbClr val="0D1117"/>
-        </a:solidFill>
-        <a:effectLst/>
-      </p:bgPr>
-    </p:bg>
-    <p:spTree>
-      <p:nvGrpSpPr>
-        <p:cNvPr id="1" name=""/>
-        <p:cNvGrpSpPr/>
-        <p:nvPr/>
-      </p:nvGrpSpPr>
-      <p:grpSpPr/>
-      <p:sp>
-        <p:nvSpPr>
-          <p:cNvPr id="2" name="TextBox 1"/>
-          <p:cNvSpPr txBox="1"/>
-          <p:nvPr/>
-        </p:nvSpPr>
-        <p:spPr>
-          <a:xfrm>
-            <a:off x="731520" y="411480"/>
-            <a:ext cx="10698480" cy="1005840"/>
-          </a:xfrm>
-          <a:prstGeom prst="rect">
-            <a:avLst/>
-          </a:prstGeom>
-          <a:noFill/>
-        </p:spPr>
-        <p:txBody>
-          <a:bodyPr wrap="square" lIns="0" tIns="0" rIns="0" bIns="0">
-            <a:spAutoFit/>
-          </a:bodyPr>
-          <a:lstStyle/>
-          <a:p>
-            <a:pPr>
-              <a:defRPr sz="1100" b="1">
-                <a:solidFill>
-                  <a:srgbClr val="06B6D4"/>
-                </a:solidFill>
-              </a:defRPr>
-            </a:pPr>
-            <a:r>
-              <a:t>TGFI PITCH SECTION 4: META STRUCTURE &amp; REPLAYABILITY</a:t>
-            </a:r>
-          </a:p>
-          <a:p>
-            <a:pPr>
-              <a:defRPr sz="2400" b="1">
-                <a:solidFill>
-                  <a:srgbClr val="F3F4F6"/>
-                </a:solidFill>
-              </a:defRPr>
-            </a:pPr>
-            <a:r>
-              <a:t>Product &amp; Solution: Campaign &amp; Progression</a:t>
-            </a:r>
-          </a:p>
-        </p:txBody>
-      </p:sp>
-      <p:sp>
-        <p:nvSpPr>
-          <p:cNvPr id="3" name="Rounded Rectangle 2"/>
-          <p:cNvSpPr/>
-          <p:nvPr/>
-        </p:nvSpPr>
-        <p:spPr>
-          <a:xfrm>
-            <a:off x="731520" y="1645920"/>
-            <a:ext cx="3383280" cy="3566160"/>
-          </a:xfrm>
-          <a:prstGeom prst="roundRect">
-            <a:avLst/>
-          </a:prstGeom>
-          <a:solidFill>
-            <a:srgbClr val="161B22"/>
-          </a:solidFill>
-          <a:ln w="19050">
-            <a:solidFill>
-              <a:srgbClr val="30363D"/>
-            </a:solidFill>
-          </a:ln>
-        </p:spPr>
-        <p:style>
-          <a:lnRef idx="1">
-            <a:schemeClr val="accent1"/>
-          </a:lnRef>
-          <a:fillRef idx="3">
-            <a:schemeClr val="accent1"/>
-          </a:fillRef>
-          <a:effectRef idx="2">
-            <a:schemeClr val="accent1"/>
-          </a:effectRef>
-          <a:fontRef idx="minor">
-            <a:schemeClr val="lt1"/>
-          </a:fontRef>
-        </p:style>
-        <p:txBody>
-          <a:bodyPr rtlCol="0" anchor="ctr" wrap="square" lIns="182880" rIns="182880" tIns="164592" bIns="164592"/>
-          <a:lstStyle/>
-          <a:p>
-            <a:pPr algn="ctr">
-              <a:spcAft>
-                <a:spcPts val="500"/>
-              </a:spcAft>
-              <a:defRPr b="1" sz="1350">
-                <a:solidFill>
-                  <a:srgbClr val="F59E0B"/>
-                </a:solidFill>
-              </a:defRPr>
-            </a:pPr>
-            <a:r>
-              <a:t>🗺️ Node-Based Map</a:t>
-            </a:r>
-          </a:p>
-          <a:p>
-            <a:pPr>
-              <a:spcAft>
-                <a:spcPts val="300"/>
-              </a:spcAft>
-              <a:defRPr sz="1150">
-                <a:solidFill>
-                  <a:srgbClr val="F3F4F6"/>
-                </a:solidFill>
-              </a:defRPr>
-            </a:pPr>
-            <a:r>
-              <a:t>Branching expedition map inspired by Slay the Spire and Brigandine.</a:t>
-            </a:r>
-          </a:p>
-          <a:p>
-            <a:pPr>
-              <a:spcAft>
-                <a:spcPts val="300"/>
-              </a:spcAft>
-              <a:defRPr sz="1150">
-                <a:solidFill>
-                  <a:srgbClr val="F3F4F6"/>
-                </a:solidFill>
-              </a:defRPr>
-            </a:pPr>
-          </a:p>
-          <a:p>
-            <a:pPr>
-              <a:spcAft>
-                <a:spcPts val="300"/>
-              </a:spcAft>
-              <a:defRPr sz="1150">
-                <a:solidFill>
-                  <a:srgbClr val="F3F4F6"/>
-                </a:solidFill>
-              </a:defRPr>
-            </a:pPr>
-            <a:r>
-              <a:t>Choose your path through skirmishes, elemental shrines, mystery encounters, and rest camps.</a:t>
-            </a:r>
-          </a:p>
-          <a:p>
-            <a:pPr>
-              <a:spcAft>
-                <a:spcPts val="300"/>
-              </a:spcAft>
-              <a:defRPr sz="1150">
-                <a:solidFill>
-                  <a:srgbClr val="F3F4F6"/>
-                </a:solidFill>
-              </a:defRPr>
-            </a:pPr>
-          </a:p>
-          <a:p>
-            <a:pPr>
-              <a:spcAft>
-                <a:spcPts val="300"/>
-              </a:spcAft>
-              <a:defRPr sz="1150">
-                <a:solidFill>
-                  <a:srgbClr val="F3F4F6"/>
-                </a:solidFill>
-              </a:defRPr>
-            </a:pPr>
-            <a:r>
-              <a:t>Every run presents unique terrain challenges.</a:t>
-            </a:r>
-          </a:p>
-        </p:txBody>
-      </p:sp>
-      <p:sp>
-        <p:nvSpPr>
-          <p:cNvPr id="4" name="Rounded Rectangle 3"/>
-          <p:cNvSpPr/>
-          <p:nvPr/>
-        </p:nvSpPr>
-        <p:spPr>
-          <a:xfrm>
-            <a:off x="4389120" y="1645920"/>
-            <a:ext cx="3383280" cy="3566160"/>
-          </a:xfrm>
-          <a:prstGeom prst="roundRect">
-            <a:avLst/>
-          </a:prstGeom>
-          <a:solidFill>
-            <a:srgbClr val="161B22"/>
-          </a:solidFill>
-          <a:ln w="19050">
-            <a:solidFill>
-              <a:srgbClr val="30363D"/>
-            </a:solidFill>
-          </a:ln>
-        </p:spPr>
-        <p:style>
-          <a:lnRef idx="1">
-            <a:schemeClr val="accent1"/>
-          </a:lnRef>
-          <a:fillRef idx="3">
-            <a:schemeClr val="accent1"/>
-          </a:fillRef>
-          <a:effectRef idx="2">
-            <a:schemeClr val="accent1"/>
-          </a:effectRef>
-          <a:fontRef idx="minor">
-            <a:schemeClr val="lt1"/>
-          </a:fontRef>
-        </p:style>
-        <p:txBody>
-          <a:bodyPr rtlCol="0" anchor="ctr" wrap="square" lIns="182880" rIns="182880" tIns="164592" bIns="164592"/>
-          <a:lstStyle/>
-          <a:p>
-            <a:pPr algn="ctr">
-              <a:spcAft>
-                <a:spcPts val="500"/>
-              </a:spcAft>
-              <a:defRPr b="1" sz="1350">
-                <a:solidFill>
-                  <a:srgbClr val="F59E0B"/>
-                </a:solidFill>
-              </a:defRPr>
-            </a:pPr>
-            <a:r>
-              <a:t>🔮 Spellbooks &amp; Monsters</a:t>
-            </a:r>
-          </a:p>
-          <a:p>
-            <a:pPr>
-              <a:spcAft>
-                <a:spcPts val="300"/>
-              </a:spcAft>
-              <a:defRPr sz="1150">
-                <a:solidFill>
-                  <a:srgbClr val="F3F4F6"/>
-                </a:solidFill>
-              </a:defRPr>
-            </a:pPr>
-            <a:r>
-              <a:t>Unlock new elemental disciplines for your Master (Ice, Lightning, Earth).</a:t>
-            </a:r>
-          </a:p>
-          <a:p>
-            <a:pPr>
-              <a:spcAft>
-                <a:spcPts val="300"/>
-              </a:spcAft>
-              <a:defRPr sz="1150">
-                <a:solidFill>
-                  <a:srgbClr val="F3F4F6"/>
-                </a:solidFill>
-              </a:defRPr>
-            </a:pPr>
-          </a:p>
-          <a:p>
-            <a:pPr>
-              <a:spcAft>
-                <a:spcPts val="300"/>
-              </a:spcAft>
-              <a:defRPr sz="1150">
-                <a:solidFill>
-                  <a:srgbClr val="F3F4F6"/>
-                </a:solidFill>
-              </a:defRPr>
-            </a:pPr>
-            <a:r>
-              <a:t>Hatch, evolve, and attune new Monster cohorts with unique passive immunities and Cataclysm ultimates.</a:t>
-            </a:r>
-          </a:p>
-        </p:txBody>
-      </p:sp>
-      <p:sp>
-        <p:nvSpPr>
-          <p:cNvPr id="5" name="Rounded Rectangle 4"/>
-          <p:cNvSpPr/>
-          <p:nvPr/>
-        </p:nvSpPr>
-        <p:spPr>
-          <a:xfrm>
-            <a:off x="8046720" y="1645920"/>
-            <a:ext cx="3383280" cy="3566160"/>
-          </a:xfrm>
-          <a:prstGeom prst="roundRect">
-            <a:avLst/>
-          </a:prstGeom>
-          <a:solidFill>
-            <a:srgbClr val="161B22"/>
-          </a:solidFill>
-          <a:ln w="19050">
-            <a:solidFill>
-              <a:srgbClr val="30363D"/>
-            </a:solidFill>
-          </a:ln>
-        </p:spPr>
-        <p:style>
-          <a:lnRef idx="1">
-            <a:schemeClr val="accent1"/>
-          </a:lnRef>
-          <a:fillRef idx="3">
-            <a:schemeClr val="accent1"/>
-          </a:fillRef>
-          <a:effectRef idx="2">
-            <a:schemeClr val="accent1"/>
-          </a:effectRef>
-          <a:fontRef idx="minor">
-            <a:schemeClr val="lt1"/>
-          </a:fontRef>
-        </p:style>
-        <p:txBody>
-          <a:bodyPr rtlCol="0" anchor="ctr" wrap="square" lIns="182880" rIns="182880" tIns="164592" bIns="164592"/>
-          <a:lstStyle/>
-          <a:p>
-            <a:pPr algn="ctr">
-              <a:spcAft>
-                <a:spcPts val="500"/>
-              </a:spcAft>
-              <a:defRPr b="1" sz="1350">
-                <a:solidFill>
-                  <a:srgbClr val="F59E0B"/>
-                </a:solidFill>
-              </a:defRPr>
-            </a:pPr>
-            <a:r>
-              <a:t>⏱️ Zero-Grind Tactical Depth</a:t>
-            </a:r>
-          </a:p>
-          <a:p>
-            <a:pPr>
-              <a:spcAft>
-                <a:spcPts val="300"/>
-              </a:spcAft>
-              <a:defRPr sz="1150">
-                <a:solidFill>
-                  <a:srgbClr val="F3F4F6"/>
-                </a:solidFill>
-              </a:defRPr>
-            </a:pPr>
-            <a:r>
-              <a:t>No 20-hour stat grinding.</a:t>
-            </a:r>
-          </a:p>
-          <a:p>
-            <a:pPr>
-              <a:spcAft>
-                <a:spcPts val="300"/>
-              </a:spcAft>
-              <a:defRPr sz="1150">
-                <a:solidFill>
-                  <a:srgbClr val="F3F4F6"/>
-                </a:solidFill>
-              </a:defRPr>
-            </a:pPr>
-          </a:p>
-          <a:p>
-            <a:pPr>
-              <a:spcAft>
-                <a:spcPts val="300"/>
-              </a:spcAft>
-              <a:defRPr sz="1150">
-                <a:solidFill>
-                  <a:srgbClr val="F3F4F6"/>
-                </a:solidFill>
-              </a:defRPr>
-            </a:pPr>
-            <a:r>
-              <a:t>Thoughtful, deliberate turn-based tactical battles where success is driven by player skill, positioning, and creative terrain combos—never stat checks.</a:t>
-            </a:r>
-          </a:p>
-        </p:txBody>
-      </p:sp>
-      <p:sp>
-        <p:nvSpPr>
-          <p:cNvPr id="6" name="Rounded Rectangle 5"/>
-          <p:cNvSpPr/>
-          <p:nvPr/>
-        </p:nvSpPr>
-        <p:spPr>
-          <a:xfrm>
-            <a:off x="731520" y="5440680"/>
-            <a:ext cx="10698480" cy="822960"/>
-          </a:xfrm>
-          <a:prstGeom prst="roundRect">
-            <a:avLst/>
-          </a:prstGeom>
-          <a:solidFill>
-            <a:srgbClr val="161B22"/>
-          </a:solidFill>
-          <a:ln w="19050">
-            <a:solidFill>
-              <a:srgbClr val="F59E0B"/>
-            </a:solidFill>
-          </a:ln>
-        </p:spPr>
-        <p:style>
-          <a:lnRef idx="1">
-            <a:schemeClr val="accent1"/>
-          </a:lnRef>
-          <a:fillRef idx="3">
-            <a:schemeClr val="accent1"/>
-          </a:fillRef>
-          <a:effectRef idx="2">
-            <a:schemeClr val="accent1"/>
-          </a:effectRef>
-          <a:fontRef idx="minor">
-            <a:schemeClr val="lt1"/>
-          </a:fontRef>
-        </p:style>
-        <p:txBody>
-          <a:bodyPr rtlCol="0" anchor="ctr" wrap="square" lIns="182880" rIns="182880" tIns="164592" bIns="164592"/>
-          <a:lstStyle/>
-          <a:p>
-            <a:pPr algn="ctr">
-              <a:spcAft>
-                <a:spcPts val="500"/>
-              </a:spcAft>
-              <a:defRPr b="1" sz="1350">
-                <a:solidFill>
-                  <a:srgbClr val="F59E0B"/>
-                </a:solidFill>
-              </a:defRPr>
-            </a:pPr>
-            <a:r>
-              <a:t>🔄 High Replayability</a:t>
-            </a:r>
-          </a:p>
-          <a:p>
-            <a:pPr>
-              <a:spcAft>
-                <a:spcPts val="300"/>
-              </a:spcAft>
-              <a:defRPr sz="1150">
-                <a:solidFill>
-                  <a:srgbClr val="F3F4F6"/>
-                </a:solidFill>
-              </a:defRPr>
-            </a:pPr>
-            <a:r>
-              <a:t>Procedural encounter routes, emergent environmental chemistry, and diverse Master-Monster squad combinations ensure no two runs feel identical.</a:t>
+              <a:t>👤 Developer Profile &amp; Contact Details</a:t>
+            </a:r>
+          </a:p>
+          <a:p>
+            <a:pPr>
+              <a:spcAft>
+                <a:spcPts val="250"/>
+              </a:spcAft>
+              <a:defRPr sz="1100">
+                <a:solidFill>
+                  <a:srgbClr val="F3F4F6"/>
+                </a:solidFill>
+              </a:defRPr>
+            </a:pPr>
+            <a:r>
+              <a:t>• Developer Profile:</a:t>
+            </a:r>
+          </a:p>
+          <a:p>
+            <a:pPr>
+              <a:spcAft>
+                <a:spcPts val="250"/>
+              </a:spcAft>
+              <a:defRPr sz="1100">
+                <a:solidFill>
+                  <a:srgbClr val="F3F4F6"/>
+                </a:solidFill>
+              </a:defRPr>
+            </a:pPr>
+            <a:r>
+              <a:t>  Elang Esa Yudhistira</a:t>
+            </a:r>
+          </a:p>
+          <a:p>
+            <a:pPr>
+              <a:spcAft>
+                <a:spcPts val="250"/>
+              </a:spcAft>
+              <a:defRPr sz="1100">
+                <a:solidFill>
+                  <a:srgbClr val="F3F4F6"/>
+                </a:solidFill>
+              </a:defRPr>
+            </a:pPr>
+            <a:r>
+              <a:t>  Solo Game Designer, Story Writer &amp; Lead Programmer</a:t>
+            </a:r>
+          </a:p>
+          <a:p>
+            <a:pPr>
+              <a:spcAft>
+                <a:spcPts val="250"/>
+              </a:spcAft>
+              <a:defRPr sz="1100">
+                <a:solidFill>
+                  <a:srgbClr val="F3F4F6"/>
+                </a:solidFill>
+              </a:defRPr>
+            </a:pPr>
+            <a:r>
+              <a:t>  Location: Indonesia 🇮🇩</a:t>
+            </a:r>
+          </a:p>
+          <a:p>
+            <a:pPr>
+              <a:spcAft>
+                <a:spcPts val="250"/>
+              </a:spcAft>
+              <a:defRPr sz="1100">
+                <a:solidFill>
+                  <a:srgbClr val="F3F4F6"/>
+                </a:solidFill>
+              </a:defRPr>
+            </a:pPr>
+          </a:p>
+          <a:p>
+            <a:pPr>
+              <a:spcAft>
+                <a:spcPts val="250"/>
+              </a:spcAft>
+              <a:defRPr sz="1100">
+                <a:solidFill>
+                  <a:srgbClr val="F3F4F6"/>
+                </a:solidFill>
+              </a:defRPr>
+            </a:pPr>
+            <a:r>
+              <a:t>• Contact Email:</a:t>
+            </a:r>
+          </a:p>
+          <a:p>
+            <a:pPr>
+              <a:spcAft>
+                <a:spcPts val="250"/>
+              </a:spcAft>
+              <a:defRPr sz="1100">
+                <a:solidFill>
+                  <a:srgbClr val="F3F4F6"/>
+                </a:solidFill>
+              </a:defRPr>
+            </a:pPr>
+            <a:r>
+              <a:t>  yelangesa@gmail.com</a:t>
+            </a:r>
+          </a:p>
+          <a:p>
+            <a:pPr>
+              <a:spcAft>
+                <a:spcPts val="250"/>
+              </a:spcAft>
+              <a:defRPr sz="1100">
+                <a:solidFill>
+                  <a:srgbClr val="F3F4F6"/>
+                </a:solidFill>
+              </a:defRPr>
+            </a:pPr>
+          </a:p>
+          <a:p>
+            <a:pPr>
+              <a:spcAft>
+                <a:spcPts val="250"/>
+              </a:spcAft>
+              <a:defRPr sz="1100">
+                <a:solidFill>
+                  <a:srgbClr val="F3F4F6"/>
+                </a:solidFill>
+              </a:defRPr>
+            </a:pPr>
+            <a:r>
+              <a:t>• Portfolio &amp; Web Links:</a:t>
+            </a:r>
+          </a:p>
+          <a:p>
+            <a:pPr>
+              <a:spcAft>
+                <a:spcPts val="250"/>
+              </a:spcAft>
+              <a:defRPr sz="1100">
+                <a:solidFill>
+                  <a:srgbClr val="F3F4F6"/>
+                </a:solidFill>
+              </a:defRPr>
+            </a:pPr>
+            <a:r>
+              <a:t>  - Itch.io: https://nealverse.itch.io</a:t>
+            </a:r>
+          </a:p>
+          <a:p>
+            <a:pPr>
+              <a:spcAft>
+                <a:spcPts val="250"/>
+              </a:spcAft>
+              <a:defRPr sz="1100">
+                <a:solidFill>
+                  <a:srgbClr val="F3F4F6"/>
+                </a:solidFill>
+              </a:defRPr>
+            </a:pPr>
+            <a:r>
+              <a:t>  - GitHub: https://github.com/nealverseprime</a:t>
+            </a:r>
+          </a:p>
+          <a:p>
+            <a:pPr>
+              <a:spcAft>
+                <a:spcPts val="250"/>
+              </a:spcAft>
+              <a:defRPr sz="1100">
+                <a:solidFill>
+                  <a:srgbClr val="F3F4F6"/>
+                </a:solidFill>
+              </a:defRPr>
+            </a:pPr>
+            <a:r>
+              <a:t>  - Game Repo: https://github.com/nealverseprime/ElementalHexTactics3D</a:t>
+            </a:r>
+          </a:p>
+          <a:p>
+            <a:pPr>
+              <a:spcAft>
+                <a:spcPts val="250"/>
+              </a:spcAft>
+              <a:defRPr sz="1100">
+                <a:solidFill>
+                  <a:srgbClr val="F3F4F6"/>
+                </a:solidFill>
+              </a:defRPr>
+            </a:pPr>
+            <a:r>
+              <a:t>  - Web Pitch Deck: https://nealverseprime.github.io/ElementalHexTactics3D/</a:t>
+            </a:r>
+          </a:p>
+          <a:p>
+            <a:pPr>
+              <a:spcAft>
+                <a:spcPts val="250"/>
+              </a:spcAft>
+              <a:defRPr sz="1100">
+                <a:solidFill>
+                  <a:srgbClr val="F3F4F6"/>
+                </a:solidFill>
+              </a:defRPr>
+            </a:pPr>
+          </a:p>
+          <a:p>
+            <a:pPr>
+              <a:spcAft>
+                <a:spcPts val="250"/>
+              </a:spcAft>
+              <a:defRPr sz="1100">
+                <a:solidFill>
+                  <a:srgbClr val="F3F4F6"/>
+                </a:solidFill>
+              </a:defRPr>
+            </a:pPr>
+            <a:r>
+              <a:t>Thank you for considering Elemental Hex Tactics for the TGFI grant!</a:t>
             </a:r>
           </a:p>
         </p:txBody>

--- a/ElementalHexTactics_PitchDeck.pptx
+++ b/ElementalHexTactics_PitchDeck.pptx
@@ -858,7 +858,7 @@
           <a:lstStyle/>
           <a:p>
             <a:r>
-              <a:t>Slide 6 outlines our ask: $6,000 in prototype grant funding and production mentorship, in exchange for transparent milestones and Right of First Refusal for a full publishing deal.</a:t>
+              <a:t>Slide 6 outlines our ask: $6,000 in prototype grant funding and production mentorship, explains why Toge is the ideal publisher for this game, and establishes Right of First Refusal for full publishing.</a:t>
             </a:r>
           </a:p>
         </p:txBody>
@@ -6658,8 +6658,65 @@
               </a:defRPr>
             </a:pPr>
             <a:r>
-              <a:t>🤝 Publisher Support &amp; Commercial Path</a:t>
-            </a:r>
+              <a:t>🤝 Why Toge Productions &amp; Partnership</a:t>
+            </a:r>
+          </a:p>
+          <a:p>
+            <a:pPr>
+              <a:spcAft>
+                <a:spcPts val="250"/>
+              </a:spcAft>
+              <a:defRPr sz="1100">
+                <a:solidFill>
+                  <a:srgbClr val="F3F4F6"/>
+                </a:solidFill>
+              </a:defRPr>
+            </a:pPr>
+            <a:r>
+              <a:t>• Why Toge Productions is the Ideal Partner:</a:t>
+            </a:r>
+          </a:p>
+          <a:p>
+            <a:pPr>
+              <a:spcAft>
+                <a:spcPts val="250"/>
+              </a:spcAft>
+              <a:defRPr sz="1100">
+                <a:solidFill>
+                  <a:srgbClr val="F3F4F6"/>
+                </a:solidFill>
+              </a:defRPr>
+            </a:pPr>
+            <a:r>
+              <a:t>  1. Proven Champion of Tactical Depth: Toge published Vanaris Tactics and develops Kriegsfront Tactics. Toge's community is our exact target audience.</a:t>
+            </a:r>
+          </a:p>
+          <a:p>
+            <a:pPr>
+              <a:spcAft>
+                <a:spcPts val="250"/>
+              </a:spcAft>
+              <a:defRPr sz="1100">
+                <a:solidFill>
+                  <a:srgbClr val="F3F4F6"/>
+                </a:solidFill>
+              </a:defRPr>
+            </a:pPr>
+            <a:r>
+              <a:t>  2. Shared Indonesian Indie Heritage: From garage roots to global reach, Toge understands our vision, culture, and production pipeline.</a:t>
+            </a:r>
+          </a:p>
+          <a:p>
+            <a:pPr>
+              <a:spcAft>
+                <a:spcPts val="250"/>
+              </a:spcAft>
+              <a:defRPr sz="1100">
+                <a:solidFill>
+                  <a:srgbClr val="F3F4F6"/>
+                </a:solidFill>
+              </a:defRPr>
+            </a:pPr>
           </a:p>
           <a:p>
             <a:pPr>
@@ -6688,22 +6745,22 @@
               </a:defRPr>
             </a:pPr>
             <a:r>
-              <a:t>  1. Milestone feedback &amp; production mentorship from Toge's veteran producers.</a:t>
-            </a:r>
-          </a:p>
-          <a:p>
-            <a:pPr>
-              <a:spcAft>
-                <a:spcPts val="250"/>
-              </a:spcAft>
-              <a:defRPr sz="1100">
-                <a:solidFill>
-                  <a:srgbClr val="F3F4F6"/>
-                </a:solidFill>
-              </a:defRPr>
-            </a:pPr>
-            <a:r>
-              <a:t>  2. Publishing evaluation and market positioning guidance for Steam Next Fest.</a:t>
+              <a:t>  1. Production mentorship &amp; milestone feedback from veteran producers.</a:t>
+            </a:r>
+          </a:p>
+          <a:p>
+            <a:pPr>
+              <a:spcAft>
+                <a:spcPts val="250"/>
+              </a:spcAft>
+              <a:defRPr sz="1100">
+                <a:solidFill>
+                  <a:srgbClr val="F3F4F6"/>
+                </a:solidFill>
+              </a:defRPr>
+            </a:pPr>
+            <a:r>
+              <a:t>  2. Steam Next Fest positioning and marketing guidance.</a:t>
             </a:r>
           </a:p>
           <a:p>
@@ -6745,37 +6802,22 @@
               </a:defRPr>
             </a:pPr>
             <a:r>
-              <a:t>  1. Right of First Refusal (RoFR) for a full commercial publishing partnership ($50k–$150k USD) to expand into 20+ classes and full continental campaign.</a:t>
-            </a:r>
-          </a:p>
-          <a:p>
-            <a:pPr>
-              <a:spcAft>
-                <a:spcPts val="250"/>
-              </a:spcAft>
-              <a:defRPr sz="1100">
-                <a:solidFill>
-                  <a:srgbClr val="F3F4F6"/>
-                </a:solidFill>
-              </a:defRPr>
-            </a:pPr>
-            <a:r>
-              <a:t>  2. Transparent bi-weekly verified milestone builds.</a:t>
-            </a:r>
-          </a:p>
-          <a:p>
-            <a:pPr>
-              <a:spcAft>
-                <a:spcPts val="250"/>
-              </a:spcAft>
-              <a:defRPr sz="1100">
-                <a:solidFill>
-                  <a:srgbClr val="F3F4F6"/>
-                </a:solidFill>
-              </a:defRPr>
-            </a:pPr>
-            <a:r>
-              <a:t>  3. First access to a unique SEA tactical title marrying classic JRPG nostalgia with modern terraforming mechanics.</a:t>
+              <a:t>  1. Right of First Refusal (RoFR) for full commercial publishing ($50k–$150k USD) to expand into 20+ classes and full campaign.</a:t>
+            </a:r>
+          </a:p>
+          <a:p>
+            <a:pPr>
+              <a:spcAft>
+                <a:spcPts val="250"/>
+              </a:spcAft>
+              <a:defRPr sz="1100">
+                <a:solidFill>
+                  <a:srgbClr val="F3F4F6"/>
+                </a:solidFill>
+              </a:defRPr>
+            </a:pPr>
+            <a:r>
+              <a:t>  2. Transparent bi-weekly verified milestone builds on private branches.</a:t>
             </a:r>
           </a:p>
         </p:txBody>
